--- a/files/04_2_생성형AI_제미나이노트북편.pptx
+++ b/files/04_2_생성형AI_제미나이노트북편.pptx
@@ -2,43 +2,43 @@
 <file path=ppt/presentation.xml><?xml version="1.0" encoding="utf-8"?>
 <p:presentation xmlns:p="http://schemas.openxmlformats.org/presentationml/2006/main">
   <p:sldMasterIdLst>
-    <p:sldMasterId xmlns:r="http://schemas.openxmlformats.org/officeDocument/2006/relationships" id="2147483648" r:id="R4ccd9a3368954cb3"/>
+    <p:sldMasterId xmlns:r="http://schemas.openxmlformats.org/officeDocument/2006/relationships" id="2147483648" r:id="R3667caaf7da942ec"/>
   </p:sldMasterIdLst>
   <p:notesMasterIdLst>
-    <p:notesMasterId xmlns:r="http://schemas.openxmlformats.org/officeDocument/2006/relationships" r:id="R4e58d875568b4ba0"/>
+    <p:notesMasterId xmlns:r="http://schemas.openxmlformats.org/officeDocument/2006/relationships" r:id="Rf6c93a0cbb114ffa"/>
   </p:notesMasterIdLst>
   <p:sldIdLst>
-    <p:sldId xmlns:r="http://schemas.openxmlformats.org/officeDocument/2006/relationships" id="256" r:id="Re93f70fb74c7496b"/>
-    <p:sldId xmlns:r="http://schemas.openxmlformats.org/officeDocument/2006/relationships" id="257" r:id="Rcc704769752142ac"/>
-    <p:sldId xmlns:r="http://schemas.openxmlformats.org/officeDocument/2006/relationships" id="258" r:id="R9328e50d8bde4d67"/>
-    <p:sldId xmlns:r="http://schemas.openxmlformats.org/officeDocument/2006/relationships" id="259" r:id="Rbb6a496e755c474d"/>
-    <p:sldId xmlns:r="http://schemas.openxmlformats.org/officeDocument/2006/relationships" id="260" r:id="R0f3a36063ba947a3"/>
-    <p:sldId xmlns:r="http://schemas.openxmlformats.org/officeDocument/2006/relationships" id="261" r:id="Rcdfb03387f4b4a62"/>
-    <p:sldId xmlns:r="http://schemas.openxmlformats.org/officeDocument/2006/relationships" id="262" r:id="R6363a0cf13944dc2"/>
-    <p:sldId xmlns:r="http://schemas.openxmlformats.org/officeDocument/2006/relationships" id="263" r:id="R61be74d832f646f0"/>
-    <p:sldId xmlns:r="http://schemas.openxmlformats.org/officeDocument/2006/relationships" id="264" r:id="R7160be21724947e9"/>
-    <p:sldId xmlns:r="http://schemas.openxmlformats.org/officeDocument/2006/relationships" id="265" r:id="R70064fccec244e2d"/>
-    <p:sldId xmlns:r="http://schemas.openxmlformats.org/officeDocument/2006/relationships" id="266" r:id="R8551b5e9e11a420c"/>
-    <p:sldId xmlns:r="http://schemas.openxmlformats.org/officeDocument/2006/relationships" id="267" r:id="R34254e8306e242eb"/>
-    <p:sldId xmlns:r="http://schemas.openxmlformats.org/officeDocument/2006/relationships" id="268" r:id="Re0066a9bf6014219"/>
-    <p:sldId xmlns:r="http://schemas.openxmlformats.org/officeDocument/2006/relationships" id="269" r:id="Rce0d925c12444427"/>
-    <p:sldId xmlns:r="http://schemas.openxmlformats.org/officeDocument/2006/relationships" id="270" r:id="Re829b7cbd524491e"/>
-    <p:sldId xmlns:r="http://schemas.openxmlformats.org/officeDocument/2006/relationships" id="271" r:id="R502352a23b9e43a8"/>
-    <p:sldId xmlns:r="http://schemas.openxmlformats.org/officeDocument/2006/relationships" id="272" r:id="R93c93366b2244135"/>
-    <p:sldId xmlns:r="http://schemas.openxmlformats.org/officeDocument/2006/relationships" id="273" r:id="R5b1a731a74114fc2"/>
-    <p:sldId xmlns:r="http://schemas.openxmlformats.org/officeDocument/2006/relationships" id="274" r:id="R4c85a283f68541af"/>
-    <p:sldId xmlns:r="http://schemas.openxmlformats.org/officeDocument/2006/relationships" id="275" r:id="R4b27aadc2bf84966"/>
-    <p:sldId xmlns:r="http://schemas.openxmlformats.org/officeDocument/2006/relationships" id="276" r:id="R531c7133546b41b8"/>
-    <p:sldId xmlns:r="http://schemas.openxmlformats.org/officeDocument/2006/relationships" id="277" r:id="R0eb2c92db53741ee"/>
-    <p:sldId xmlns:r="http://schemas.openxmlformats.org/officeDocument/2006/relationships" id="278" r:id="Rf327edc322664494"/>
-    <p:sldId xmlns:r="http://schemas.openxmlformats.org/officeDocument/2006/relationships" id="279" r:id="R1eb03e12d6b44806"/>
-    <p:sldId xmlns:r="http://schemas.openxmlformats.org/officeDocument/2006/relationships" id="280" r:id="R208dc0bb77394e53"/>
-    <p:sldId xmlns:r="http://schemas.openxmlformats.org/officeDocument/2006/relationships" id="281" r:id="R3627728dd2fb4420"/>
-    <p:sldId xmlns:r="http://schemas.openxmlformats.org/officeDocument/2006/relationships" id="282" r:id="R8a138f252956484e"/>
-    <p:sldId xmlns:r="http://schemas.openxmlformats.org/officeDocument/2006/relationships" id="283" r:id="Rb97862e479aa4ac9"/>
-    <p:sldId xmlns:r="http://schemas.openxmlformats.org/officeDocument/2006/relationships" id="284" r:id="Re5b63cf00df548f7"/>
-    <p:sldId xmlns:r="http://schemas.openxmlformats.org/officeDocument/2006/relationships" id="285" r:id="R8a54a7103f8945ef"/>
-    <p:sldId xmlns:r="http://schemas.openxmlformats.org/officeDocument/2006/relationships" id="286" r:id="Rd00a8995da314994"/>
+    <p:sldId xmlns:r="http://schemas.openxmlformats.org/officeDocument/2006/relationships" id="256" r:id="R4aeff23e8b3043f9"/>
+    <p:sldId xmlns:r="http://schemas.openxmlformats.org/officeDocument/2006/relationships" id="257" r:id="R6c2700945867462f"/>
+    <p:sldId xmlns:r="http://schemas.openxmlformats.org/officeDocument/2006/relationships" id="258" r:id="R47b8e01ce1714b0f"/>
+    <p:sldId xmlns:r="http://schemas.openxmlformats.org/officeDocument/2006/relationships" id="259" r:id="R92822419591d49a4"/>
+    <p:sldId xmlns:r="http://schemas.openxmlformats.org/officeDocument/2006/relationships" id="260" r:id="Rad4b381ae1bd458b"/>
+    <p:sldId xmlns:r="http://schemas.openxmlformats.org/officeDocument/2006/relationships" id="261" r:id="R3ec177a0232045da"/>
+    <p:sldId xmlns:r="http://schemas.openxmlformats.org/officeDocument/2006/relationships" id="262" r:id="Rc33c9e59225f42bf"/>
+    <p:sldId xmlns:r="http://schemas.openxmlformats.org/officeDocument/2006/relationships" id="263" r:id="R266f9b0ea7654fce"/>
+    <p:sldId xmlns:r="http://schemas.openxmlformats.org/officeDocument/2006/relationships" id="264" r:id="Rb4ba5dbafa0e4a45"/>
+    <p:sldId xmlns:r="http://schemas.openxmlformats.org/officeDocument/2006/relationships" id="265" r:id="Rc6d0ecc2137245bb"/>
+    <p:sldId xmlns:r="http://schemas.openxmlformats.org/officeDocument/2006/relationships" id="266" r:id="Rf9bd824472a04d29"/>
+    <p:sldId xmlns:r="http://schemas.openxmlformats.org/officeDocument/2006/relationships" id="267" r:id="R18a2d92579f34ef2"/>
+    <p:sldId xmlns:r="http://schemas.openxmlformats.org/officeDocument/2006/relationships" id="268" r:id="R2e19c8c05f4c4fc3"/>
+    <p:sldId xmlns:r="http://schemas.openxmlformats.org/officeDocument/2006/relationships" id="269" r:id="R00eaaac9626c4791"/>
+    <p:sldId xmlns:r="http://schemas.openxmlformats.org/officeDocument/2006/relationships" id="270" r:id="Rc9d05a3743e74fde"/>
+    <p:sldId xmlns:r="http://schemas.openxmlformats.org/officeDocument/2006/relationships" id="271" r:id="R5d47dcecec4a4b4b"/>
+    <p:sldId xmlns:r="http://schemas.openxmlformats.org/officeDocument/2006/relationships" id="272" r:id="R820622f753f54067"/>
+    <p:sldId xmlns:r="http://schemas.openxmlformats.org/officeDocument/2006/relationships" id="273" r:id="R66d1901a505e4d06"/>
+    <p:sldId xmlns:r="http://schemas.openxmlformats.org/officeDocument/2006/relationships" id="274" r:id="Rf7308ea8ff854518"/>
+    <p:sldId xmlns:r="http://schemas.openxmlformats.org/officeDocument/2006/relationships" id="275" r:id="R5cc3f49ee353453e"/>
+    <p:sldId xmlns:r="http://schemas.openxmlformats.org/officeDocument/2006/relationships" id="276" r:id="Ra0a7d2086bd64dac"/>
+    <p:sldId xmlns:r="http://schemas.openxmlformats.org/officeDocument/2006/relationships" id="277" r:id="R451d37a502de40a2"/>
+    <p:sldId xmlns:r="http://schemas.openxmlformats.org/officeDocument/2006/relationships" id="278" r:id="R42b9a98a4c284c1e"/>
+    <p:sldId xmlns:r="http://schemas.openxmlformats.org/officeDocument/2006/relationships" id="279" r:id="Rf3bc6d530c344061"/>
+    <p:sldId xmlns:r="http://schemas.openxmlformats.org/officeDocument/2006/relationships" id="280" r:id="Rbd65674ddda84c60"/>
+    <p:sldId xmlns:r="http://schemas.openxmlformats.org/officeDocument/2006/relationships" id="281" r:id="R4e26e31d85cb4b39"/>
+    <p:sldId xmlns:r="http://schemas.openxmlformats.org/officeDocument/2006/relationships" id="282" r:id="R999fd6ab4da2403b"/>
+    <p:sldId xmlns:r="http://schemas.openxmlformats.org/officeDocument/2006/relationships" id="283" r:id="R0906e5bf850a4de9"/>
+    <p:sldId xmlns:r="http://schemas.openxmlformats.org/officeDocument/2006/relationships" id="284" r:id="Rfb976dd1d2534e12"/>
+    <p:sldId xmlns:r="http://schemas.openxmlformats.org/officeDocument/2006/relationships" id="285" r:id="R25ff7c2c9a5e461d"/>
+    <p:sldId xmlns:r="http://schemas.openxmlformats.org/officeDocument/2006/relationships" id="286" r:id="R241327196dbf441c"/>
   </p:sldIdLst>
   <p:sldSz cx="12192000" cy="6858000"/>
   <p:notesSz cx="6858000" cy="9144000"/>
@@ -3530,7 +3530,7 @@
   </p:cSld>
   <p:clrMap bg1="lt1" tx1="dk1" bg2="lt2" tx2="dk2" accent1="accent1" accent2="accent2" accent3="accent3" accent4="accent4" accent5="accent5" accent6="accent6" hlink="hlink" folHlink="folHlink"/>
   <p:sldLayoutIdLst>
-    <p:sldLayoutId xmlns:r="http://schemas.openxmlformats.org/officeDocument/2006/relationships" id="2147483649" r:id="Rf2a06a94faee4298"/>
+    <p:sldLayoutId xmlns:r="http://schemas.openxmlformats.org/officeDocument/2006/relationships" id="2147483649" r:id="Rdfd5b700c9524549"/>
   </p:sldLayoutIdLst>
   <p:txStyles>
     <p:titleStyle>
@@ -4081,7 +4081,7 @@
           <p:cNvPr id="9" name="">
             <a:extLst xmlns:a="http://schemas.openxmlformats.org/drawingml/2006/main">
               <a:ext uri="{FF2B5EF4-FFF2-40B4-BE49-F238E27FC236}">
-                <a16:creationId xmlns:a16="http://schemas.microsoft.com/office/drawing/2014/main" id="{4922F6A9-11D0-4515-B4A6-7F1DD10B5256}"/>
+                <a16:creationId xmlns:a16="http://schemas.microsoft.com/office/drawing/2014/main" id="{43E7352F-803E-42B1-992C-69DF3CA20BC5}"/>
               </a:ext>
             </a:extLst>
           </p:cNvPr>
@@ -4112,7 +4112,7 @@
           <p:cNvPr id="2" name="">
             <a:extLst xmlns:a="http://schemas.openxmlformats.org/drawingml/2006/main">
               <a:ext uri="{FF2B5EF4-FFF2-40B4-BE49-F238E27FC236}">
-                <a16:creationId xmlns:a16="http://schemas.microsoft.com/office/drawing/2014/main" id="{5E360F4E-861D-47B5-83E5-36F9EF0E311F}"/>
+                <a16:creationId xmlns:a16="http://schemas.microsoft.com/office/drawing/2014/main" id="{DEDE6F4F-A7C7-40F0-AF98-A2AEBD4CA707}"/>
               </a:ext>
             </a:extLst>
           </p:cNvPr>
@@ -4174,7 +4174,7 @@
           <p:cNvPr id="3" name="">
             <a:extLst xmlns:a="http://schemas.openxmlformats.org/drawingml/2006/main">
               <a:ext uri="{FF2B5EF4-FFF2-40B4-BE49-F238E27FC236}">
-                <a16:creationId xmlns:a16="http://schemas.microsoft.com/office/drawing/2014/main" id="{DF75A707-E049-4ADB-BC77-403C8FE38B20}"/>
+                <a16:creationId xmlns:a16="http://schemas.microsoft.com/office/drawing/2014/main" id="{75691679-BB23-46C1-90F5-FD03D2F53B5F}"/>
               </a:ext>
             </a:extLst>
           </p:cNvPr>
@@ -4263,7 +4263,7 @@
           <p:cNvPr id="4" name="">
             <a:extLst xmlns:a="http://schemas.openxmlformats.org/drawingml/2006/main">
               <a:ext uri="{FF2B5EF4-FFF2-40B4-BE49-F238E27FC236}">
-                <a16:creationId xmlns:a16="http://schemas.microsoft.com/office/drawing/2014/main" id="{E8F66FB6-DDA6-4877-9205-F11AE2D2F4D4}"/>
+                <a16:creationId xmlns:a16="http://schemas.microsoft.com/office/drawing/2014/main" id="{7C0DE1B8-E3E2-4246-AD82-B5C6B5E83CF5}"/>
               </a:ext>
             </a:extLst>
           </p:cNvPr>
@@ -4325,7 +4325,7 @@
           <p:cNvPr id="5" name="">
             <a:extLst xmlns:a="http://schemas.openxmlformats.org/drawingml/2006/main">
               <a:ext uri="{FF2B5EF4-FFF2-40B4-BE49-F238E27FC236}">
-                <a16:creationId xmlns:a16="http://schemas.microsoft.com/office/drawing/2014/main" id="{9A90646B-EA50-4DA1-9F4F-28117879C159}"/>
+                <a16:creationId xmlns:a16="http://schemas.microsoft.com/office/drawing/2014/main" id="{D892439C-EF9F-4ADE-BCCE-98F35E020DEE}"/>
               </a:ext>
             </a:extLst>
           </p:cNvPr>
@@ -4356,7 +4356,7 @@
           <p:cNvPr id="6" name="">
             <a:extLst xmlns:a="http://schemas.openxmlformats.org/drawingml/2006/main">
               <a:ext uri="{FF2B5EF4-FFF2-40B4-BE49-F238E27FC236}">
-                <a16:creationId xmlns:a16="http://schemas.microsoft.com/office/drawing/2014/main" id="{40A1EC32-8737-4576-8EA0-2BB43B42E055}"/>
+                <a16:creationId xmlns:a16="http://schemas.microsoft.com/office/drawing/2014/main" id="{0AB076E1-42BF-4F50-9566-97ADD13CDE2D}"/>
               </a:ext>
             </a:extLst>
           </p:cNvPr>
@@ -4418,7 +4418,7 @@
           <p:cNvPr id="7" name="">
             <a:extLst xmlns:a="http://schemas.openxmlformats.org/drawingml/2006/main">
               <a:ext uri="{FF2B5EF4-FFF2-40B4-BE49-F238E27FC236}">
-                <a16:creationId xmlns:a16="http://schemas.microsoft.com/office/drawing/2014/main" id="{251B922F-B548-4D93-B711-FDC2A83B26CE}"/>
+                <a16:creationId xmlns:a16="http://schemas.microsoft.com/office/drawing/2014/main" id="{ADFABF07-E718-4B74-8F27-845B22D4BE96}"/>
               </a:ext>
             </a:extLst>
           </p:cNvPr>
@@ -4449,7 +4449,7 @@
           <p:cNvPr id="8" name="">
             <a:extLst xmlns:a="http://schemas.openxmlformats.org/drawingml/2006/main">
               <a:ext uri="{FF2B5EF4-FFF2-40B4-BE49-F238E27FC236}">
-                <a16:creationId xmlns:a16="http://schemas.microsoft.com/office/drawing/2014/main" id="{411EB450-9EDC-4817-9421-82BE297F7A1B}"/>
+                <a16:creationId xmlns:a16="http://schemas.microsoft.com/office/drawing/2014/main" id="{AC8EADE9-99C4-4955-A983-4C32514393FD}"/>
               </a:ext>
             </a:extLst>
           </p:cNvPr>
@@ -4509,7 +4509,7 @@
     </p:spTree>
     <p:extLst>
       <p:ext uri="{BB962C8B-B14F-4D97-AF65-F5344CB8AC3E}">
-        <p14:creationId xmlns:p14="http://schemas.microsoft.com/office/powerpoint/2010/main" val="101543161"/>
+        <p14:creationId xmlns:p14="http://schemas.microsoft.com/office/powerpoint/2010/main" val="1567364866"/>
       </p:ext>
     </p:extLst>
   </p:cSld>
@@ -4543,7 +4543,7 @@
           <p:cNvPr id="31" name="">
             <a:extLst xmlns:a="http://schemas.openxmlformats.org/drawingml/2006/main">
               <a:ext uri="{FF2B5EF4-FFF2-40B4-BE49-F238E27FC236}">
-                <a16:creationId xmlns:a16="http://schemas.microsoft.com/office/drawing/2014/main" id="{B93AE8D2-EE11-4B3C-852F-5F083C9F4B0F}"/>
+                <a16:creationId xmlns:a16="http://schemas.microsoft.com/office/drawing/2014/main" id="{2EBF866D-4941-4FB8-A033-C905F7434466}"/>
               </a:ext>
             </a:extLst>
           </p:cNvPr>
@@ -4574,7 +4574,7 @@
           <p:cNvPr id="2" name="">
             <a:extLst xmlns:a="http://schemas.openxmlformats.org/drawingml/2006/main">
               <a:ext uri="{FF2B5EF4-FFF2-40B4-BE49-F238E27FC236}">
-                <a16:creationId xmlns:a16="http://schemas.microsoft.com/office/drawing/2014/main" id="{77AC1896-4DB0-46E3-8DDB-77E5E9FB531C}"/>
+                <a16:creationId xmlns:a16="http://schemas.microsoft.com/office/drawing/2014/main" id="{670B76F5-2F81-4D6D-997A-8ECA7A644197}"/>
               </a:ext>
             </a:extLst>
           </p:cNvPr>
@@ -4636,7 +4636,7 @@
           <p:cNvPr id="3" name="">
             <a:extLst xmlns:a="http://schemas.openxmlformats.org/drawingml/2006/main">
               <a:ext uri="{FF2B5EF4-FFF2-40B4-BE49-F238E27FC236}">
-                <a16:creationId xmlns:a16="http://schemas.microsoft.com/office/drawing/2014/main" id="{81255A8F-8069-4A6A-A0F0-282ACACC9365}"/>
+                <a16:creationId xmlns:a16="http://schemas.microsoft.com/office/drawing/2014/main" id="{258D8321-C359-44E5-B994-75138958C58B}"/>
               </a:ext>
             </a:extLst>
           </p:cNvPr>
@@ -4698,7 +4698,7 @@
           <p:cNvPr id="4" name="">
             <a:extLst xmlns:a="http://schemas.openxmlformats.org/drawingml/2006/main">
               <a:ext uri="{FF2B5EF4-FFF2-40B4-BE49-F238E27FC236}">
-                <a16:creationId xmlns:a16="http://schemas.microsoft.com/office/drawing/2014/main" id="{4D940C11-12D4-48F8-9F5D-BE8E80CAFBD3}"/>
+                <a16:creationId xmlns:a16="http://schemas.microsoft.com/office/drawing/2014/main" id="{47930CD5-AF9E-41C8-B85D-01628F44C65F}"/>
               </a:ext>
             </a:extLst>
           </p:cNvPr>
@@ -4760,7 +4760,7 @@
           <p:cNvPr id="5" name="">
             <a:extLst xmlns:a="http://schemas.openxmlformats.org/drawingml/2006/main">
               <a:ext uri="{FF2B5EF4-FFF2-40B4-BE49-F238E27FC236}">
-                <a16:creationId xmlns:a16="http://schemas.microsoft.com/office/drawing/2014/main" id="{1724E22F-4084-47DF-B701-7304162A1264}"/>
+                <a16:creationId xmlns:a16="http://schemas.microsoft.com/office/drawing/2014/main" id="{B6E2CF5F-1B6B-4C07-A8C6-96899BBA7C1A}"/>
               </a:ext>
             </a:extLst>
           </p:cNvPr>
@@ -4822,7 +4822,7 @@
           <p:cNvPr id="6" name="">
             <a:extLst xmlns:a="http://schemas.openxmlformats.org/drawingml/2006/main">
               <a:ext uri="{FF2B5EF4-FFF2-40B4-BE49-F238E27FC236}">
-                <a16:creationId xmlns:a16="http://schemas.microsoft.com/office/drawing/2014/main" id="{94DEB0B2-4E01-4A23-A373-29C7885A5064}"/>
+                <a16:creationId xmlns:a16="http://schemas.microsoft.com/office/drawing/2014/main" id="{11ED69E2-6A7E-489A-835F-E854AA36AE24}"/>
               </a:ext>
             </a:extLst>
           </p:cNvPr>
@@ -4884,7 +4884,7 @@
           <p:cNvPr id="7" name="">
             <a:extLst xmlns:a="http://schemas.openxmlformats.org/drawingml/2006/main">
               <a:ext uri="{FF2B5EF4-FFF2-40B4-BE49-F238E27FC236}">
-                <a16:creationId xmlns:a16="http://schemas.microsoft.com/office/drawing/2014/main" id="{2FBD7E8A-F365-4528-BB47-4CD1C72F2233}"/>
+                <a16:creationId xmlns:a16="http://schemas.microsoft.com/office/drawing/2014/main" id="{9082F6F8-CD48-4566-8BBE-F51D790B91AF}"/>
               </a:ext>
             </a:extLst>
           </p:cNvPr>
@@ -4917,7 +4917,7 @@
           <p:cNvPr id="8" name="">
             <a:extLst xmlns:a="http://schemas.openxmlformats.org/drawingml/2006/main">
               <a:ext uri="{FF2B5EF4-FFF2-40B4-BE49-F238E27FC236}">
-                <a16:creationId xmlns:a16="http://schemas.microsoft.com/office/drawing/2014/main" id="{1A59026F-5498-46D9-8350-38533891F70B}"/>
+                <a16:creationId xmlns:a16="http://schemas.microsoft.com/office/drawing/2014/main" id="{49460067-8918-4282-A986-C8DCBD3CEE46}"/>
               </a:ext>
             </a:extLst>
           </p:cNvPr>
@@ -4950,7 +4950,7 @@
           <p:cNvPr id="9" name="">
             <a:extLst xmlns:a="http://schemas.openxmlformats.org/drawingml/2006/main">
               <a:ext uri="{FF2B5EF4-FFF2-40B4-BE49-F238E27FC236}">
-                <a16:creationId xmlns:a16="http://schemas.microsoft.com/office/drawing/2014/main" id="{7B392C0A-CC63-47A5-922A-B6DE16D1085C}"/>
+                <a16:creationId xmlns:a16="http://schemas.microsoft.com/office/drawing/2014/main" id="{47998657-7C63-4CB8-AC75-648F3DD9731A}"/>
               </a:ext>
             </a:extLst>
           </p:cNvPr>
@@ -5012,7 +5012,7 @@
           <p:cNvPr id="10" name="">
             <a:extLst xmlns:a="http://schemas.openxmlformats.org/drawingml/2006/main">
               <a:ext uri="{FF2B5EF4-FFF2-40B4-BE49-F238E27FC236}">
-                <a16:creationId xmlns:a16="http://schemas.microsoft.com/office/drawing/2014/main" id="{B89C9FFA-44A2-4F8C-9F29-BBF81A68B791}"/>
+                <a16:creationId xmlns:a16="http://schemas.microsoft.com/office/drawing/2014/main" id="{81CB2C33-A9AA-4D14-8153-762D658FBD1B}"/>
               </a:ext>
             </a:extLst>
           </p:cNvPr>
@@ -5074,7 +5074,7 @@
           <p:cNvPr id="11" name="">
             <a:extLst xmlns:a="http://schemas.openxmlformats.org/drawingml/2006/main">
               <a:ext uri="{FF2B5EF4-FFF2-40B4-BE49-F238E27FC236}">
-                <a16:creationId xmlns:a16="http://schemas.microsoft.com/office/drawing/2014/main" id="{27DEBE81-458D-4C68-8258-FA0F6F902C6E}"/>
+                <a16:creationId xmlns:a16="http://schemas.microsoft.com/office/drawing/2014/main" id="{25AB89CC-6724-4829-B25E-62FACDE27962}"/>
               </a:ext>
             </a:extLst>
           </p:cNvPr>
@@ -5114,7 +5114,7 @@
           <p:cNvPr id="12" name="">
             <a:extLst xmlns:a="http://schemas.openxmlformats.org/drawingml/2006/main">
               <a:ext uri="{FF2B5EF4-FFF2-40B4-BE49-F238E27FC236}">
-                <a16:creationId xmlns:a16="http://schemas.microsoft.com/office/drawing/2014/main" id="{A873432B-21D2-4BB6-992E-A878ED705910}"/>
+                <a16:creationId xmlns:a16="http://schemas.microsoft.com/office/drawing/2014/main" id="{1F514A7D-5898-4B96-8F9C-EDE3B335213D}"/>
               </a:ext>
             </a:extLst>
           </p:cNvPr>
@@ -5176,7 +5176,7 @@
           <p:cNvPr id="13" name="">
             <a:extLst xmlns:a="http://schemas.openxmlformats.org/drawingml/2006/main">
               <a:ext uri="{FF2B5EF4-FFF2-40B4-BE49-F238E27FC236}">
-                <a16:creationId xmlns:a16="http://schemas.microsoft.com/office/drawing/2014/main" id="{AECC934F-E8B3-428C-9323-6776DC008EA2}"/>
+                <a16:creationId xmlns:a16="http://schemas.microsoft.com/office/drawing/2014/main" id="{97BE6F67-5D29-4CA8-8352-6F7715B8C5EE}"/>
               </a:ext>
             </a:extLst>
           </p:cNvPr>
@@ -5238,7 +5238,7 @@
           <p:cNvPr id="14" name="">
             <a:extLst xmlns:a="http://schemas.openxmlformats.org/drawingml/2006/main">
               <a:ext uri="{FF2B5EF4-FFF2-40B4-BE49-F238E27FC236}">
-                <a16:creationId xmlns:a16="http://schemas.microsoft.com/office/drawing/2014/main" id="{A149271D-BAC7-42B8-8F89-5FF270ABF703}"/>
+                <a16:creationId xmlns:a16="http://schemas.microsoft.com/office/drawing/2014/main" id="{23A2A166-0612-4210-B230-A15933C214AC}"/>
               </a:ext>
             </a:extLst>
           </p:cNvPr>
@@ -5300,7 +5300,7 @@
           <p:cNvPr id="15" name="">
             <a:extLst xmlns:a="http://schemas.openxmlformats.org/drawingml/2006/main">
               <a:ext uri="{FF2B5EF4-FFF2-40B4-BE49-F238E27FC236}">
-                <a16:creationId xmlns:a16="http://schemas.microsoft.com/office/drawing/2014/main" id="{F1D6EA8B-0CE5-4A51-9FDB-63CD0CDF8C3B}"/>
+                <a16:creationId xmlns:a16="http://schemas.microsoft.com/office/drawing/2014/main" id="{C549ADBE-DE67-44A0-82B0-64B57941DB60}"/>
               </a:ext>
             </a:extLst>
           </p:cNvPr>
@@ -5333,7 +5333,7 @@
           <p:cNvPr id="16" name="">
             <a:extLst xmlns:a="http://schemas.openxmlformats.org/drawingml/2006/main">
               <a:ext uri="{FF2B5EF4-FFF2-40B4-BE49-F238E27FC236}">
-                <a16:creationId xmlns:a16="http://schemas.microsoft.com/office/drawing/2014/main" id="{54293F06-56DF-48B7-A763-3022633ED5CE}"/>
+                <a16:creationId xmlns:a16="http://schemas.microsoft.com/office/drawing/2014/main" id="{2F324ED5-8BCA-4D11-9479-8DCFABD1C987}"/>
               </a:ext>
             </a:extLst>
           </p:cNvPr>
@@ -5366,7 +5366,7 @@
           <p:cNvPr id="17" name="">
             <a:extLst xmlns:a="http://schemas.openxmlformats.org/drawingml/2006/main">
               <a:ext uri="{FF2B5EF4-FFF2-40B4-BE49-F238E27FC236}">
-                <a16:creationId xmlns:a16="http://schemas.microsoft.com/office/drawing/2014/main" id="{C7E97EF2-685B-4FAA-8D4A-C9DDB660BC4D}"/>
+                <a16:creationId xmlns:a16="http://schemas.microsoft.com/office/drawing/2014/main" id="{B4A99E14-BC62-48C4-A5DC-C1CB7F21286E}"/>
               </a:ext>
             </a:extLst>
           </p:cNvPr>
@@ -5428,7 +5428,7 @@
           <p:cNvPr id="18" name="">
             <a:extLst xmlns:a="http://schemas.openxmlformats.org/drawingml/2006/main">
               <a:ext uri="{FF2B5EF4-FFF2-40B4-BE49-F238E27FC236}">
-                <a16:creationId xmlns:a16="http://schemas.microsoft.com/office/drawing/2014/main" id="{29FCA602-AA2D-4F75-A0F5-633D1FDA5730}"/>
+                <a16:creationId xmlns:a16="http://schemas.microsoft.com/office/drawing/2014/main" id="{7110DBA6-3026-456E-A022-FF1D72D25022}"/>
               </a:ext>
             </a:extLst>
           </p:cNvPr>
@@ -5490,7 +5490,7 @@
           <p:cNvPr id="19" name="">
             <a:extLst xmlns:a="http://schemas.openxmlformats.org/drawingml/2006/main">
               <a:ext uri="{FF2B5EF4-FFF2-40B4-BE49-F238E27FC236}">
-                <a16:creationId xmlns:a16="http://schemas.microsoft.com/office/drawing/2014/main" id="{5D7E73DE-3480-4F88-A267-25AD73F42AF6}"/>
+                <a16:creationId xmlns:a16="http://schemas.microsoft.com/office/drawing/2014/main" id="{128A635E-3F8F-488D-88F4-92064DBECD4F}"/>
               </a:ext>
             </a:extLst>
           </p:cNvPr>
@@ -5530,7 +5530,7 @@
           <p:cNvPr id="20" name="">
             <a:extLst xmlns:a="http://schemas.openxmlformats.org/drawingml/2006/main">
               <a:ext uri="{FF2B5EF4-FFF2-40B4-BE49-F238E27FC236}">
-                <a16:creationId xmlns:a16="http://schemas.microsoft.com/office/drawing/2014/main" id="{88BF0F98-557D-4E15-A4CF-3CCDC263C13D}"/>
+                <a16:creationId xmlns:a16="http://schemas.microsoft.com/office/drawing/2014/main" id="{A5697214-8DDA-4C18-A648-F6996696987E}"/>
               </a:ext>
             </a:extLst>
           </p:cNvPr>
@@ -5592,7 +5592,7 @@
           <p:cNvPr id="21" name="">
             <a:extLst xmlns:a="http://schemas.openxmlformats.org/drawingml/2006/main">
               <a:ext uri="{FF2B5EF4-FFF2-40B4-BE49-F238E27FC236}">
-                <a16:creationId xmlns:a16="http://schemas.microsoft.com/office/drawing/2014/main" id="{B83BE607-6DF0-442A-A50A-5443A0D28A6C}"/>
+                <a16:creationId xmlns:a16="http://schemas.microsoft.com/office/drawing/2014/main" id="{B7A62889-1D5A-44FE-BB10-F61C76843900}"/>
               </a:ext>
             </a:extLst>
           </p:cNvPr>
@@ -5654,7 +5654,7 @@
           <p:cNvPr id="22" name="">
             <a:extLst xmlns:a="http://schemas.openxmlformats.org/drawingml/2006/main">
               <a:ext uri="{FF2B5EF4-FFF2-40B4-BE49-F238E27FC236}">
-                <a16:creationId xmlns:a16="http://schemas.microsoft.com/office/drawing/2014/main" id="{81A2F7E9-CDA5-4745-AA08-1AB3228B46E8}"/>
+                <a16:creationId xmlns:a16="http://schemas.microsoft.com/office/drawing/2014/main" id="{C12F3241-44E7-4527-87B1-EA7917DAD49D}"/>
               </a:ext>
             </a:extLst>
           </p:cNvPr>
@@ -5716,7 +5716,7 @@
           <p:cNvPr id="23" name="">
             <a:extLst xmlns:a="http://schemas.openxmlformats.org/drawingml/2006/main">
               <a:ext uri="{FF2B5EF4-FFF2-40B4-BE49-F238E27FC236}">
-                <a16:creationId xmlns:a16="http://schemas.microsoft.com/office/drawing/2014/main" id="{70110325-7419-40A9-AE7C-98DA83BA963D}"/>
+                <a16:creationId xmlns:a16="http://schemas.microsoft.com/office/drawing/2014/main" id="{BD85AA5F-F30E-46E3-8A18-0A275A898DE2}"/>
               </a:ext>
             </a:extLst>
           </p:cNvPr>
@@ -5749,7 +5749,7 @@
           <p:cNvPr id="24" name="">
             <a:extLst xmlns:a="http://schemas.openxmlformats.org/drawingml/2006/main">
               <a:ext uri="{FF2B5EF4-FFF2-40B4-BE49-F238E27FC236}">
-                <a16:creationId xmlns:a16="http://schemas.microsoft.com/office/drawing/2014/main" id="{815C98A5-2E77-4EE1-A204-460D76FA9915}"/>
+                <a16:creationId xmlns:a16="http://schemas.microsoft.com/office/drawing/2014/main" id="{479469F4-3008-41B7-A58E-4A0BD7E5A64A}"/>
               </a:ext>
             </a:extLst>
           </p:cNvPr>
@@ -5782,7 +5782,7 @@
           <p:cNvPr id="25" name="">
             <a:extLst xmlns:a="http://schemas.openxmlformats.org/drawingml/2006/main">
               <a:ext uri="{FF2B5EF4-FFF2-40B4-BE49-F238E27FC236}">
-                <a16:creationId xmlns:a16="http://schemas.microsoft.com/office/drawing/2014/main" id="{EE043E1B-7F6E-4E3B-831D-87BBBBC78C37}"/>
+                <a16:creationId xmlns:a16="http://schemas.microsoft.com/office/drawing/2014/main" id="{15AD7A89-F1D7-4E36-9EA0-82A55E5DC3A0}"/>
               </a:ext>
             </a:extLst>
           </p:cNvPr>
@@ -5844,7 +5844,7 @@
           <p:cNvPr id="26" name="">
             <a:extLst xmlns:a="http://schemas.openxmlformats.org/drawingml/2006/main">
               <a:ext uri="{FF2B5EF4-FFF2-40B4-BE49-F238E27FC236}">
-                <a16:creationId xmlns:a16="http://schemas.microsoft.com/office/drawing/2014/main" id="{FCA6404C-C5D7-4C06-9B34-93C2D861F817}"/>
+                <a16:creationId xmlns:a16="http://schemas.microsoft.com/office/drawing/2014/main" id="{56F35171-E4CF-446E-8F06-F2DB83F59D31}"/>
               </a:ext>
             </a:extLst>
           </p:cNvPr>
@@ -5906,7 +5906,7 @@
           <p:cNvPr id="27" name="">
             <a:extLst xmlns:a="http://schemas.openxmlformats.org/drawingml/2006/main">
               <a:ext uri="{FF2B5EF4-FFF2-40B4-BE49-F238E27FC236}">
-                <a16:creationId xmlns:a16="http://schemas.microsoft.com/office/drawing/2014/main" id="{D43E8C55-FE33-4CC3-BEDC-32377CE86723}"/>
+                <a16:creationId xmlns:a16="http://schemas.microsoft.com/office/drawing/2014/main" id="{DF2A5186-B328-4139-9130-CB009AA1E0D8}"/>
               </a:ext>
             </a:extLst>
           </p:cNvPr>
@@ -5946,7 +5946,7 @@
           <p:cNvPr id="28" name="">
             <a:extLst xmlns:a="http://schemas.openxmlformats.org/drawingml/2006/main">
               <a:ext uri="{FF2B5EF4-FFF2-40B4-BE49-F238E27FC236}">
-                <a16:creationId xmlns:a16="http://schemas.microsoft.com/office/drawing/2014/main" id="{91DCBF96-EC8C-4248-AAD7-992317D9F30B}"/>
+                <a16:creationId xmlns:a16="http://schemas.microsoft.com/office/drawing/2014/main" id="{332761BD-0957-4249-B508-B621358EA0D1}"/>
               </a:ext>
             </a:extLst>
           </p:cNvPr>
@@ -6008,7 +6008,7 @@
           <p:cNvPr id="29" name="">
             <a:extLst xmlns:a="http://schemas.openxmlformats.org/drawingml/2006/main">
               <a:ext uri="{FF2B5EF4-FFF2-40B4-BE49-F238E27FC236}">
-                <a16:creationId xmlns:a16="http://schemas.microsoft.com/office/drawing/2014/main" id="{AD4928BE-8FB6-464E-952F-428EF8BC8C06}"/>
+                <a16:creationId xmlns:a16="http://schemas.microsoft.com/office/drawing/2014/main" id="{6C4B41CD-6B32-45D9-A625-BFDDA6070086}"/>
               </a:ext>
             </a:extLst>
           </p:cNvPr>
@@ -6070,7 +6070,7 @@
           <p:cNvPr id="30" name="">
             <a:extLst xmlns:a="http://schemas.openxmlformats.org/drawingml/2006/main">
               <a:ext uri="{FF2B5EF4-FFF2-40B4-BE49-F238E27FC236}">
-                <a16:creationId xmlns:a16="http://schemas.microsoft.com/office/drawing/2014/main" id="{3BA2A5E0-7B86-461B-83F8-718931EE40AA}"/>
+                <a16:creationId xmlns:a16="http://schemas.microsoft.com/office/drawing/2014/main" id="{F2B3F4F2-0ABA-412D-9E62-E25D769892A4}"/>
               </a:ext>
             </a:extLst>
           </p:cNvPr>
@@ -6130,7 +6130,7 @@
     </p:spTree>
     <p:extLst>
       <p:ext uri="{BB962C8B-B14F-4D97-AF65-F5344CB8AC3E}">
-        <p14:creationId xmlns:p14="http://schemas.microsoft.com/office/powerpoint/2010/main" val="432066286"/>
+        <p14:creationId xmlns:p14="http://schemas.microsoft.com/office/powerpoint/2010/main" val="1364807461"/>
       </p:ext>
     </p:extLst>
   </p:cSld>
@@ -6164,7 +6164,7 @@
           <p:cNvPr id="9" name="">
             <a:extLst xmlns:a="http://schemas.openxmlformats.org/drawingml/2006/main">
               <a:ext uri="{FF2B5EF4-FFF2-40B4-BE49-F238E27FC236}">
-                <a16:creationId xmlns:a16="http://schemas.microsoft.com/office/drawing/2014/main" id="{DFD58803-C845-493D-8D54-0E04C98B5401}"/>
+                <a16:creationId xmlns:a16="http://schemas.microsoft.com/office/drawing/2014/main" id="{BC9FE9BD-6C62-466B-ACA5-E15489AC771C}"/>
               </a:ext>
             </a:extLst>
           </p:cNvPr>
@@ -6195,7 +6195,7 @@
           <p:cNvPr id="2" name="">
             <a:extLst xmlns:a="http://schemas.openxmlformats.org/drawingml/2006/main">
               <a:ext uri="{FF2B5EF4-FFF2-40B4-BE49-F238E27FC236}">
-                <a16:creationId xmlns:a16="http://schemas.microsoft.com/office/drawing/2014/main" id="{36EF0847-462B-40FB-B8B3-D98718CAB859}"/>
+                <a16:creationId xmlns:a16="http://schemas.microsoft.com/office/drawing/2014/main" id="{7D6B8520-3A1C-4868-9C30-DBEB417F8498}"/>
               </a:ext>
             </a:extLst>
           </p:cNvPr>
@@ -6257,7 +6257,7 @@
           <p:cNvPr id="3" name="">
             <a:extLst xmlns:a="http://schemas.openxmlformats.org/drawingml/2006/main">
               <a:ext uri="{FF2B5EF4-FFF2-40B4-BE49-F238E27FC236}">
-                <a16:creationId xmlns:a16="http://schemas.microsoft.com/office/drawing/2014/main" id="{86A364A7-E177-4525-BBE8-0F41F508ED38}"/>
+                <a16:creationId xmlns:a16="http://schemas.microsoft.com/office/drawing/2014/main" id="{823C448A-BB69-464C-9758-2B5C60B86C3A}"/>
               </a:ext>
             </a:extLst>
           </p:cNvPr>
@@ -6319,7 +6319,7 @@
           <p:cNvPr id="4" name="">
             <a:extLst xmlns:a="http://schemas.openxmlformats.org/drawingml/2006/main">
               <a:ext uri="{FF2B5EF4-FFF2-40B4-BE49-F238E27FC236}">
-                <a16:creationId xmlns:a16="http://schemas.microsoft.com/office/drawing/2014/main" id="{FC03A5F6-27E5-426B-88E1-0B19556C7AA1}"/>
+                <a16:creationId xmlns:a16="http://schemas.microsoft.com/office/drawing/2014/main" id="{9011ECA5-9576-4E70-94A6-A8155F90B224}"/>
               </a:ext>
             </a:extLst>
           </p:cNvPr>
@@ -6381,7 +6381,7 @@
           <p:cNvPr id="5" name="">
             <a:extLst xmlns:a="http://schemas.openxmlformats.org/drawingml/2006/main">
               <a:ext uri="{FF2B5EF4-FFF2-40B4-BE49-F238E27FC236}">
-                <a16:creationId xmlns:a16="http://schemas.microsoft.com/office/drawing/2014/main" id="{958BA643-ACE3-4BC4-A35C-1B479EECD743}"/>
+                <a16:creationId xmlns:a16="http://schemas.microsoft.com/office/drawing/2014/main" id="{C8C83308-4BE8-47FB-882D-F0A3F04BDAD5}"/>
               </a:ext>
             </a:extLst>
           </p:cNvPr>
@@ -6443,7 +6443,7 @@
           <p:cNvPr id="6" name="">
             <a:extLst xmlns:a="http://schemas.openxmlformats.org/drawingml/2006/main">
               <a:ext uri="{FF2B5EF4-FFF2-40B4-BE49-F238E27FC236}">
-                <a16:creationId xmlns:a16="http://schemas.microsoft.com/office/drawing/2014/main" id="{43B1B0BE-080B-476E-BA09-AF085DE29674}"/>
+                <a16:creationId xmlns:a16="http://schemas.microsoft.com/office/drawing/2014/main" id="{13BC0125-564C-417F-8AAD-73079392C497}"/>
               </a:ext>
             </a:extLst>
           </p:cNvPr>
@@ -6532,7 +6532,7 @@
           <p:cNvPr id="7" name="">
             <a:extLst xmlns:a="http://schemas.openxmlformats.org/drawingml/2006/main">
               <a:ext uri="{FF2B5EF4-FFF2-40B4-BE49-F238E27FC236}">
-                <a16:creationId xmlns:a16="http://schemas.microsoft.com/office/drawing/2014/main" id="{85606EFA-EDD5-4E02-8DCD-7ECE3BF13E7F}"/>
+                <a16:creationId xmlns:a16="http://schemas.microsoft.com/office/drawing/2014/main" id="{803EB695-DED9-4AF6-81E5-AB9734C2E1E3}"/>
               </a:ext>
             </a:extLst>
           </p:cNvPr>
@@ -6594,7 +6594,7 @@
           <p:cNvPr id="8" name="">
             <a:extLst xmlns:a="http://schemas.openxmlformats.org/drawingml/2006/main">
               <a:ext uri="{FF2B5EF4-FFF2-40B4-BE49-F238E27FC236}">
-                <a16:creationId xmlns:a16="http://schemas.microsoft.com/office/drawing/2014/main" id="{00CB8F7D-0AB1-4F55-B667-50BD4F8B234E}"/>
+                <a16:creationId xmlns:a16="http://schemas.microsoft.com/office/drawing/2014/main" id="{472CE9B9-ED15-4456-B5B7-832EBF41839B}"/>
               </a:ext>
             </a:extLst>
           </p:cNvPr>
@@ -6623,7 +6623,7 @@
     </p:spTree>
     <p:extLst>
       <p:ext uri="{BB962C8B-B14F-4D97-AF65-F5344CB8AC3E}">
-        <p14:creationId xmlns:p14="http://schemas.microsoft.com/office/powerpoint/2010/main" val="674366858"/>
+        <p14:creationId xmlns:p14="http://schemas.microsoft.com/office/powerpoint/2010/main" val="650616314"/>
       </p:ext>
     </p:extLst>
   </p:cSld>
@@ -6657,7 +6657,7 @@
           <p:cNvPr id="29" name="">
             <a:extLst xmlns:a="http://schemas.openxmlformats.org/drawingml/2006/main">
               <a:ext uri="{FF2B5EF4-FFF2-40B4-BE49-F238E27FC236}">
-                <a16:creationId xmlns:a16="http://schemas.microsoft.com/office/drawing/2014/main" id="{D50F7C6D-170A-4A28-866F-260DBEF2106D}"/>
+                <a16:creationId xmlns:a16="http://schemas.microsoft.com/office/drawing/2014/main" id="{15C0C6A3-5A2F-49F5-8EC6-35A191C6AF8C}"/>
               </a:ext>
             </a:extLst>
           </p:cNvPr>
@@ -6688,7 +6688,7 @@
           <p:cNvPr id="2" name="">
             <a:extLst xmlns:a="http://schemas.openxmlformats.org/drawingml/2006/main">
               <a:ext uri="{FF2B5EF4-FFF2-40B4-BE49-F238E27FC236}">
-                <a16:creationId xmlns:a16="http://schemas.microsoft.com/office/drawing/2014/main" id="{7BD00CC1-D47E-4883-8ED3-2244DDA5CA8C}"/>
+                <a16:creationId xmlns:a16="http://schemas.microsoft.com/office/drawing/2014/main" id="{1E1B895F-B626-41EE-A620-A61AE8402D5C}"/>
               </a:ext>
             </a:extLst>
           </p:cNvPr>
@@ -6750,7 +6750,7 @@
           <p:cNvPr id="3" name="">
             <a:extLst xmlns:a="http://schemas.openxmlformats.org/drawingml/2006/main">
               <a:ext uri="{FF2B5EF4-FFF2-40B4-BE49-F238E27FC236}">
-                <a16:creationId xmlns:a16="http://schemas.microsoft.com/office/drawing/2014/main" id="{D053E538-601A-400C-ABE3-125D6AB61775}"/>
+                <a16:creationId xmlns:a16="http://schemas.microsoft.com/office/drawing/2014/main" id="{DDF0AF25-B458-4C90-95EA-1E8E0B89239E}"/>
               </a:ext>
             </a:extLst>
           </p:cNvPr>
@@ -6812,7 +6812,7 @@
           <p:cNvPr id="4" name="">
             <a:extLst xmlns:a="http://schemas.openxmlformats.org/drawingml/2006/main">
               <a:ext uri="{FF2B5EF4-FFF2-40B4-BE49-F238E27FC236}">
-                <a16:creationId xmlns:a16="http://schemas.microsoft.com/office/drawing/2014/main" id="{0F23ECB0-D9C9-4AC0-881D-4EA0B274917E}"/>
+                <a16:creationId xmlns:a16="http://schemas.microsoft.com/office/drawing/2014/main" id="{C8530277-7F28-44CD-A2DD-F3E7BF56B834}"/>
               </a:ext>
             </a:extLst>
           </p:cNvPr>
@@ -6874,7 +6874,7 @@
           <p:cNvPr id="5" name="">
             <a:extLst xmlns:a="http://schemas.openxmlformats.org/drawingml/2006/main">
               <a:ext uri="{FF2B5EF4-FFF2-40B4-BE49-F238E27FC236}">
-                <a16:creationId xmlns:a16="http://schemas.microsoft.com/office/drawing/2014/main" id="{2CAC97D3-FEA2-4D99-B517-43C35270E42C}"/>
+                <a16:creationId xmlns:a16="http://schemas.microsoft.com/office/drawing/2014/main" id="{F20ADAFA-2C3B-402E-994D-7358FCA92C71}"/>
               </a:ext>
             </a:extLst>
           </p:cNvPr>
@@ -6936,7 +6936,7 @@
           <p:cNvPr id="6" name="">
             <a:extLst xmlns:a="http://schemas.openxmlformats.org/drawingml/2006/main">
               <a:ext uri="{FF2B5EF4-FFF2-40B4-BE49-F238E27FC236}">
-                <a16:creationId xmlns:a16="http://schemas.microsoft.com/office/drawing/2014/main" id="{E8EABA67-4B90-45E1-973E-AE871F7B45B6}"/>
+                <a16:creationId xmlns:a16="http://schemas.microsoft.com/office/drawing/2014/main" id="{22DB3113-B7E7-4FE7-8CC0-A849AD9FD269}"/>
               </a:ext>
             </a:extLst>
           </p:cNvPr>
@@ -6998,7 +6998,7 @@
           <p:cNvPr id="7" name="">
             <a:extLst xmlns:a="http://schemas.openxmlformats.org/drawingml/2006/main">
               <a:ext uri="{FF2B5EF4-FFF2-40B4-BE49-F238E27FC236}">
-                <a16:creationId xmlns:a16="http://schemas.microsoft.com/office/drawing/2014/main" id="{2BA0DA0F-24CF-41FB-9202-41A8B1ACAC34}"/>
+                <a16:creationId xmlns:a16="http://schemas.microsoft.com/office/drawing/2014/main" id="{CEF72686-450E-4E2B-9B8C-BA7DD1130D9C}"/>
               </a:ext>
             </a:extLst>
           </p:cNvPr>
@@ -7031,7 +7031,7 @@
           <p:cNvPr id="8" name="">
             <a:extLst xmlns:a="http://schemas.openxmlformats.org/drawingml/2006/main">
               <a:ext uri="{FF2B5EF4-FFF2-40B4-BE49-F238E27FC236}">
-                <a16:creationId xmlns:a16="http://schemas.microsoft.com/office/drawing/2014/main" id="{FEA4214D-C6C2-447B-8DCA-8811D1F997F4}"/>
+                <a16:creationId xmlns:a16="http://schemas.microsoft.com/office/drawing/2014/main" id="{FD05D25A-4C29-484B-9FF5-DF18BCE34B4B}"/>
               </a:ext>
             </a:extLst>
           </p:cNvPr>
@@ -7064,7 +7064,7 @@
           <p:cNvPr id="9" name="">
             <a:extLst xmlns:a="http://schemas.openxmlformats.org/drawingml/2006/main">
               <a:ext uri="{FF2B5EF4-FFF2-40B4-BE49-F238E27FC236}">
-                <a16:creationId xmlns:a16="http://schemas.microsoft.com/office/drawing/2014/main" id="{A6E1138B-350E-40A6-A046-8A3D5B029470}"/>
+                <a16:creationId xmlns:a16="http://schemas.microsoft.com/office/drawing/2014/main" id="{F2AB78F2-3116-4577-8285-C9E102197394}"/>
               </a:ext>
             </a:extLst>
           </p:cNvPr>
@@ -7153,7 +7153,7 @@
           <p:cNvPr id="10" name="">
             <a:extLst xmlns:a="http://schemas.openxmlformats.org/drawingml/2006/main">
               <a:ext uri="{FF2B5EF4-FFF2-40B4-BE49-F238E27FC236}">
-                <a16:creationId xmlns:a16="http://schemas.microsoft.com/office/drawing/2014/main" id="{A3F1D83E-92CA-4D3C-8C1D-75323D1D59E0}"/>
+                <a16:creationId xmlns:a16="http://schemas.microsoft.com/office/drawing/2014/main" id="{BA2DF562-4CA5-4F31-90A6-259FECC0AEA0}"/>
               </a:ext>
             </a:extLst>
           </p:cNvPr>
@@ -7215,7 +7215,7 @@
           <p:cNvPr id="11" name="">
             <a:extLst xmlns:a="http://schemas.openxmlformats.org/drawingml/2006/main">
               <a:ext uri="{FF2B5EF4-FFF2-40B4-BE49-F238E27FC236}">
-                <a16:creationId xmlns:a16="http://schemas.microsoft.com/office/drawing/2014/main" id="{9D09F3B3-D3BF-4E10-98F5-094A1C5E56B7}"/>
+                <a16:creationId xmlns:a16="http://schemas.microsoft.com/office/drawing/2014/main" id="{20838FA8-F5C2-450F-BDDB-1FFD39E7B6C2}"/>
               </a:ext>
             </a:extLst>
           </p:cNvPr>
@@ -7277,7 +7277,7 @@
           <p:cNvPr id="12" name="">
             <a:extLst xmlns:a="http://schemas.openxmlformats.org/drawingml/2006/main">
               <a:ext uri="{FF2B5EF4-FFF2-40B4-BE49-F238E27FC236}">
-                <a16:creationId xmlns:a16="http://schemas.microsoft.com/office/drawing/2014/main" id="{5F033BC1-E53F-4E4D-BA15-E3451E2F85D2}"/>
+                <a16:creationId xmlns:a16="http://schemas.microsoft.com/office/drawing/2014/main" id="{97F6C128-E501-4D3C-A726-4577DE28B975}"/>
               </a:ext>
             </a:extLst>
           </p:cNvPr>
@@ -7339,7 +7339,7 @@
           <p:cNvPr id="13" name="">
             <a:extLst xmlns:a="http://schemas.openxmlformats.org/drawingml/2006/main">
               <a:ext uri="{FF2B5EF4-FFF2-40B4-BE49-F238E27FC236}">
-                <a16:creationId xmlns:a16="http://schemas.microsoft.com/office/drawing/2014/main" id="{4F845233-8290-402D-BB85-085BE52D2D0A}"/>
+                <a16:creationId xmlns:a16="http://schemas.microsoft.com/office/drawing/2014/main" id="{CEE69636-F387-4526-A77D-FB8DC3BC6ADB}"/>
               </a:ext>
             </a:extLst>
           </p:cNvPr>
@@ -7401,7 +7401,7 @@
           <p:cNvPr id="14" name="">
             <a:extLst xmlns:a="http://schemas.openxmlformats.org/drawingml/2006/main">
               <a:ext uri="{FF2B5EF4-FFF2-40B4-BE49-F238E27FC236}">
-                <a16:creationId xmlns:a16="http://schemas.microsoft.com/office/drawing/2014/main" id="{F325C75B-3C4B-4214-B940-4C5AA394D9FB}"/>
+                <a16:creationId xmlns:a16="http://schemas.microsoft.com/office/drawing/2014/main" id="{627CC762-5F48-4093-97EF-596B7F523EE6}"/>
               </a:ext>
             </a:extLst>
           </p:cNvPr>
@@ -7434,7 +7434,7 @@
           <p:cNvPr id="15" name="">
             <a:extLst xmlns:a="http://schemas.openxmlformats.org/drawingml/2006/main">
               <a:ext uri="{FF2B5EF4-FFF2-40B4-BE49-F238E27FC236}">
-                <a16:creationId xmlns:a16="http://schemas.microsoft.com/office/drawing/2014/main" id="{D26D1505-B7F1-4FCF-B68E-D7BE1C9A6E6F}"/>
+                <a16:creationId xmlns:a16="http://schemas.microsoft.com/office/drawing/2014/main" id="{16C99958-65A9-404A-AA6C-130615E95D9B}"/>
               </a:ext>
             </a:extLst>
           </p:cNvPr>
@@ -7467,7 +7467,7 @@
           <p:cNvPr id="16" name="">
             <a:extLst xmlns:a="http://schemas.openxmlformats.org/drawingml/2006/main">
               <a:ext uri="{FF2B5EF4-FFF2-40B4-BE49-F238E27FC236}">
-                <a16:creationId xmlns:a16="http://schemas.microsoft.com/office/drawing/2014/main" id="{807A193B-F497-40E8-A20C-4589B656747F}"/>
+                <a16:creationId xmlns:a16="http://schemas.microsoft.com/office/drawing/2014/main" id="{5CDC4234-99FB-4074-AF12-C57B686F12AB}"/>
               </a:ext>
             </a:extLst>
           </p:cNvPr>
@@ -7556,7 +7556,7 @@
           <p:cNvPr id="17" name="">
             <a:extLst xmlns:a="http://schemas.openxmlformats.org/drawingml/2006/main">
               <a:ext uri="{FF2B5EF4-FFF2-40B4-BE49-F238E27FC236}">
-                <a16:creationId xmlns:a16="http://schemas.microsoft.com/office/drawing/2014/main" id="{E97BA60C-9E4D-4EA7-9F9E-BC0E89A0C693}"/>
+                <a16:creationId xmlns:a16="http://schemas.microsoft.com/office/drawing/2014/main" id="{C84735B7-182F-4062-BB0D-36C0B3F4C021}"/>
               </a:ext>
             </a:extLst>
           </p:cNvPr>
@@ -7618,7 +7618,7 @@
           <p:cNvPr id="18" name="">
             <a:extLst xmlns:a="http://schemas.openxmlformats.org/drawingml/2006/main">
               <a:ext uri="{FF2B5EF4-FFF2-40B4-BE49-F238E27FC236}">
-                <a16:creationId xmlns:a16="http://schemas.microsoft.com/office/drawing/2014/main" id="{7DA77238-C54E-47BF-B53D-1129DFF7EE11}"/>
+                <a16:creationId xmlns:a16="http://schemas.microsoft.com/office/drawing/2014/main" id="{81515032-785C-43C0-85B4-5024E4BD5ED1}"/>
               </a:ext>
             </a:extLst>
           </p:cNvPr>
@@ -7680,7 +7680,7 @@
           <p:cNvPr id="19" name="">
             <a:extLst xmlns:a="http://schemas.openxmlformats.org/drawingml/2006/main">
               <a:ext uri="{FF2B5EF4-FFF2-40B4-BE49-F238E27FC236}">
-                <a16:creationId xmlns:a16="http://schemas.microsoft.com/office/drawing/2014/main" id="{C560CFAE-2EE7-483D-A32E-A7A451F7F4A5}"/>
+                <a16:creationId xmlns:a16="http://schemas.microsoft.com/office/drawing/2014/main" id="{9F4F404F-2AF6-42AA-844B-2DB6B69C5BFB}"/>
               </a:ext>
             </a:extLst>
           </p:cNvPr>
@@ -7742,7 +7742,7 @@
           <p:cNvPr id="20" name="">
             <a:extLst xmlns:a="http://schemas.openxmlformats.org/drawingml/2006/main">
               <a:ext uri="{FF2B5EF4-FFF2-40B4-BE49-F238E27FC236}">
-                <a16:creationId xmlns:a16="http://schemas.microsoft.com/office/drawing/2014/main" id="{28416AB0-1437-477F-A02F-F71D1D9CBE69}"/>
+                <a16:creationId xmlns:a16="http://schemas.microsoft.com/office/drawing/2014/main" id="{C349D8FC-D963-403D-A581-774B982156F1}"/>
               </a:ext>
             </a:extLst>
           </p:cNvPr>
@@ -7804,7 +7804,7 @@
           <p:cNvPr id="21" name="">
             <a:extLst xmlns:a="http://schemas.openxmlformats.org/drawingml/2006/main">
               <a:ext uri="{FF2B5EF4-FFF2-40B4-BE49-F238E27FC236}">
-                <a16:creationId xmlns:a16="http://schemas.microsoft.com/office/drawing/2014/main" id="{36830EFD-A7A0-4E93-B3E7-329D32D8227E}"/>
+                <a16:creationId xmlns:a16="http://schemas.microsoft.com/office/drawing/2014/main" id="{7AB8DFFA-60AB-4574-9F67-624CC6B7D555}"/>
               </a:ext>
             </a:extLst>
           </p:cNvPr>
@@ -7866,7 +7866,7 @@
           <p:cNvPr id="22" name="">
             <a:extLst xmlns:a="http://schemas.openxmlformats.org/drawingml/2006/main">
               <a:ext uri="{FF2B5EF4-FFF2-40B4-BE49-F238E27FC236}">
-                <a16:creationId xmlns:a16="http://schemas.microsoft.com/office/drawing/2014/main" id="{B4EBEA89-717B-4232-A9D5-EB7B3DC055FE}"/>
+                <a16:creationId xmlns:a16="http://schemas.microsoft.com/office/drawing/2014/main" id="{2FBC87D3-3010-4404-8358-7F2C3E9FB985}"/>
               </a:ext>
             </a:extLst>
           </p:cNvPr>
@@ -7899,7 +7899,7 @@
           <p:cNvPr id="23" name="">
             <a:extLst xmlns:a="http://schemas.openxmlformats.org/drawingml/2006/main">
               <a:ext uri="{FF2B5EF4-FFF2-40B4-BE49-F238E27FC236}">
-                <a16:creationId xmlns:a16="http://schemas.microsoft.com/office/drawing/2014/main" id="{5D9A750E-3262-472A-B66C-661FF8E67CC9}"/>
+                <a16:creationId xmlns:a16="http://schemas.microsoft.com/office/drawing/2014/main" id="{1CCAD0CC-FCBA-4103-A7BF-A01C1427A1E2}"/>
               </a:ext>
             </a:extLst>
           </p:cNvPr>
@@ -7932,7 +7932,7 @@
           <p:cNvPr id="24" name="">
             <a:extLst xmlns:a="http://schemas.openxmlformats.org/drawingml/2006/main">
               <a:ext uri="{FF2B5EF4-FFF2-40B4-BE49-F238E27FC236}">
-                <a16:creationId xmlns:a16="http://schemas.microsoft.com/office/drawing/2014/main" id="{14F6EB73-435C-47DF-9B2F-C1B73427D2A0}"/>
+                <a16:creationId xmlns:a16="http://schemas.microsoft.com/office/drawing/2014/main" id="{1EEB8AC4-E309-4F7C-A9B7-8B56707E87C1}"/>
               </a:ext>
             </a:extLst>
           </p:cNvPr>
@@ -8021,7 +8021,7 @@
           <p:cNvPr id="25" name="">
             <a:extLst xmlns:a="http://schemas.openxmlformats.org/drawingml/2006/main">
               <a:ext uri="{FF2B5EF4-FFF2-40B4-BE49-F238E27FC236}">
-                <a16:creationId xmlns:a16="http://schemas.microsoft.com/office/drawing/2014/main" id="{4B55FE21-C274-41F1-932C-B6BC8C087BC8}"/>
+                <a16:creationId xmlns:a16="http://schemas.microsoft.com/office/drawing/2014/main" id="{5D0CD231-8CFA-496D-BD21-F0BC2C45793D}"/>
               </a:ext>
             </a:extLst>
           </p:cNvPr>
@@ -8083,7 +8083,7 @@
           <p:cNvPr id="26" name="">
             <a:extLst xmlns:a="http://schemas.openxmlformats.org/drawingml/2006/main">
               <a:ext uri="{FF2B5EF4-FFF2-40B4-BE49-F238E27FC236}">
-                <a16:creationId xmlns:a16="http://schemas.microsoft.com/office/drawing/2014/main" id="{166622E0-B979-4F5F-94B5-A089AE06911D}"/>
+                <a16:creationId xmlns:a16="http://schemas.microsoft.com/office/drawing/2014/main" id="{A4FFD6FC-5D89-4FDC-B737-2E5B81427A70}"/>
               </a:ext>
             </a:extLst>
           </p:cNvPr>
@@ -8145,7 +8145,7 @@
           <p:cNvPr id="27" name="">
             <a:extLst xmlns:a="http://schemas.openxmlformats.org/drawingml/2006/main">
               <a:ext uri="{FF2B5EF4-FFF2-40B4-BE49-F238E27FC236}">
-                <a16:creationId xmlns:a16="http://schemas.microsoft.com/office/drawing/2014/main" id="{D8768586-F8C3-4947-9B29-3BC8255C8505}"/>
+                <a16:creationId xmlns:a16="http://schemas.microsoft.com/office/drawing/2014/main" id="{EAD4901C-5B9C-4410-A557-CB61732D8105}"/>
               </a:ext>
             </a:extLst>
           </p:cNvPr>
@@ -8207,7 +8207,7 @@
           <p:cNvPr id="28" name="">
             <a:extLst xmlns:a="http://schemas.openxmlformats.org/drawingml/2006/main">
               <a:ext uri="{FF2B5EF4-FFF2-40B4-BE49-F238E27FC236}">
-                <a16:creationId xmlns:a16="http://schemas.microsoft.com/office/drawing/2014/main" id="{FBC69507-08DA-4FE3-93D9-8226B9EA3408}"/>
+                <a16:creationId xmlns:a16="http://schemas.microsoft.com/office/drawing/2014/main" id="{194B967A-14D4-486B-983A-1EBBEC90CCA4}"/>
               </a:ext>
             </a:extLst>
           </p:cNvPr>
@@ -8267,7 +8267,7 @@
     </p:spTree>
     <p:extLst>
       <p:ext uri="{BB962C8B-B14F-4D97-AF65-F5344CB8AC3E}">
-        <p14:creationId xmlns:p14="http://schemas.microsoft.com/office/powerpoint/2010/main" val="1402488516"/>
+        <p14:creationId xmlns:p14="http://schemas.microsoft.com/office/powerpoint/2010/main" val="1638076971"/>
       </p:ext>
     </p:extLst>
   </p:cSld>
@@ -8301,7 +8301,7 @@
           <p:cNvPr id="13" name="">
             <a:extLst xmlns:a="http://schemas.openxmlformats.org/drawingml/2006/main">
               <a:ext uri="{FF2B5EF4-FFF2-40B4-BE49-F238E27FC236}">
-                <a16:creationId xmlns:a16="http://schemas.microsoft.com/office/drawing/2014/main" id="{0A2B1331-EE77-46AA-AEC5-36C45FD1D92C}"/>
+                <a16:creationId xmlns:a16="http://schemas.microsoft.com/office/drawing/2014/main" id="{58237B7C-1314-47A6-B255-74486E2C3BD3}"/>
               </a:ext>
             </a:extLst>
           </p:cNvPr>
@@ -8332,7 +8332,7 @@
           <p:cNvPr id="2" name="">
             <a:extLst xmlns:a="http://schemas.openxmlformats.org/drawingml/2006/main">
               <a:ext uri="{FF2B5EF4-FFF2-40B4-BE49-F238E27FC236}">
-                <a16:creationId xmlns:a16="http://schemas.microsoft.com/office/drawing/2014/main" id="{DBA9DDA8-6682-471F-BAED-2D83F2F807F5}"/>
+                <a16:creationId xmlns:a16="http://schemas.microsoft.com/office/drawing/2014/main" id="{EBD815AF-A4B2-47AD-94E6-74A850D0CEA2}"/>
               </a:ext>
             </a:extLst>
           </p:cNvPr>
@@ -8394,7 +8394,7 @@
           <p:cNvPr id="3" name="">
             <a:extLst xmlns:a="http://schemas.openxmlformats.org/drawingml/2006/main">
               <a:ext uri="{FF2B5EF4-FFF2-40B4-BE49-F238E27FC236}">
-                <a16:creationId xmlns:a16="http://schemas.microsoft.com/office/drawing/2014/main" id="{8212C4FC-B9FB-4834-B368-64F0157DEB92}"/>
+                <a16:creationId xmlns:a16="http://schemas.microsoft.com/office/drawing/2014/main" id="{57C08500-68E0-4E72-B05D-07E1DCDA630D}"/>
               </a:ext>
             </a:extLst>
           </p:cNvPr>
@@ -8456,7 +8456,7 @@
           <p:cNvPr id="4" name="">
             <a:extLst xmlns:a="http://schemas.openxmlformats.org/drawingml/2006/main">
               <a:ext uri="{FF2B5EF4-FFF2-40B4-BE49-F238E27FC236}">
-                <a16:creationId xmlns:a16="http://schemas.microsoft.com/office/drawing/2014/main" id="{4DC0913D-D32B-4F5E-8205-C1C6D5D0A45A}"/>
+                <a16:creationId xmlns:a16="http://schemas.microsoft.com/office/drawing/2014/main" id="{40FE2676-C3E2-4832-97F8-7EDA28C22445}"/>
               </a:ext>
             </a:extLst>
           </p:cNvPr>
@@ -8518,7 +8518,7 @@
           <p:cNvPr id="5" name="">
             <a:extLst xmlns:a="http://schemas.openxmlformats.org/drawingml/2006/main">
               <a:ext uri="{FF2B5EF4-FFF2-40B4-BE49-F238E27FC236}">
-                <a16:creationId xmlns:a16="http://schemas.microsoft.com/office/drawing/2014/main" id="{45EE20E1-7E83-4CD2-9AC9-7E9A6D23C4D5}"/>
+                <a16:creationId xmlns:a16="http://schemas.microsoft.com/office/drawing/2014/main" id="{C9B3EC79-1616-4BD3-8EA8-A8202D43B7EB}"/>
               </a:ext>
             </a:extLst>
           </p:cNvPr>
@@ -8580,7 +8580,7 @@
           <p:cNvPr id="6" name="">
             <a:extLst xmlns:a="http://schemas.openxmlformats.org/drawingml/2006/main">
               <a:ext uri="{FF2B5EF4-FFF2-40B4-BE49-F238E27FC236}">
-                <a16:creationId xmlns:a16="http://schemas.microsoft.com/office/drawing/2014/main" id="{574B3846-ED81-4216-BEEA-83F5A017FA28}"/>
+                <a16:creationId xmlns:a16="http://schemas.microsoft.com/office/drawing/2014/main" id="{7FFF3D49-BB9D-4231-A84A-C9B9FA0B753C}"/>
               </a:ext>
             </a:extLst>
           </p:cNvPr>
@@ -8642,7 +8642,7 @@
           <p:cNvPr id="7" name="">
             <a:extLst xmlns:a="http://schemas.openxmlformats.org/drawingml/2006/main">
               <a:ext uri="{FF2B5EF4-FFF2-40B4-BE49-F238E27FC236}">
-                <a16:creationId xmlns:a16="http://schemas.microsoft.com/office/drawing/2014/main" id="{35A7D5AB-7B53-47EA-9655-58454E90DE95}"/>
+                <a16:creationId xmlns:a16="http://schemas.microsoft.com/office/drawing/2014/main" id="{0D730602-A9E8-45FD-A729-8464E9A1A73C}"/>
               </a:ext>
             </a:extLst>
           </p:cNvPr>
@@ -8704,7 +8704,7 @@
           <p:cNvPr id="8" name="">
             <a:extLst xmlns:a="http://schemas.openxmlformats.org/drawingml/2006/main">
               <a:ext uri="{FF2B5EF4-FFF2-40B4-BE49-F238E27FC236}">
-                <a16:creationId xmlns:a16="http://schemas.microsoft.com/office/drawing/2014/main" id="{802C62F1-6061-4A6D-A560-9E9C788819F9}"/>
+                <a16:creationId xmlns:a16="http://schemas.microsoft.com/office/drawing/2014/main" id="{1D5DF70D-CD48-4CE0-AE69-D337F4FFFD21}"/>
               </a:ext>
             </a:extLst>
           </p:cNvPr>
@@ -8766,7 +8766,7 @@
           <p:cNvPr id="9" name="">
             <a:extLst xmlns:a="http://schemas.openxmlformats.org/drawingml/2006/main">
               <a:ext uri="{FF2B5EF4-FFF2-40B4-BE49-F238E27FC236}">
-                <a16:creationId xmlns:a16="http://schemas.microsoft.com/office/drawing/2014/main" id="{A00400EC-67DF-40F3-A465-6C504FADAD57}"/>
+                <a16:creationId xmlns:a16="http://schemas.microsoft.com/office/drawing/2014/main" id="{0C697DC4-61D5-4CCD-BE91-1550C15CD4CE}"/>
               </a:ext>
             </a:extLst>
           </p:cNvPr>
@@ -8828,7 +8828,7 @@
           <p:cNvPr id="10" name="">
             <a:extLst xmlns:a="http://schemas.openxmlformats.org/drawingml/2006/main">
               <a:ext uri="{FF2B5EF4-FFF2-40B4-BE49-F238E27FC236}">
-                <a16:creationId xmlns:a16="http://schemas.microsoft.com/office/drawing/2014/main" id="{066E25AC-0EBF-4895-AD19-32C35EE1D17F}"/>
+                <a16:creationId xmlns:a16="http://schemas.microsoft.com/office/drawing/2014/main" id="{BC305DE1-B42E-496B-A7A9-3470AABBBD5B}"/>
               </a:ext>
             </a:extLst>
           </p:cNvPr>
@@ -8890,7 +8890,7 @@
           <p:cNvPr id="11" name="">
             <a:extLst xmlns:a="http://schemas.openxmlformats.org/drawingml/2006/main">
               <a:ext uri="{FF2B5EF4-FFF2-40B4-BE49-F238E27FC236}">
-                <a16:creationId xmlns:a16="http://schemas.microsoft.com/office/drawing/2014/main" id="{89042596-1B88-4862-B2BC-A55B7DB3E027}"/>
+                <a16:creationId xmlns:a16="http://schemas.microsoft.com/office/drawing/2014/main" id="{B631360D-95A6-4D83-801B-60CCF2646B89}"/>
               </a:ext>
             </a:extLst>
           </p:cNvPr>
@@ -8952,7 +8952,7 @@
           <p:cNvPr id="12" name="">
             <a:extLst xmlns:a="http://schemas.openxmlformats.org/drawingml/2006/main">
               <a:ext uri="{FF2B5EF4-FFF2-40B4-BE49-F238E27FC236}">
-                <a16:creationId xmlns:a16="http://schemas.microsoft.com/office/drawing/2014/main" id="{B4F87E9E-5FE7-43A6-BCED-323F1E35B450}"/>
+                <a16:creationId xmlns:a16="http://schemas.microsoft.com/office/drawing/2014/main" id="{4CBAF470-1BC4-481C-8CCA-3433373D43C4}"/>
               </a:ext>
             </a:extLst>
           </p:cNvPr>
@@ -9012,7 +9012,7 @@
     </p:spTree>
     <p:extLst>
       <p:ext uri="{BB962C8B-B14F-4D97-AF65-F5344CB8AC3E}">
-        <p14:creationId xmlns:p14="http://schemas.microsoft.com/office/powerpoint/2010/main" val="1863320360"/>
+        <p14:creationId xmlns:p14="http://schemas.microsoft.com/office/powerpoint/2010/main" val="333997736"/>
       </p:ext>
     </p:extLst>
   </p:cSld>
@@ -9046,7 +9046,7 @@
           <p:cNvPr id="35" name="">
             <a:extLst xmlns:a="http://schemas.openxmlformats.org/drawingml/2006/main">
               <a:ext uri="{FF2B5EF4-FFF2-40B4-BE49-F238E27FC236}">
-                <a16:creationId xmlns:a16="http://schemas.microsoft.com/office/drawing/2014/main" id="{482F237C-B817-4BCC-A423-FCCD0F316688}"/>
+                <a16:creationId xmlns:a16="http://schemas.microsoft.com/office/drawing/2014/main" id="{76C1C1CC-7BFA-4EEA-A0AE-B0047ABA4A4F}"/>
               </a:ext>
             </a:extLst>
           </p:cNvPr>
@@ -9077,7 +9077,7 @@
           <p:cNvPr id="2" name="">
             <a:extLst xmlns:a="http://schemas.openxmlformats.org/drawingml/2006/main">
               <a:ext uri="{FF2B5EF4-FFF2-40B4-BE49-F238E27FC236}">
-                <a16:creationId xmlns:a16="http://schemas.microsoft.com/office/drawing/2014/main" id="{524B94D5-89B1-4F0F-802E-40053E8311AF}"/>
+                <a16:creationId xmlns:a16="http://schemas.microsoft.com/office/drawing/2014/main" id="{115422E4-DEE6-4FDC-A2F2-9D76CA57E296}"/>
               </a:ext>
             </a:extLst>
           </p:cNvPr>
@@ -9139,7 +9139,7 @@
           <p:cNvPr id="3" name="">
             <a:extLst xmlns:a="http://schemas.openxmlformats.org/drawingml/2006/main">
               <a:ext uri="{FF2B5EF4-FFF2-40B4-BE49-F238E27FC236}">
-                <a16:creationId xmlns:a16="http://schemas.microsoft.com/office/drawing/2014/main" id="{CECD62DE-06D1-41AE-8FC8-35EA07BE2C53}"/>
+                <a16:creationId xmlns:a16="http://schemas.microsoft.com/office/drawing/2014/main" id="{35259E7B-D00A-48B0-9460-64A66049DB0D}"/>
               </a:ext>
             </a:extLst>
           </p:cNvPr>
@@ -9201,7 +9201,7 @@
           <p:cNvPr id="4" name="">
             <a:extLst xmlns:a="http://schemas.openxmlformats.org/drawingml/2006/main">
               <a:ext uri="{FF2B5EF4-FFF2-40B4-BE49-F238E27FC236}">
-                <a16:creationId xmlns:a16="http://schemas.microsoft.com/office/drawing/2014/main" id="{3E8C7914-C83D-480E-B742-91DA0BEC18DB}"/>
+                <a16:creationId xmlns:a16="http://schemas.microsoft.com/office/drawing/2014/main" id="{11391E0C-E0F2-4AFC-8AFB-E13B2D778D1B}"/>
               </a:ext>
             </a:extLst>
           </p:cNvPr>
@@ -9263,7 +9263,7 @@
           <p:cNvPr id="5" name="">
             <a:extLst xmlns:a="http://schemas.openxmlformats.org/drawingml/2006/main">
               <a:ext uri="{FF2B5EF4-FFF2-40B4-BE49-F238E27FC236}">
-                <a16:creationId xmlns:a16="http://schemas.microsoft.com/office/drawing/2014/main" id="{EEAC7BEF-1F1A-4F79-83DB-33BC671D98D9}"/>
+                <a16:creationId xmlns:a16="http://schemas.microsoft.com/office/drawing/2014/main" id="{DC5C26CA-BB94-4C8B-8388-5BAF716BE246}"/>
               </a:ext>
             </a:extLst>
           </p:cNvPr>
@@ -9325,7 +9325,7 @@
           <p:cNvPr id="6" name="">
             <a:extLst xmlns:a="http://schemas.openxmlformats.org/drawingml/2006/main">
               <a:ext uri="{FF2B5EF4-FFF2-40B4-BE49-F238E27FC236}">
-                <a16:creationId xmlns:a16="http://schemas.microsoft.com/office/drawing/2014/main" id="{F0FFE4BE-A708-4100-8502-0D793B05D21F}"/>
+                <a16:creationId xmlns:a16="http://schemas.microsoft.com/office/drawing/2014/main" id="{F48A4DFA-F0AF-4B1B-9F1D-1811A18A4BD8}"/>
               </a:ext>
             </a:extLst>
           </p:cNvPr>
@@ -9387,7 +9387,7 @@
           <p:cNvPr id="7" name="">
             <a:extLst xmlns:a="http://schemas.openxmlformats.org/drawingml/2006/main">
               <a:ext uri="{FF2B5EF4-FFF2-40B4-BE49-F238E27FC236}">
-                <a16:creationId xmlns:a16="http://schemas.microsoft.com/office/drawing/2014/main" id="{67C1B714-FCFE-4285-87B8-E690720FD0F2}"/>
+                <a16:creationId xmlns:a16="http://schemas.microsoft.com/office/drawing/2014/main" id="{17EC7C21-D48A-4E11-A7AB-95C8151DFED9}"/>
               </a:ext>
             </a:extLst>
           </p:cNvPr>
@@ -9420,7 +9420,7 @@
           <p:cNvPr id="8" name="">
             <a:extLst xmlns:a="http://schemas.openxmlformats.org/drawingml/2006/main">
               <a:ext uri="{FF2B5EF4-FFF2-40B4-BE49-F238E27FC236}">
-                <a16:creationId xmlns:a16="http://schemas.microsoft.com/office/drawing/2014/main" id="{BE00FEA9-06AD-4941-BC2C-E7575C56C471}"/>
+                <a16:creationId xmlns:a16="http://schemas.microsoft.com/office/drawing/2014/main" id="{2EDF37EC-C73A-4944-B929-11FDCEF7D2BE}"/>
               </a:ext>
             </a:extLst>
           </p:cNvPr>
@@ -9453,7 +9453,7 @@
           <p:cNvPr id="9" name="">
             <a:extLst xmlns:a="http://schemas.openxmlformats.org/drawingml/2006/main">
               <a:ext uri="{FF2B5EF4-FFF2-40B4-BE49-F238E27FC236}">
-                <a16:creationId xmlns:a16="http://schemas.microsoft.com/office/drawing/2014/main" id="{FDC9477C-C0E2-4087-98CB-D67969E753BF}"/>
+                <a16:creationId xmlns:a16="http://schemas.microsoft.com/office/drawing/2014/main" id="{6DCB434A-959A-4CE0-BBCE-9848DF938007}"/>
               </a:ext>
             </a:extLst>
           </p:cNvPr>
@@ -9542,7 +9542,7 @@
           <p:cNvPr id="10" name="">
             <a:extLst xmlns:a="http://schemas.openxmlformats.org/drawingml/2006/main">
               <a:ext uri="{FF2B5EF4-FFF2-40B4-BE49-F238E27FC236}">
-                <a16:creationId xmlns:a16="http://schemas.microsoft.com/office/drawing/2014/main" id="{D8C67010-2AB6-42A2-8CB1-8C64DD6CF9CB}"/>
+                <a16:creationId xmlns:a16="http://schemas.microsoft.com/office/drawing/2014/main" id="{8536AC55-DDCE-4BED-A342-B41B5594F723}"/>
               </a:ext>
             </a:extLst>
           </p:cNvPr>
@@ -9604,7 +9604,7 @@
           <p:cNvPr id="11" name="">
             <a:extLst xmlns:a="http://schemas.openxmlformats.org/drawingml/2006/main">
               <a:ext uri="{FF2B5EF4-FFF2-40B4-BE49-F238E27FC236}">
-                <a16:creationId xmlns:a16="http://schemas.microsoft.com/office/drawing/2014/main" id="{5CE2E676-741D-4320-B148-20194A8E965F}"/>
+                <a16:creationId xmlns:a16="http://schemas.microsoft.com/office/drawing/2014/main" id="{357AFAB1-E438-4F27-91E4-6F1E08C497A3}"/>
               </a:ext>
             </a:extLst>
           </p:cNvPr>
@@ -9666,7 +9666,7 @@
           <p:cNvPr id="12" name="">
             <a:extLst xmlns:a="http://schemas.openxmlformats.org/drawingml/2006/main">
               <a:ext uri="{FF2B5EF4-FFF2-40B4-BE49-F238E27FC236}">
-                <a16:creationId xmlns:a16="http://schemas.microsoft.com/office/drawing/2014/main" id="{633D877E-6822-4EAA-B5DD-50CDC89FFC4D}"/>
+                <a16:creationId xmlns:a16="http://schemas.microsoft.com/office/drawing/2014/main" id="{7C47DB69-ABFF-4247-906B-5A18343FF59F}"/>
               </a:ext>
             </a:extLst>
           </p:cNvPr>
@@ -9706,7 +9706,7 @@
           <p:cNvPr id="13" name="">
             <a:extLst xmlns:a="http://schemas.openxmlformats.org/drawingml/2006/main">
               <a:ext uri="{FF2B5EF4-FFF2-40B4-BE49-F238E27FC236}">
-                <a16:creationId xmlns:a16="http://schemas.microsoft.com/office/drawing/2014/main" id="{B51F03F7-1363-4124-A57D-7CF18169FF98}"/>
+                <a16:creationId xmlns:a16="http://schemas.microsoft.com/office/drawing/2014/main" id="{9716ABEE-FDEC-4E93-A13F-3EFE374FD3C0}"/>
               </a:ext>
             </a:extLst>
           </p:cNvPr>
@@ -9768,7 +9768,7 @@
           <p:cNvPr id="14" name="">
             <a:extLst xmlns:a="http://schemas.openxmlformats.org/drawingml/2006/main">
               <a:ext uri="{FF2B5EF4-FFF2-40B4-BE49-F238E27FC236}">
-                <a16:creationId xmlns:a16="http://schemas.microsoft.com/office/drawing/2014/main" id="{79470417-9D2F-4AC5-82CD-2053870AD727}"/>
+                <a16:creationId xmlns:a16="http://schemas.microsoft.com/office/drawing/2014/main" id="{871BD7A9-7B85-496E-8024-D1237CDC3940}"/>
               </a:ext>
             </a:extLst>
           </p:cNvPr>
@@ -9830,7 +9830,7 @@
           <p:cNvPr id="15" name="">
             <a:extLst xmlns:a="http://schemas.openxmlformats.org/drawingml/2006/main">
               <a:ext uri="{FF2B5EF4-FFF2-40B4-BE49-F238E27FC236}">
-                <a16:creationId xmlns:a16="http://schemas.microsoft.com/office/drawing/2014/main" id="{F55A320D-4364-48A5-8F2B-B0237CC7901E}"/>
+                <a16:creationId xmlns:a16="http://schemas.microsoft.com/office/drawing/2014/main" id="{CFD876E0-22A6-4A72-91A6-826EB0730B18}"/>
               </a:ext>
             </a:extLst>
           </p:cNvPr>
@@ -9892,7 +9892,7 @@
           <p:cNvPr id="16" name="">
             <a:extLst xmlns:a="http://schemas.openxmlformats.org/drawingml/2006/main">
               <a:ext uri="{FF2B5EF4-FFF2-40B4-BE49-F238E27FC236}">
-                <a16:creationId xmlns:a16="http://schemas.microsoft.com/office/drawing/2014/main" id="{6DDFB7FA-B028-4CE5-92F0-E42F784B65B2}"/>
+                <a16:creationId xmlns:a16="http://schemas.microsoft.com/office/drawing/2014/main" id="{DE37AF12-4DE3-48FF-94A9-BDA1DFCFC3C5}"/>
               </a:ext>
             </a:extLst>
           </p:cNvPr>
@@ -9925,7 +9925,7 @@
           <p:cNvPr id="17" name="">
             <a:extLst xmlns:a="http://schemas.openxmlformats.org/drawingml/2006/main">
               <a:ext uri="{FF2B5EF4-FFF2-40B4-BE49-F238E27FC236}">
-                <a16:creationId xmlns:a16="http://schemas.microsoft.com/office/drawing/2014/main" id="{9C4D76A2-9C5C-4C9D-8885-AD4677B55393}"/>
+                <a16:creationId xmlns:a16="http://schemas.microsoft.com/office/drawing/2014/main" id="{F1825867-ECFB-466B-9E13-D22A4F5AB57D}"/>
               </a:ext>
             </a:extLst>
           </p:cNvPr>
@@ -9958,7 +9958,7 @@
           <p:cNvPr id="18" name="">
             <a:extLst xmlns:a="http://schemas.openxmlformats.org/drawingml/2006/main">
               <a:ext uri="{FF2B5EF4-FFF2-40B4-BE49-F238E27FC236}">
-                <a16:creationId xmlns:a16="http://schemas.microsoft.com/office/drawing/2014/main" id="{CBE512BE-187B-4467-A878-8BA1ED2D7A59}"/>
+                <a16:creationId xmlns:a16="http://schemas.microsoft.com/office/drawing/2014/main" id="{1FE2E397-7761-4DB1-B351-1F914741B883}"/>
               </a:ext>
             </a:extLst>
           </p:cNvPr>
@@ -10047,7 +10047,7 @@
           <p:cNvPr id="19" name="">
             <a:extLst xmlns:a="http://schemas.openxmlformats.org/drawingml/2006/main">
               <a:ext uri="{FF2B5EF4-FFF2-40B4-BE49-F238E27FC236}">
-                <a16:creationId xmlns:a16="http://schemas.microsoft.com/office/drawing/2014/main" id="{92203858-1A97-451D-9F8B-01C9F5F03FB7}"/>
+                <a16:creationId xmlns:a16="http://schemas.microsoft.com/office/drawing/2014/main" id="{0C5832C2-D45B-428B-B17A-C230A0303E2D}"/>
               </a:ext>
             </a:extLst>
           </p:cNvPr>
@@ -10109,7 +10109,7 @@
           <p:cNvPr id="20" name="">
             <a:extLst xmlns:a="http://schemas.openxmlformats.org/drawingml/2006/main">
               <a:ext uri="{FF2B5EF4-FFF2-40B4-BE49-F238E27FC236}">
-                <a16:creationId xmlns:a16="http://schemas.microsoft.com/office/drawing/2014/main" id="{8A9B0BC9-32DE-4ED3-AB92-1582EB440672}"/>
+                <a16:creationId xmlns:a16="http://schemas.microsoft.com/office/drawing/2014/main" id="{97D06977-3DEB-4454-A6D9-900BF4F69BF7}"/>
               </a:ext>
             </a:extLst>
           </p:cNvPr>
@@ -10171,7 +10171,7 @@
           <p:cNvPr id="21" name="">
             <a:extLst xmlns:a="http://schemas.openxmlformats.org/drawingml/2006/main">
               <a:ext uri="{FF2B5EF4-FFF2-40B4-BE49-F238E27FC236}">
-                <a16:creationId xmlns:a16="http://schemas.microsoft.com/office/drawing/2014/main" id="{3CA20EBD-B711-400C-9338-9BB13214FACF}"/>
+                <a16:creationId xmlns:a16="http://schemas.microsoft.com/office/drawing/2014/main" id="{2C68B3F2-E223-4580-951F-5489F0DDD7C3}"/>
               </a:ext>
             </a:extLst>
           </p:cNvPr>
@@ -10233,7 +10233,7 @@
           <p:cNvPr id="22" name="">
             <a:extLst xmlns:a="http://schemas.openxmlformats.org/drawingml/2006/main">
               <a:ext uri="{FF2B5EF4-FFF2-40B4-BE49-F238E27FC236}">
-                <a16:creationId xmlns:a16="http://schemas.microsoft.com/office/drawing/2014/main" id="{F0DC54C2-7A45-4346-A446-13CC66E1B9A1}"/>
+                <a16:creationId xmlns:a16="http://schemas.microsoft.com/office/drawing/2014/main" id="{F83A3A25-0EE1-4976-818E-4F1A6533C55F}"/>
               </a:ext>
             </a:extLst>
           </p:cNvPr>
@@ -10273,7 +10273,7 @@
           <p:cNvPr id="23" name="">
             <a:extLst xmlns:a="http://schemas.openxmlformats.org/drawingml/2006/main">
               <a:ext uri="{FF2B5EF4-FFF2-40B4-BE49-F238E27FC236}">
-                <a16:creationId xmlns:a16="http://schemas.microsoft.com/office/drawing/2014/main" id="{53B9C661-DD52-4E1B-A3FD-E0B48C9C2E51}"/>
+                <a16:creationId xmlns:a16="http://schemas.microsoft.com/office/drawing/2014/main" id="{57AD865B-F7C4-494B-BB31-909582ADCAF8}"/>
               </a:ext>
             </a:extLst>
           </p:cNvPr>
@@ -10335,7 +10335,7 @@
           <p:cNvPr id="24" name="">
             <a:extLst xmlns:a="http://schemas.openxmlformats.org/drawingml/2006/main">
               <a:ext uri="{FF2B5EF4-FFF2-40B4-BE49-F238E27FC236}">
-                <a16:creationId xmlns:a16="http://schemas.microsoft.com/office/drawing/2014/main" id="{EC8CC2DD-6400-4092-9519-3E170C909F21}"/>
+                <a16:creationId xmlns:a16="http://schemas.microsoft.com/office/drawing/2014/main" id="{36975459-8D46-4877-96DA-5DDD6E921A93}"/>
               </a:ext>
             </a:extLst>
           </p:cNvPr>
@@ -10397,7 +10397,7 @@
           <p:cNvPr id="25" name="">
             <a:extLst xmlns:a="http://schemas.openxmlformats.org/drawingml/2006/main">
               <a:ext uri="{FF2B5EF4-FFF2-40B4-BE49-F238E27FC236}">
-                <a16:creationId xmlns:a16="http://schemas.microsoft.com/office/drawing/2014/main" id="{066BBD68-919A-42E6-BC9C-51F4D95DE3CC}"/>
+                <a16:creationId xmlns:a16="http://schemas.microsoft.com/office/drawing/2014/main" id="{636EB2FB-5893-4A02-A75A-2F4E41FB978B}"/>
               </a:ext>
             </a:extLst>
           </p:cNvPr>
@@ -10430,7 +10430,7 @@
           <p:cNvPr id="26" name="">
             <a:extLst xmlns:a="http://schemas.openxmlformats.org/drawingml/2006/main">
               <a:ext uri="{FF2B5EF4-FFF2-40B4-BE49-F238E27FC236}">
-                <a16:creationId xmlns:a16="http://schemas.microsoft.com/office/drawing/2014/main" id="{A776754E-8906-44A3-97A5-977BAFE3424F}"/>
+                <a16:creationId xmlns:a16="http://schemas.microsoft.com/office/drawing/2014/main" id="{84116665-597D-404D-88FD-0D10F659214F}"/>
               </a:ext>
             </a:extLst>
           </p:cNvPr>
@@ -10463,7 +10463,7 @@
           <p:cNvPr id="27" name="">
             <a:extLst xmlns:a="http://schemas.openxmlformats.org/drawingml/2006/main">
               <a:ext uri="{FF2B5EF4-FFF2-40B4-BE49-F238E27FC236}">
-                <a16:creationId xmlns:a16="http://schemas.microsoft.com/office/drawing/2014/main" id="{52980332-3895-4C31-B109-74100EEAF152}"/>
+                <a16:creationId xmlns:a16="http://schemas.microsoft.com/office/drawing/2014/main" id="{95FA90EF-0133-4FCF-B9AA-39DA032E25F8}"/>
               </a:ext>
             </a:extLst>
           </p:cNvPr>
@@ -10552,7 +10552,7 @@
           <p:cNvPr id="28" name="">
             <a:extLst xmlns:a="http://schemas.openxmlformats.org/drawingml/2006/main">
               <a:ext uri="{FF2B5EF4-FFF2-40B4-BE49-F238E27FC236}">
-                <a16:creationId xmlns:a16="http://schemas.microsoft.com/office/drawing/2014/main" id="{C164A6A4-7388-40F3-A406-0253123AF0F2}"/>
+                <a16:creationId xmlns:a16="http://schemas.microsoft.com/office/drawing/2014/main" id="{28B57036-22F1-429D-B8BE-26ECF2ED6C24}"/>
               </a:ext>
             </a:extLst>
           </p:cNvPr>
@@ -10614,7 +10614,7 @@
           <p:cNvPr id="29" name="">
             <a:extLst xmlns:a="http://schemas.openxmlformats.org/drawingml/2006/main">
               <a:ext uri="{FF2B5EF4-FFF2-40B4-BE49-F238E27FC236}">
-                <a16:creationId xmlns:a16="http://schemas.microsoft.com/office/drawing/2014/main" id="{B007A2BE-4629-4631-8032-3D25115C491F}"/>
+                <a16:creationId xmlns:a16="http://schemas.microsoft.com/office/drawing/2014/main" id="{29043680-D1F9-4B4C-82ED-CE5DEFB58C04}"/>
               </a:ext>
             </a:extLst>
           </p:cNvPr>
@@ -10654,7 +10654,7 @@
           <p:cNvPr id="30" name="">
             <a:extLst xmlns:a="http://schemas.openxmlformats.org/drawingml/2006/main">
               <a:ext uri="{FF2B5EF4-FFF2-40B4-BE49-F238E27FC236}">
-                <a16:creationId xmlns:a16="http://schemas.microsoft.com/office/drawing/2014/main" id="{9328BE5D-50B4-4581-98B2-AB804AB85F9C}"/>
+                <a16:creationId xmlns:a16="http://schemas.microsoft.com/office/drawing/2014/main" id="{E211D7A6-675D-4492-BF29-6FE6BF6EAA54}"/>
               </a:ext>
             </a:extLst>
           </p:cNvPr>
@@ -10716,7 +10716,7 @@
           <p:cNvPr id="31" name="">
             <a:extLst xmlns:a="http://schemas.openxmlformats.org/drawingml/2006/main">
               <a:ext uri="{FF2B5EF4-FFF2-40B4-BE49-F238E27FC236}">
-                <a16:creationId xmlns:a16="http://schemas.microsoft.com/office/drawing/2014/main" id="{CF07FC2B-885C-4424-A11A-D9ACB92F1B04}"/>
+                <a16:creationId xmlns:a16="http://schemas.microsoft.com/office/drawing/2014/main" id="{6D892883-E0E7-4AEE-B577-11378C2B9E3F}"/>
               </a:ext>
             </a:extLst>
           </p:cNvPr>
@@ -10778,7 +10778,7 @@
           <p:cNvPr id="32" name="">
             <a:extLst xmlns:a="http://schemas.openxmlformats.org/drawingml/2006/main">
               <a:ext uri="{FF2B5EF4-FFF2-40B4-BE49-F238E27FC236}">
-                <a16:creationId xmlns:a16="http://schemas.microsoft.com/office/drawing/2014/main" id="{FE27AB8E-BEB4-4386-AD60-A3FC97863ED2}"/>
+                <a16:creationId xmlns:a16="http://schemas.microsoft.com/office/drawing/2014/main" id="{4C191CE9-81C7-4CA2-A56E-83179D734D15}"/>
               </a:ext>
             </a:extLst>
           </p:cNvPr>
@@ -10840,7 +10840,7 @@
           <p:cNvPr id="33" name="">
             <a:extLst xmlns:a="http://schemas.openxmlformats.org/drawingml/2006/main">
               <a:ext uri="{FF2B5EF4-FFF2-40B4-BE49-F238E27FC236}">
-                <a16:creationId xmlns:a16="http://schemas.microsoft.com/office/drawing/2014/main" id="{C85A3845-827F-4E20-9C9B-DD2F0E1F413C}"/>
+                <a16:creationId xmlns:a16="http://schemas.microsoft.com/office/drawing/2014/main" id="{E2EF6DDD-7C68-469C-8EEE-A910638F175E}"/>
               </a:ext>
             </a:extLst>
           </p:cNvPr>
@@ -10880,7 +10880,7 @@
           <p:cNvPr id="34" name="">
             <a:extLst xmlns:a="http://schemas.openxmlformats.org/drawingml/2006/main">
               <a:ext uri="{FF2B5EF4-FFF2-40B4-BE49-F238E27FC236}">
-                <a16:creationId xmlns:a16="http://schemas.microsoft.com/office/drawing/2014/main" id="{10D63252-14E7-4021-9E9E-2A18DDC3F236}"/>
+                <a16:creationId xmlns:a16="http://schemas.microsoft.com/office/drawing/2014/main" id="{650CDB0D-A738-4FFA-9A6D-3A5882131346}"/>
               </a:ext>
             </a:extLst>
           </p:cNvPr>
@@ -10940,7 +10940,7 @@
     </p:spTree>
     <p:extLst>
       <p:ext uri="{BB962C8B-B14F-4D97-AF65-F5344CB8AC3E}">
-        <p14:creationId xmlns:p14="http://schemas.microsoft.com/office/powerpoint/2010/main" val="1686355887"/>
+        <p14:creationId xmlns:p14="http://schemas.microsoft.com/office/powerpoint/2010/main" val="1023891870"/>
       </p:ext>
     </p:extLst>
   </p:cSld>
@@ -10974,7 +10974,7 @@
           <p:cNvPr id="10" name="">
             <a:extLst xmlns:a="http://schemas.openxmlformats.org/drawingml/2006/main">
               <a:ext uri="{FF2B5EF4-FFF2-40B4-BE49-F238E27FC236}">
-                <a16:creationId xmlns:a16="http://schemas.microsoft.com/office/drawing/2014/main" id="{162AA00B-38EF-4433-BE32-648F597FCEA1}"/>
+                <a16:creationId xmlns:a16="http://schemas.microsoft.com/office/drawing/2014/main" id="{0F3BD44F-3A94-4CD7-AB6D-30530575BA03}"/>
               </a:ext>
             </a:extLst>
           </p:cNvPr>
@@ -11005,7 +11005,7 @@
           <p:cNvPr id="2" name="">
             <a:extLst xmlns:a="http://schemas.openxmlformats.org/drawingml/2006/main">
               <a:ext uri="{FF2B5EF4-FFF2-40B4-BE49-F238E27FC236}">
-                <a16:creationId xmlns:a16="http://schemas.microsoft.com/office/drawing/2014/main" id="{253E07B2-B133-4864-8D99-C12BE108B0D6}"/>
+                <a16:creationId xmlns:a16="http://schemas.microsoft.com/office/drawing/2014/main" id="{34FC3A6D-C1A6-4DD5-AF36-6AD3CF9FCD62}"/>
               </a:ext>
             </a:extLst>
           </p:cNvPr>
@@ -11067,7 +11067,7 @@
           <p:cNvPr id="3" name="">
             <a:extLst xmlns:a="http://schemas.openxmlformats.org/drawingml/2006/main">
               <a:ext uri="{FF2B5EF4-FFF2-40B4-BE49-F238E27FC236}">
-                <a16:creationId xmlns:a16="http://schemas.microsoft.com/office/drawing/2014/main" id="{2A253155-8B19-4B2E-AA7F-A70CFFB18BA6}"/>
+                <a16:creationId xmlns:a16="http://schemas.microsoft.com/office/drawing/2014/main" id="{3954259D-8F89-4872-BC7D-C24843E642DB}"/>
               </a:ext>
             </a:extLst>
           </p:cNvPr>
@@ -11129,7 +11129,7 @@
           <p:cNvPr id="4" name="">
             <a:extLst xmlns:a="http://schemas.openxmlformats.org/drawingml/2006/main">
               <a:ext uri="{FF2B5EF4-FFF2-40B4-BE49-F238E27FC236}">
-                <a16:creationId xmlns:a16="http://schemas.microsoft.com/office/drawing/2014/main" id="{E789D62D-7601-475F-8EC5-45E38FA403D1}"/>
+                <a16:creationId xmlns:a16="http://schemas.microsoft.com/office/drawing/2014/main" id="{9AE33C56-76A8-47EB-8637-3663C023DD16}"/>
               </a:ext>
             </a:extLst>
           </p:cNvPr>
@@ -11191,7 +11191,7 @@
           <p:cNvPr id="5" name="">
             <a:extLst xmlns:a="http://schemas.openxmlformats.org/drawingml/2006/main">
               <a:ext uri="{FF2B5EF4-FFF2-40B4-BE49-F238E27FC236}">
-                <a16:creationId xmlns:a16="http://schemas.microsoft.com/office/drawing/2014/main" id="{39C2A150-4535-46BD-920F-84BE6118762E}"/>
+                <a16:creationId xmlns:a16="http://schemas.microsoft.com/office/drawing/2014/main" id="{4CA47D90-9CE0-44B5-A6CB-0319E83AECF3}"/>
               </a:ext>
             </a:extLst>
           </p:cNvPr>
@@ -11253,7 +11253,7 @@
           <p:cNvPr id="6" name="">
             <a:extLst xmlns:a="http://schemas.openxmlformats.org/drawingml/2006/main">
               <a:ext uri="{FF2B5EF4-FFF2-40B4-BE49-F238E27FC236}">
-                <a16:creationId xmlns:a16="http://schemas.microsoft.com/office/drawing/2014/main" id="{7D7DAB8F-5AF7-4E80-908C-B1F531E4B6F3}"/>
+                <a16:creationId xmlns:a16="http://schemas.microsoft.com/office/drawing/2014/main" id="{56803B94-86FE-4114-916D-B7BF8074E6C3}"/>
               </a:ext>
             </a:extLst>
           </p:cNvPr>
@@ -11315,7 +11315,7 @@
           <p:cNvPr id="7" name="">
             <a:extLst xmlns:a="http://schemas.openxmlformats.org/drawingml/2006/main">
               <a:ext uri="{FF2B5EF4-FFF2-40B4-BE49-F238E27FC236}">
-                <a16:creationId xmlns:a16="http://schemas.microsoft.com/office/drawing/2014/main" id="{59CE192B-8C82-46E0-B820-8BD1F7680539}"/>
+                <a16:creationId xmlns:a16="http://schemas.microsoft.com/office/drawing/2014/main" id="{323864C4-371A-4A06-952E-EE83B7AEBF50}"/>
               </a:ext>
             </a:extLst>
           </p:cNvPr>
@@ -11350,7 +11350,7 @@
           <p:cNvPr id="8" name="">
             <a:extLst xmlns:a="http://schemas.openxmlformats.org/drawingml/2006/main">
               <a:ext uri="{FF2B5EF4-FFF2-40B4-BE49-F238E27FC236}">
-                <a16:creationId xmlns:a16="http://schemas.microsoft.com/office/drawing/2014/main" id="{B07755D6-A7A1-4792-951C-E9B272C5E15C}"/>
+                <a16:creationId xmlns:a16="http://schemas.microsoft.com/office/drawing/2014/main" id="{EC931CFE-2732-42A4-B55A-1AF2C32EAC2D}"/>
               </a:ext>
             </a:extLst>
           </p:cNvPr>
@@ -11783,7 +11783,7 @@
           <p:cNvPr id="9" name="">
             <a:extLst xmlns:a="http://schemas.openxmlformats.org/drawingml/2006/main">
               <a:ext uri="{FF2B5EF4-FFF2-40B4-BE49-F238E27FC236}">
-                <a16:creationId xmlns:a16="http://schemas.microsoft.com/office/drawing/2014/main" id="{0BAEFBA6-4473-4EEA-809B-791F79A886EE}"/>
+                <a16:creationId xmlns:a16="http://schemas.microsoft.com/office/drawing/2014/main" id="{87F4F8F3-C581-4853-AFB2-79EE7FA220B8}"/>
               </a:ext>
             </a:extLst>
           </p:cNvPr>
@@ -11843,7 +11843,7 @@
     </p:spTree>
     <p:extLst>
       <p:ext uri="{BB962C8B-B14F-4D97-AF65-F5344CB8AC3E}">
-        <p14:creationId xmlns:p14="http://schemas.microsoft.com/office/powerpoint/2010/main" val="898680187"/>
+        <p14:creationId xmlns:p14="http://schemas.microsoft.com/office/powerpoint/2010/main" val="228773446"/>
       </p:ext>
     </p:extLst>
   </p:cSld>
@@ -11877,7 +11877,7 @@
           <p:cNvPr id="33" name="">
             <a:extLst xmlns:a="http://schemas.openxmlformats.org/drawingml/2006/main">
               <a:ext uri="{FF2B5EF4-FFF2-40B4-BE49-F238E27FC236}">
-                <a16:creationId xmlns:a16="http://schemas.microsoft.com/office/drawing/2014/main" id="{11A22504-60AD-483D-86CE-3DA59CDED3BB}"/>
+                <a16:creationId xmlns:a16="http://schemas.microsoft.com/office/drawing/2014/main" id="{F91044F1-7318-4B64-8193-A6D4D69FF272}"/>
               </a:ext>
             </a:extLst>
           </p:cNvPr>
@@ -11908,7 +11908,7 @@
           <p:cNvPr id="2" name="">
             <a:extLst xmlns:a="http://schemas.openxmlformats.org/drawingml/2006/main">
               <a:ext uri="{FF2B5EF4-FFF2-40B4-BE49-F238E27FC236}">
-                <a16:creationId xmlns:a16="http://schemas.microsoft.com/office/drawing/2014/main" id="{1ED84795-E700-49BE-8C55-48EE79B90A84}"/>
+                <a16:creationId xmlns:a16="http://schemas.microsoft.com/office/drawing/2014/main" id="{889CBB1E-3972-44C1-B3B4-013305995D20}"/>
               </a:ext>
             </a:extLst>
           </p:cNvPr>
@@ -11970,7 +11970,7 @@
           <p:cNvPr id="3" name="">
             <a:extLst xmlns:a="http://schemas.openxmlformats.org/drawingml/2006/main">
               <a:ext uri="{FF2B5EF4-FFF2-40B4-BE49-F238E27FC236}">
-                <a16:creationId xmlns:a16="http://schemas.microsoft.com/office/drawing/2014/main" id="{BB008F96-DC09-4ACC-8533-2E8FA9FFE925}"/>
+                <a16:creationId xmlns:a16="http://schemas.microsoft.com/office/drawing/2014/main" id="{6204D70D-9683-4EFD-9584-6DBF1177A236}"/>
               </a:ext>
             </a:extLst>
           </p:cNvPr>
@@ -12032,7 +12032,7 @@
           <p:cNvPr id="4" name="">
             <a:extLst xmlns:a="http://schemas.openxmlformats.org/drawingml/2006/main">
               <a:ext uri="{FF2B5EF4-FFF2-40B4-BE49-F238E27FC236}">
-                <a16:creationId xmlns:a16="http://schemas.microsoft.com/office/drawing/2014/main" id="{EA0793DC-0A70-4F65-8C3F-6E520F870896}"/>
+                <a16:creationId xmlns:a16="http://schemas.microsoft.com/office/drawing/2014/main" id="{E6793BFE-822D-4166-8C95-4C11B7FCFA2D}"/>
               </a:ext>
             </a:extLst>
           </p:cNvPr>
@@ -12094,7 +12094,7 @@
           <p:cNvPr id="5" name="">
             <a:extLst xmlns:a="http://schemas.openxmlformats.org/drawingml/2006/main">
               <a:ext uri="{FF2B5EF4-FFF2-40B4-BE49-F238E27FC236}">
-                <a16:creationId xmlns:a16="http://schemas.microsoft.com/office/drawing/2014/main" id="{AEEEC0BA-4905-4F47-A0A5-440623670ED3}"/>
+                <a16:creationId xmlns:a16="http://schemas.microsoft.com/office/drawing/2014/main" id="{81D68134-BD2A-43F2-8E14-AED5903E528E}"/>
               </a:ext>
             </a:extLst>
           </p:cNvPr>
@@ -12156,7 +12156,7 @@
           <p:cNvPr id="6" name="">
             <a:extLst xmlns:a="http://schemas.openxmlformats.org/drawingml/2006/main">
               <a:ext uri="{FF2B5EF4-FFF2-40B4-BE49-F238E27FC236}">
-                <a16:creationId xmlns:a16="http://schemas.microsoft.com/office/drawing/2014/main" id="{F83B2FB9-A6C2-4B39-88C6-7E599233E131}"/>
+                <a16:creationId xmlns:a16="http://schemas.microsoft.com/office/drawing/2014/main" id="{026DC14E-17B7-4A19-952D-48DF73F9BFEC}"/>
               </a:ext>
             </a:extLst>
           </p:cNvPr>
@@ -12218,7 +12218,7 @@
           <p:cNvPr id="7" name="">
             <a:extLst xmlns:a="http://schemas.openxmlformats.org/drawingml/2006/main">
               <a:ext uri="{FF2B5EF4-FFF2-40B4-BE49-F238E27FC236}">
-                <a16:creationId xmlns:a16="http://schemas.microsoft.com/office/drawing/2014/main" id="{69044AD5-2BC6-4BB5-B29E-9CC5426B82CA}"/>
+                <a16:creationId xmlns:a16="http://schemas.microsoft.com/office/drawing/2014/main" id="{3334ABD9-989C-44D7-9DEF-DA46CC9F9B43}"/>
               </a:ext>
             </a:extLst>
           </p:cNvPr>
@@ -12251,7 +12251,7 @@
           <p:cNvPr id="8" name="">
             <a:extLst xmlns:a="http://schemas.openxmlformats.org/drawingml/2006/main">
               <a:ext uri="{FF2B5EF4-FFF2-40B4-BE49-F238E27FC236}">
-                <a16:creationId xmlns:a16="http://schemas.microsoft.com/office/drawing/2014/main" id="{240537A4-9245-4CE8-B8CF-9556882E6ED9}"/>
+                <a16:creationId xmlns:a16="http://schemas.microsoft.com/office/drawing/2014/main" id="{6FCEEC46-94E3-44AE-8616-15172C873B55}"/>
               </a:ext>
             </a:extLst>
           </p:cNvPr>
@@ -12284,7 +12284,7 @@
           <p:cNvPr id="9" name="">
             <a:extLst xmlns:a="http://schemas.openxmlformats.org/drawingml/2006/main">
               <a:ext uri="{FF2B5EF4-FFF2-40B4-BE49-F238E27FC236}">
-                <a16:creationId xmlns:a16="http://schemas.microsoft.com/office/drawing/2014/main" id="{0A89D2DB-F343-4641-AF91-52F52053F1D3}"/>
+                <a16:creationId xmlns:a16="http://schemas.microsoft.com/office/drawing/2014/main" id="{05D71A0F-6B86-4022-BD04-85BBD4E54BE5}"/>
               </a:ext>
             </a:extLst>
           </p:cNvPr>
@@ -12346,7 +12346,7 @@
           <p:cNvPr id="10" name="">
             <a:extLst xmlns:a="http://schemas.openxmlformats.org/drawingml/2006/main">
               <a:ext uri="{FF2B5EF4-FFF2-40B4-BE49-F238E27FC236}">
-                <a16:creationId xmlns:a16="http://schemas.microsoft.com/office/drawing/2014/main" id="{553265A5-3003-4F80-9C23-F98F14F39B5B}"/>
+                <a16:creationId xmlns:a16="http://schemas.microsoft.com/office/drawing/2014/main" id="{08EC6137-0E3E-41F7-8601-814C8399620A}"/>
               </a:ext>
             </a:extLst>
           </p:cNvPr>
@@ -12408,7 +12408,7 @@
           <p:cNvPr id="11" name="">
             <a:extLst xmlns:a="http://schemas.openxmlformats.org/drawingml/2006/main">
               <a:ext uri="{FF2B5EF4-FFF2-40B4-BE49-F238E27FC236}">
-                <a16:creationId xmlns:a16="http://schemas.microsoft.com/office/drawing/2014/main" id="{FB34D55A-7FFD-4478-9A34-C5E9D1FEFD59}"/>
+                <a16:creationId xmlns:a16="http://schemas.microsoft.com/office/drawing/2014/main" id="{F6EA1AF5-FEDD-4DCC-8DCA-F750DCBCD585}"/>
               </a:ext>
             </a:extLst>
           </p:cNvPr>
@@ -12470,7 +12470,7 @@
           <p:cNvPr id="12" name="">
             <a:extLst xmlns:a="http://schemas.openxmlformats.org/drawingml/2006/main">
               <a:ext uri="{FF2B5EF4-FFF2-40B4-BE49-F238E27FC236}">
-                <a16:creationId xmlns:a16="http://schemas.microsoft.com/office/drawing/2014/main" id="{E943DC79-99BC-4F7A-9AB1-0A09FA8DC354}"/>
+                <a16:creationId xmlns:a16="http://schemas.microsoft.com/office/drawing/2014/main" id="{5DA88A61-FEB8-48FA-BC37-09E3BDFB5D64}"/>
               </a:ext>
             </a:extLst>
           </p:cNvPr>
@@ -12510,7 +12510,7 @@
           <p:cNvPr id="13" name="">
             <a:extLst xmlns:a="http://schemas.openxmlformats.org/drawingml/2006/main">
               <a:ext uri="{FF2B5EF4-FFF2-40B4-BE49-F238E27FC236}">
-                <a16:creationId xmlns:a16="http://schemas.microsoft.com/office/drawing/2014/main" id="{8F17E369-86C2-49D8-9DFD-D3CE0DA8568B}"/>
+                <a16:creationId xmlns:a16="http://schemas.microsoft.com/office/drawing/2014/main" id="{7B02E3AB-F288-4884-A076-04585CF846EF}"/>
               </a:ext>
             </a:extLst>
           </p:cNvPr>
@@ -12572,7 +12572,7 @@
           <p:cNvPr id="14" name="">
             <a:extLst xmlns:a="http://schemas.openxmlformats.org/drawingml/2006/main">
               <a:ext uri="{FF2B5EF4-FFF2-40B4-BE49-F238E27FC236}">
-                <a16:creationId xmlns:a16="http://schemas.microsoft.com/office/drawing/2014/main" id="{F37ADF9E-CDA5-4376-8D5F-2CF0E7AF8DA3}"/>
+                <a16:creationId xmlns:a16="http://schemas.microsoft.com/office/drawing/2014/main" id="{B211B7E9-2600-408A-AFF3-CCF104A3CE97}"/>
               </a:ext>
             </a:extLst>
           </p:cNvPr>
@@ -12634,7 +12634,7 @@
           <p:cNvPr id="15" name="">
             <a:extLst xmlns:a="http://schemas.openxmlformats.org/drawingml/2006/main">
               <a:ext uri="{FF2B5EF4-FFF2-40B4-BE49-F238E27FC236}">
-                <a16:creationId xmlns:a16="http://schemas.microsoft.com/office/drawing/2014/main" id="{0FAD4CCB-E807-41ED-8AF6-12506D0270C4}"/>
+                <a16:creationId xmlns:a16="http://schemas.microsoft.com/office/drawing/2014/main" id="{175DD252-D09D-4D43-AD8F-9745AA7C1A1D}"/>
               </a:ext>
             </a:extLst>
           </p:cNvPr>
@@ -12667,7 +12667,7 @@
           <p:cNvPr id="16" name="">
             <a:extLst xmlns:a="http://schemas.openxmlformats.org/drawingml/2006/main">
               <a:ext uri="{FF2B5EF4-FFF2-40B4-BE49-F238E27FC236}">
-                <a16:creationId xmlns:a16="http://schemas.microsoft.com/office/drawing/2014/main" id="{62042D1D-3FC5-4DA9-B2D0-6F8CE20DF0F9}"/>
+                <a16:creationId xmlns:a16="http://schemas.microsoft.com/office/drawing/2014/main" id="{20E0851E-0463-4321-9C72-7BCEE5109CCF}"/>
               </a:ext>
             </a:extLst>
           </p:cNvPr>
@@ -12700,7 +12700,7 @@
           <p:cNvPr id="17" name="">
             <a:extLst xmlns:a="http://schemas.openxmlformats.org/drawingml/2006/main">
               <a:ext uri="{FF2B5EF4-FFF2-40B4-BE49-F238E27FC236}">
-                <a16:creationId xmlns:a16="http://schemas.microsoft.com/office/drawing/2014/main" id="{58C4E4FE-D6D6-4E35-BA6C-420E26496124}"/>
+                <a16:creationId xmlns:a16="http://schemas.microsoft.com/office/drawing/2014/main" id="{7C3A9779-EDC9-484D-8CDE-4CBE0F28EFC3}"/>
               </a:ext>
             </a:extLst>
           </p:cNvPr>
@@ -12762,7 +12762,7 @@
           <p:cNvPr id="18" name="">
             <a:extLst xmlns:a="http://schemas.openxmlformats.org/drawingml/2006/main">
               <a:ext uri="{FF2B5EF4-FFF2-40B4-BE49-F238E27FC236}">
-                <a16:creationId xmlns:a16="http://schemas.microsoft.com/office/drawing/2014/main" id="{3A5430DE-DFE7-49DD-9A9A-84A68DC6BE47}"/>
+                <a16:creationId xmlns:a16="http://schemas.microsoft.com/office/drawing/2014/main" id="{B5B789CC-4337-4C63-8EFC-675995DB2ABC}"/>
               </a:ext>
             </a:extLst>
           </p:cNvPr>
@@ -12824,7 +12824,7 @@
           <p:cNvPr id="19" name="">
             <a:extLst xmlns:a="http://schemas.openxmlformats.org/drawingml/2006/main">
               <a:ext uri="{FF2B5EF4-FFF2-40B4-BE49-F238E27FC236}">
-                <a16:creationId xmlns:a16="http://schemas.microsoft.com/office/drawing/2014/main" id="{AF87F13B-C002-483A-96CE-6264652C44DE}"/>
+                <a16:creationId xmlns:a16="http://schemas.microsoft.com/office/drawing/2014/main" id="{0D76A03B-03D3-474C-A6E8-F2C331CC639B}"/>
               </a:ext>
             </a:extLst>
           </p:cNvPr>
@@ -12864,7 +12864,7 @@
           <p:cNvPr id="20" name="">
             <a:extLst xmlns:a="http://schemas.openxmlformats.org/drawingml/2006/main">
               <a:ext uri="{FF2B5EF4-FFF2-40B4-BE49-F238E27FC236}">
-                <a16:creationId xmlns:a16="http://schemas.microsoft.com/office/drawing/2014/main" id="{BD656EA7-2E18-4ED3-B8A2-A527C4884285}"/>
+                <a16:creationId xmlns:a16="http://schemas.microsoft.com/office/drawing/2014/main" id="{2FCA47BF-88BD-489A-A4A7-DCAA809E1327}"/>
               </a:ext>
             </a:extLst>
           </p:cNvPr>
@@ -12926,7 +12926,7 @@
           <p:cNvPr id="21" name="">
             <a:extLst xmlns:a="http://schemas.openxmlformats.org/drawingml/2006/main">
               <a:ext uri="{FF2B5EF4-FFF2-40B4-BE49-F238E27FC236}">
-                <a16:creationId xmlns:a16="http://schemas.microsoft.com/office/drawing/2014/main" id="{2B6D8126-8EBB-47A6-8CA6-30C08A45F068}"/>
+                <a16:creationId xmlns:a16="http://schemas.microsoft.com/office/drawing/2014/main" id="{CE55F11C-3540-4CF0-BEC8-0B1EA6688DCB}"/>
               </a:ext>
             </a:extLst>
           </p:cNvPr>
@@ -12988,7 +12988,7 @@
           <p:cNvPr id="22" name="">
             <a:extLst xmlns:a="http://schemas.openxmlformats.org/drawingml/2006/main">
               <a:ext uri="{FF2B5EF4-FFF2-40B4-BE49-F238E27FC236}">
-                <a16:creationId xmlns:a16="http://schemas.microsoft.com/office/drawing/2014/main" id="{6F3592C7-6F3D-4A65-9522-8E1CEB955165}"/>
+                <a16:creationId xmlns:a16="http://schemas.microsoft.com/office/drawing/2014/main" id="{57E10E6C-DEF6-4862-AB21-AA767CB0770A}"/>
               </a:ext>
             </a:extLst>
           </p:cNvPr>
@@ -13028,7 +13028,7 @@
           <p:cNvPr id="23" name="">
             <a:extLst xmlns:a="http://schemas.openxmlformats.org/drawingml/2006/main">
               <a:ext uri="{FF2B5EF4-FFF2-40B4-BE49-F238E27FC236}">
-                <a16:creationId xmlns:a16="http://schemas.microsoft.com/office/drawing/2014/main" id="{BC853D40-DAC1-48A2-AAF8-FC82E1DDC578}"/>
+                <a16:creationId xmlns:a16="http://schemas.microsoft.com/office/drawing/2014/main" id="{C9D7D891-82E8-4CA3-BFFF-C6DA27896759}"/>
               </a:ext>
             </a:extLst>
           </p:cNvPr>
@@ -13090,7 +13090,7 @@
           <p:cNvPr id="24" name="">
             <a:extLst xmlns:a="http://schemas.openxmlformats.org/drawingml/2006/main">
               <a:ext uri="{FF2B5EF4-FFF2-40B4-BE49-F238E27FC236}">
-                <a16:creationId xmlns:a16="http://schemas.microsoft.com/office/drawing/2014/main" id="{C573EFE7-7102-4485-A6F5-723321A0878E}"/>
+                <a16:creationId xmlns:a16="http://schemas.microsoft.com/office/drawing/2014/main" id="{25A7187D-A6C0-4935-B250-6DD1A66128E0}"/>
               </a:ext>
             </a:extLst>
           </p:cNvPr>
@@ -13123,7 +13123,7 @@
           <p:cNvPr id="25" name="">
             <a:extLst xmlns:a="http://schemas.openxmlformats.org/drawingml/2006/main">
               <a:ext uri="{FF2B5EF4-FFF2-40B4-BE49-F238E27FC236}">
-                <a16:creationId xmlns:a16="http://schemas.microsoft.com/office/drawing/2014/main" id="{FA199C78-083D-4B68-94E4-B730CE0F52B4}"/>
+                <a16:creationId xmlns:a16="http://schemas.microsoft.com/office/drawing/2014/main" id="{69FEFEBA-18E7-476A-9823-A462C32A5107}"/>
               </a:ext>
             </a:extLst>
           </p:cNvPr>
@@ -13156,7 +13156,7 @@
           <p:cNvPr id="26" name="">
             <a:extLst xmlns:a="http://schemas.openxmlformats.org/drawingml/2006/main">
               <a:ext uri="{FF2B5EF4-FFF2-40B4-BE49-F238E27FC236}">
-                <a16:creationId xmlns:a16="http://schemas.microsoft.com/office/drawing/2014/main" id="{B60E4E07-02AB-49DD-B5A0-742D41684B5C}"/>
+                <a16:creationId xmlns:a16="http://schemas.microsoft.com/office/drawing/2014/main" id="{2FEC161C-E15B-4939-8A12-C3D12B4F4268}"/>
               </a:ext>
             </a:extLst>
           </p:cNvPr>
@@ -13218,7 +13218,7 @@
           <p:cNvPr id="27" name="">
             <a:extLst xmlns:a="http://schemas.openxmlformats.org/drawingml/2006/main">
               <a:ext uri="{FF2B5EF4-FFF2-40B4-BE49-F238E27FC236}">
-                <a16:creationId xmlns:a16="http://schemas.microsoft.com/office/drawing/2014/main" id="{7F0D6F73-15BF-4F3D-A428-AF2A66DD3CF9}"/>
+                <a16:creationId xmlns:a16="http://schemas.microsoft.com/office/drawing/2014/main" id="{2890C1D9-C506-4916-B196-F8052B6AD5FC}"/>
               </a:ext>
             </a:extLst>
           </p:cNvPr>
@@ -13280,7 +13280,7 @@
           <p:cNvPr id="28" name="">
             <a:extLst xmlns:a="http://schemas.openxmlformats.org/drawingml/2006/main">
               <a:ext uri="{FF2B5EF4-FFF2-40B4-BE49-F238E27FC236}">
-                <a16:creationId xmlns:a16="http://schemas.microsoft.com/office/drawing/2014/main" id="{8926F9A9-2E97-4313-815D-76B4440A4D31}"/>
+                <a16:creationId xmlns:a16="http://schemas.microsoft.com/office/drawing/2014/main" id="{14099C2A-5035-43A1-8B5D-39893262D962}"/>
               </a:ext>
             </a:extLst>
           </p:cNvPr>
@@ -13342,7 +13342,7 @@
           <p:cNvPr id="29" name="">
             <a:extLst xmlns:a="http://schemas.openxmlformats.org/drawingml/2006/main">
               <a:ext uri="{FF2B5EF4-FFF2-40B4-BE49-F238E27FC236}">
-                <a16:creationId xmlns:a16="http://schemas.microsoft.com/office/drawing/2014/main" id="{CAA209E6-8ECC-4359-9ACC-527A2C840B65}"/>
+                <a16:creationId xmlns:a16="http://schemas.microsoft.com/office/drawing/2014/main" id="{C2E3D620-231C-4BE9-B928-7CC888064A3E}"/>
               </a:ext>
             </a:extLst>
           </p:cNvPr>
@@ -13382,7 +13382,7 @@
           <p:cNvPr id="30" name="">
             <a:extLst xmlns:a="http://schemas.openxmlformats.org/drawingml/2006/main">
               <a:ext uri="{FF2B5EF4-FFF2-40B4-BE49-F238E27FC236}">
-                <a16:creationId xmlns:a16="http://schemas.microsoft.com/office/drawing/2014/main" id="{E78607C5-EB60-40E1-91B5-E2EAA4B51B47}"/>
+                <a16:creationId xmlns:a16="http://schemas.microsoft.com/office/drawing/2014/main" id="{158BE818-9CF0-4538-86FD-9F91F0FC0E5C}"/>
               </a:ext>
             </a:extLst>
           </p:cNvPr>
@@ -13444,7 +13444,7 @@
           <p:cNvPr id="31" name="">
             <a:extLst xmlns:a="http://schemas.openxmlformats.org/drawingml/2006/main">
               <a:ext uri="{FF2B5EF4-FFF2-40B4-BE49-F238E27FC236}">
-                <a16:creationId xmlns:a16="http://schemas.microsoft.com/office/drawing/2014/main" id="{29BB6D53-DC2E-42C6-8DEE-78762CE29F73}"/>
+                <a16:creationId xmlns:a16="http://schemas.microsoft.com/office/drawing/2014/main" id="{F11B92AF-2E55-40CE-87FC-B631162EEB91}"/>
               </a:ext>
             </a:extLst>
           </p:cNvPr>
@@ -13506,7 +13506,7 @@
           <p:cNvPr id="32" name="">
             <a:extLst xmlns:a="http://schemas.openxmlformats.org/drawingml/2006/main">
               <a:ext uri="{FF2B5EF4-FFF2-40B4-BE49-F238E27FC236}">
-                <a16:creationId xmlns:a16="http://schemas.microsoft.com/office/drawing/2014/main" id="{83ED543C-B035-4453-AEC1-78A2C3E2C2FC}"/>
+                <a16:creationId xmlns:a16="http://schemas.microsoft.com/office/drawing/2014/main" id="{C65525C2-7CF4-4B4B-8922-660E3BB7F81C}"/>
               </a:ext>
             </a:extLst>
           </p:cNvPr>
@@ -13566,7 +13566,7 @@
     </p:spTree>
     <p:extLst>
       <p:ext uri="{BB962C8B-B14F-4D97-AF65-F5344CB8AC3E}">
-        <p14:creationId xmlns:p14="http://schemas.microsoft.com/office/powerpoint/2010/main" val="412726827"/>
+        <p14:creationId xmlns:p14="http://schemas.microsoft.com/office/powerpoint/2010/main" val="1010599448"/>
       </p:ext>
     </p:extLst>
   </p:cSld>
@@ -13600,7 +13600,7 @@
           <p:cNvPr id="10" name="">
             <a:extLst xmlns:a="http://schemas.openxmlformats.org/drawingml/2006/main">
               <a:ext uri="{FF2B5EF4-FFF2-40B4-BE49-F238E27FC236}">
-                <a16:creationId xmlns:a16="http://schemas.microsoft.com/office/drawing/2014/main" id="{7EFFB849-95CD-46D5-B20E-5BB7DD69F7DC}"/>
+                <a16:creationId xmlns:a16="http://schemas.microsoft.com/office/drawing/2014/main" id="{11CB89A9-87C6-4709-8047-FE0C3A509676}"/>
               </a:ext>
             </a:extLst>
           </p:cNvPr>
@@ -13631,7 +13631,7 @@
           <p:cNvPr id="2" name="">
             <a:extLst xmlns:a="http://schemas.openxmlformats.org/drawingml/2006/main">
               <a:ext uri="{FF2B5EF4-FFF2-40B4-BE49-F238E27FC236}">
-                <a16:creationId xmlns:a16="http://schemas.microsoft.com/office/drawing/2014/main" id="{7E08F3D9-0E5F-47CE-AE73-16F31DA119BC}"/>
+                <a16:creationId xmlns:a16="http://schemas.microsoft.com/office/drawing/2014/main" id="{C1B84EEE-9FA5-4243-AEE7-CF3CA4D23A48}"/>
               </a:ext>
             </a:extLst>
           </p:cNvPr>
@@ -13693,7 +13693,7 @@
           <p:cNvPr id="3" name="">
             <a:extLst xmlns:a="http://schemas.openxmlformats.org/drawingml/2006/main">
               <a:ext uri="{FF2B5EF4-FFF2-40B4-BE49-F238E27FC236}">
-                <a16:creationId xmlns:a16="http://schemas.microsoft.com/office/drawing/2014/main" id="{AB01D79E-359D-429E-A4CC-49068EE32661}"/>
+                <a16:creationId xmlns:a16="http://schemas.microsoft.com/office/drawing/2014/main" id="{7A875FC9-650E-4A70-A132-6204E0182956}"/>
               </a:ext>
             </a:extLst>
           </p:cNvPr>
@@ -13755,7 +13755,7 @@
           <p:cNvPr id="4" name="">
             <a:extLst xmlns:a="http://schemas.openxmlformats.org/drawingml/2006/main">
               <a:ext uri="{FF2B5EF4-FFF2-40B4-BE49-F238E27FC236}">
-                <a16:creationId xmlns:a16="http://schemas.microsoft.com/office/drawing/2014/main" id="{12368A35-B706-4F4D-8B7D-1367369D120A}"/>
+                <a16:creationId xmlns:a16="http://schemas.microsoft.com/office/drawing/2014/main" id="{9B60805F-F24F-460B-BFB1-2BEECFE420D0}"/>
               </a:ext>
             </a:extLst>
           </p:cNvPr>
@@ -13817,7 +13817,7 @@
           <p:cNvPr id="5" name="">
             <a:extLst xmlns:a="http://schemas.openxmlformats.org/drawingml/2006/main">
               <a:ext uri="{FF2B5EF4-FFF2-40B4-BE49-F238E27FC236}">
-                <a16:creationId xmlns:a16="http://schemas.microsoft.com/office/drawing/2014/main" id="{5E1F8753-6D95-4351-A3DF-122E4EC5F29B}"/>
+                <a16:creationId xmlns:a16="http://schemas.microsoft.com/office/drawing/2014/main" id="{9899724E-9197-4A17-8A04-91680DDB6CEF}"/>
               </a:ext>
             </a:extLst>
           </p:cNvPr>
@@ -13879,7 +13879,7 @@
           <p:cNvPr id="6" name="">
             <a:extLst xmlns:a="http://schemas.openxmlformats.org/drawingml/2006/main">
               <a:ext uri="{FF2B5EF4-FFF2-40B4-BE49-F238E27FC236}">
-                <a16:creationId xmlns:a16="http://schemas.microsoft.com/office/drawing/2014/main" id="{F48EFBA7-3903-43DA-9DA3-185997F39F21}"/>
+                <a16:creationId xmlns:a16="http://schemas.microsoft.com/office/drawing/2014/main" id="{84EBF74E-8B1C-4E59-A628-0995ADABD7BB}"/>
               </a:ext>
             </a:extLst>
           </p:cNvPr>
@@ -13941,7 +13941,7 @@
           <p:cNvPr id="7" name="">
             <a:extLst xmlns:a="http://schemas.openxmlformats.org/drawingml/2006/main">
               <a:ext uri="{FF2B5EF4-FFF2-40B4-BE49-F238E27FC236}">
-                <a16:creationId xmlns:a16="http://schemas.microsoft.com/office/drawing/2014/main" id="{F8D4FF6B-6ABE-4B85-A011-F32064122EE0}"/>
+                <a16:creationId xmlns:a16="http://schemas.microsoft.com/office/drawing/2014/main" id="{E9ED3599-A4F1-49FB-AF78-A34F415DF930}"/>
               </a:ext>
             </a:extLst>
           </p:cNvPr>
@@ -13976,7 +13976,7 @@
           <p:cNvPr id="8" name="">
             <a:extLst xmlns:a="http://schemas.openxmlformats.org/drawingml/2006/main">
               <a:ext uri="{FF2B5EF4-FFF2-40B4-BE49-F238E27FC236}">
-                <a16:creationId xmlns:a16="http://schemas.microsoft.com/office/drawing/2014/main" id="{E1DE6F79-36F5-4469-8ECE-82B6E2B9442E}"/>
+                <a16:creationId xmlns:a16="http://schemas.microsoft.com/office/drawing/2014/main" id="{B42BD533-2CA3-4F31-BA1C-B12B50D2812A}"/>
               </a:ext>
             </a:extLst>
           </p:cNvPr>
@@ -14038,7 +14038,7 @@
           <p:cNvPr id="9" name="">
             <a:extLst xmlns:a="http://schemas.openxmlformats.org/drawingml/2006/main">
               <a:ext uri="{FF2B5EF4-FFF2-40B4-BE49-F238E27FC236}">
-                <a16:creationId xmlns:a16="http://schemas.microsoft.com/office/drawing/2014/main" id="{2EDB3A21-4473-434F-9C1B-297DA5D82D4E}"/>
+                <a16:creationId xmlns:a16="http://schemas.microsoft.com/office/drawing/2014/main" id="{C032B154-FDE4-4C98-8971-F75C9326AA0B}"/>
               </a:ext>
             </a:extLst>
           </p:cNvPr>
@@ -14125,7 +14125,7 @@
     </p:spTree>
     <p:extLst>
       <p:ext uri="{BB962C8B-B14F-4D97-AF65-F5344CB8AC3E}">
-        <p14:creationId xmlns:p14="http://schemas.microsoft.com/office/powerpoint/2010/main" val="1772744787"/>
+        <p14:creationId xmlns:p14="http://schemas.microsoft.com/office/powerpoint/2010/main" val="582256678"/>
       </p:ext>
     </p:extLst>
   </p:cSld>
@@ -14159,7 +14159,7 @@
           <p:cNvPr id="17" name="">
             <a:extLst xmlns:a="http://schemas.openxmlformats.org/drawingml/2006/main">
               <a:ext uri="{FF2B5EF4-FFF2-40B4-BE49-F238E27FC236}">
-                <a16:creationId xmlns:a16="http://schemas.microsoft.com/office/drawing/2014/main" id="{558C6CB9-BF6C-4FAA-A92E-53EB699AC12B}"/>
+                <a16:creationId xmlns:a16="http://schemas.microsoft.com/office/drawing/2014/main" id="{7D1FD59E-FB39-4C4A-A3A5-1A9D8DB396C0}"/>
               </a:ext>
             </a:extLst>
           </p:cNvPr>
@@ -14190,7 +14190,7 @@
           <p:cNvPr id="2" name="">
             <a:extLst xmlns:a="http://schemas.openxmlformats.org/drawingml/2006/main">
               <a:ext uri="{FF2B5EF4-FFF2-40B4-BE49-F238E27FC236}">
-                <a16:creationId xmlns:a16="http://schemas.microsoft.com/office/drawing/2014/main" id="{9429204E-5FD3-4C41-92B8-5223F36F2A05}"/>
+                <a16:creationId xmlns:a16="http://schemas.microsoft.com/office/drawing/2014/main" id="{8C299F20-8EA9-4321-9232-8E4A343B66E0}"/>
               </a:ext>
             </a:extLst>
           </p:cNvPr>
@@ -14252,7 +14252,7 @@
           <p:cNvPr id="3" name="">
             <a:extLst xmlns:a="http://schemas.openxmlformats.org/drawingml/2006/main">
               <a:ext uri="{FF2B5EF4-FFF2-40B4-BE49-F238E27FC236}">
-                <a16:creationId xmlns:a16="http://schemas.microsoft.com/office/drawing/2014/main" id="{0FE137B3-28D7-400B-84DF-EA40F6585EA7}"/>
+                <a16:creationId xmlns:a16="http://schemas.microsoft.com/office/drawing/2014/main" id="{1657A869-D0EF-4F0D-83EA-2096CB1C4F98}"/>
               </a:ext>
             </a:extLst>
           </p:cNvPr>
@@ -14314,7 +14314,7 @@
           <p:cNvPr id="4" name="">
             <a:extLst xmlns:a="http://schemas.openxmlformats.org/drawingml/2006/main">
               <a:ext uri="{FF2B5EF4-FFF2-40B4-BE49-F238E27FC236}">
-                <a16:creationId xmlns:a16="http://schemas.microsoft.com/office/drawing/2014/main" id="{7546994A-EE0D-47F3-AC1A-F5463588B3DB}"/>
+                <a16:creationId xmlns:a16="http://schemas.microsoft.com/office/drawing/2014/main" id="{CC10A7CB-B2A1-497A-AC72-517E241E72E4}"/>
               </a:ext>
             </a:extLst>
           </p:cNvPr>
@@ -14376,7 +14376,7 @@
           <p:cNvPr id="5" name="">
             <a:extLst xmlns:a="http://schemas.openxmlformats.org/drawingml/2006/main">
               <a:ext uri="{FF2B5EF4-FFF2-40B4-BE49-F238E27FC236}">
-                <a16:creationId xmlns:a16="http://schemas.microsoft.com/office/drawing/2014/main" id="{B5DF8F5D-B4B9-425E-842D-7B0EAA8EE6EC}"/>
+                <a16:creationId xmlns:a16="http://schemas.microsoft.com/office/drawing/2014/main" id="{184D32A1-FBF3-4A33-A3D9-F63B5BE1A0EB}"/>
               </a:ext>
             </a:extLst>
           </p:cNvPr>
@@ -14438,7 +14438,7 @@
           <p:cNvPr id="6" name="">
             <a:extLst xmlns:a="http://schemas.openxmlformats.org/drawingml/2006/main">
               <a:ext uri="{FF2B5EF4-FFF2-40B4-BE49-F238E27FC236}">
-                <a16:creationId xmlns:a16="http://schemas.microsoft.com/office/drawing/2014/main" id="{BA944D04-1E6F-427C-AABF-B45F69926F48}"/>
+                <a16:creationId xmlns:a16="http://schemas.microsoft.com/office/drawing/2014/main" id="{53C11D3A-77E7-4E36-9874-FB1B19A15C38}"/>
               </a:ext>
             </a:extLst>
           </p:cNvPr>
@@ -14500,7 +14500,7 @@
           <p:cNvPr id="7" name="">
             <a:extLst xmlns:a="http://schemas.openxmlformats.org/drawingml/2006/main">
               <a:ext uri="{FF2B5EF4-FFF2-40B4-BE49-F238E27FC236}">
-                <a16:creationId xmlns:a16="http://schemas.microsoft.com/office/drawing/2014/main" id="{00812148-C390-4C18-BDC2-ECD9751F3B64}"/>
+                <a16:creationId xmlns:a16="http://schemas.microsoft.com/office/drawing/2014/main" id="{CBB57D53-A469-4B9D-B18B-B92D77B1DCF2}"/>
               </a:ext>
             </a:extLst>
           </p:cNvPr>
@@ -14562,7 +14562,7 @@
           <p:cNvPr id="8" name="">
             <a:extLst xmlns:a="http://schemas.openxmlformats.org/drawingml/2006/main">
               <a:ext uri="{FF2B5EF4-FFF2-40B4-BE49-F238E27FC236}">
-                <a16:creationId xmlns:a16="http://schemas.microsoft.com/office/drawing/2014/main" id="{2A6974E4-4BA0-41CC-B666-4892B8BE63D1}"/>
+                <a16:creationId xmlns:a16="http://schemas.microsoft.com/office/drawing/2014/main" id="{933A14CF-D58A-49D2-9DD0-81B0AF172160}"/>
               </a:ext>
             </a:extLst>
           </p:cNvPr>
@@ -14624,7 +14624,7 @@
           <p:cNvPr id="9" name="">
             <a:extLst xmlns:a="http://schemas.openxmlformats.org/drawingml/2006/main">
               <a:ext uri="{FF2B5EF4-FFF2-40B4-BE49-F238E27FC236}">
-                <a16:creationId xmlns:a16="http://schemas.microsoft.com/office/drawing/2014/main" id="{C8D84DD7-744C-4B03-9087-6D1298389581}"/>
+                <a16:creationId xmlns:a16="http://schemas.microsoft.com/office/drawing/2014/main" id="{A1170A68-AA7A-4919-B9A2-86B59DC2CD65}"/>
               </a:ext>
             </a:extLst>
           </p:cNvPr>
@@ -14686,7 +14686,7 @@
           <p:cNvPr id="10" name="">
             <a:extLst xmlns:a="http://schemas.openxmlformats.org/drawingml/2006/main">
               <a:ext uri="{FF2B5EF4-FFF2-40B4-BE49-F238E27FC236}">
-                <a16:creationId xmlns:a16="http://schemas.microsoft.com/office/drawing/2014/main" id="{214D7F4E-D41F-4B42-B3D0-A0253821C95C}"/>
+                <a16:creationId xmlns:a16="http://schemas.microsoft.com/office/drawing/2014/main" id="{FECEA75D-D6D8-4432-9D13-88080CD0F52B}"/>
               </a:ext>
             </a:extLst>
           </p:cNvPr>
@@ -14748,7 +14748,7 @@
           <p:cNvPr id="11" name="">
             <a:extLst xmlns:a="http://schemas.openxmlformats.org/drawingml/2006/main">
               <a:ext uri="{FF2B5EF4-FFF2-40B4-BE49-F238E27FC236}">
-                <a16:creationId xmlns:a16="http://schemas.microsoft.com/office/drawing/2014/main" id="{51E2EFF7-7DB5-4B5E-8E29-8300A4C37490}"/>
+                <a16:creationId xmlns:a16="http://schemas.microsoft.com/office/drawing/2014/main" id="{802E6A9A-62BD-41D0-839D-29436E83C9BC}"/>
               </a:ext>
             </a:extLst>
           </p:cNvPr>
@@ -14810,7 +14810,7 @@
           <p:cNvPr id="12" name="">
             <a:extLst xmlns:a="http://schemas.openxmlformats.org/drawingml/2006/main">
               <a:ext uri="{FF2B5EF4-FFF2-40B4-BE49-F238E27FC236}">
-                <a16:creationId xmlns:a16="http://schemas.microsoft.com/office/drawing/2014/main" id="{071E01B0-1912-4C93-8AAE-CC4B9CCBDEFA}"/>
+                <a16:creationId xmlns:a16="http://schemas.microsoft.com/office/drawing/2014/main" id="{6432E57F-9BC7-4D2C-9E2F-0E0FD6233716}"/>
               </a:ext>
             </a:extLst>
           </p:cNvPr>
@@ -14872,7 +14872,7 @@
           <p:cNvPr id="13" name="">
             <a:extLst xmlns:a="http://schemas.openxmlformats.org/drawingml/2006/main">
               <a:ext uri="{FF2B5EF4-FFF2-40B4-BE49-F238E27FC236}">
-                <a16:creationId xmlns:a16="http://schemas.microsoft.com/office/drawing/2014/main" id="{85EC6D7F-0D89-490C-82EE-FA403C7E844E}"/>
+                <a16:creationId xmlns:a16="http://schemas.microsoft.com/office/drawing/2014/main" id="{C70E9A74-1F88-46A0-B13A-9CCFC629992F}"/>
               </a:ext>
             </a:extLst>
           </p:cNvPr>
@@ -14934,7 +14934,7 @@
           <p:cNvPr id="14" name="">
             <a:extLst xmlns:a="http://schemas.openxmlformats.org/drawingml/2006/main">
               <a:ext uri="{FF2B5EF4-FFF2-40B4-BE49-F238E27FC236}">
-                <a16:creationId xmlns:a16="http://schemas.microsoft.com/office/drawing/2014/main" id="{4C9EC35B-4B6E-4CF2-8157-A1EC2D8F80AF}"/>
+                <a16:creationId xmlns:a16="http://schemas.microsoft.com/office/drawing/2014/main" id="{E497E740-E48A-4FFA-8323-14B0ED771028}"/>
               </a:ext>
             </a:extLst>
           </p:cNvPr>
@@ -14996,7 +14996,7 @@
           <p:cNvPr id="15" name="">
             <a:extLst xmlns:a="http://schemas.openxmlformats.org/drawingml/2006/main">
               <a:ext uri="{FF2B5EF4-FFF2-40B4-BE49-F238E27FC236}">
-                <a16:creationId xmlns:a16="http://schemas.microsoft.com/office/drawing/2014/main" id="{2AF0CA95-B121-458E-B655-A5B2B7F87A07}"/>
+                <a16:creationId xmlns:a16="http://schemas.microsoft.com/office/drawing/2014/main" id="{971BAAFA-3547-4B72-9E43-90F92225D11A}"/>
               </a:ext>
             </a:extLst>
           </p:cNvPr>
@@ -15058,7 +15058,7 @@
           <p:cNvPr id="16" name="">
             <a:extLst xmlns:a="http://schemas.openxmlformats.org/drawingml/2006/main">
               <a:ext uri="{FF2B5EF4-FFF2-40B4-BE49-F238E27FC236}">
-                <a16:creationId xmlns:a16="http://schemas.microsoft.com/office/drawing/2014/main" id="{B1B52317-708F-4962-A72D-0B2E47B92A95}"/>
+                <a16:creationId xmlns:a16="http://schemas.microsoft.com/office/drawing/2014/main" id="{C8222691-75B4-4F4F-8C42-96D80A075A61}"/>
               </a:ext>
             </a:extLst>
           </p:cNvPr>
@@ -15118,7 +15118,7 @@
     </p:spTree>
     <p:extLst>
       <p:ext uri="{BB962C8B-B14F-4D97-AF65-F5344CB8AC3E}">
-        <p14:creationId xmlns:p14="http://schemas.microsoft.com/office/powerpoint/2010/main" val="1452947534"/>
+        <p14:creationId xmlns:p14="http://schemas.microsoft.com/office/powerpoint/2010/main" val="1223540140"/>
       </p:ext>
     </p:extLst>
   </p:cSld>
@@ -15152,7 +15152,7 @@
           <p:cNvPr id="17" name="">
             <a:extLst xmlns:a="http://schemas.openxmlformats.org/drawingml/2006/main">
               <a:ext uri="{FF2B5EF4-FFF2-40B4-BE49-F238E27FC236}">
-                <a16:creationId xmlns:a16="http://schemas.microsoft.com/office/drawing/2014/main" id="{027DB54B-6C28-4770-801B-6A3E1485F4BA}"/>
+                <a16:creationId xmlns:a16="http://schemas.microsoft.com/office/drawing/2014/main" id="{5F80E711-FD89-462F-B816-2F4EF4E6290E}"/>
               </a:ext>
             </a:extLst>
           </p:cNvPr>
@@ -15183,7 +15183,7 @@
           <p:cNvPr id="2" name="">
             <a:extLst xmlns:a="http://schemas.openxmlformats.org/drawingml/2006/main">
               <a:ext uri="{FF2B5EF4-FFF2-40B4-BE49-F238E27FC236}">
-                <a16:creationId xmlns:a16="http://schemas.microsoft.com/office/drawing/2014/main" id="{EF1A8F50-44E3-4CEE-BF1F-9B02FA1F9983}"/>
+                <a16:creationId xmlns:a16="http://schemas.microsoft.com/office/drawing/2014/main" id="{0D8B7F97-21BF-42B4-AB7E-A5F0412188C6}"/>
               </a:ext>
             </a:extLst>
           </p:cNvPr>
@@ -15245,7 +15245,7 @@
           <p:cNvPr id="3" name="">
             <a:extLst xmlns:a="http://schemas.openxmlformats.org/drawingml/2006/main">
               <a:ext uri="{FF2B5EF4-FFF2-40B4-BE49-F238E27FC236}">
-                <a16:creationId xmlns:a16="http://schemas.microsoft.com/office/drawing/2014/main" id="{E5D9878E-0BD1-462C-9A92-ED33C1FCCB2F}"/>
+                <a16:creationId xmlns:a16="http://schemas.microsoft.com/office/drawing/2014/main" id="{F32B66B7-E7B8-4B8A-837E-A80B700694F7}"/>
               </a:ext>
             </a:extLst>
           </p:cNvPr>
@@ -15307,7 +15307,7 @@
           <p:cNvPr id="4" name="">
             <a:extLst xmlns:a="http://schemas.openxmlformats.org/drawingml/2006/main">
               <a:ext uri="{FF2B5EF4-FFF2-40B4-BE49-F238E27FC236}">
-                <a16:creationId xmlns:a16="http://schemas.microsoft.com/office/drawing/2014/main" id="{29D8E890-8B43-4643-BAD0-335E68CC267F}"/>
+                <a16:creationId xmlns:a16="http://schemas.microsoft.com/office/drawing/2014/main" id="{7CD06A37-B70B-44A8-92E1-11FB4841E745}"/>
               </a:ext>
             </a:extLst>
           </p:cNvPr>
@@ -15369,7 +15369,7 @@
           <p:cNvPr id="5" name="">
             <a:extLst xmlns:a="http://schemas.openxmlformats.org/drawingml/2006/main">
               <a:ext uri="{FF2B5EF4-FFF2-40B4-BE49-F238E27FC236}">
-                <a16:creationId xmlns:a16="http://schemas.microsoft.com/office/drawing/2014/main" id="{21749CE4-27FC-4B9D-8F59-63A74182E7BD}"/>
+                <a16:creationId xmlns:a16="http://schemas.microsoft.com/office/drawing/2014/main" id="{1DBE07BA-3672-40E9-96E4-225EF8B5B1D0}"/>
               </a:ext>
             </a:extLst>
           </p:cNvPr>
@@ -15431,7 +15431,7 @@
           <p:cNvPr id="6" name="">
             <a:extLst xmlns:a="http://schemas.openxmlformats.org/drawingml/2006/main">
               <a:ext uri="{FF2B5EF4-FFF2-40B4-BE49-F238E27FC236}">
-                <a16:creationId xmlns:a16="http://schemas.microsoft.com/office/drawing/2014/main" id="{C53AED94-2F33-4469-97D1-A9E1F1F0D198}"/>
+                <a16:creationId xmlns:a16="http://schemas.microsoft.com/office/drawing/2014/main" id="{7C16D234-60F1-4C84-8E13-3E56CDC40DD6}"/>
               </a:ext>
             </a:extLst>
           </p:cNvPr>
@@ -15493,7 +15493,7 @@
           <p:cNvPr id="7" name="">
             <a:extLst xmlns:a="http://schemas.openxmlformats.org/drawingml/2006/main">
               <a:ext uri="{FF2B5EF4-FFF2-40B4-BE49-F238E27FC236}">
-                <a16:creationId xmlns:a16="http://schemas.microsoft.com/office/drawing/2014/main" id="{8507B6E3-3230-4412-BBBB-4C4FA1F30673}"/>
+                <a16:creationId xmlns:a16="http://schemas.microsoft.com/office/drawing/2014/main" id="{CC9A5C80-20BF-4B0C-A1E3-D773F7A99B5F}"/>
               </a:ext>
             </a:extLst>
           </p:cNvPr>
@@ -15555,7 +15555,7 @@
           <p:cNvPr id="8" name="">
             <a:extLst xmlns:a="http://schemas.openxmlformats.org/drawingml/2006/main">
               <a:ext uri="{FF2B5EF4-FFF2-40B4-BE49-F238E27FC236}">
-                <a16:creationId xmlns:a16="http://schemas.microsoft.com/office/drawing/2014/main" id="{A2100383-D976-4A87-974C-9A6660AE5877}"/>
+                <a16:creationId xmlns:a16="http://schemas.microsoft.com/office/drawing/2014/main" id="{12860ED7-B6D7-4E2E-B083-DDED67BE0326}"/>
               </a:ext>
             </a:extLst>
           </p:cNvPr>
@@ -15617,7 +15617,7 @@
           <p:cNvPr id="9" name="">
             <a:extLst xmlns:a="http://schemas.openxmlformats.org/drawingml/2006/main">
               <a:ext uri="{FF2B5EF4-FFF2-40B4-BE49-F238E27FC236}">
-                <a16:creationId xmlns:a16="http://schemas.microsoft.com/office/drawing/2014/main" id="{4B2ED211-5464-4CCD-A461-CA846BF048CE}"/>
+                <a16:creationId xmlns:a16="http://schemas.microsoft.com/office/drawing/2014/main" id="{F45FBC2F-66EE-48D0-AB35-D65E57EB9F21}"/>
               </a:ext>
             </a:extLst>
           </p:cNvPr>
@@ -15679,7 +15679,7 @@
           <p:cNvPr id="10" name="">
             <a:extLst xmlns:a="http://schemas.openxmlformats.org/drawingml/2006/main">
               <a:ext uri="{FF2B5EF4-FFF2-40B4-BE49-F238E27FC236}">
-                <a16:creationId xmlns:a16="http://schemas.microsoft.com/office/drawing/2014/main" id="{5BE56635-FA26-4888-9ECA-64B3CB4C3955}"/>
+                <a16:creationId xmlns:a16="http://schemas.microsoft.com/office/drawing/2014/main" id="{B546C14E-CD2F-4960-BBB0-F0CA175224BD}"/>
               </a:ext>
             </a:extLst>
           </p:cNvPr>
@@ -15741,7 +15741,7 @@
           <p:cNvPr id="11" name="">
             <a:extLst xmlns:a="http://schemas.openxmlformats.org/drawingml/2006/main">
               <a:ext uri="{FF2B5EF4-FFF2-40B4-BE49-F238E27FC236}">
-                <a16:creationId xmlns:a16="http://schemas.microsoft.com/office/drawing/2014/main" id="{61FBC660-3271-437E-A8B9-76AB14EFA347}"/>
+                <a16:creationId xmlns:a16="http://schemas.microsoft.com/office/drawing/2014/main" id="{888AE0F7-564B-4EEA-A104-6AAE6CB17A05}"/>
               </a:ext>
             </a:extLst>
           </p:cNvPr>
@@ -15803,7 +15803,7 @@
           <p:cNvPr id="12" name="">
             <a:extLst xmlns:a="http://schemas.openxmlformats.org/drawingml/2006/main">
               <a:ext uri="{FF2B5EF4-FFF2-40B4-BE49-F238E27FC236}">
-                <a16:creationId xmlns:a16="http://schemas.microsoft.com/office/drawing/2014/main" id="{AAC71334-EEFC-4392-A1A1-6FB5EAEDA56A}"/>
+                <a16:creationId xmlns:a16="http://schemas.microsoft.com/office/drawing/2014/main" id="{9B8126B6-CDD6-4DBC-BEE8-843D1F5D7DD9}"/>
               </a:ext>
             </a:extLst>
           </p:cNvPr>
@@ -15865,7 +15865,7 @@
           <p:cNvPr id="13" name="">
             <a:extLst xmlns:a="http://schemas.openxmlformats.org/drawingml/2006/main">
               <a:ext uri="{FF2B5EF4-FFF2-40B4-BE49-F238E27FC236}">
-                <a16:creationId xmlns:a16="http://schemas.microsoft.com/office/drawing/2014/main" id="{BCDD3E22-81D0-478B-B7A4-E4C532349D45}"/>
+                <a16:creationId xmlns:a16="http://schemas.microsoft.com/office/drawing/2014/main" id="{DA5F00F1-B199-4790-9B31-D70B5B0A76CE}"/>
               </a:ext>
             </a:extLst>
           </p:cNvPr>
@@ -15927,7 +15927,7 @@
           <p:cNvPr id="14" name="">
             <a:extLst xmlns:a="http://schemas.openxmlformats.org/drawingml/2006/main">
               <a:ext uri="{FF2B5EF4-FFF2-40B4-BE49-F238E27FC236}">
-                <a16:creationId xmlns:a16="http://schemas.microsoft.com/office/drawing/2014/main" id="{E1354B5E-13C9-4C36-AD1F-00918E6955A8}"/>
+                <a16:creationId xmlns:a16="http://schemas.microsoft.com/office/drawing/2014/main" id="{BA610322-E66A-4529-80B4-3024EE745B87}"/>
               </a:ext>
             </a:extLst>
           </p:cNvPr>
@@ -15989,7 +15989,7 @@
           <p:cNvPr id="15" name="">
             <a:extLst xmlns:a="http://schemas.openxmlformats.org/drawingml/2006/main">
               <a:ext uri="{FF2B5EF4-FFF2-40B4-BE49-F238E27FC236}">
-                <a16:creationId xmlns:a16="http://schemas.microsoft.com/office/drawing/2014/main" id="{391F6547-581E-47D2-9B44-DF697EB61DF4}"/>
+                <a16:creationId xmlns:a16="http://schemas.microsoft.com/office/drawing/2014/main" id="{BB59699E-BD94-476F-9C61-59CED5CC6959}"/>
               </a:ext>
             </a:extLst>
           </p:cNvPr>
@@ -16051,7 +16051,7 @@
           <p:cNvPr id="16" name="">
             <a:extLst xmlns:a="http://schemas.openxmlformats.org/drawingml/2006/main">
               <a:ext uri="{FF2B5EF4-FFF2-40B4-BE49-F238E27FC236}">
-                <a16:creationId xmlns:a16="http://schemas.microsoft.com/office/drawing/2014/main" id="{C2A8224E-82C9-40BB-94DD-D0549EC9207D}"/>
+                <a16:creationId xmlns:a16="http://schemas.microsoft.com/office/drawing/2014/main" id="{E7A35595-E0AB-42EC-9F2B-37A3660E1D49}"/>
               </a:ext>
             </a:extLst>
           </p:cNvPr>
@@ -16111,7 +16111,7 @@
     </p:spTree>
     <p:extLst>
       <p:ext uri="{BB962C8B-B14F-4D97-AF65-F5344CB8AC3E}">
-        <p14:creationId xmlns:p14="http://schemas.microsoft.com/office/powerpoint/2010/main" val="895696916"/>
+        <p14:creationId xmlns:p14="http://schemas.microsoft.com/office/powerpoint/2010/main" val="1565908589"/>
       </p:ext>
     </p:extLst>
   </p:cSld>
@@ -16145,7 +16145,7 @@
           <p:cNvPr id="9" name="">
             <a:extLst xmlns:a="http://schemas.openxmlformats.org/drawingml/2006/main">
               <a:ext uri="{FF2B5EF4-FFF2-40B4-BE49-F238E27FC236}">
-                <a16:creationId xmlns:a16="http://schemas.microsoft.com/office/drawing/2014/main" id="{712A2459-36DA-49DC-9723-AA1C279BDF47}"/>
+                <a16:creationId xmlns:a16="http://schemas.microsoft.com/office/drawing/2014/main" id="{80900E7B-198A-4C12-9686-7CD69D637975}"/>
               </a:ext>
             </a:extLst>
           </p:cNvPr>
@@ -16176,7 +16176,7 @@
           <p:cNvPr id="2" name="">
             <a:extLst xmlns:a="http://schemas.openxmlformats.org/drawingml/2006/main">
               <a:ext uri="{FF2B5EF4-FFF2-40B4-BE49-F238E27FC236}">
-                <a16:creationId xmlns:a16="http://schemas.microsoft.com/office/drawing/2014/main" id="{7DD85C73-2E21-4596-B1B8-AE9C810804F0}"/>
+                <a16:creationId xmlns:a16="http://schemas.microsoft.com/office/drawing/2014/main" id="{637DC273-221A-4CF1-8D39-84356ED7E607}"/>
               </a:ext>
             </a:extLst>
           </p:cNvPr>
@@ -16238,7 +16238,7 @@
           <p:cNvPr id="3" name="">
             <a:extLst xmlns:a="http://schemas.openxmlformats.org/drawingml/2006/main">
               <a:ext uri="{FF2B5EF4-FFF2-40B4-BE49-F238E27FC236}">
-                <a16:creationId xmlns:a16="http://schemas.microsoft.com/office/drawing/2014/main" id="{510FB4A1-1D6B-4342-914E-373E028BAB87}"/>
+                <a16:creationId xmlns:a16="http://schemas.microsoft.com/office/drawing/2014/main" id="{1FC78D97-F1C2-4D80-AAF2-C79DBAB20D57}"/>
               </a:ext>
             </a:extLst>
           </p:cNvPr>
@@ -16300,7 +16300,7 @@
           <p:cNvPr id="4" name="">
             <a:extLst xmlns:a="http://schemas.openxmlformats.org/drawingml/2006/main">
               <a:ext uri="{FF2B5EF4-FFF2-40B4-BE49-F238E27FC236}">
-                <a16:creationId xmlns:a16="http://schemas.microsoft.com/office/drawing/2014/main" id="{3DD39651-EFF2-40FA-9FB9-C93CCD8DBCF2}"/>
+                <a16:creationId xmlns:a16="http://schemas.microsoft.com/office/drawing/2014/main" id="{6762A14F-B0B3-41B8-AC76-54452DDC1D16}"/>
               </a:ext>
             </a:extLst>
           </p:cNvPr>
@@ -16362,7 +16362,7 @@
           <p:cNvPr id="5" name="">
             <a:extLst xmlns:a="http://schemas.openxmlformats.org/drawingml/2006/main">
               <a:ext uri="{FF2B5EF4-FFF2-40B4-BE49-F238E27FC236}">
-                <a16:creationId xmlns:a16="http://schemas.microsoft.com/office/drawing/2014/main" id="{7368CD0F-E0AA-4903-8F0E-25A56C4E7D7C}"/>
+                <a16:creationId xmlns:a16="http://schemas.microsoft.com/office/drawing/2014/main" id="{586F5E50-71C5-4A85-BE11-0F0D57C2E762}"/>
               </a:ext>
             </a:extLst>
           </p:cNvPr>
@@ -16424,7 +16424,7 @@
           <p:cNvPr id="6" name="">
             <a:extLst xmlns:a="http://schemas.openxmlformats.org/drawingml/2006/main">
               <a:ext uri="{FF2B5EF4-FFF2-40B4-BE49-F238E27FC236}">
-                <a16:creationId xmlns:a16="http://schemas.microsoft.com/office/drawing/2014/main" id="{A66681C6-435D-4A91-9175-179C02C70246}"/>
+                <a16:creationId xmlns:a16="http://schemas.microsoft.com/office/drawing/2014/main" id="{39419E14-1F09-4634-86A5-5A072BEFD76F}"/>
               </a:ext>
             </a:extLst>
           </p:cNvPr>
@@ -16513,7 +16513,7 @@
           <p:cNvPr id="7" name="">
             <a:extLst xmlns:a="http://schemas.openxmlformats.org/drawingml/2006/main">
               <a:ext uri="{FF2B5EF4-FFF2-40B4-BE49-F238E27FC236}">
-                <a16:creationId xmlns:a16="http://schemas.microsoft.com/office/drawing/2014/main" id="{8C0B49BE-142D-415B-B8ED-A8B5073020D4}"/>
+                <a16:creationId xmlns:a16="http://schemas.microsoft.com/office/drawing/2014/main" id="{B51B3F6D-C2D8-4C91-8220-53B71BF94921}"/>
               </a:ext>
             </a:extLst>
           </p:cNvPr>
@@ -16575,7 +16575,7 @@
           <p:cNvPr id="8" name="">
             <a:extLst xmlns:a="http://schemas.openxmlformats.org/drawingml/2006/main">
               <a:ext uri="{FF2B5EF4-FFF2-40B4-BE49-F238E27FC236}">
-                <a16:creationId xmlns:a16="http://schemas.microsoft.com/office/drawing/2014/main" id="{15928B22-6584-4A9E-AB3F-097E79B70D58}"/>
+                <a16:creationId xmlns:a16="http://schemas.microsoft.com/office/drawing/2014/main" id="{866525BC-FB08-4C4C-BD77-FB67991CA4B5}"/>
               </a:ext>
             </a:extLst>
           </p:cNvPr>
@@ -16604,7 +16604,7 @@
     </p:spTree>
     <p:extLst>
       <p:ext uri="{BB962C8B-B14F-4D97-AF65-F5344CB8AC3E}">
-        <p14:creationId xmlns:p14="http://schemas.microsoft.com/office/powerpoint/2010/main" val="1722232729"/>
+        <p14:creationId xmlns:p14="http://schemas.microsoft.com/office/powerpoint/2010/main" val="1809500762"/>
       </p:ext>
     </p:extLst>
   </p:cSld>
@@ -16638,7 +16638,7 @@
           <p:cNvPr id="23" name="">
             <a:extLst xmlns:a="http://schemas.openxmlformats.org/drawingml/2006/main">
               <a:ext uri="{FF2B5EF4-FFF2-40B4-BE49-F238E27FC236}">
-                <a16:creationId xmlns:a16="http://schemas.microsoft.com/office/drawing/2014/main" id="{B76EC3A2-97B3-4837-814E-BBCEA393E8F8}"/>
+                <a16:creationId xmlns:a16="http://schemas.microsoft.com/office/drawing/2014/main" id="{A0357333-6277-4820-B0CF-0F05B83F5BA7}"/>
               </a:ext>
             </a:extLst>
           </p:cNvPr>
@@ -16669,7 +16669,7 @@
           <p:cNvPr id="2" name="">
             <a:extLst xmlns:a="http://schemas.openxmlformats.org/drawingml/2006/main">
               <a:ext uri="{FF2B5EF4-FFF2-40B4-BE49-F238E27FC236}">
-                <a16:creationId xmlns:a16="http://schemas.microsoft.com/office/drawing/2014/main" id="{1E2E798F-7A13-49EE-A7BF-860F1C6A68EC}"/>
+                <a16:creationId xmlns:a16="http://schemas.microsoft.com/office/drawing/2014/main" id="{0D1520C0-0EEF-4E04-9957-C24F781D645C}"/>
               </a:ext>
             </a:extLst>
           </p:cNvPr>
@@ -16731,7 +16731,7 @@
           <p:cNvPr id="3" name="">
             <a:extLst xmlns:a="http://schemas.openxmlformats.org/drawingml/2006/main">
               <a:ext uri="{FF2B5EF4-FFF2-40B4-BE49-F238E27FC236}">
-                <a16:creationId xmlns:a16="http://schemas.microsoft.com/office/drawing/2014/main" id="{45400701-FEF3-48DC-9761-CE0BB5E8C53A}"/>
+                <a16:creationId xmlns:a16="http://schemas.microsoft.com/office/drawing/2014/main" id="{9A68615F-7D14-4CFB-91D8-59E80987EA0D}"/>
               </a:ext>
             </a:extLst>
           </p:cNvPr>
@@ -16793,7 +16793,7 @@
           <p:cNvPr id="4" name="">
             <a:extLst xmlns:a="http://schemas.openxmlformats.org/drawingml/2006/main">
               <a:ext uri="{FF2B5EF4-FFF2-40B4-BE49-F238E27FC236}">
-                <a16:creationId xmlns:a16="http://schemas.microsoft.com/office/drawing/2014/main" id="{817A5E4E-7D09-4581-AFB7-B19947DFC3A9}"/>
+                <a16:creationId xmlns:a16="http://schemas.microsoft.com/office/drawing/2014/main" id="{B8E06D86-25B6-4E9A-BF31-92000A187AEB}"/>
               </a:ext>
             </a:extLst>
           </p:cNvPr>
@@ -16855,7 +16855,7 @@
           <p:cNvPr id="5" name="">
             <a:extLst xmlns:a="http://schemas.openxmlformats.org/drawingml/2006/main">
               <a:ext uri="{FF2B5EF4-FFF2-40B4-BE49-F238E27FC236}">
-                <a16:creationId xmlns:a16="http://schemas.microsoft.com/office/drawing/2014/main" id="{3082D78B-4D51-4D33-BE31-B6714BB1712E}"/>
+                <a16:creationId xmlns:a16="http://schemas.microsoft.com/office/drawing/2014/main" id="{E26C6798-00C6-4F3A-A25F-624DAB63886A}"/>
               </a:ext>
             </a:extLst>
           </p:cNvPr>
@@ -16888,7 +16888,7 @@
           <p:cNvPr id="6" name="">
             <a:extLst xmlns:a="http://schemas.openxmlformats.org/drawingml/2006/main">
               <a:ext uri="{FF2B5EF4-FFF2-40B4-BE49-F238E27FC236}">
-                <a16:creationId xmlns:a16="http://schemas.microsoft.com/office/drawing/2014/main" id="{21B67F56-7EEA-40F7-B26C-AA2D4DCDE0C8}"/>
+                <a16:creationId xmlns:a16="http://schemas.microsoft.com/office/drawing/2014/main" id="{84F7265F-ED66-4D65-88C6-6F956D06CB3D}"/>
               </a:ext>
             </a:extLst>
           </p:cNvPr>
@@ -16950,7 +16950,7 @@
           <p:cNvPr id="7" name="">
             <a:extLst xmlns:a="http://schemas.openxmlformats.org/drawingml/2006/main">
               <a:ext uri="{FF2B5EF4-FFF2-40B4-BE49-F238E27FC236}">
-                <a16:creationId xmlns:a16="http://schemas.microsoft.com/office/drawing/2014/main" id="{631961A1-CD87-4065-BF84-83E5B06A6290}"/>
+                <a16:creationId xmlns:a16="http://schemas.microsoft.com/office/drawing/2014/main" id="{97DBD5A6-046B-4950-B9BF-640BDAC521D8}"/>
               </a:ext>
             </a:extLst>
           </p:cNvPr>
@@ -17012,7 +17012,7 @@
           <p:cNvPr id="8" name="">
             <a:extLst xmlns:a="http://schemas.openxmlformats.org/drawingml/2006/main">
               <a:ext uri="{FF2B5EF4-FFF2-40B4-BE49-F238E27FC236}">
-                <a16:creationId xmlns:a16="http://schemas.microsoft.com/office/drawing/2014/main" id="{046D8CFA-6B7E-485D-8987-F206A93EB99A}"/>
+                <a16:creationId xmlns:a16="http://schemas.microsoft.com/office/drawing/2014/main" id="{0D163944-86A0-4E8F-845D-C082A51C6AC5}"/>
               </a:ext>
             </a:extLst>
           </p:cNvPr>
@@ -17074,7 +17074,7 @@
           <p:cNvPr id="9" name="">
             <a:extLst xmlns:a="http://schemas.openxmlformats.org/drawingml/2006/main">
               <a:ext uri="{FF2B5EF4-FFF2-40B4-BE49-F238E27FC236}">
-                <a16:creationId xmlns:a16="http://schemas.microsoft.com/office/drawing/2014/main" id="{CCD96B7D-718C-4838-8438-C8E2C2FE2F75}"/>
+                <a16:creationId xmlns:a16="http://schemas.microsoft.com/office/drawing/2014/main" id="{E8205870-3869-4D58-87F1-04A49F96B5E2}"/>
               </a:ext>
             </a:extLst>
           </p:cNvPr>
@@ -17136,7 +17136,7 @@
           <p:cNvPr id="10" name="">
             <a:extLst xmlns:a="http://schemas.openxmlformats.org/drawingml/2006/main">
               <a:ext uri="{FF2B5EF4-FFF2-40B4-BE49-F238E27FC236}">
-                <a16:creationId xmlns:a16="http://schemas.microsoft.com/office/drawing/2014/main" id="{4C300378-CBC4-40FC-A0E7-0B20292A1A61}"/>
+                <a16:creationId xmlns:a16="http://schemas.microsoft.com/office/drawing/2014/main" id="{5445D9B8-E4C0-4CCE-A50A-96572587E715}"/>
               </a:ext>
             </a:extLst>
           </p:cNvPr>
@@ -17169,7 +17169,7 @@
           <p:cNvPr id="11" name="">
             <a:extLst xmlns:a="http://schemas.openxmlformats.org/drawingml/2006/main">
               <a:ext uri="{FF2B5EF4-FFF2-40B4-BE49-F238E27FC236}">
-                <a16:creationId xmlns:a16="http://schemas.microsoft.com/office/drawing/2014/main" id="{9F687C7D-CB08-44C6-A455-890FBB91E7ED}"/>
+                <a16:creationId xmlns:a16="http://schemas.microsoft.com/office/drawing/2014/main" id="{2B74630E-57B9-496B-B81C-CA04953D321C}"/>
               </a:ext>
             </a:extLst>
           </p:cNvPr>
@@ -17231,7 +17231,7 @@
           <p:cNvPr id="12" name="">
             <a:extLst xmlns:a="http://schemas.openxmlformats.org/drawingml/2006/main">
               <a:ext uri="{FF2B5EF4-FFF2-40B4-BE49-F238E27FC236}">
-                <a16:creationId xmlns:a16="http://schemas.microsoft.com/office/drawing/2014/main" id="{294E6824-2452-4AD4-B10D-74FB19566E9A}"/>
+                <a16:creationId xmlns:a16="http://schemas.microsoft.com/office/drawing/2014/main" id="{376F7071-F370-47FA-B4E7-DEA2E9E0C20C}"/>
               </a:ext>
             </a:extLst>
           </p:cNvPr>
@@ -17293,7 +17293,7 @@
           <p:cNvPr id="13" name="">
             <a:extLst xmlns:a="http://schemas.openxmlformats.org/drawingml/2006/main">
               <a:ext uri="{FF2B5EF4-FFF2-40B4-BE49-F238E27FC236}">
-                <a16:creationId xmlns:a16="http://schemas.microsoft.com/office/drawing/2014/main" id="{952AE584-1A3A-4EA9-9211-05A6DA2B8A88}"/>
+                <a16:creationId xmlns:a16="http://schemas.microsoft.com/office/drawing/2014/main" id="{20A98DAB-E4B5-491A-8978-2E1C212D24A7}"/>
               </a:ext>
             </a:extLst>
           </p:cNvPr>
@@ -17355,7 +17355,7 @@
           <p:cNvPr id="14" name="">
             <a:extLst xmlns:a="http://schemas.openxmlformats.org/drawingml/2006/main">
               <a:ext uri="{FF2B5EF4-FFF2-40B4-BE49-F238E27FC236}">
-                <a16:creationId xmlns:a16="http://schemas.microsoft.com/office/drawing/2014/main" id="{A0C409D9-6905-4229-8D28-1EADB3C25CCD}"/>
+                <a16:creationId xmlns:a16="http://schemas.microsoft.com/office/drawing/2014/main" id="{FBBA9A30-0BFA-4BFD-A18F-BB06584AF05B}"/>
               </a:ext>
             </a:extLst>
           </p:cNvPr>
@@ -17417,7 +17417,7 @@
           <p:cNvPr id="15" name="">
             <a:extLst xmlns:a="http://schemas.openxmlformats.org/drawingml/2006/main">
               <a:ext uri="{FF2B5EF4-FFF2-40B4-BE49-F238E27FC236}">
-                <a16:creationId xmlns:a16="http://schemas.microsoft.com/office/drawing/2014/main" id="{BCAC9B09-91E8-44BC-B4AB-D36D43F633AA}"/>
+                <a16:creationId xmlns:a16="http://schemas.microsoft.com/office/drawing/2014/main" id="{9B5E75F4-8783-495B-85A3-D8BA34B24F3B}"/>
               </a:ext>
             </a:extLst>
           </p:cNvPr>
@@ -17479,7 +17479,7 @@
           <p:cNvPr id="16" name="">
             <a:extLst xmlns:a="http://schemas.openxmlformats.org/drawingml/2006/main">
               <a:ext uri="{FF2B5EF4-FFF2-40B4-BE49-F238E27FC236}">
-                <a16:creationId xmlns:a16="http://schemas.microsoft.com/office/drawing/2014/main" id="{EF5E8A73-603E-4EB7-95D3-9B1C72C6F58C}"/>
+                <a16:creationId xmlns:a16="http://schemas.microsoft.com/office/drawing/2014/main" id="{4CD4F55C-8721-409B-87C5-ED43DD414392}"/>
               </a:ext>
             </a:extLst>
           </p:cNvPr>
@@ -17541,7 +17541,7 @@
           <p:cNvPr id="17" name="">
             <a:extLst xmlns:a="http://schemas.openxmlformats.org/drawingml/2006/main">
               <a:ext uri="{FF2B5EF4-FFF2-40B4-BE49-F238E27FC236}">
-                <a16:creationId xmlns:a16="http://schemas.microsoft.com/office/drawing/2014/main" id="{AD04CFF4-9FA2-4769-AB3D-EB30C7BEFB7E}"/>
+                <a16:creationId xmlns:a16="http://schemas.microsoft.com/office/drawing/2014/main" id="{D6F3FF82-8126-48F6-890A-EFB163B05ABF}"/>
               </a:ext>
             </a:extLst>
           </p:cNvPr>
@@ -17603,7 +17603,7 @@
           <p:cNvPr id="18" name="">
             <a:extLst xmlns:a="http://schemas.openxmlformats.org/drawingml/2006/main">
               <a:ext uri="{FF2B5EF4-FFF2-40B4-BE49-F238E27FC236}">
-                <a16:creationId xmlns:a16="http://schemas.microsoft.com/office/drawing/2014/main" id="{9629A2AA-CF34-4D86-A7A0-9347E4777296}"/>
+                <a16:creationId xmlns:a16="http://schemas.microsoft.com/office/drawing/2014/main" id="{2AB74095-8ED2-46B4-A0A5-5B4E89709E49}"/>
               </a:ext>
             </a:extLst>
           </p:cNvPr>
@@ -17636,7 +17636,7 @@
           <p:cNvPr id="19" name="">
             <a:extLst xmlns:a="http://schemas.openxmlformats.org/drawingml/2006/main">
               <a:ext uri="{FF2B5EF4-FFF2-40B4-BE49-F238E27FC236}">
-                <a16:creationId xmlns:a16="http://schemas.microsoft.com/office/drawing/2014/main" id="{A49125F7-2CCD-4115-AF25-67F318002631}"/>
+                <a16:creationId xmlns:a16="http://schemas.microsoft.com/office/drawing/2014/main" id="{F887E10D-7C19-4DF9-8790-FD1CD6B88B65}"/>
               </a:ext>
             </a:extLst>
           </p:cNvPr>
@@ -17698,7 +17698,7 @@
           <p:cNvPr id="20" name="">
             <a:extLst xmlns:a="http://schemas.openxmlformats.org/drawingml/2006/main">
               <a:ext uri="{FF2B5EF4-FFF2-40B4-BE49-F238E27FC236}">
-                <a16:creationId xmlns:a16="http://schemas.microsoft.com/office/drawing/2014/main" id="{C48B9C89-B57A-41C2-94B1-C7848F8B9B5D}"/>
+                <a16:creationId xmlns:a16="http://schemas.microsoft.com/office/drawing/2014/main" id="{3C61CF15-817A-485D-A485-8F639C54E316}"/>
               </a:ext>
             </a:extLst>
           </p:cNvPr>
@@ -17760,7 +17760,7 @@
           <p:cNvPr id="21" name="">
             <a:extLst xmlns:a="http://schemas.openxmlformats.org/drawingml/2006/main">
               <a:ext uri="{FF2B5EF4-FFF2-40B4-BE49-F238E27FC236}">
-                <a16:creationId xmlns:a16="http://schemas.microsoft.com/office/drawing/2014/main" id="{5BB176C2-D64E-4CF7-A676-73B444B9690B}"/>
+                <a16:creationId xmlns:a16="http://schemas.microsoft.com/office/drawing/2014/main" id="{BD94CE7C-6D91-407A-9150-4BE2926504FE}"/>
               </a:ext>
             </a:extLst>
           </p:cNvPr>
@@ -17822,7 +17822,7 @@
           <p:cNvPr id="22" name="">
             <a:extLst xmlns:a="http://schemas.openxmlformats.org/drawingml/2006/main">
               <a:ext uri="{FF2B5EF4-FFF2-40B4-BE49-F238E27FC236}">
-                <a16:creationId xmlns:a16="http://schemas.microsoft.com/office/drawing/2014/main" id="{A8283AD0-17F5-461E-8D6B-A74CD700EECD}"/>
+                <a16:creationId xmlns:a16="http://schemas.microsoft.com/office/drawing/2014/main" id="{EA7FEB6D-607E-4DD5-8C09-2A5032FC3FF5}"/>
               </a:ext>
             </a:extLst>
           </p:cNvPr>
@@ -17874,7 +17874,7 @@
                 <a:ea typeface="Noto Sans KR"/>
                 <a:cs typeface="Noto Sans KR"/>
               </a:rPr>
-              <a:t>실습 가이드 웹페이지 → 「실습 결과 공유」 게시판</a:t>
+              <a:t>https://ksb6857.github.io/ai-training-260811/</a:t>
             </a:r>
           </a:p>
         </p:txBody>
@@ -17882,7 +17882,7 @@
     </p:spTree>
     <p:extLst>
       <p:ext uri="{BB962C8B-B14F-4D97-AF65-F5344CB8AC3E}">
-        <p14:creationId xmlns:p14="http://schemas.microsoft.com/office/powerpoint/2010/main" val="1845885467"/>
+        <p14:creationId xmlns:p14="http://schemas.microsoft.com/office/powerpoint/2010/main" val="1131942572"/>
       </p:ext>
     </p:extLst>
   </p:cSld>
@@ -17916,7 +17916,7 @@
           <p:cNvPr id="9" name="">
             <a:extLst xmlns:a="http://schemas.openxmlformats.org/drawingml/2006/main">
               <a:ext uri="{FF2B5EF4-FFF2-40B4-BE49-F238E27FC236}">
-                <a16:creationId xmlns:a16="http://schemas.microsoft.com/office/drawing/2014/main" id="{9DCCEA93-D083-4671-ADA7-3909410B8D1F}"/>
+                <a16:creationId xmlns:a16="http://schemas.microsoft.com/office/drawing/2014/main" id="{60E43D88-D1AD-445B-877D-16B775E31C79}"/>
               </a:ext>
             </a:extLst>
           </p:cNvPr>
@@ -17947,7 +17947,7 @@
           <p:cNvPr id="2" name="">
             <a:extLst xmlns:a="http://schemas.openxmlformats.org/drawingml/2006/main">
               <a:ext uri="{FF2B5EF4-FFF2-40B4-BE49-F238E27FC236}">
-                <a16:creationId xmlns:a16="http://schemas.microsoft.com/office/drawing/2014/main" id="{DF36ED09-328A-462B-9F49-095741D86377}"/>
+                <a16:creationId xmlns:a16="http://schemas.microsoft.com/office/drawing/2014/main" id="{F8B24584-5875-42D7-98CB-72C7C4198AA7}"/>
               </a:ext>
             </a:extLst>
           </p:cNvPr>
@@ -18009,7 +18009,7 @@
           <p:cNvPr id="3" name="">
             <a:extLst xmlns:a="http://schemas.openxmlformats.org/drawingml/2006/main">
               <a:ext uri="{FF2B5EF4-FFF2-40B4-BE49-F238E27FC236}">
-                <a16:creationId xmlns:a16="http://schemas.microsoft.com/office/drawing/2014/main" id="{B6E438F5-F999-4C21-B928-EAF395D612B6}"/>
+                <a16:creationId xmlns:a16="http://schemas.microsoft.com/office/drawing/2014/main" id="{751DBB5F-B59D-4DC5-8122-B8119C257AEB}"/>
               </a:ext>
             </a:extLst>
           </p:cNvPr>
@@ -18071,7 +18071,7 @@
           <p:cNvPr id="4" name="">
             <a:extLst xmlns:a="http://schemas.openxmlformats.org/drawingml/2006/main">
               <a:ext uri="{FF2B5EF4-FFF2-40B4-BE49-F238E27FC236}">
-                <a16:creationId xmlns:a16="http://schemas.microsoft.com/office/drawing/2014/main" id="{82AC788E-0E83-4585-A3B9-ED786074CB31}"/>
+                <a16:creationId xmlns:a16="http://schemas.microsoft.com/office/drawing/2014/main" id="{0964BE62-9E92-4E0A-935B-22DD5EF20E66}"/>
               </a:ext>
             </a:extLst>
           </p:cNvPr>
@@ -18133,7 +18133,7 @@
           <p:cNvPr id="5" name="">
             <a:extLst xmlns:a="http://schemas.openxmlformats.org/drawingml/2006/main">
               <a:ext uri="{FF2B5EF4-FFF2-40B4-BE49-F238E27FC236}">
-                <a16:creationId xmlns:a16="http://schemas.microsoft.com/office/drawing/2014/main" id="{FA1C705C-5F1C-427C-86F5-7DC76FED363E}"/>
+                <a16:creationId xmlns:a16="http://schemas.microsoft.com/office/drawing/2014/main" id="{E0F3DE46-BC0F-4E55-B23E-1281D98BF2C8}"/>
               </a:ext>
             </a:extLst>
           </p:cNvPr>
@@ -18195,7 +18195,7 @@
           <p:cNvPr id="6" name="">
             <a:extLst xmlns:a="http://schemas.openxmlformats.org/drawingml/2006/main">
               <a:ext uri="{FF2B5EF4-FFF2-40B4-BE49-F238E27FC236}">
-                <a16:creationId xmlns:a16="http://schemas.microsoft.com/office/drawing/2014/main" id="{16C41C33-9F84-4201-8C9C-7A2E3163A9A1}"/>
+                <a16:creationId xmlns:a16="http://schemas.microsoft.com/office/drawing/2014/main" id="{BB1511A0-417D-41AD-8E82-8495B79B43D2}"/>
               </a:ext>
             </a:extLst>
           </p:cNvPr>
@@ -18284,7 +18284,7 @@
           <p:cNvPr id="7" name="">
             <a:extLst xmlns:a="http://schemas.openxmlformats.org/drawingml/2006/main">
               <a:ext uri="{FF2B5EF4-FFF2-40B4-BE49-F238E27FC236}">
-                <a16:creationId xmlns:a16="http://schemas.microsoft.com/office/drawing/2014/main" id="{7931CFCF-721F-49BF-A484-604449C096F2}"/>
+                <a16:creationId xmlns:a16="http://schemas.microsoft.com/office/drawing/2014/main" id="{7BA99D02-2432-4E92-B221-FFB28E7BFF46}"/>
               </a:ext>
             </a:extLst>
           </p:cNvPr>
@@ -18346,7 +18346,7 @@
           <p:cNvPr id="8" name="">
             <a:extLst xmlns:a="http://schemas.openxmlformats.org/drawingml/2006/main">
               <a:ext uri="{FF2B5EF4-FFF2-40B4-BE49-F238E27FC236}">
-                <a16:creationId xmlns:a16="http://schemas.microsoft.com/office/drawing/2014/main" id="{1A194742-5158-4D84-8579-F87BA86F96D5}"/>
+                <a16:creationId xmlns:a16="http://schemas.microsoft.com/office/drawing/2014/main" id="{4B8ECD3F-6273-4FE5-8211-1FEFC2EAA6AF}"/>
               </a:ext>
             </a:extLst>
           </p:cNvPr>
@@ -18375,7 +18375,7 @@
     </p:spTree>
     <p:extLst>
       <p:ext uri="{BB962C8B-B14F-4D97-AF65-F5344CB8AC3E}">
-        <p14:creationId xmlns:p14="http://schemas.microsoft.com/office/powerpoint/2010/main" val="1110795570"/>
+        <p14:creationId xmlns:p14="http://schemas.microsoft.com/office/powerpoint/2010/main" val="1576326534"/>
       </p:ext>
     </p:extLst>
   </p:cSld>
@@ -18409,7 +18409,7 @@
           <p:cNvPr id="7" name="">
             <a:extLst xmlns:a="http://schemas.openxmlformats.org/drawingml/2006/main">
               <a:ext uri="{FF2B5EF4-FFF2-40B4-BE49-F238E27FC236}">
-                <a16:creationId xmlns:a16="http://schemas.microsoft.com/office/drawing/2014/main" id="{083EE631-7915-444F-90D2-1B69C09AC249}"/>
+                <a16:creationId xmlns:a16="http://schemas.microsoft.com/office/drawing/2014/main" id="{9006867F-931F-42BB-88B1-193723376584}"/>
               </a:ext>
             </a:extLst>
           </p:cNvPr>
@@ -18440,7 +18440,7 @@
           <p:cNvPr id="2" name="">
             <a:extLst xmlns:a="http://schemas.openxmlformats.org/drawingml/2006/main">
               <a:ext uri="{FF2B5EF4-FFF2-40B4-BE49-F238E27FC236}">
-                <a16:creationId xmlns:a16="http://schemas.microsoft.com/office/drawing/2014/main" id="{0B7DE75E-70DC-4F1B-A019-BC25A646A42E}"/>
+                <a16:creationId xmlns:a16="http://schemas.microsoft.com/office/drawing/2014/main" id="{CBE64CAE-40CB-4554-A316-61EEAEB38C13}"/>
               </a:ext>
             </a:extLst>
           </p:cNvPr>
@@ -18502,7 +18502,7 @@
           <p:cNvPr id="3" name="">
             <a:extLst xmlns:a="http://schemas.openxmlformats.org/drawingml/2006/main">
               <a:ext uri="{FF2B5EF4-FFF2-40B4-BE49-F238E27FC236}">
-                <a16:creationId xmlns:a16="http://schemas.microsoft.com/office/drawing/2014/main" id="{71619A22-909D-4A5A-A1A1-0C2ED4E2A8AC}"/>
+                <a16:creationId xmlns:a16="http://schemas.microsoft.com/office/drawing/2014/main" id="{20F6CC4B-F26C-4E04-86A1-9D1926325505}"/>
               </a:ext>
             </a:extLst>
           </p:cNvPr>
@@ -18564,7 +18564,7 @@
           <p:cNvPr id="4" name="">
             <a:extLst xmlns:a="http://schemas.openxmlformats.org/drawingml/2006/main">
               <a:ext uri="{FF2B5EF4-FFF2-40B4-BE49-F238E27FC236}">
-                <a16:creationId xmlns:a16="http://schemas.microsoft.com/office/drawing/2014/main" id="{0FC216BA-CD61-43AF-9CD6-24FBA3BDD18F}"/>
+                <a16:creationId xmlns:a16="http://schemas.microsoft.com/office/drawing/2014/main" id="{734CD191-CD09-4AEB-842D-BE9CE56E9A99}"/>
               </a:ext>
             </a:extLst>
           </p:cNvPr>
@@ -18626,7 +18626,7 @@
           <p:cNvPr id="5" name="">
             <a:extLst xmlns:a="http://schemas.openxmlformats.org/drawingml/2006/main">
               <a:ext uri="{FF2B5EF4-FFF2-40B4-BE49-F238E27FC236}">
-                <a16:creationId xmlns:a16="http://schemas.microsoft.com/office/drawing/2014/main" id="{580FE71D-029B-480A-9B3C-2CB5BB11B0C0}"/>
+                <a16:creationId xmlns:a16="http://schemas.microsoft.com/office/drawing/2014/main" id="{6379473D-A4B8-444C-B2D7-B962D07DF363}"/>
               </a:ext>
             </a:extLst>
           </p:cNvPr>
@@ -18692,7 +18692,7 @@
           <p:nvPr/>
         </p:nvPicPr>
         <p:blipFill>
-          <a:blip xmlns:r="http://schemas.openxmlformats.org/officeDocument/2006/relationships" xmlns:a="http://schemas.openxmlformats.org/drawingml/2006/main" r:embed="R3534d25cb1eb4f0a"/>
+          <a:blip xmlns:r="http://schemas.openxmlformats.org/officeDocument/2006/relationships" xmlns:a="http://schemas.openxmlformats.org/drawingml/2006/main" r:embed="Rc3f9dea3d5584e9b"/>
           <a:stretch xmlns:a="http://schemas.openxmlformats.org/drawingml/2006/main"/>
         </p:blipFill>
         <p:spPr>
@@ -18710,7 +18710,7 @@
     </p:spTree>
     <p:extLst>
       <p:ext uri="{BB962C8B-B14F-4D97-AF65-F5344CB8AC3E}">
-        <p14:creationId xmlns:p14="http://schemas.microsoft.com/office/powerpoint/2010/main" val="1331350726"/>
+        <p14:creationId xmlns:p14="http://schemas.microsoft.com/office/powerpoint/2010/main" val="1829487078"/>
       </p:ext>
     </p:extLst>
   </p:cSld>
@@ -18744,7 +18744,7 @@
           <p:cNvPr id="55" name="">
             <a:extLst xmlns:a="http://schemas.openxmlformats.org/drawingml/2006/main">
               <a:ext uri="{FF2B5EF4-FFF2-40B4-BE49-F238E27FC236}">
-                <a16:creationId xmlns:a16="http://schemas.microsoft.com/office/drawing/2014/main" id="{B1D5AA5A-EAD9-4809-BB89-95CE64825DCC}"/>
+                <a16:creationId xmlns:a16="http://schemas.microsoft.com/office/drawing/2014/main" id="{52EEA6D1-CB68-408E-ADE1-A41A764743DD}"/>
               </a:ext>
             </a:extLst>
           </p:cNvPr>
@@ -18775,7 +18775,7 @@
           <p:cNvPr id="2" name="">
             <a:extLst xmlns:a="http://schemas.openxmlformats.org/drawingml/2006/main">
               <a:ext uri="{FF2B5EF4-FFF2-40B4-BE49-F238E27FC236}">
-                <a16:creationId xmlns:a16="http://schemas.microsoft.com/office/drawing/2014/main" id="{EDD2DDC6-749C-4BA6-AED0-DA2705545F97}"/>
+                <a16:creationId xmlns:a16="http://schemas.microsoft.com/office/drawing/2014/main" id="{5105EBEE-C91B-41F2-A034-3D66D88FB6CE}"/>
               </a:ext>
             </a:extLst>
           </p:cNvPr>
@@ -18837,7 +18837,7 @@
           <p:cNvPr id="3" name="">
             <a:extLst xmlns:a="http://schemas.openxmlformats.org/drawingml/2006/main">
               <a:ext uri="{FF2B5EF4-FFF2-40B4-BE49-F238E27FC236}">
-                <a16:creationId xmlns:a16="http://schemas.microsoft.com/office/drawing/2014/main" id="{C7BB72C0-CCCA-48D3-B171-0F93F2318244}"/>
+                <a16:creationId xmlns:a16="http://schemas.microsoft.com/office/drawing/2014/main" id="{3AF92D24-C2EA-4640-AF75-CFA44E55A8F5}"/>
               </a:ext>
             </a:extLst>
           </p:cNvPr>
@@ -18899,7 +18899,7 @@
           <p:cNvPr id="4" name="">
             <a:extLst xmlns:a="http://schemas.openxmlformats.org/drawingml/2006/main">
               <a:ext uri="{FF2B5EF4-FFF2-40B4-BE49-F238E27FC236}">
-                <a16:creationId xmlns:a16="http://schemas.microsoft.com/office/drawing/2014/main" id="{C7938520-7669-48E1-986A-E23DFE72D81F}"/>
+                <a16:creationId xmlns:a16="http://schemas.microsoft.com/office/drawing/2014/main" id="{BF192272-2192-43AE-9EEB-260167B6A90B}"/>
               </a:ext>
             </a:extLst>
           </p:cNvPr>
@@ -18961,7 +18961,7 @@
           <p:cNvPr id="5" name="">
             <a:extLst xmlns:a="http://schemas.openxmlformats.org/drawingml/2006/main">
               <a:ext uri="{FF2B5EF4-FFF2-40B4-BE49-F238E27FC236}">
-                <a16:creationId xmlns:a16="http://schemas.microsoft.com/office/drawing/2014/main" id="{C2B5C449-88F4-42CB-915F-423262E30373}"/>
+                <a16:creationId xmlns:a16="http://schemas.microsoft.com/office/drawing/2014/main" id="{2444134D-E98D-4746-BC57-9D070EF6FCED}"/>
               </a:ext>
             </a:extLst>
           </p:cNvPr>
@@ -19023,7 +19023,7 @@
           <p:cNvPr id="6" name="">
             <a:extLst xmlns:a="http://schemas.openxmlformats.org/drawingml/2006/main">
               <a:ext uri="{FF2B5EF4-FFF2-40B4-BE49-F238E27FC236}">
-                <a16:creationId xmlns:a16="http://schemas.microsoft.com/office/drawing/2014/main" id="{8B90246E-2380-4773-AD6E-0EBD4F1CA8FB}"/>
+                <a16:creationId xmlns:a16="http://schemas.microsoft.com/office/drawing/2014/main" id="{95CED935-F14E-4A3F-8F5F-C9477AE90318}"/>
               </a:ext>
             </a:extLst>
           </p:cNvPr>
@@ -19085,7 +19085,7 @@
           <p:cNvPr id="7" name="">
             <a:extLst xmlns:a="http://schemas.openxmlformats.org/drawingml/2006/main">
               <a:ext uri="{FF2B5EF4-FFF2-40B4-BE49-F238E27FC236}">
-                <a16:creationId xmlns:a16="http://schemas.microsoft.com/office/drawing/2014/main" id="{FF28F952-7401-412D-B7EB-50B957EBCCD4}"/>
+                <a16:creationId xmlns:a16="http://schemas.microsoft.com/office/drawing/2014/main" id="{9996E836-A438-466E-9984-23BECE11E9D0}"/>
               </a:ext>
             </a:extLst>
           </p:cNvPr>
@@ -19116,7 +19116,7 @@
           <p:cNvPr id="8" name="">
             <a:extLst xmlns:a="http://schemas.openxmlformats.org/drawingml/2006/main">
               <a:ext uri="{FF2B5EF4-FFF2-40B4-BE49-F238E27FC236}">
-                <a16:creationId xmlns:a16="http://schemas.microsoft.com/office/drawing/2014/main" id="{A074E4E2-0A03-4726-AB5B-4EC37972DDC0}"/>
+                <a16:creationId xmlns:a16="http://schemas.microsoft.com/office/drawing/2014/main" id="{1D7ACB2E-89FB-489B-B531-0A5174C6766F}"/>
               </a:ext>
             </a:extLst>
           </p:cNvPr>
@@ -19178,7 +19178,7 @@
           <p:cNvPr id="9" name="">
             <a:extLst xmlns:a="http://schemas.openxmlformats.org/drawingml/2006/main">
               <a:ext uri="{FF2B5EF4-FFF2-40B4-BE49-F238E27FC236}">
-                <a16:creationId xmlns:a16="http://schemas.microsoft.com/office/drawing/2014/main" id="{AC4F3B5E-0793-4D6E-9AF8-6D032419515D}"/>
+                <a16:creationId xmlns:a16="http://schemas.microsoft.com/office/drawing/2014/main" id="{C0B7C9AA-0E54-4614-9031-925B6E2D544B}"/>
               </a:ext>
             </a:extLst>
           </p:cNvPr>
@@ -19209,7 +19209,7 @@
           <p:cNvPr id="10" name="">
             <a:extLst xmlns:a="http://schemas.openxmlformats.org/drawingml/2006/main">
               <a:ext uri="{FF2B5EF4-FFF2-40B4-BE49-F238E27FC236}">
-                <a16:creationId xmlns:a16="http://schemas.microsoft.com/office/drawing/2014/main" id="{0BB0F44F-F0CE-4F46-92D1-FE63D2538F73}"/>
+                <a16:creationId xmlns:a16="http://schemas.microsoft.com/office/drawing/2014/main" id="{A0A9173C-903F-4EBA-B08A-9788F9EB0DBC}"/>
               </a:ext>
             </a:extLst>
           </p:cNvPr>
@@ -19271,7 +19271,7 @@
           <p:cNvPr id="11" name="">
             <a:extLst xmlns:a="http://schemas.openxmlformats.org/drawingml/2006/main">
               <a:ext uri="{FF2B5EF4-FFF2-40B4-BE49-F238E27FC236}">
-                <a16:creationId xmlns:a16="http://schemas.microsoft.com/office/drawing/2014/main" id="{D5F9EC8C-A439-4623-BAF4-F76203784CC9}"/>
+                <a16:creationId xmlns:a16="http://schemas.microsoft.com/office/drawing/2014/main" id="{168379B9-D47F-4C61-8857-DF94D310BFF6}"/>
               </a:ext>
             </a:extLst>
           </p:cNvPr>
@@ -19302,7 +19302,7 @@
           <p:cNvPr id="12" name="">
             <a:extLst xmlns:a="http://schemas.openxmlformats.org/drawingml/2006/main">
               <a:ext uri="{FF2B5EF4-FFF2-40B4-BE49-F238E27FC236}">
-                <a16:creationId xmlns:a16="http://schemas.microsoft.com/office/drawing/2014/main" id="{133F099A-5877-4E1F-BC66-DE1144681F0A}"/>
+                <a16:creationId xmlns:a16="http://schemas.microsoft.com/office/drawing/2014/main" id="{FAA393DA-AE83-4C39-AA6D-0D3866B9ADD7}"/>
               </a:ext>
             </a:extLst>
           </p:cNvPr>
@@ -19364,7 +19364,7 @@
           <p:cNvPr id="13" name="">
             <a:extLst xmlns:a="http://schemas.openxmlformats.org/drawingml/2006/main">
               <a:ext uri="{FF2B5EF4-FFF2-40B4-BE49-F238E27FC236}">
-                <a16:creationId xmlns:a16="http://schemas.microsoft.com/office/drawing/2014/main" id="{210F506E-33F0-4039-8206-6B540237F864}"/>
+                <a16:creationId xmlns:a16="http://schemas.microsoft.com/office/drawing/2014/main" id="{B2E04D02-511F-4D5C-94A8-8E59DB3B3EB8}"/>
               </a:ext>
             </a:extLst>
           </p:cNvPr>
@@ -19397,7 +19397,7 @@
           <p:cNvPr id="14" name="">
             <a:extLst xmlns:a="http://schemas.openxmlformats.org/drawingml/2006/main">
               <a:ext uri="{FF2B5EF4-FFF2-40B4-BE49-F238E27FC236}">
-                <a16:creationId xmlns:a16="http://schemas.microsoft.com/office/drawing/2014/main" id="{5C4236B9-20D0-464E-9844-658AA1E60BAC}"/>
+                <a16:creationId xmlns:a16="http://schemas.microsoft.com/office/drawing/2014/main" id="{30C294FB-C5EE-4861-9285-F0D3DB3C4B41}"/>
               </a:ext>
             </a:extLst>
           </p:cNvPr>
@@ -19459,7 +19459,7 @@
           <p:cNvPr id="15" name="">
             <a:extLst xmlns:a="http://schemas.openxmlformats.org/drawingml/2006/main">
               <a:ext uri="{FF2B5EF4-FFF2-40B4-BE49-F238E27FC236}">
-                <a16:creationId xmlns:a16="http://schemas.microsoft.com/office/drawing/2014/main" id="{53C47761-80CD-46E2-9CFF-AC17ECBF35CF}"/>
+                <a16:creationId xmlns:a16="http://schemas.microsoft.com/office/drawing/2014/main" id="{757AF915-4E10-4D76-86FE-8A08B5021440}"/>
               </a:ext>
             </a:extLst>
           </p:cNvPr>
@@ -19492,7 +19492,7 @@
           <p:cNvPr id="16" name="">
             <a:extLst xmlns:a="http://schemas.openxmlformats.org/drawingml/2006/main">
               <a:ext uri="{FF2B5EF4-FFF2-40B4-BE49-F238E27FC236}">
-                <a16:creationId xmlns:a16="http://schemas.microsoft.com/office/drawing/2014/main" id="{910540A2-F1B4-4997-9CC3-B78698CB5A90}"/>
+                <a16:creationId xmlns:a16="http://schemas.microsoft.com/office/drawing/2014/main" id="{9B602CD6-ECCE-4C60-9B40-733944B63A5C}"/>
               </a:ext>
             </a:extLst>
           </p:cNvPr>
@@ -19554,7 +19554,7 @@
           <p:cNvPr id="17" name="">
             <a:extLst xmlns:a="http://schemas.openxmlformats.org/drawingml/2006/main">
               <a:ext uri="{FF2B5EF4-FFF2-40B4-BE49-F238E27FC236}">
-                <a16:creationId xmlns:a16="http://schemas.microsoft.com/office/drawing/2014/main" id="{10AE5B6B-FB3D-4AF1-BF21-DABA070BED56}"/>
+                <a16:creationId xmlns:a16="http://schemas.microsoft.com/office/drawing/2014/main" id="{B7BBE65F-802E-4F89-BD9D-E5B3296BDAA3}"/>
               </a:ext>
             </a:extLst>
           </p:cNvPr>
@@ -19587,7 +19587,7 @@
           <p:cNvPr id="18" name="">
             <a:extLst xmlns:a="http://schemas.openxmlformats.org/drawingml/2006/main">
               <a:ext uri="{FF2B5EF4-FFF2-40B4-BE49-F238E27FC236}">
-                <a16:creationId xmlns:a16="http://schemas.microsoft.com/office/drawing/2014/main" id="{0F81F6BA-FF40-4661-A29F-9A8B03ECC935}"/>
+                <a16:creationId xmlns:a16="http://schemas.microsoft.com/office/drawing/2014/main" id="{33EEAB09-2AA1-4853-94AA-CB0C465BCE8B}"/>
               </a:ext>
             </a:extLst>
           </p:cNvPr>
@@ -19649,7 +19649,7 @@
           <p:cNvPr id="19" name="">
             <a:extLst xmlns:a="http://schemas.openxmlformats.org/drawingml/2006/main">
               <a:ext uri="{FF2B5EF4-FFF2-40B4-BE49-F238E27FC236}">
-                <a16:creationId xmlns:a16="http://schemas.microsoft.com/office/drawing/2014/main" id="{FADD2214-64CB-4AE5-B0A8-E7C6FD617A5E}"/>
+                <a16:creationId xmlns:a16="http://schemas.microsoft.com/office/drawing/2014/main" id="{69B36282-FB64-4B82-A2F1-1A660B482477}"/>
               </a:ext>
             </a:extLst>
           </p:cNvPr>
@@ -19682,7 +19682,7 @@
           <p:cNvPr id="20" name="">
             <a:extLst xmlns:a="http://schemas.openxmlformats.org/drawingml/2006/main">
               <a:ext uri="{FF2B5EF4-FFF2-40B4-BE49-F238E27FC236}">
-                <a16:creationId xmlns:a16="http://schemas.microsoft.com/office/drawing/2014/main" id="{617895CF-D36B-419B-88EC-0EE20E612B52}"/>
+                <a16:creationId xmlns:a16="http://schemas.microsoft.com/office/drawing/2014/main" id="{48B20AE5-CBAE-4CF7-88D9-370D7B088867}"/>
               </a:ext>
             </a:extLst>
           </p:cNvPr>
@@ -19744,7 +19744,7 @@
           <p:cNvPr id="21" name="">
             <a:extLst xmlns:a="http://schemas.openxmlformats.org/drawingml/2006/main">
               <a:ext uri="{FF2B5EF4-FFF2-40B4-BE49-F238E27FC236}">
-                <a16:creationId xmlns:a16="http://schemas.microsoft.com/office/drawing/2014/main" id="{2E3F922F-DF61-4B1D-BB36-0F0ED1EAE01F}"/>
+                <a16:creationId xmlns:a16="http://schemas.microsoft.com/office/drawing/2014/main" id="{C90D3738-1096-4EE9-B4A8-24BCA92FF4A7}"/>
               </a:ext>
             </a:extLst>
           </p:cNvPr>
@@ -19777,7 +19777,7 @@
           <p:cNvPr id="22" name="">
             <a:extLst xmlns:a="http://schemas.openxmlformats.org/drawingml/2006/main">
               <a:ext uri="{FF2B5EF4-FFF2-40B4-BE49-F238E27FC236}">
-                <a16:creationId xmlns:a16="http://schemas.microsoft.com/office/drawing/2014/main" id="{83DDD333-3BFA-438C-8FBA-FAB3CEC54B8D}"/>
+                <a16:creationId xmlns:a16="http://schemas.microsoft.com/office/drawing/2014/main" id="{0F1E31A2-1060-4AEC-9CF2-A3083EA73228}"/>
               </a:ext>
             </a:extLst>
           </p:cNvPr>
@@ -19839,7 +19839,7 @@
           <p:cNvPr id="23" name="">
             <a:extLst xmlns:a="http://schemas.openxmlformats.org/drawingml/2006/main">
               <a:ext uri="{FF2B5EF4-FFF2-40B4-BE49-F238E27FC236}">
-                <a16:creationId xmlns:a16="http://schemas.microsoft.com/office/drawing/2014/main" id="{CCCF6734-94E5-4122-B086-CF8DB862CE09}"/>
+                <a16:creationId xmlns:a16="http://schemas.microsoft.com/office/drawing/2014/main" id="{17EE5078-FFFF-4123-9948-8489FCE5AAFE}"/>
               </a:ext>
             </a:extLst>
           </p:cNvPr>
@@ -19872,7 +19872,7 @@
           <p:cNvPr id="24" name="">
             <a:extLst xmlns:a="http://schemas.openxmlformats.org/drawingml/2006/main">
               <a:ext uri="{FF2B5EF4-FFF2-40B4-BE49-F238E27FC236}">
-                <a16:creationId xmlns:a16="http://schemas.microsoft.com/office/drawing/2014/main" id="{B5FF72AA-D961-429E-B3C3-092AFE4AC8A7}"/>
+                <a16:creationId xmlns:a16="http://schemas.microsoft.com/office/drawing/2014/main" id="{B713D212-3241-48F3-8548-0158DFBB7B64}"/>
               </a:ext>
             </a:extLst>
           </p:cNvPr>
@@ -19934,7 +19934,7 @@
           <p:cNvPr id="25" name="">
             <a:extLst xmlns:a="http://schemas.openxmlformats.org/drawingml/2006/main">
               <a:ext uri="{FF2B5EF4-FFF2-40B4-BE49-F238E27FC236}">
-                <a16:creationId xmlns:a16="http://schemas.microsoft.com/office/drawing/2014/main" id="{ED5F9E73-1A3D-429C-B49A-8E99E73B6411}"/>
+                <a16:creationId xmlns:a16="http://schemas.microsoft.com/office/drawing/2014/main" id="{FB9B6825-1E9F-4FFC-B86A-808E721EDC39}"/>
               </a:ext>
             </a:extLst>
           </p:cNvPr>
@@ -19967,7 +19967,7 @@
           <p:cNvPr id="26" name="">
             <a:extLst xmlns:a="http://schemas.openxmlformats.org/drawingml/2006/main">
               <a:ext uri="{FF2B5EF4-FFF2-40B4-BE49-F238E27FC236}">
-                <a16:creationId xmlns:a16="http://schemas.microsoft.com/office/drawing/2014/main" id="{276D2AB2-B657-4D2B-8CED-D3AB3204A2C9}"/>
+                <a16:creationId xmlns:a16="http://schemas.microsoft.com/office/drawing/2014/main" id="{A4337A68-40C3-49DF-A001-3E6A0CED67DC}"/>
               </a:ext>
             </a:extLst>
           </p:cNvPr>
@@ -20029,7 +20029,7 @@
           <p:cNvPr id="27" name="">
             <a:extLst xmlns:a="http://schemas.openxmlformats.org/drawingml/2006/main">
               <a:ext uri="{FF2B5EF4-FFF2-40B4-BE49-F238E27FC236}">
-                <a16:creationId xmlns:a16="http://schemas.microsoft.com/office/drawing/2014/main" id="{38CC7F1F-2F1F-4542-854C-01939DB226B5}"/>
+                <a16:creationId xmlns:a16="http://schemas.microsoft.com/office/drawing/2014/main" id="{DE4291D8-2A8D-43BA-B9A6-8C53B9384AF6}"/>
               </a:ext>
             </a:extLst>
           </p:cNvPr>
@@ -20062,7 +20062,7 @@
           <p:cNvPr id="28" name="">
             <a:extLst xmlns:a="http://schemas.openxmlformats.org/drawingml/2006/main">
               <a:ext uri="{FF2B5EF4-FFF2-40B4-BE49-F238E27FC236}">
-                <a16:creationId xmlns:a16="http://schemas.microsoft.com/office/drawing/2014/main" id="{C1959352-10D7-4484-8728-E5EFCC257161}"/>
+                <a16:creationId xmlns:a16="http://schemas.microsoft.com/office/drawing/2014/main" id="{A6B014D3-D84B-4AD3-8A1F-50BEDC9850DC}"/>
               </a:ext>
             </a:extLst>
           </p:cNvPr>
@@ -20124,7 +20124,7 @@
           <p:cNvPr id="29" name="">
             <a:extLst xmlns:a="http://schemas.openxmlformats.org/drawingml/2006/main">
               <a:ext uri="{FF2B5EF4-FFF2-40B4-BE49-F238E27FC236}">
-                <a16:creationId xmlns:a16="http://schemas.microsoft.com/office/drawing/2014/main" id="{3BFD6180-87E1-40E9-B2E4-048332A7C347}"/>
+                <a16:creationId xmlns:a16="http://schemas.microsoft.com/office/drawing/2014/main" id="{7CCEA17C-D3D7-45B2-8733-FB2347543311}"/>
               </a:ext>
             </a:extLst>
           </p:cNvPr>
@@ -20157,7 +20157,7 @@
           <p:cNvPr id="30" name="">
             <a:extLst xmlns:a="http://schemas.openxmlformats.org/drawingml/2006/main">
               <a:ext uri="{FF2B5EF4-FFF2-40B4-BE49-F238E27FC236}">
-                <a16:creationId xmlns:a16="http://schemas.microsoft.com/office/drawing/2014/main" id="{A3942AA3-9332-4C2E-8248-4E58EFB9D338}"/>
+                <a16:creationId xmlns:a16="http://schemas.microsoft.com/office/drawing/2014/main" id="{A17509CA-7C7E-478B-86FB-0ABF0F5CEE24}"/>
               </a:ext>
             </a:extLst>
           </p:cNvPr>
@@ -20219,7 +20219,7 @@
           <p:cNvPr id="31" name="">
             <a:extLst xmlns:a="http://schemas.openxmlformats.org/drawingml/2006/main">
               <a:ext uri="{FF2B5EF4-FFF2-40B4-BE49-F238E27FC236}">
-                <a16:creationId xmlns:a16="http://schemas.microsoft.com/office/drawing/2014/main" id="{7A1A8066-2DDA-48EE-AEE9-AEE810ED2115}"/>
+                <a16:creationId xmlns:a16="http://schemas.microsoft.com/office/drawing/2014/main" id="{1E35DE89-09E8-4387-8F2F-FF6AF635DA14}"/>
               </a:ext>
             </a:extLst>
           </p:cNvPr>
@@ -20252,7 +20252,7 @@
           <p:cNvPr id="32" name="">
             <a:extLst xmlns:a="http://schemas.openxmlformats.org/drawingml/2006/main">
               <a:ext uri="{FF2B5EF4-FFF2-40B4-BE49-F238E27FC236}">
-                <a16:creationId xmlns:a16="http://schemas.microsoft.com/office/drawing/2014/main" id="{788B3FCD-4177-4E16-AE0C-7DC5A9F3E0CE}"/>
+                <a16:creationId xmlns:a16="http://schemas.microsoft.com/office/drawing/2014/main" id="{D5FE4E5C-A251-44CF-96D1-84A46102761C}"/>
               </a:ext>
             </a:extLst>
           </p:cNvPr>
@@ -20314,7 +20314,7 @@
           <p:cNvPr id="33" name="">
             <a:extLst xmlns:a="http://schemas.openxmlformats.org/drawingml/2006/main">
               <a:ext uri="{FF2B5EF4-FFF2-40B4-BE49-F238E27FC236}">
-                <a16:creationId xmlns:a16="http://schemas.microsoft.com/office/drawing/2014/main" id="{42CB39B0-876C-4641-9617-D1E293B5CE03}"/>
+                <a16:creationId xmlns:a16="http://schemas.microsoft.com/office/drawing/2014/main" id="{1D735266-6265-46AB-9B77-34E9CD7C1B92}"/>
               </a:ext>
             </a:extLst>
           </p:cNvPr>
@@ -20347,7 +20347,7 @@
           <p:cNvPr id="34" name="">
             <a:extLst xmlns:a="http://schemas.openxmlformats.org/drawingml/2006/main">
               <a:ext uri="{FF2B5EF4-FFF2-40B4-BE49-F238E27FC236}">
-                <a16:creationId xmlns:a16="http://schemas.microsoft.com/office/drawing/2014/main" id="{C1612116-EF6A-4A42-88C0-5AF399C37B96}"/>
+                <a16:creationId xmlns:a16="http://schemas.microsoft.com/office/drawing/2014/main" id="{46DAAFE5-5A89-4BFE-8D06-A84682D1D49E}"/>
               </a:ext>
             </a:extLst>
           </p:cNvPr>
@@ -20409,7 +20409,7 @@
           <p:cNvPr id="35" name="">
             <a:extLst xmlns:a="http://schemas.openxmlformats.org/drawingml/2006/main">
               <a:ext uri="{FF2B5EF4-FFF2-40B4-BE49-F238E27FC236}">
-                <a16:creationId xmlns:a16="http://schemas.microsoft.com/office/drawing/2014/main" id="{EC938C57-E029-47DA-9C92-99039088DCC5}"/>
+                <a16:creationId xmlns:a16="http://schemas.microsoft.com/office/drawing/2014/main" id="{9E81B638-B082-4D00-9BC2-8C9A711CBD54}"/>
               </a:ext>
             </a:extLst>
           </p:cNvPr>
@@ -20442,7 +20442,7 @@
           <p:cNvPr id="36" name="">
             <a:extLst xmlns:a="http://schemas.openxmlformats.org/drawingml/2006/main">
               <a:ext uri="{FF2B5EF4-FFF2-40B4-BE49-F238E27FC236}">
-                <a16:creationId xmlns:a16="http://schemas.microsoft.com/office/drawing/2014/main" id="{DCC67AFB-A789-4207-BC23-DE8F5865CC86}"/>
+                <a16:creationId xmlns:a16="http://schemas.microsoft.com/office/drawing/2014/main" id="{98B3C582-B203-41BE-813D-4AA76D000F73}"/>
               </a:ext>
             </a:extLst>
           </p:cNvPr>
@@ -20504,7 +20504,7 @@
           <p:cNvPr id="37" name="">
             <a:extLst xmlns:a="http://schemas.openxmlformats.org/drawingml/2006/main">
               <a:ext uri="{FF2B5EF4-FFF2-40B4-BE49-F238E27FC236}">
-                <a16:creationId xmlns:a16="http://schemas.microsoft.com/office/drawing/2014/main" id="{1A343454-A8B7-4049-BF1F-A17018DEA2B1}"/>
+                <a16:creationId xmlns:a16="http://schemas.microsoft.com/office/drawing/2014/main" id="{6ADD4E63-B08C-4069-861E-DFE07FCF4677}"/>
               </a:ext>
             </a:extLst>
           </p:cNvPr>
@@ -20537,7 +20537,7 @@
           <p:cNvPr id="38" name="">
             <a:extLst xmlns:a="http://schemas.openxmlformats.org/drawingml/2006/main">
               <a:ext uri="{FF2B5EF4-FFF2-40B4-BE49-F238E27FC236}">
-                <a16:creationId xmlns:a16="http://schemas.microsoft.com/office/drawing/2014/main" id="{B1B637D8-FC6D-41AD-B4E5-DE32BEC12025}"/>
+                <a16:creationId xmlns:a16="http://schemas.microsoft.com/office/drawing/2014/main" id="{F34AA06A-F0A7-4EEB-B1C4-EA232D96E607}"/>
               </a:ext>
             </a:extLst>
           </p:cNvPr>
@@ -20599,7 +20599,7 @@
           <p:cNvPr id="39" name="">
             <a:extLst xmlns:a="http://schemas.openxmlformats.org/drawingml/2006/main">
               <a:ext uri="{FF2B5EF4-FFF2-40B4-BE49-F238E27FC236}">
-                <a16:creationId xmlns:a16="http://schemas.microsoft.com/office/drawing/2014/main" id="{61743754-A7EB-4E55-B661-2BA1EDE5C919}"/>
+                <a16:creationId xmlns:a16="http://schemas.microsoft.com/office/drawing/2014/main" id="{C86E6CC6-8DAE-41E7-8B0B-7C08D66C45B7}"/>
               </a:ext>
             </a:extLst>
           </p:cNvPr>
@@ -20632,7 +20632,7 @@
           <p:cNvPr id="40" name="">
             <a:extLst xmlns:a="http://schemas.openxmlformats.org/drawingml/2006/main">
               <a:ext uri="{FF2B5EF4-FFF2-40B4-BE49-F238E27FC236}">
-                <a16:creationId xmlns:a16="http://schemas.microsoft.com/office/drawing/2014/main" id="{68F41A42-7FB3-4775-B83E-A14C99E966E8}"/>
+                <a16:creationId xmlns:a16="http://schemas.microsoft.com/office/drawing/2014/main" id="{54CC33CA-AF46-415F-A30D-017D6886743E}"/>
               </a:ext>
             </a:extLst>
           </p:cNvPr>
@@ -20694,7 +20694,7 @@
           <p:cNvPr id="41" name="">
             <a:extLst xmlns:a="http://schemas.openxmlformats.org/drawingml/2006/main">
               <a:ext uri="{FF2B5EF4-FFF2-40B4-BE49-F238E27FC236}">
-                <a16:creationId xmlns:a16="http://schemas.microsoft.com/office/drawing/2014/main" id="{1F9EB67A-4BCD-4B20-A56C-7A2502B936BA}"/>
+                <a16:creationId xmlns:a16="http://schemas.microsoft.com/office/drawing/2014/main" id="{FFB6DA8D-0DA7-4F69-958C-0FCCE9CD6404}"/>
               </a:ext>
             </a:extLst>
           </p:cNvPr>
@@ -20727,7 +20727,7 @@
           <p:cNvPr id="42" name="">
             <a:extLst xmlns:a="http://schemas.openxmlformats.org/drawingml/2006/main">
               <a:ext uri="{FF2B5EF4-FFF2-40B4-BE49-F238E27FC236}">
-                <a16:creationId xmlns:a16="http://schemas.microsoft.com/office/drawing/2014/main" id="{F5FC32EC-EC55-4EFF-B4F8-B2464A55ADC6}"/>
+                <a16:creationId xmlns:a16="http://schemas.microsoft.com/office/drawing/2014/main" id="{80EA8A31-B94B-41FB-9B44-5DC52C4D02F4}"/>
               </a:ext>
             </a:extLst>
           </p:cNvPr>
@@ -20789,7 +20789,7 @@
           <p:cNvPr id="43" name="">
             <a:extLst xmlns:a="http://schemas.openxmlformats.org/drawingml/2006/main">
               <a:ext uri="{FF2B5EF4-FFF2-40B4-BE49-F238E27FC236}">
-                <a16:creationId xmlns:a16="http://schemas.microsoft.com/office/drawing/2014/main" id="{B64268E5-234C-4A6E-9D0D-415844ECAD8C}"/>
+                <a16:creationId xmlns:a16="http://schemas.microsoft.com/office/drawing/2014/main" id="{17B1FB07-B8D6-4DFE-A791-D66C46EDD519}"/>
               </a:ext>
             </a:extLst>
           </p:cNvPr>
@@ -20822,7 +20822,7 @@
           <p:cNvPr id="44" name="">
             <a:extLst xmlns:a="http://schemas.openxmlformats.org/drawingml/2006/main">
               <a:ext uri="{FF2B5EF4-FFF2-40B4-BE49-F238E27FC236}">
-                <a16:creationId xmlns:a16="http://schemas.microsoft.com/office/drawing/2014/main" id="{F80FDE6C-1274-4C27-94C0-D26E1850F23A}"/>
+                <a16:creationId xmlns:a16="http://schemas.microsoft.com/office/drawing/2014/main" id="{2505C058-A7E2-4625-B810-0840388E3D77}"/>
               </a:ext>
             </a:extLst>
           </p:cNvPr>
@@ -20884,7 +20884,7 @@
           <p:cNvPr id="45" name="">
             <a:extLst xmlns:a="http://schemas.openxmlformats.org/drawingml/2006/main">
               <a:ext uri="{FF2B5EF4-FFF2-40B4-BE49-F238E27FC236}">
-                <a16:creationId xmlns:a16="http://schemas.microsoft.com/office/drawing/2014/main" id="{FC7A8DD6-C67F-4F75-81BC-CB7CB1AF0AC8}"/>
+                <a16:creationId xmlns:a16="http://schemas.microsoft.com/office/drawing/2014/main" id="{80941233-3291-4EB1-840E-5CEEB23F02FD}"/>
               </a:ext>
             </a:extLst>
           </p:cNvPr>
@@ -20917,7 +20917,7 @@
           <p:cNvPr id="46" name="">
             <a:extLst xmlns:a="http://schemas.openxmlformats.org/drawingml/2006/main">
               <a:ext uri="{FF2B5EF4-FFF2-40B4-BE49-F238E27FC236}">
-                <a16:creationId xmlns:a16="http://schemas.microsoft.com/office/drawing/2014/main" id="{9AAF1CDE-F74C-41D5-A98B-0FA967BB06C5}"/>
+                <a16:creationId xmlns:a16="http://schemas.microsoft.com/office/drawing/2014/main" id="{D0809A39-9920-45BD-A0B8-D8ADADE29E83}"/>
               </a:ext>
             </a:extLst>
           </p:cNvPr>
@@ -20979,7 +20979,7 @@
           <p:cNvPr id="47" name="">
             <a:extLst xmlns:a="http://schemas.openxmlformats.org/drawingml/2006/main">
               <a:ext uri="{FF2B5EF4-FFF2-40B4-BE49-F238E27FC236}">
-                <a16:creationId xmlns:a16="http://schemas.microsoft.com/office/drawing/2014/main" id="{7D5EBE8C-737F-4304-8C7E-0B4724F30244}"/>
+                <a16:creationId xmlns:a16="http://schemas.microsoft.com/office/drawing/2014/main" id="{7C58C642-407E-4FC3-9B7F-38D35DB79D65}"/>
               </a:ext>
             </a:extLst>
           </p:cNvPr>
@@ -21012,7 +21012,7 @@
           <p:cNvPr id="48" name="">
             <a:extLst xmlns:a="http://schemas.openxmlformats.org/drawingml/2006/main">
               <a:ext uri="{FF2B5EF4-FFF2-40B4-BE49-F238E27FC236}">
-                <a16:creationId xmlns:a16="http://schemas.microsoft.com/office/drawing/2014/main" id="{21AB5296-9ECB-4355-91B9-737555C9A8DE}"/>
+                <a16:creationId xmlns:a16="http://schemas.microsoft.com/office/drawing/2014/main" id="{375AAE2E-5716-4B42-BA5F-B5D8AF827B78}"/>
               </a:ext>
             </a:extLst>
           </p:cNvPr>
@@ -21074,7 +21074,7 @@
           <p:cNvPr id="49" name="">
             <a:extLst xmlns:a="http://schemas.openxmlformats.org/drawingml/2006/main">
               <a:ext uri="{FF2B5EF4-FFF2-40B4-BE49-F238E27FC236}">
-                <a16:creationId xmlns:a16="http://schemas.microsoft.com/office/drawing/2014/main" id="{A21FCEF9-C842-4A3E-BCAC-6E3F6B682277}"/>
+                <a16:creationId xmlns:a16="http://schemas.microsoft.com/office/drawing/2014/main" id="{B32EC0D5-FD11-41B7-B1FC-8CF1E702D212}"/>
               </a:ext>
             </a:extLst>
           </p:cNvPr>
@@ -21107,7 +21107,7 @@
           <p:cNvPr id="50" name="">
             <a:extLst xmlns:a="http://schemas.openxmlformats.org/drawingml/2006/main">
               <a:ext uri="{FF2B5EF4-FFF2-40B4-BE49-F238E27FC236}">
-                <a16:creationId xmlns:a16="http://schemas.microsoft.com/office/drawing/2014/main" id="{0F290569-3BD3-4EA2-BBEF-B588D68C721F}"/>
+                <a16:creationId xmlns:a16="http://schemas.microsoft.com/office/drawing/2014/main" id="{DFD8D1FA-052D-4A66-9F92-05DA75A71416}"/>
               </a:ext>
             </a:extLst>
           </p:cNvPr>
@@ -21169,7 +21169,7 @@
           <p:cNvPr id="51" name="">
             <a:extLst xmlns:a="http://schemas.openxmlformats.org/drawingml/2006/main">
               <a:ext uri="{FF2B5EF4-FFF2-40B4-BE49-F238E27FC236}">
-                <a16:creationId xmlns:a16="http://schemas.microsoft.com/office/drawing/2014/main" id="{2BA93270-1A25-488C-B76B-FBE1DA82FCF0}"/>
+                <a16:creationId xmlns:a16="http://schemas.microsoft.com/office/drawing/2014/main" id="{C3B020A2-30DF-481D-9926-54C5D9195D8E}"/>
               </a:ext>
             </a:extLst>
           </p:cNvPr>
@@ -21202,7 +21202,7 @@
           <p:cNvPr id="52" name="">
             <a:extLst xmlns:a="http://schemas.openxmlformats.org/drawingml/2006/main">
               <a:ext uri="{FF2B5EF4-FFF2-40B4-BE49-F238E27FC236}">
-                <a16:creationId xmlns:a16="http://schemas.microsoft.com/office/drawing/2014/main" id="{2F5C62ED-F986-4780-9083-0CDDBEBE4D87}"/>
+                <a16:creationId xmlns:a16="http://schemas.microsoft.com/office/drawing/2014/main" id="{19214B92-7754-4255-A09B-868361E5F7C0}"/>
               </a:ext>
             </a:extLst>
           </p:cNvPr>
@@ -21264,7 +21264,7 @@
           <p:cNvPr id="53" name="">
             <a:extLst xmlns:a="http://schemas.openxmlformats.org/drawingml/2006/main">
               <a:ext uri="{FF2B5EF4-FFF2-40B4-BE49-F238E27FC236}">
-                <a16:creationId xmlns:a16="http://schemas.microsoft.com/office/drawing/2014/main" id="{88169554-78AC-47FD-9A6C-E443F29C54A7}"/>
+                <a16:creationId xmlns:a16="http://schemas.microsoft.com/office/drawing/2014/main" id="{1C4CD844-F2AF-4E8E-A528-3A9BA009898C}"/>
               </a:ext>
             </a:extLst>
           </p:cNvPr>
@@ -21297,7 +21297,7 @@
           <p:cNvPr id="54" name="">
             <a:extLst xmlns:a="http://schemas.openxmlformats.org/drawingml/2006/main">
               <a:ext uri="{FF2B5EF4-FFF2-40B4-BE49-F238E27FC236}">
-                <a16:creationId xmlns:a16="http://schemas.microsoft.com/office/drawing/2014/main" id="{21DF6C7A-FC59-47DD-BADC-FE4836032861}"/>
+                <a16:creationId xmlns:a16="http://schemas.microsoft.com/office/drawing/2014/main" id="{677364B9-DB7D-4A18-91A4-DE3677F8DACE}"/>
               </a:ext>
             </a:extLst>
           </p:cNvPr>
@@ -21357,7 +21357,7 @@
     </p:spTree>
     <p:extLst>
       <p:ext uri="{BB962C8B-B14F-4D97-AF65-F5344CB8AC3E}">
-        <p14:creationId xmlns:p14="http://schemas.microsoft.com/office/powerpoint/2010/main" val="1582175653"/>
+        <p14:creationId xmlns:p14="http://schemas.microsoft.com/office/powerpoint/2010/main" val="1286769400"/>
       </p:ext>
     </p:extLst>
   </p:cSld>
@@ -21391,7 +21391,7 @@
           <p:cNvPr id="30" name="">
             <a:extLst xmlns:a="http://schemas.openxmlformats.org/drawingml/2006/main">
               <a:ext uri="{FF2B5EF4-FFF2-40B4-BE49-F238E27FC236}">
-                <a16:creationId xmlns:a16="http://schemas.microsoft.com/office/drawing/2014/main" id="{6CB101A2-2B17-4656-A3DC-C5BD1EA4EF00}"/>
+                <a16:creationId xmlns:a16="http://schemas.microsoft.com/office/drawing/2014/main" id="{78ADE48C-D7DD-4070-8A89-0D3CBD3658BB}"/>
               </a:ext>
             </a:extLst>
           </p:cNvPr>
@@ -21422,7 +21422,7 @@
           <p:cNvPr id="2" name="">
             <a:extLst xmlns:a="http://schemas.openxmlformats.org/drawingml/2006/main">
               <a:ext uri="{FF2B5EF4-FFF2-40B4-BE49-F238E27FC236}">
-                <a16:creationId xmlns:a16="http://schemas.microsoft.com/office/drawing/2014/main" id="{5A125337-C516-4A7F-903C-54075CA7BADA}"/>
+                <a16:creationId xmlns:a16="http://schemas.microsoft.com/office/drawing/2014/main" id="{C719AA5C-F03C-4BFE-89B2-1970D8F7B5A9}"/>
               </a:ext>
             </a:extLst>
           </p:cNvPr>
@@ -21484,7 +21484,7 @@
           <p:cNvPr id="3" name="">
             <a:extLst xmlns:a="http://schemas.openxmlformats.org/drawingml/2006/main">
               <a:ext uri="{FF2B5EF4-FFF2-40B4-BE49-F238E27FC236}">
-                <a16:creationId xmlns:a16="http://schemas.microsoft.com/office/drawing/2014/main" id="{F4BDF31C-718E-4B66-8FD2-94F4443DDD0C}"/>
+                <a16:creationId xmlns:a16="http://schemas.microsoft.com/office/drawing/2014/main" id="{2D9C23E9-1A29-47E5-BA4F-8CAB8232DC80}"/>
               </a:ext>
             </a:extLst>
           </p:cNvPr>
@@ -21546,7 +21546,7 @@
           <p:cNvPr id="4" name="">
             <a:extLst xmlns:a="http://schemas.openxmlformats.org/drawingml/2006/main">
               <a:ext uri="{FF2B5EF4-FFF2-40B4-BE49-F238E27FC236}">
-                <a16:creationId xmlns:a16="http://schemas.microsoft.com/office/drawing/2014/main" id="{ED35B0E6-A48D-48A9-A58A-7BE9982B2104}"/>
+                <a16:creationId xmlns:a16="http://schemas.microsoft.com/office/drawing/2014/main" id="{E0063AA9-D6DE-497A-86B8-D209000C9AA7}"/>
               </a:ext>
             </a:extLst>
           </p:cNvPr>
@@ -21608,7 +21608,7 @@
           <p:cNvPr id="5" name="">
             <a:extLst xmlns:a="http://schemas.openxmlformats.org/drawingml/2006/main">
               <a:ext uri="{FF2B5EF4-FFF2-40B4-BE49-F238E27FC236}">
-                <a16:creationId xmlns:a16="http://schemas.microsoft.com/office/drawing/2014/main" id="{0096FE70-DE1E-423A-BE0C-2C5DFE518D60}"/>
+                <a16:creationId xmlns:a16="http://schemas.microsoft.com/office/drawing/2014/main" id="{07388B51-4093-48AC-B619-12DF2015FC5B}"/>
               </a:ext>
             </a:extLst>
           </p:cNvPr>
@@ -21670,7 +21670,7 @@
           <p:cNvPr id="6" name="">
             <a:extLst xmlns:a="http://schemas.openxmlformats.org/drawingml/2006/main">
               <a:ext uri="{FF2B5EF4-FFF2-40B4-BE49-F238E27FC236}">
-                <a16:creationId xmlns:a16="http://schemas.microsoft.com/office/drawing/2014/main" id="{876913CF-6579-424C-B499-7995BEA454EC}"/>
+                <a16:creationId xmlns:a16="http://schemas.microsoft.com/office/drawing/2014/main" id="{3127BDA4-5A85-4C01-AEB9-9195D5E8711C}"/>
               </a:ext>
             </a:extLst>
           </p:cNvPr>
@@ -21732,7 +21732,7 @@
           <p:cNvPr id="7" name="">
             <a:extLst xmlns:a="http://schemas.openxmlformats.org/drawingml/2006/main">
               <a:ext uri="{FF2B5EF4-FFF2-40B4-BE49-F238E27FC236}">
-                <a16:creationId xmlns:a16="http://schemas.microsoft.com/office/drawing/2014/main" id="{15CD1783-0EA3-429C-8CB1-D023D9E2DD1B}"/>
+                <a16:creationId xmlns:a16="http://schemas.microsoft.com/office/drawing/2014/main" id="{866ABF54-14E4-43A1-B0A3-BFC86C092251}"/>
               </a:ext>
             </a:extLst>
           </p:cNvPr>
@@ -21765,7 +21765,7 @@
           <p:cNvPr id="8" name="">
             <a:extLst xmlns:a="http://schemas.openxmlformats.org/drawingml/2006/main">
               <a:ext uri="{FF2B5EF4-FFF2-40B4-BE49-F238E27FC236}">
-                <a16:creationId xmlns:a16="http://schemas.microsoft.com/office/drawing/2014/main" id="{128B9005-00DC-4740-AC2B-C16F0E96F9FD}"/>
+                <a16:creationId xmlns:a16="http://schemas.microsoft.com/office/drawing/2014/main" id="{822096EE-1FCE-4FCF-A766-5B07708818D5}"/>
               </a:ext>
             </a:extLst>
           </p:cNvPr>
@@ -21798,7 +21798,7 @@
           <p:cNvPr id="9" name="">
             <a:extLst xmlns:a="http://schemas.openxmlformats.org/drawingml/2006/main">
               <a:ext uri="{FF2B5EF4-FFF2-40B4-BE49-F238E27FC236}">
-                <a16:creationId xmlns:a16="http://schemas.microsoft.com/office/drawing/2014/main" id="{5B22C8F2-9437-44D9-8196-80E2B65188A3}"/>
+                <a16:creationId xmlns:a16="http://schemas.microsoft.com/office/drawing/2014/main" id="{7E823D0E-48F0-4E9A-AA8D-02497854CB0E}"/>
               </a:ext>
             </a:extLst>
           </p:cNvPr>
@@ -21860,7 +21860,7 @@
           <p:cNvPr id="10" name="">
             <a:extLst xmlns:a="http://schemas.openxmlformats.org/drawingml/2006/main">
               <a:ext uri="{FF2B5EF4-FFF2-40B4-BE49-F238E27FC236}">
-                <a16:creationId xmlns:a16="http://schemas.microsoft.com/office/drawing/2014/main" id="{067495F2-461F-4490-8BA8-D75A38A0FEF9}"/>
+                <a16:creationId xmlns:a16="http://schemas.microsoft.com/office/drawing/2014/main" id="{811493C6-176D-47DF-8053-E24663F7B093}"/>
               </a:ext>
             </a:extLst>
           </p:cNvPr>
@@ -21922,7 +21922,7 @@
           <p:cNvPr id="11" name="">
             <a:extLst xmlns:a="http://schemas.openxmlformats.org/drawingml/2006/main">
               <a:ext uri="{FF2B5EF4-FFF2-40B4-BE49-F238E27FC236}">
-                <a16:creationId xmlns:a16="http://schemas.microsoft.com/office/drawing/2014/main" id="{0816EC59-7F4F-4C34-86DB-4ED06E97EFCB}"/>
+                <a16:creationId xmlns:a16="http://schemas.microsoft.com/office/drawing/2014/main" id="{840169D2-8F24-4680-8F79-81F146FEA6ED}"/>
               </a:ext>
             </a:extLst>
           </p:cNvPr>
@@ -21984,7 +21984,7 @@
           <p:cNvPr id="12" name="">
             <a:extLst xmlns:a="http://schemas.openxmlformats.org/drawingml/2006/main">
               <a:ext uri="{FF2B5EF4-FFF2-40B4-BE49-F238E27FC236}">
-                <a16:creationId xmlns:a16="http://schemas.microsoft.com/office/drawing/2014/main" id="{9CFC0D0C-8B86-4ACB-87F3-9E93B5E70DE4}"/>
+                <a16:creationId xmlns:a16="http://schemas.microsoft.com/office/drawing/2014/main" id="{320128C7-7C88-42A7-AF30-C953AD7F8800}"/>
               </a:ext>
             </a:extLst>
           </p:cNvPr>
@@ -22024,7 +22024,7 @@
           <p:cNvPr id="13" name="">
             <a:extLst xmlns:a="http://schemas.openxmlformats.org/drawingml/2006/main">
               <a:ext uri="{FF2B5EF4-FFF2-40B4-BE49-F238E27FC236}">
-                <a16:creationId xmlns:a16="http://schemas.microsoft.com/office/drawing/2014/main" id="{BC0F9089-6E13-41D5-BB22-7B1146EFBC53}"/>
+                <a16:creationId xmlns:a16="http://schemas.microsoft.com/office/drawing/2014/main" id="{A06B0985-417E-46A9-8490-E345A67069CC}"/>
               </a:ext>
             </a:extLst>
           </p:cNvPr>
@@ -22086,7 +22086,7 @@
           <p:cNvPr id="14" name="">
             <a:extLst xmlns:a="http://schemas.openxmlformats.org/drawingml/2006/main">
               <a:ext uri="{FF2B5EF4-FFF2-40B4-BE49-F238E27FC236}">
-                <a16:creationId xmlns:a16="http://schemas.microsoft.com/office/drawing/2014/main" id="{4880B783-11A2-4DF8-AE1F-2726F057AE7F}"/>
+                <a16:creationId xmlns:a16="http://schemas.microsoft.com/office/drawing/2014/main" id="{FAE6DFE6-B564-4C2C-ABB7-D5036F59B2E9}"/>
               </a:ext>
             </a:extLst>
           </p:cNvPr>
@@ -22148,7 +22148,7 @@
           <p:cNvPr id="15" name="">
             <a:extLst xmlns:a="http://schemas.openxmlformats.org/drawingml/2006/main">
               <a:ext uri="{FF2B5EF4-FFF2-40B4-BE49-F238E27FC236}">
-                <a16:creationId xmlns:a16="http://schemas.microsoft.com/office/drawing/2014/main" id="{47197808-B1B2-4D10-A731-F575DE23C2C8}"/>
+                <a16:creationId xmlns:a16="http://schemas.microsoft.com/office/drawing/2014/main" id="{D5B5D171-5BDA-4DEB-BAA7-68600DC46961}"/>
               </a:ext>
             </a:extLst>
           </p:cNvPr>
@@ -22188,7 +22188,7 @@
           <p:cNvPr id="16" name="">
             <a:extLst xmlns:a="http://schemas.openxmlformats.org/drawingml/2006/main">
               <a:ext uri="{FF2B5EF4-FFF2-40B4-BE49-F238E27FC236}">
-                <a16:creationId xmlns:a16="http://schemas.microsoft.com/office/drawing/2014/main" id="{A6C3442F-8F8C-4B13-AACD-E84950A658B6}"/>
+                <a16:creationId xmlns:a16="http://schemas.microsoft.com/office/drawing/2014/main" id="{AAD74593-7E3F-455F-8D1F-AC7FA934E406}"/>
               </a:ext>
             </a:extLst>
           </p:cNvPr>
@@ -22250,7 +22250,7 @@
           <p:cNvPr id="17" name="">
             <a:extLst xmlns:a="http://schemas.openxmlformats.org/drawingml/2006/main">
               <a:ext uri="{FF2B5EF4-FFF2-40B4-BE49-F238E27FC236}">
-                <a16:creationId xmlns:a16="http://schemas.microsoft.com/office/drawing/2014/main" id="{121799A6-E280-4C24-AAE2-DA803B1EBD10}"/>
+                <a16:creationId xmlns:a16="http://schemas.microsoft.com/office/drawing/2014/main" id="{6CE3433F-5590-47FB-AEFC-15B66C70E614}"/>
               </a:ext>
             </a:extLst>
           </p:cNvPr>
@@ -22312,7 +22312,7 @@
           <p:cNvPr id="18" name="">
             <a:extLst xmlns:a="http://schemas.openxmlformats.org/drawingml/2006/main">
               <a:ext uri="{FF2B5EF4-FFF2-40B4-BE49-F238E27FC236}">
-                <a16:creationId xmlns:a16="http://schemas.microsoft.com/office/drawing/2014/main" id="{F8618218-1358-40EC-B6A5-2F8B340BD5D5}"/>
+                <a16:creationId xmlns:a16="http://schemas.microsoft.com/office/drawing/2014/main" id="{099DFB64-63A3-47B7-8A54-697EAD6E406A}"/>
               </a:ext>
             </a:extLst>
           </p:cNvPr>
@@ -22345,7 +22345,7 @@
           <p:cNvPr id="19" name="">
             <a:extLst xmlns:a="http://schemas.openxmlformats.org/drawingml/2006/main">
               <a:ext uri="{FF2B5EF4-FFF2-40B4-BE49-F238E27FC236}">
-                <a16:creationId xmlns:a16="http://schemas.microsoft.com/office/drawing/2014/main" id="{5C05D540-FC56-4D07-94A9-11D2C3BEF1AB}"/>
+                <a16:creationId xmlns:a16="http://schemas.microsoft.com/office/drawing/2014/main" id="{406E79EA-422B-4CC4-A0D3-5F10DECDBA09}"/>
               </a:ext>
             </a:extLst>
           </p:cNvPr>
@@ -22378,7 +22378,7 @@
           <p:cNvPr id="20" name="">
             <a:extLst xmlns:a="http://schemas.openxmlformats.org/drawingml/2006/main">
               <a:ext uri="{FF2B5EF4-FFF2-40B4-BE49-F238E27FC236}">
-                <a16:creationId xmlns:a16="http://schemas.microsoft.com/office/drawing/2014/main" id="{59F92DE8-753D-41CE-9170-D6A073185B9D}"/>
+                <a16:creationId xmlns:a16="http://schemas.microsoft.com/office/drawing/2014/main" id="{6986E188-F710-4D7B-BD20-F0A11AF7D082}"/>
               </a:ext>
             </a:extLst>
           </p:cNvPr>
@@ -22440,7 +22440,7 @@
           <p:cNvPr id="21" name="">
             <a:extLst xmlns:a="http://schemas.openxmlformats.org/drawingml/2006/main">
               <a:ext uri="{FF2B5EF4-FFF2-40B4-BE49-F238E27FC236}">
-                <a16:creationId xmlns:a16="http://schemas.microsoft.com/office/drawing/2014/main" id="{3A3B0A3C-D359-4286-A4E1-194A4F0BC547}"/>
+                <a16:creationId xmlns:a16="http://schemas.microsoft.com/office/drawing/2014/main" id="{8C33ADE8-5A30-40E6-A54C-15C88E525D50}"/>
               </a:ext>
             </a:extLst>
           </p:cNvPr>
@@ -22502,7 +22502,7 @@
           <p:cNvPr id="22" name="">
             <a:extLst xmlns:a="http://schemas.openxmlformats.org/drawingml/2006/main">
               <a:ext uri="{FF2B5EF4-FFF2-40B4-BE49-F238E27FC236}">
-                <a16:creationId xmlns:a16="http://schemas.microsoft.com/office/drawing/2014/main" id="{C79A5F47-6035-4885-8CDC-6F187BF4B309}"/>
+                <a16:creationId xmlns:a16="http://schemas.microsoft.com/office/drawing/2014/main" id="{E1E9D711-3544-48C3-B8D1-2BDA691712C9}"/>
               </a:ext>
             </a:extLst>
           </p:cNvPr>
@@ -22564,7 +22564,7 @@
           <p:cNvPr id="23" name="">
             <a:extLst xmlns:a="http://schemas.openxmlformats.org/drawingml/2006/main">
               <a:ext uri="{FF2B5EF4-FFF2-40B4-BE49-F238E27FC236}">
-                <a16:creationId xmlns:a16="http://schemas.microsoft.com/office/drawing/2014/main" id="{2A63929D-78F3-410D-A5FC-F2DA9E51AFDE}"/>
+                <a16:creationId xmlns:a16="http://schemas.microsoft.com/office/drawing/2014/main" id="{8E48EB3D-C45D-48E3-9547-FF25AD7D8DF0}"/>
               </a:ext>
             </a:extLst>
           </p:cNvPr>
@@ -22604,7 +22604,7 @@
           <p:cNvPr id="24" name="">
             <a:extLst xmlns:a="http://schemas.openxmlformats.org/drawingml/2006/main">
               <a:ext uri="{FF2B5EF4-FFF2-40B4-BE49-F238E27FC236}">
-                <a16:creationId xmlns:a16="http://schemas.microsoft.com/office/drawing/2014/main" id="{0A5A02DF-05FF-4700-A0F8-1360BDA80A1D}"/>
+                <a16:creationId xmlns:a16="http://schemas.microsoft.com/office/drawing/2014/main" id="{2CDF1109-4249-4005-AF65-3C0D4F530F80}"/>
               </a:ext>
             </a:extLst>
           </p:cNvPr>
@@ -22666,7 +22666,7 @@
           <p:cNvPr id="25" name="">
             <a:extLst xmlns:a="http://schemas.openxmlformats.org/drawingml/2006/main">
               <a:ext uri="{FF2B5EF4-FFF2-40B4-BE49-F238E27FC236}">
-                <a16:creationId xmlns:a16="http://schemas.microsoft.com/office/drawing/2014/main" id="{3399BB16-F77A-45D1-AE95-3CA77F76A265}"/>
+                <a16:creationId xmlns:a16="http://schemas.microsoft.com/office/drawing/2014/main" id="{6E50412A-AB69-4030-BDEA-B608C0AD4EB8}"/>
               </a:ext>
             </a:extLst>
           </p:cNvPr>
@@ -22728,7 +22728,7 @@
           <p:cNvPr id="26" name="">
             <a:extLst xmlns:a="http://schemas.openxmlformats.org/drawingml/2006/main">
               <a:ext uri="{FF2B5EF4-FFF2-40B4-BE49-F238E27FC236}">
-                <a16:creationId xmlns:a16="http://schemas.microsoft.com/office/drawing/2014/main" id="{7D98FB53-81FB-4FF3-AF27-E3B1E57671FB}"/>
+                <a16:creationId xmlns:a16="http://schemas.microsoft.com/office/drawing/2014/main" id="{00A70BB2-2145-4212-A90C-15811867DA53}"/>
               </a:ext>
             </a:extLst>
           </p:cNvPr>
@@ -22790,7 +22790,7 @@
           <p:cNvPr id="27" name="">
             <a:extLst xmlns:a="http://schemas.openxmlformats.org/drawingml/2006/main">
               <a:ext uri="{FF2B5EF4-FFF2-40B4-BE49-F238E27FC236}">
-                <a16:creationId xmlns:a16="http://schemas.microsoft.com/office/drawing/2014/main" id="{80413AC5-8BA5-42FA-908A-0A398E54B5DB}"/>
+                <a16:creationId xmlns:a16="http://schemas.microsoft.com/office/drawing/2014/main" id="{0A0EFA91-DF6E-40BE-AD9F-0AC9962E5BFD}"/>
               </a:ext>
             </a:extLst>
           </p:cNvPr>
@@ -22852,7 +22852,7 @@
           <p:cNvPr id="28" name="">
             <a:extLst xmlns:a="http://schemas.openxmlformats.org/drawingml/2006/main">
               <a:ext uri="{FF2B5EF4-FFF2-40B4-BE49-F238E27FC236}">
-                <a16:creationId xmlns:a16="http://schemas.microsoft.com/office/drawing/2014/main" id="{118FA24A-1628-41E3-B924-5CAD3D5D8FD5}"/>
+                <a16:creationId xmlns:a16="http://schemas.microsoft.com/office/drawing/2014/main" id="{C402ED86-7B98-4FDF-BF50-9477E186229F}"/>
               </a:ext>
             </a:extLst>
           </p:cNvPr>
@@ -22892,7 +22892,7 @@
           <p:cNvPr id="29" name="">
             <a:extLst xmlns:a="http://schemas.openxmlformats.org/drawingml/2006/main">
               <a:ext uri="{FF2B5EF4-FFF2-40B4-BE49-F238E27FC236}">
-                <a16:creationId xmlns:a16="http://schemas.microsoft.com/office/drawing/2014/main" id="{C6E39D0B-65DB-4141-A1DB-C8B6CC11688A}"/>
+                <a16:creationId xmlns:a16="http://schemas.microsoft.com/office/drawing/2014/main" id="{1FD7897B-0534-4F1D-997F-280501CB1071}"/>
               </a:ext>
             </a:extLst>
           </p:cNvPr>
@@ -22952,7 +22952,7 @@
     </p:spTree>
     <p:extLst>
       <p:ext uri="{BB962C8B-B14F-4D97-AF65-F5344CB8AC3E}">
-        <p14:creationId xmlns:p14="http://schemas.microsoft.com/office/powerpoint/2010/main" val="284128003"/>
+        <p14:creationId xmlns:p14="http://schemas.microsoft.com/office/powerpoint/2010/main" val="1423135210"/>
       </p:ext>
     </p:extLst>
   </p:cSld>
@@ -22986,7 +22986,7 @@
           <p:cNvPr id="30" name="">
             <a:extLst xmlns:a="http://schemas.openxmlformats.org/drawingml/2006/main">
               <a:ext uri="{FF2B5EF4-FFF2-40B4-BE49-F238E27FC236}">
-                <a16:creationId xmlns:a16="http://schemas.microsoft.com/office/drawing/2014/main" id="{A5757966-592B-46A6-A340-920E535AC60A}"/>
+                <a16:creationId xmlns:a16="http://schemas.microsoft.com/office/drawing/2014/main" id="{5502459B-AA7D-4005-87C7-C8ADE7745602}"/>
               </a:ext>
             </a:extLst>
           </p:cNvPr>
@@ -23017,7 +23017,7 @@
           <p:cNvPr id="2" name="">
             <a:extLst xmlns:a="http://schemas.openxmlformats.org/drawingml/2006/main">
               <a:ext uri="{FF2B5EF4-FFF2-40B4-BE49-F238E27FC236}">
-                <a16:creationId xmlns:a16="http://schemas.microsoft.com/office/drawing/2014/main" id="{1754FE3B-4D40-4189-AAE7-797CBF5A5C8F}"/>
+                <a16:creationId xmlns:a16="http://schemas.microsoft.com/office/drawing/2014/main" id="{C97B9552-B537-4823-B470-6B14734A6301}"/>
               </a:ext>
             </a:extLst>
           </p:cNvPr>
@@ -23079,7 +23079,7 @@
           <p:cNvPr id="3" name="">
             <a:extLst xmlns:a="http://schemas.openxmlformats.org/drawingml/2006/main">
               <a:ext uri="{FF2B5EF4-FFF2-40B4-BE49-F238E27FC236}">
-                <a16:creationId xmlns:a16="http://schemas.microsoft.com/office/drawing/2014/main" id="{52DD5932-F530-4779-A7A0-A2BF0A21D386}"/>
+                <a16:creationId xmlns:a16="http://schemas.microsoft.com/office/drawing/2014/main" id="{086505CF-98FC-4141-AC43-60C6FF8AB718}"/>
               </a:ext>
             </a:extLst>
           </p:cNvPr>
@@ -23141,7 +23141,7 @@
           <p:cNvPr id="4" name="">
             <a:extLst xmlns:a="http://schemas.openxmlformats.org/drawingml/2006/main">
               <a:ext uri="{FF2B5EF4-FFF2-40B4-BE49-F238E27FC236}">
-                <a16:creationId xmlns:a16="http://schemas.microsoft.com/office/drawing/2014/main" id="{F78D94E5-D6AA-4A13-A167-0A9F9D8D566F}"/>
+                <a16:creationId xmlns:a16="http://schemas.microsoft.com/office/drawing/2014/main" id="{516A1BBE-1695-47D9-AB25-749085AE64A6}"/>
               </a:ext>
             </a:extLst>
           </p:cNvPr>
@@ -23203,7 +23203,7 @@
           <p:cNvPr id="5" name="">
             <a:extLst xmlns:a="http://schemas.openxmlformats.org/drawingml/2006/main">
               <a:ext uri="{FF2B5EF4-FFF2-40B4-BE49-F238E27FC236}">
-                <a16:creationId xmlns:a16="http://schemas.microsoft.com/office/drawing/2014/main" id="{596CF71A-97D8-46CA-BD36-898C0ADEC36C}"/>
+                <a16:creationId xmlns:a16="http://schemas.microsoft.com/office/drawing/2014/main" id="{EDCECBF5-BC25-42A8-81A6-34CCBD0F2A9B}"/>
               </a:ext>
             </a:extLst>
           </p:cNvPr>
@@ -23265,7 +23265,7 @@
           <p:cNvPr id="6" name="">
             <a:extLst xmlns:a="http://schemas.openxmlformats.org/drawingml/2006/main">
               <a:ext uri="{FF2B5EF4-FFF2-40B4-BE49-F238E27FC236}">
-                <a16:creationId xmlns:a16="http://schemas.microsoft.com/office/drawing/2014/main" id="{43EE4FF3-5CA5-4FCC-A40A-E502C0A850AF}"/>
+                <a16:creationId xmlns:a16="http://schemas.microsoft.com/office/drawing/2014/main" id="{374B52C3-254A-426C-A4D6-BC98535224C9}"/>
               </a:ext>
             </a:extLst>
           </p:cNvPr>
@@ -23327,7 +23327,7 @@
           <p:cNvPr id="7" name="">
             <a:extLst xmlns:a="http://schemas.openxmlformats.org/drawingml/2006/main">
               <a:ext uri="{FF2B5EF4-FFF2-40B4-BE49-F238E27FC236}">
-                <a16:creationId xmlns:a16="http://schemas.microsoft.com/office/drawing/2014/main" id="{E7773480-1EE1-4FE5-BC30-16879AF7925D}"/>
+                <a16:creationId xmlns:a16="http://schemas.microsoft.com/office/drawing/2014/main" id="{5514D10F-D20C-44C2-9987-8E89831A3832}"/>
               </a:ext>
             </a:extLst>
           </p:cNvPr>
@@ -23360,7 +23360,7 @@
           <p:cNvPr id="8" name="">
             <a:extLst xmlns:a="http://schemas.openxmlformats.org/drawingml/2006/main">
               <a:ext uri="{FF2B5EF4-FFF2-40B4-BE49-F238E27FC236}">
-                <a16:creationId xmlns:a16="http://schemas.microsoft.com/office/drawing/2014/main" id="{DD8F9AFA-AA4E-494D-8959-4586789A1B8D}"/>
+                <a16:creationId xmlns:a16="http://schemas.microsoft.com/office/drawing/2014/main" id="{A06226D7-59DE-4EA7-86D6-00D9F955431B}"/>
               </a:ext>
             </a:extLst>
           </p:cNvPr>
@@ -23393,7 +23393,7 @@
           <p:cNvPr id="9" name="">
             <a:extLst xmlns:a="http://schemas.openxmlformats.org/drawingml/2006/main">
               <a:ext uri="{FF2B5EF4-FFF2-40B4-BE49-F238E27FC236}">
-                <a16:creationId xmlns:a16="http://schemas.microsoft.com/office/drawing/2014/main" id="{AEF3980D-6F41-43EB-8585-8310909F0277}"/>
+                <a16:creationId xmlns:a16="http://schemas.microsoft.com/office/drawing/2014/main" id="{A7715A90-CDD0-450E-93C4-B8ACC0426C8B}"/>
               </a:ext>
             </a:extLst>
           </p:cNvPr>
@@ -23455,7 +23455,7 @@
           <p:cNvPr id="10" name="">
             <a:extLst xmlns:a="http://schemas.openxmlformats.org/drawingml/2006/main">
               <a:ext uri="{FF2B5EF4-FFF2-40B4-BE49-F238E27FC236}">
-                <a16:creationId xmlns:a16="http://schemas.microsoft.com/office/drawing/2014/main" id="{595A4F1C-D1CA-4CCD-A477-7A781655D1C9}"/>
+                <a16:creationId xmlns:a16="http://schemas.microsoft.com/office/drawing/2014/main" id="{E61E68E0-9A77-42FC-A588-B4CA549D7E77}"/>
               </a:ext>
             </a:extLst>
           </p:cNvPr>
@@ -23517,7 +23517,7 @@
           <p:cNvPr id="11" name="">
             <a:extLst xmlns:a="http://schemas.openxmlformats.org/drawingml/2006/main">
               <a:ext uri="{FF2B5EF4-FFF2-40B4-BE49-F238E27FC236}">
-                <a16:creationId xmlns:a16="http://schemas.microsoft.com/office/drawing/2014/main" id="{77743E6B-FFF4-4CC1-8FD6-FA16254944B8}"/>
+                <a16:creationId xmlns:a16="http://schemas.microsoft.com/office/drawing/2014/main" id="{84038A51-EB42-4115-AB95-3CD9A1DC1121}"/>
               </a:ext>
             </a:extLst>
           </p:cNvPr>
@@ -23579,7 +23579,7 @@
           <p:cNvPr id="12" name="">
             <a:extLst xmlns:a="http://schemas.openxmlformats.org/drawingml/2006/main">
               <a:ext uri="{FF2B5EF4-FFF2-40B4-BE49-F238E27FC236}">
-                <a16:creationId xmlns:a16="http://schemas.microsoft.com/office/drawing/2014/main" id="{E09D8AC9-0E9B-4451-A1E4-79F9A064A71D}"/>
+                <a16:creationId xmlns:a16="http://schemas.microsoft.com/office/drawing/2014/main" id="{125F0A5B-5586-4B18-B967-B8893125F000}"/>
               </a:ext>
             </a:extLst>
           </p:cNvPr>
@@ -23641,7 +23641,7 @@
           <p:cNvPr id="13" name="">
             <a:extLst xmlns:a="http://schemas.openxmlformats.org/drawingml/2006/main">
               <a:ext uri="{FF2B5EF4-FFF2-40B4-BE49-F238E27FC236}">
-                <a16:creationId xmlns:a16="http://schemas.microsoft.com/office/drawing/2014/main" id="{3CCAF339-5E23-4352-8B9F-88D36F6068F7}"/>
+                <a16:creationId xmlns:a16="http://schemas.microsoft.com/office/drawing/2014/main" id="{F5A45BA4-6218-4B05-84EA-0C90A9DFDE76}"/>
               </a:ext>
             </a:extLst>
           </p:cNvPr>
@@ -23681,7 +23681,7 @@
           <p:cNvPr id="14" name="">
             <a:extLst xmlns:a="http://schemas.openxmlformats.org/drawingml/2006/main">
               <a:ext uri="{FF2B5EF4-FFF2-40B4-BE49-F238E27FC236}">
-                <a16:creationId xmlns:a16="http://schemas.microsoft.com/office/drawing/2014/main" id="{8DC741C7-3A99-4704-816F-6C992F0766F3}"/>
+                <a16:creationId xmlns:a16="http://schemas.microsoft.com/office/drawing/2014/main" id="{6F3D1924-FFEE-49DF-B71A-A3904321AF45}"/>
               </a:ext>
             </a:extLst>
           </p:cNvPr>
@@ -23743,7 +23743,7 @@
           <p:cNvPr id="15" name="">
             <a:extLst xmlns:a="http://schemas.openxmlformats.org/drawingml/2006/main">
               <a:ext uri="{FF2B5EF4-FFF2-40B4-BE49-F238E27FC236}">
-                <a16:creationId xmlns:a16="http://schemas.microsoft.com/office/drawing/2014/main" id="{5144B273-1BFA-41DC-B212-61D837B1AEC1}"/>
+                <a16:creationId xmlns:a16="http://schemas.microsoft.com/office/drawing/2014/main" id="{553D1D0B-7717-40DB-A979-F053C7FA5346}"/>
               </a:ext>
             </a:extLst>
           </p:cNvPr>
@@ -23805,7 +23805,7 @@
           <p:cNvPr id="16" name="">
             <a:extLst xmlns:a="http://schemas.openxmlformats.org/drawingml/2006/main">
               <a:ext uri="{FF2B5EF4-FFF2-40B4-BE49-F238E27FC236}">
-                <a16:creationId xmlns:a16="http://schemas.microsoft.com/office/drawing/2014/main" id="{832E7053-B1EE-43F4-A89E-F9FCEF780EB4}"/>
+                <a16:creationId xmlns:a16="http://schemas.microsoft.com/office/drawing/2014/main" id="{2458A15F-C901-4BF2-B485-AB08CC36F5D7}"/>
               </a:ext>
             </a:extLst>
           </p:cNvPr>
@@ -23845,7 +23845,7 @@
           <p:cNvPr id="17" name="">
             <a:extLst xmlns:a="http://schemas.openxmlformats.org/drawingml/2006/main">
               <a:ext uri="{FF2B5EF4-FFF2-40B4-BE49-F238E27FC236}">
-                <a16:creationId xmlns:a16="http://schemas.microsoft.com/office/drawing/2014/main" id="{8529BCE8-D6CE-4843-9798-3F23F0533BAA}"/>
+                <a16:creationId xmlns:a16="http://schemas.microsoft.com/office/drawing/2014/main" id="{3B417E84-C7F0-4D9C-942F-B77A6ADF362D}"/>
               </a:ext>
             </a:extLst>
           </p:cNvPr>
@@ -23907,7 +23907,7 @@
           <p:cNvPr id="18" name="">
             <a:extLst xmlns:a="http://schemas.openxmlformats.org/drawingml/2006/main">
               <a:ext uri="{FF2B5EF4-FFF2-40B4-BE49-F238E27FC236}">
-                <a16:creationId xmlns:a16="http://schemas.microsoft.com/office/drawing/2014/main" id="{020A7650-1E92-4B6C-BBE3-F6635ED9D04F}"/>
+                <a16:creationId xmlns:a16="http://schemas.microsoft.com/office/drawing/2014/main" id="{EA801AF2-0D79-4790-A895-655764DCA1DB}"/>
               </a:ext>
             </a:extLst>
           </p:cNvPr>
@@ -23940,7 +23940,7 @@
           <p:cNvPr id="19" name="">
             <a:extLst xmlns:a="http://schemas.openxmlformats.org/drawingml/2006/main">
               <a:ext uri="{FF2B5EF4-FFF2-40B4-BE49-F238E27FC236}">
-                <a16:creationId xmlns:a16="http://schemas.microsoft.com/office/drawing/2014/main" id="{E55379A3-EA2D-4FEA-9B56-0719150B78BA}"/>
+                <a16:creationId xmlns:a16="http://schemas.microsoft.com/office/drawing/2014/main" id="{24079420-89FE-475A-B6EE-176109341AF1}"/>
               </a:ext>
             </a:extLst>
           </p:cNvPr>
@@ -23973,7 +23973,7 @@
           <p:cNvPr id="20" name="">
             <a:extLst xmlns:a="http://schemas.openxmlformats.org/drawingml/2006/main">
               <a:ext uri="{FF2B5EF4-FFF2-40B4-BE49-F238E27FC236}">
-                <a16:creationId xmlns:a16="http://schemas.microsoft.com/office/drawing/2014/main" id="{A7036AA0-6457-477B-A58A-CD63E940F8E3}"/>
+                <a16:creationId xmlns:a16="http://schemas.microsoft.com/office/drawing/2014/main" id="{A4A3DE6A-EF16-4AAB-86A8-85723335C7A4}"/>
               </a:ext>
             </a:extLst>
           </p:cNvPr>
@@ -24035,7 +24035,7 @@
           <p:cNvPr id="21" name="">
             <a:extLst xmlns:a="http://schemas.openxmlformats.org/drawingml/2006/main">
               <a:ext uri="{FF2B5EF4-FFF2-40B4-BE49-F238E27FC236}">
-                <a16:creationId xmlns:a16="http://schemas.microsoft.com/office/drawing/2014/main" id="{DAD1122E-20EB-4B30-A46C-BC87C5785C95}"/>
+                <a16:creationId xmlns:a16="http://schemas.microsoft.com/office/drawing/2014/main" id="{245865DC-B3DC-4AE0-9E73-0477151DF3AE}"/>
               </a:ext>
             </a:extLst>
           </p:cNvPr>
@@ -24097,7 +24097,7 @@
           <p:cNvPr id="22" name="">
             <a:extLst xmlns:a="http://schemas.openxmlformats.org/drawingml/2006/main">
               <a:ext uri="{FF2B5EF4-FFF2-40B4-BE49-F238E27FC236}">
-                <a16:creationId xmlns:a16="http://schemas.microsoft.com/office/drawing/2014/main" id="{D05EE952-3E08-42DB-90A5-5A89C2D3B3CD}"/>
+                <a16:creationId xmlns:a16="http://schemas.microsoft.com/office/drawing/2014/main" id="{6976C37E-1EB6-475F-8D5C-C95AAE681D70}"/>
               </a:ext>
             </a:extLst>
           </p:cNvPr>
@@ -24159,7 +24159,7 @@
           <p:cNvPr id="23" name="">
             <a:extLst xmlns:a="http://schemas.openxmlformats.org/drawingml/2006/main">
               <a:ext uri="{FF2B5EF4-FFF2-40B4-BE49-F238E27FC236}">
-                <a16:creationId xmlns:a16="http://schemas.microsoft.com/office/drawing/2014/main" id="{7732896C-4506-4996-87BF-23896C936A8D}"/>
+                <a16:creationId xmlns:a16="http://schemas.microsoft.com/office/drawing/2014/main" id="{CBB71045-37F4-43FF-8D73-0CEDFAB66B21}"/>
               </a:ext>
             </a:extLst>
           </p:cNvPr>
@@ -24199,7 +24199,7 @@
           <p:cNvPr id="24" name="">
             <a:extLst xmlns:a="http://schemas.openxmlformats.org/drawingml/2006/main">
               <a:ext uri="{FF2B5EF4-FFF2-40B4-BE49-F238E27FC236}">
-                <a16:creationId xmlns:a16="http://schemas.microsoft.com/office/drawing/2014/main" id="{FB25EC5B-9601-4761-856D-431ACB95FD66}"/>
+                <a16:creationId xmlns:a16="http://schemas.microsoft.com/office/drawing/2014/main" id="{E4693AFF-5078-4587-8BA2-E04494515EB2}"/>
               </a:ext>
             </a:extLst>
           </p:cNvPr>
@@ -24261,7 +24261,7 @@
           <p:cNvPr id="25" name="">
             <a:extLst xmlns:a="http://schemas.openxmlformats.org/drawingml/2006/main">
               <a:ext uri="{FF2B5EF4-FFF2-40B4-BE49-F238E27FC236}">
-                <a16:creationId xmlns:a16="http://schemas.microsoft.com/office/drawing/2014/main" id="{1A44BC6C-8213-4897-8B91-EAFFFA59E048}"/>
+                <a16:creationId xmlns:a16="http://schemas.microsoft.com/office/drawing/2014/main" id="{15A98326-573F-49C9-A2B1-F94540C0557E}"/>
               </a:ext>
             </a:extLst>
           </p:cNvPr>
@@ -24323,7 +24323,7 @@
           <p:cNvPr id="26" name="">
             <a:extLst xmlns:a="http://schemas.openxmlformats.org/drawingml/2006/main">
               <a:ext uri="{FF2B5EF4-FFF2-40B4-BE49-F238E27FC236}">
-                <a16:creationId xmlns:a16="http://schemas.microsoft.com/office/drawing/2014/main" id="{0821E091-E41C-44D9-ABAD-4894C38FBCE9}"/>
+                <a16:creationId xmlns:a16="http://schemas.microsoft.com/office/drawing/2014/main" id="{E283B96B-4BAE-4C72-830F-A71C2550E178}"/>
               </a:ext>
             </a:extLst>
           </p:cNvPr>
@@ -24385,7 +24385,7 @@
           <p:cNvPr id="27" name="">
             <a:extLst xmlns:a="http://schemas.openxmlformats.org/drawingml/2006/main">
               <a:ext uri="{FF2B5EF4-FFF2-40B4-BE49-F238E27FC236}">
-                <a16:creationId xmlns:a16="http://schemas.microsoft.com/office/drawing/2014/main" id="{BA3556D4-BB04-4A9C-87C0-A3C7AC02EE54}"/>
+                <a16:creationId xmlns:a16="http://schemas.microsoft.com/office/drawing/2014/main" id="{7239B1F8-BB25-4C84-86B3-B408B01A2F63}"/>
               </a:ext>
             </a:extLst>
           </p:cNvPr>
@@ -24425,7 +24425,7 @@
           <p:cNvPr id="28" name="">
             <a:extLst xmlns:a="http://schemas.openxmlformats.org/drawingml/2006/main">
               <a:ext uri="{FF2B5EF4-FFF2-40B4-BE49-F238E27FC236}">
-                <a16:creationId xmlns:a16="http://schemas.microsoft.com/office/drawing/2014/main" id="{B52D37D6-C14F-4487-B727-3558CB5785E8}"/>
+                <a16:creationId xmlns:a16="http://schemas.microsoft.com/office/drawing/2014/main" id="{07D0C986-6F79-4BC0-8D67-9F3B431B942C}"/>
               </a:ext>
             </a:extLst>
           </p:cNvPr>
@@ -24487,7 +24487,7 @@
           <p:cNvPr id="29" name="">
             <a:extLst xmlns:a="http://schemas.openxmlformats.org/drawingml/2006/main">
               <a:ext uri="{FF2B5EF4-FFF2-40B4-BE49-F238E27FC236}">
-                <a16:creationId xmlns:a16="http://schemas.microsoft.com/office/drawing/2014/main" id="{062377D2-DE85-4B67-A6C2-50D8879A7DC6}"/>
+                <a16:creationId xmlns:a16="http://schemas.microsoft.com/office/drawing/2014/main" id="{47EE8D0A-FC99-4D32-B8A5-58499DE08B18}"/>
               </a:ext>
             </a:extLst>
           </p:cNvPr>
@@ -24547,7 +24547,7 @@
     </p:spTree>
     <p:extLst>
       <p:ext uri="{BB962C8B-B14F-4D97-AF65-F5344CB8AC3E}">
-        <p14:creationId xmlns:p14="http://schemas.microsoft.com/office/powerpoint/2010/main" val="666782673"/>
+        <p14:creationId xmlns:p14="http://schemas.microsoft.com/office/powerpoint/2010/main" val="203406376"/>
       </p:ext>
     </p:extLst>
   </p:cSld>
@@ -24581,7 +24581,7 @@
           <p:cNvPr id="19" name="">
             <a:extLst xmlns:a="http://schemas.openxmlformats.org/drawingml/2006/main">
               <a:ext uri="{FF2B5EF4-FFF2-40B4-BE49-F238E27FC236}">
-                <a16:creationId xmlns:a16="http://schemas.microsoft.com/office/drawing/2014/main" id="{10E74A2F-84CE-4EAF-9FF3-43B5EA130E1B}"/>
+                <a16:creationId xmlns:a16="http://schemas.microsoft.com/office/drawing/2014/main" id="{9E4603EA-758E-44CD-8831-15ECC5E92D51}"/>
               </a:ext>
             </a:extLst>
           </p:cNvPr>
@@ -24612,7 +24612,7 @@
           <p:cNvPr id="2" name="">
             <a:extLst xmlns:a="http://schemas.openxmlformats.org/drawingml/2006/main">
               <a:ext uri="{FF2B5EF4-FFF2-40B4-BE49-F238E27FC236}">
-                <a16:creationId xmlns:a16="http://schemas.microsoft.com/office/drawing/2014/main" id="{F4EA2413-0AFF-426E-9F86-F2F21AAF1985}"/>
+                <a16:creationId xmlns:a16="http://schemas.microsoft.com/office/drawing/2014/main" id="{905AE74A-93C8-4F5F-A774-B91D468A42FC}"/>
               </a:ext>
             </a:extLst>
           </p:cNvPr>
@@ -24674,7 +24674,7 @@
           <p:cNvPr id="3" name="">
             <a:extLst xmlns:a="http://schemas.openxmlformats.org/drawingml/2006/main">
               <a:ext uri="{FF2B5EF4-FFF2-40B4-BE49-F238E27FC236}">
-                <a16:creationId xmlns:a16="http://schemas.microsoft.com/office/drawing/2014/main" id="{50896402-0EED-4777-90D9-929CFF5BB790}"/>
+                <a16:creationId xmlns:a16="http://schemas.microsoft.com/office/drawing/2014/main" id="{C511AB7D-F2A6-458F-AB7E-24FE7E0A63E5}"/>
               </a:ext>
             </a:extLst>
           </p:cNvPr>
@@ -24736,7 +24736,7 @@
           <p:cNvPr id="4" name="">
             <a:extLst xmlns:a="http://schemas.openxmlformats.org/drawingml/2006/main">
               <a:ext uri="{FF2B5EF4-FFF2-40B4-BE49-F238E27FC236}">
-                <a16:creationId xmlns:a16="http://schemas.microsoft.com/office/drawing/2014/main" id="{4E620E0C-19FD-4815-933A-BA744D273638}"/>
+                <a16:creationId xmlns:a16="http://schemas.microsoft.com/office/drawing/2014/main" id="{E3EAE40B-E1B2-4A54-BE08-2521EEC674AF}"/>
               </a:ext>
             </a:extLst>
           </p:cNvPr>
@@ -24798,7 +24798,7 @@
           <p:cNvPr id="5" name="">
             <a:extLst xmlns:a="http://schemas.openxmlformats.org/drawingml/2006/main">
               <a:ext uri="{FF2B5EF4-FFF2-40B4-BE49-F238E27FC236}">
-                <a16:creationId xmlns:a16="http://schemas.microsoft.com/office/drawing/2014/main" id="{61D3C33B-B39F-4B2C-930D-80447147FEC8}"/>
+                <a16:creationId xmlns:a16="http://schemas.microsoft.com/office/drawing/2014/main" id="{68E70351-921D-4917-8B2C-25CFCBF568D2}"/>
               </a:ext>
             </a:extLst>
           </p:cNvPr>
@@ -24860,7 +24860,7 @@
           <p:cNvPr id="6" name="">
             <a:extLst xmlns:a="http://schemas.openxmlformats.org/drawingml/2006/main">
               <a:ext uri="{FF2B5EF4-FFF2-40B4-BE49-F238E27FC236}">
-                <a16:creationId xmlns:a16="http://schemas.microsoft.com/office/drawing/2014/main" id="{5CC67E81-16A7-4664-A399-1F92C70C5DB5}"/>
+                <a16:creationId xmlns:a16="http://schemas.microsoft.com/office/drawing/2014/main" id="{2B1D82C6-3623-4DF9-B03C-D2E3F759658D}"/>
               </a:ext>
             </a:extLst>
           </p:cNvPr>
@@ -24922,7 +24922,7 @@
           <p:cNvPr id="7" name="">
             <a:extLst xmlns:a="http://schemas.openxmlformats.org/drawingml/2006/main">
               <a:ext uri="{FF2B5EF4-FFF2-40B4-BE49-F238E27FC236}">
-                <a16:creationId xmlns:a16="http://schemas.microsoft.com/office/drawing/2014/main" id="{6CAB95C7-6B48-4725-89C6-7F57476C455B}"/>
+                <a16:creationId xmlns:a16="http://schemas.microsoft.com/office/drawing/2014/main" id="{6867E584-67A9-424D-8876-DFDBE95143B9}"/>
               </a:ext>
             </a:extLst>
           </p:cNvPr>
@@ -24984,7 +24984,7 @@
           <p:cNvPr id="8" name="">
             <a:extLst xmlns:a="http://schemas.openxmlformats.org/drawingml/2006/main">
               <a:ext uri="{FF2B5EF4-FFF2-40B4-BE49-F238E27FC236}">
-                <a16:creationId xmlns:a16="http://schemas.microsoft.com/office/drawing/2014/main" id="{685769CC-43B7-4B22-92B0-4B143554738F}"/>
+                <a16:creationId xmlns:a16="http://schemas.microsoft.com/office/drawing/2014/main" id="{0E378D81-8C63-4799-837C-85CA7CA58922}"/>
               </a:ext>
             </a:extLst>
           </p:cNvPr>
@@ -25046,7 +25046,7 @@
           <p:cNvPr id="9" name="">
             <a:extLst xmlns:a="http://schemas.openxmlformats.org/drawingml/2006/main">
               <a:ext uri="{FF2B5EF4-FFF2-40B4-BE49-F238E27FC236}">
-                <a16:creationId xmlns:a16="http://schemas.microsoft.com/office/drawing/2014/main" id="{BBA86D50-DFB5-4A0D-9401-AD3138CEF604}"/>
+                <a16:creationId xmlns:a16="http://schemas.microsoft.com/office/drawing/2014/main" id="{20A0C461-015F-41DC-85CB-9A568B32561A}"/>
               </a:ext>
             </a:extLst>
           </p:cNvPr>
@@ -25108,7 +25108,7 @@
           <p:cNvPr id="10" name="">
             <a:extLst xmlns:a="http://schemas.openxmlformats.org/drawingml/2006/main">
               <a:ext uri="{FF2B5EF4-FFF2-40B4-BE49-F238E27FC236}">
-                <a16:creationId xmlns:a16="http://schemas.microsoft.com/office/drawing/2014/main" id="{DB3FF457-3BD1-4A86-91F0-7384FD7EC9F8}"/>
+                <a16:creationId xmlns:a16="http://schemas.microsoft.com/office/drawing/2014/main" id="{E49045F9-4FA2-49F5-9973-300755377A88}"/>
               </a:ext>
             </a:extLst>
           </p:cNvPr>
@@ -25170,7 +25170,7 @@
           <p:cNvPr id="11" name="">
             <a:extLst xmlns:a="http://schemas.openxmlformats.org/drawingml/2006/main">
               <a:ext uri="{FF2B5EF4-FFF2-40B4-BE49-F238E27FC236}">
-                <a16:creationId xmlns:a16="http://schemas.microsoft.com/office/drawing/2014/main" id="{DCA264CE-98CA-49C1-8957-C3F538C613B3}"/>
+                <a16:creationId xmlns:a16="http://schemas.microsoft.com/office/drawing/2014/main" id="{AAD91449-FF1C-42F0-B689-3114571CD032}"/>
               </a:ext>
             </a:extLst>
           </p:cNvPr>
@@ -25232,7 +25232,7 @@
           <p:cNvPr id="12" name="">
             <a:extLst xmlns:a="http://schemas.openxmlformats.org/drawingml/2006/main">
               <a:ext uri="{FF2B5EF4-FFF2-40B4-BE49-F238E27FC236}">
-                <a16:creationId xmlns:a16="http://schemas.microsoft.com/office/drawing/2014/main" id="{ACA164BB-85FF-43BD-9B28-AF04D5B6CF18}"/>
+                <a16:creationId xmlns:a16="http://schemas.microsoft.com/office/drawing/2014/main" id="{37D185B7-73C7-4281-8E32-2FEC96ECE7D1}"/>
               </a:ext>
             </a:extLst>
           </p:cNvPr>
@@ -25294,7 +25294,7 @@
           <p:cNvPr id="13" name="">
             <a:extLst xmlns:a="http://schemas.openxmlformats.org/drawingml/2006/main">
               <a:ext uri="{FF2B5EF4-FFF2-40B4-BE49-F238E27FC236}">
-                <a16:creationId xmlns:a16="http://schemas.microsoft.com/office/drawing/2014/main" id="{6A133172-B343-4073-A8C3-07A5B5CEC8ED}"/>
+                <a16:creationId xmlns:a16="http://schemas.microsoft.com/office/drawing/2014/main" id="{3E5A8CE6-28C3-40DA-ABB8-5C44AB011F4B}"/>
               </a:ext>
             </a:extLst>
           </p:cNvPr>
@@ -25356,7 +25356,7 @@
           <p:cNvPr id="14" name="">
             <a:extLst xmlns:a="http://schemas.openxmlformats.org/drawingml/2006/main">
               <a:ext uri="{FF2B5EF4-FFF2-40B4-BE49-F238E27FC236}">
-                <a16:creationId xmlns:a16="http://schemas.microsoft.com/office/drawing/2014/main" id="{82CF1B16-5F7F-4F3D-AB5F-3051B441C2F9}"/>
+                <a16:creationId xmlns:a16="http://schemas.microsoft.com/office/drawing/2014/main" id="{D4590C03-AE8A-46C3-BA84-29ADF5524F2F}"/>
               </a:ext>
             </a:extLst>
           </p:cNvPr>
@@ -25418,7 +25418,7 @@
           <p:cNvPr id="15" name="">
             <a:extLst xmlns:a="http://schemas.openxmlformats.org/drawingml/2006/main">
               <a:ext uri="{FF2B5EF4-FFF2-40B4-BE49-F238E27FC236}">
-                <a16:creationId xmlns:a16="http://schemas.microsoft.com/office/drawing/2014/main" id="{B4664659-1914-41FC-B18A-7C860CE9F0D5}"/>
+                <a16:creationId xmlns:a16="http://schemas.microsoft.com/office/drawing/2014/main" id="{AF2E9DA3-76A4-49C9-97E8-6CBC59BC5F5E}"/>
               </a:ext>
             </a:extLst>
           </p:cNvPr>
@@ -25480,7 +25480,7 @@
           <p:cNvPr id="16" name="">
             <a:extLst xmlns:a="http://schemas.openxmlformats.org/drawingml/2006/main">
               <a:ext uri="{FF2B5EF4-FFF2-40B4-BE49-F238E27FC236}">
-                <a16:creationId xmlns:a16="http://schemas.microsoft.com/office/drawing/2014/main" id="{95E4AA0D-727D-420B-AF0C-A026761900FA}"/>
+                <a16:creationId xmlns:a16="http://schemas.microsoft.com/office/drawing/2014/main" id="{1F0F147B-24B1-47AC-A9E8-E6126BB86EAD}"/>
               </a:ext>
             </a:extLst>
           </p:cNvPr>
@@ -25542,7 +25542,7 @@
           <p:cNvPr id="17" name="">
             <a:extLst xmlns:a="http://schemas.openxmlformats.org/drawingml/2006/main">
               <a:ext uri="{FF2B5EF4-FFF2-40B4-BE49-F238E27FC236}">
-                <a16:creationId xmlns:a16="http://schemas.microsoft.com/office/drawing/2014/main" id="{925E04AE-90AF-4633-8A13-FCA74A2CA197}"/>
+                <a16:creationId xmlns:a16="http://schemas.microsoft.com/office/drawing/2014/main" id="{7CB1920D-C487-446C-AA1F-E9599B28E5DE}"/>
               </a:ext>
             </a:extLst>
           </p:cNvPr>
@@ -25604,7 +25604,7 @@
           <p:cNvPr id="18" name="">
             <a:extLst xmlns:a="http://schemas.openxmlformats.org/drawingml/2006/main">
               <a:ext uri="{FF2B5EF4-FFF2-40B4-BE49-F238E27FC236}">
-                <a16:creationId xmlns:a16="http://schemas.microsoft.com/office/drawing/2014/main" id="{0FE5E3BF-8738-4552-AB7F-12D0B7D722F0}"/>
+                <a16:creationId xmlns:a16="http://schemas.microsoft.com/office/drawing/2014/main" id="{A79AE299-B0E8-4C06-B461-B8A237E81910}"/>
               </a:ext>
             </a:extLst>
           </p:cNvPr>
@@ -25664,7 +25664,7 @@
     </p:spTree>
     <p:extLst>
       <p:ext uri="{BB962C8B-B14F-4D97-AF65-F5344CB8AC3E}">
-        <p14:creationId xmlns:p14="http://schemas.microsoft.com/office/powerpoint/2010/main" val="1241743098"/>
+        <p14:creationId xmlns:p14="http://schemas.microsoft.com/office/powerpoint/2010/main" val="852319955"/>
       </p:ext>
     </p:extLst>
   </p:cSld>
@@ -25698,7 +25698,7 @@
           <p:cNvPr id="23" name="">
             <a:extLst xmlns:a="http://schemas.openxmlformats.org/drawingml/2006/main">
               <a:ext uri="{FF2B5EF4-FFF2-40B4-BE49-F238E27FC236}">
-                <a16:creationId xmlns:a16="http://schemas.microsoft.com/office/drawing/2014/main" id="{2BA3EFEA-498D-46AE-9B6F-4A74E73F0E50}"/>
+                <a16:creationId xmlns:a16="http://schemas.microsoft.com/office/drawing/2014/main" id="{262C0AE3-4535-4907-AD8C-3F668780E50F}"/>
               </a:ext>
             </a:extLst>
           </p:cNvPr>
@@ -25729,7 +25729,7 @@
           <p:cNvPr id="2" name="">
             <a:extLst xmlns:a="http://schemas.openxmlformats.org/drawingml/2006/main">
               <a:ext uri="{FF2B5EF4-FFF2-40B4-BE49-F238E27FC236}">
-                <a16:creationId xmlns:a16="http://schemas.microsoft.com/office/drawing/2014/main" id="{DA232B6B-7B69-45F4-9907-A844E974C3E5}"/>
+                <a16:creationId xmlns:a16="http://schemas.microsoft.com/office/drawing/2014/main" id="{7CB85497-C615-4744-BA86-07D027D86B2F}"/>
               </a:ext>
             </a:extLst>
           </p:cNvPr>
@@ -25791,7 +25791,7 @@
           <p:cNvPr id="3" name="">
             <a:extLst xmlns:a="http://schemas.openxmlformats.org/drawingml/2006/main">
               <a:ext uri="{FF2B5EF4-FFF2-40B4-BE49-F238E27FC236}">
-                <a16:creationId xmlns:a16="http://schemas.microsoft.com/office/drawing/2014/main" id="{5C95724A-CAF2-4EFE-B87C-E055C47040D9}"/>
+                <a16:creationId xmlns:a16="http://schemas.microsoft.com/office/drawing/2014/main" id="{7D426A85-43BA-44BB-B898-AD0461B4ED71}"/>
               </a:ext>
             </a:extLst>
           </p:cNvPr>
@@ -25853,7 +25853,7 @@
           <p:cNvPr id="4" name="">
             <a:extLst xmlns:a="http://schemas.openxmlformats.org/drawingml/2006/main">
               <a:ext uri="{FF2B5EF4-FFF2-40B4-BE49-F238E27FC236}">
-                <a16:creationId xmlns:a16="http://schemas.microsoft.com/office/drawing/2014/main" id="{D104F4AA-A7BA-4E64-AA47-C6865572EC15}"/>
+                <a16:creationId xmlns:a16="http://schemas.microsoft.com/office/drawing/2014/main" id="{5C8E4BB1-55BB-4317-8611-4E0B814D8C25}"/>
               </a:ext>
             </a:extLst>
           </p:cNvPr>
@@ -25915,7 +25915,7 @@
           <p:cNvPr id="5" name="">
             <a:extLst xmlns:a="http://schemas.openxmlformats.org/drawingml/2006/main">
               <a:ext uri="{FF2B5EF4-FFF2-40B4-BE49-F238E27FC236}">
-                <a16:creationId xmlns:a16="http://schemas.microsoft.com/office/drawing/2014/main" id="{EB849F62-03B8-46B6-8E9A-C8AD91461203}"/>
+                <a16:creationId xmlns:a16="http://schemas.microsoft.com/office/drawing/2014/main" id="{D0CC0798-C2E6-4866-AF21-9AB4919DF5DE}"/>
               </a:ext>
             </a:extLst>
           </p:cNvPr>
@@ -25948,7 +25948,7 @@
           <p:cNvPr id="6" name="">
             <a:extLst xmlns:a="http://schemas.openxmlformats.org/drawingml/2006/main">
               <a:ext uri="{FF2B5EF4-FFF2-40B4-BE49-F238E27FC236}">
-                <a16:creationId xmlns:a16="http://schemas.microsoft.com/office/drawing/2014/main" id="{24959189-35E5-41F4-92A5-A929908E02DF}"/>
+                <a16:creationId xmlns:a16="http://schemas.microsoft.com/office/drawing/2014/main" id="{A2BB8EA1-62A9-4486-914E-3006C7E805C9}"/>
               </a:ext>
             </a:extLst>
           </p:cNvPr>
@@ -26010,7 +26010,7 @@
           <p:cNvPr id="7" name="">
             <a:extLst xmlns:a="http://schemas.openxmlformats.org/drawingml/2006/main">
               <a:ext uri="{FF2B5EF4-FFF2-40B4-BE49-F238E27FC236}">
-                <a16:creationId xmlns:a16="http://schemas.microsoft.com/office/drawing/2014/main" id="{10ED0C96-D6EF-4C22-A9DF-4AA7298B6013}"/>
+                <a16:creationId xmlns:a16="http://schemas.microsoft.com/office/drawing/2014/main" id="{71382E25-3748-4B99-8D9A-E050F1D37306}"/>
               </a:ext>
             </a:extLst>
           </p:cNvPr>
@@ -26072,7 +26072,7 @@
           <p:cNvPr id="8" name="">
             <a:extLst xmlns:a="http://schemas.openxmlformats.org/drawingml/2006/main">
               <a:ext uri="{FF2B5EF4-FFF2-40B4-BE49-F238E27FC236}">
-                <a16:creationId xmlns:a16="http://schemas.microsoft.com/office/drawing/2014/main" id="{9A2B73D4-6F90-4CBC-AC89-AC33226C664F}"/>
+                <a16:creationId xmlns:a16="http://schemas.microsoft.com/office/drawing/2014/main" id="{58A727FF-D60C-4C80-91D0-8BCF27A9EF8E}"/>
               </a:ext>
             </a:extLst>
           </p:cNvPr>
@@ -26134,7 +26134,7 @@
           <p:cNvPr id="9" name="">
             <a:extLst xmlns:a="http://schemas.openxmlformats.org/drawingml/2006/main">
               <a:ext uri="{FF2B5EF4-FFF2-40B4-BE49-F238E27FC236}">
-                <a16:creationId xmlns:a16="http://schemas.microsoft.com/office/drawing/2014/main" id="{878DA13B-3C6D-453F-83C8-072A0A6EC89C}"/>
+                <a16:creationId xmlns:a16="http://schemas.microsoft.com/office/drawing/2014/main" id="{D05BF83D-4480-4D42-A38B-CF5CDDA34B84}"/>
               </a:ext>
             </a:extLst>
           </p:cNvPr>
@@ -26196,7 +26196,7 @@
           <p:cNvPr id="10" name="">
             <a:extLst xmlns:a="http://schemas.openxmlformats.org/drawingml/2006/main">
               <a:ext uri="{FF2B5EF4-FFF2-40B4-BE49-F238E27FC236}">
-                <a16:creationId xmlns:a16="http://schemas.microsoft.com/office/drawing/2014/main" id="{8E3A2913-719B-4F50-98F6-8E7D158732B5}"/>
+                <a16:creationId xmlns:a16="http://schemas.microsoft.com/office/drawing/2014/main" id="{70AE5E7F-7F21-4833-8395-810B3B213A11}"/>
               </a:ext>
             </a:extLst>
           </p:cNvPr>
@@ -26229,7 +26229,7 @@
           <p:cNvPr id="11" name="">
             <a:extLst xmlns:a="http://schemas.openxmlformats.org/drawingml/2006/main">
               <a:ext uri="{FF2B5EF4-FFF2-40B4-BE49-F238E27FC236}">
-                <a16:creationId xmlns:a16="http://schemas.microsoft.com/office/drawing/2014/main" id="{B721091D-CFD6-47B4-8D61-6823DE8CB1CB}"/>
+                <a16:creationId xmlns:a16="http://schemas.microsoft.com/office/drawing/2014/main" id="{547C45A1-C8AB-4614-9FF3-3C898DE8DA46}"/>
               </a:ext>
             </a:extLst>
           </p:cNvPr>
@@ -26291,7 +26291,7 @@
           <p:cNvPr id="12" name="">
             <a:extLst xmlns:a="http://schemas.openxmlformats.org/drawingml/2006/main">
               <a:ext uri="{FF2B5EF4-FFF2-40B4-BE49-F238E27FC236}">
-                <a16:creationId xmlns:a16="http://schemas.microsoft.com/office/drawing/2014/main" id="{7C2EF85D-6E3F-4F60-A188-409B31F5ED2B}"/>
+                <a16:creationId xmlns:a16="http://schemas.microsoft.com/office/drawing/2014/main" id="{318B5E5E-07A0-43F0-84B3-3496C8E0CC89}"/>
               </a:ext>
             </a:extLst>
           </p:cNvPr>
@@ -26353,7 +26353,7 @@
           <p:cNvPr id="13" name="">
             <a:extLst xmlns:a="http://schemas.openxmlformats.org/drawingml/2006/main">
               <a:ext uri="{FF2B5EF4-FFF2-40B4-BE49-F238E27FC236}">
-                <a16:creationId xmlns:a16="http://schemas.microsoft.com/office/drawing/2014/main" id="{D5318739-CC24-46BF-AF85-193D0B513C55}"/>
+                <a16:creationId xmlns:a16="http://schemas.microsoft.com/office/drawing/2014/main" id="{F2651E3C-EF57-4D0A-B97C-B20C99653825}"/>
               </a:ext>
             </a:extLst>
           </p:cNvPr>
@@ -26415,7 +26415,7 @@
           <p:cNvPr id="14" name="">
             <a:extLst xmlns:a="http://schemas.openxmlformats.org/drawingml/2006/main">
               <a:ext uri="{FF2B5EF4-FFF2-40B4-BE49-F238E27FC236}">
-                <a16:creationId xmlns:a16="http://schemas.microsoft.com/office/drawing/2014/main" id="{7EEC6EAF-36C4-4437-B3CA-CD0959F311FB}"/>
+                <a16:creationId xmlns:a16="http://schemas.microsoft.com/office/drawing/2014/main" id="{21FFC364-9425-4F34-93FD-7700CC18CF4F}"/>
               </a:ext>
             </a:extLst>
           </p:cNvPr>
@@ -26477,7 +26477,7 @@
           <p:cNvPr id="15" name="">
             <a:extLst xmlns:a="http://schemas.openxmlformats.org/drawingml/2006/main">
               <a:ext uri="{FF2B5EF4-FFF2-40B4-BE49-F238E27FC236}">
-                <a16:creationId xmlns:a16="http://schemas.microsoft.com/office/drawing/2014/main" id="{95E83901-3C4B-4030-B5E5-9878C911DEF2}"/>
+                <a16:creationId xmlns:a16="http://schemas.microsoft.com/office/drawing/2014/main" id="{B93527B3-E8D8-4169-8FFE-955A72795A80}"/>
               </a:ext>
             </a:extLst>
           </p:cNvPr>
@@ -26539,7 +26539,7 @@
           <p:cNvPr id="16" name="">
             <a:extLst xmlns:a="http://schemas.openxmlformats.org/drawingml/2006/main">
               <a:ext uri="{FF2B5EF4-FFF2-40B4-BE49-F238E27FC236}">
-                <a16:creationId xmlns:a16="http://schemas.microsoft.com/office/drawing/2014/main" id="{188A52D5-5BEC-43CF-B495-F5C7FB426DBC}"/>
+                <a16:creationId xmlns:a16="http://schemas.microsoft.com/office/drawing/2014/main" id="{809D9D93-DC04-4248-B2BA-DF86033E9965}"/>
               </a:ext>
             </a:extLst>
           </p:cNvPr>
@@ -26601,7 +26601,7 @@
           <p:cNvPr id="17" name="">
             <a:extLst xmlns:a="http://schemas.openxmlformats.org/drawingml/2006/main">
               <a:ext uri="{FF2B5EF4-FFF2-40B4-BE49-F238E27FC236}">
-                <a16:creationId xmlns:a16="http://schemas.microsoft.com/office/drawing/2014/main" id="{7A2D1D1D-1254-4040-AC98-013F38944A11}"/>
+                <a16:creationId xmlns:a16="http://schemas.microsoft.com/office/drawing/2014/main" id="{9352E991-0181-49D9-B370-0AA05821CA36}"/>
               </a:ext>
             </a:extLst>
           </p:cNvPr>
@@ -26663,7 +26663,7 @@
           <p:cNvPr id="18" name="">
             <a:extLst xmlns:a="http://schemas.openxmlformats.org/drawingml/2006/main">
               <a:ext uri="{FF2B5EF4-FFF2-40B4-BE49-F238E27FC236}">
-                <a16:creationId xmlns:a16="http://schemas.microsoft.com/office/drawing/2014/main" id="{D9498864-E56F-46F6-B7E7-6D609EA21A83}"/>
+                <a16:creationId xmlns:a16="http://schemas.microsoft.com/office/drawing/2014/main" id="{8E503B2D-2FAA-4D10-AC1B-22E77D9D1F90}"/>
               </a:ext>
             </a:extLst>
           </p:cNvPr>
@@ -26696,7 +26696,7 @@
           <p:cNvPr id="19" name="">
             <a:extLst xmlns:a="http://schemas.openxmlformats.org/drawingml/2006/main">
               <a:ext uri="{FF2B5EF4-FFF2-40B4-BE49-F238E27FC236}">
-                <a16:creationId xmlns:a16="http://schemas.microsoft.com/office/drawing/2014/main" id="{61E90532-6C40-4913-88F4-5EB0D310FE0B}"/>
+                <a16:creationId xmlns:a16="http://schemas.microsoft.com/office/drawing/2014/main" id="{A3E274CF-BA19-4CAC-9BF9-098FB32AB903}"/>
               </a:ext>
             </a:extLst>
           </p:cNvPr>
@@ -26758,7 +26758,7 @@
           <p:cNvPr id="20" name="">
             <a:extLst xmlns:a="http://schemas.openxmlformats.org/drawingml/2006/main">
               <a:ext uri="{FF2B5EF4-FFF2-40B4-BE49-F238E27FC236}">
-                <a16:creationId xmlns:a16="http://schemas.microsoft.com/office/drawing/2014/main" id="{BC2F5721-E8C4-493E-83F7-86D47308AEBF}"/>
+                <a16:creationId xmlns:a16="http://schemas.microsoft.com/office/drawing/2014/main" id="{0BC4F1FE-76C9-4305-A7B8-354B8A6E81ED}"/>
               </a:ext>
             </a:extLst>
           </p:cNvPr>
@@ -26874,7 +26874,7 @@
           <p:cNvPr id="21" name="">
             <a:extLst xmlns:a="http://schemas.openxmlformats.org/drawingml/2006/main">
               <a:ext uri="{FF2B5EF4-FFF2-40B4-BE49-F238E27FC236}">
-                <a16:creationId xmlns:a16="http://schemas.microsoft.com/office/drawing/2014/main" id="{1FC104D3-D344-46BA-8891-EC46146077E7}"/>
+                <a16:creationId xmlns:a16="http://schemas.microsoft.com/office/drawing/2014/main" id="{930488AA-E9CC-4C3A-AC52-69B2DD2AE390}"/>
               </a:ext>
             </a:extLst>
           </p:cNvPr>
@@ -26936,7 +26936,7 @@
           <p:cNvPr id="22" name="">
             <a:extLst xmlns:a="http://schemas.openxmlformats.org/drawingml/2006/main">
               <a:ext uri="{FF2B5EF4-FFF2-40B4-BE49-F238E27FC236}">
-                <a16:creationId xmlns:a16="http://schemas.microsoft.com/office/drawing/2014/main" id="{23AD64D2-7982-4EB9-B599-A6D09DAB3496}"/>
+                <a16:creationId xmlns:a16="http://schemas.microsoft.com/office/drawing/2014/main" id="{3D1F28A9-904B-43C3-9A94-5397718CA0AB}"/>
               </a:ext>
             </a:extLst>
           </p:cNvPr>
@@ -26988,7 +26988,7 @@
                 <a:ea typeface="Noto Sans KR"/>
                 <a:cs typeface="Noto Sans KR"/>
               </a:rPr>
-              <a:t>실습 가이드 웹페이지 → 「실습 결과 공유」 게시판</a:t>
+              <a:t>https://ksb6857.github.io/ai-training-260811/</a:t>
             </a:r>
           </a:p>
         </p:txBody>
@@ -26996,7 +26996,7 @@
     </p:spTree>
     <p:extLst>
       <p:ext uri="{BB962C8B-B14F-4D97-AF65-F5344CB8AC3E}">
-        <p14:creationId xmlns:p14="http://schemas.microsoft.com/office/powerpoint/2010/main" val="933995187"/>
+        <p14:creationId xmlns:p14="http://schemas.microsoft.com/office/powerpoint/2010/main" val="257270882"/>
       </p:ext>
     </p:extLst>
   </p:cSld>
@@ -27030,7 +27030,7 @@
           <p:cNvPr id="9" name="">
             <a:extLst xmlns:a="http://schemas.openxmlformats.org/drawingml/2006/main">
               <a:ext uri="{FF2B5EF4-FFF2-40B4-BE49-F238E27FC236}">
-                <a16:creationId xmlns:a16="http://schemas.microsoft.com/office/drawing/2014/main" id="{28487224-597D-4425-BC62-C2519309BC09}"/>
+                <a16:creationId xmlns:a16="http://schemas.microsoft.com/office/drawing/2014/main" id="{5E805ADD-281E-4AE0-BB25-B42623AEED9D}"/>
               </a:ext>
             </a:extLst>
           </p:cNvPr>
@@ -27061,7 +27061,7 @@
           <p:cNvPr id="2" name="">
             <a:extLst xmlns:a="http://schemas.openxmlformats.org/drawingml/2006/main">
               <a:ext uri="{FF2B5EF4-FFF2-40B4-BE49-F238E27FC236}">
-                <a16:creationId xmlns:a16="http://schemas.microsoft.com/office/drawing/2014/main" id="{F065B87F-AA67-49D0-9F15-BA55EE68E8D2}"/>
+                <a16:creationId xmlns:a16="http://schemas.microsoft.com/office/drawing/2014/main" id="{AB0E8855-DD20-41FC-B0F5-4574DE4BD227}"/>
               </a:ext>
             </a:extLst>
           </p:cNvPr>
@@ -27123,7 +27123,7 @@
           <p:cNvPr id="3" name="">
             <a:extLst xmlns:a="http://schemas.openxmlformats.org/drawingml/2006/main">
               <a:ext uri="{FF2B5EF4-FFF2-40B4-BE49-F238E27FC236}">
-                <a16:creationId xmlns:a16="http://schemas.microsoft.com/office/drawing/2014/main" id="{6579FF61-E5DE-44A4-B8EF-C71E50EF6E05}"/>
+                <a16:creationId xmlns:a16="http://schemas.microsoft.com/office/drawing/2014/main" id="{C88F68FB-E515-4BD3-A049-A86E5DDCE0D4}"/>
               </a:ext>
             </a:extLst>
           </p:cNvPr>
@@ -27185,7 +27185,7 @@
           <p:cNvPr id="4" name="">
             <a:extLst xmlns:a="http://schemas.openxmlformats.org/drawingml/2006/main">
               <a:ext uri="{FF2B5EF4-FFF2-40B4-BE49-F238E27FC236}">
-                <a16:creationId xmlns:a16="http://schemas.microsoft.com/office/drawing/2014/main" id="{9A5EC73B-E90A-4491-ACD4-4BFA5258CA98}"/>
+                <a16:creationId xmlns:a16="http://schemas.microsoft.com/office/drawing/2014/main" id="{BB19719F-9FD4-4F2F-A8D3-FC04C7F216F1}"/>
               </a:ext>
             </a:extLst>
           </p:cNvPr>
@@ -27247,7 +27247,7 @@
           <p:cNvPr id="5" name="">
             <a:extLst xmlns:a="http://schemas.openxmlformats.org/drawingml/2006/main">
               <a:ext uri="{FF2B5EF4-FFF2-40B4-BE49-F238E27FC236}">
-                <a16:creationId xmlns:a16="http://schemas.microsoft.com/office/drawing/2014/main" id="{C464AD5B-0659-422D-8F47-D33B19153F90}"/>
+                <a16:creationId xmlns:a16="http://schemas.microsoft.com/office/drawing/2014/main" id="{E8265688-46AE-4A96-985E-96EC3643A127}"/>
               </a:ext>
             </a:extLst>
           </p:cNvPr>
@@ -27309,7 +27309,7 @@
           <p:cNvPr id="6" name="">
             <a:extLst xmlns:a="http://schemas.openxmlformats.org/drawingml/2006/main">
               <a:ext uri="{FF2B5EF4-FFF2-40B4-BE49-F238E27FC236}">
-                <a16:creationId xmlns:a16="http://schemas.microsoft.com/office/drawing/2014/main" id="{51BA5180-47CD-47DE-BC83-BF9A375F18E1}"/>
+                <a16:creationId xmlns:a16="http://schemas.microsoft.com/office/drawing/2014/main" id="{14EDE2AD-5983-4557-8E95-591E1219408D}"/>
               </a:ext>
             </a:extLst>
           </p:cNvPr>
@@ -27398,7 +27398,7 @@
           <p:cNvPr id="7" name="">
             <a:extLst xmlns:a="http://schemas.openxmlformats.org/drawingml/2006/main">
               <a:ext uri="{FF2B5EF4-FFF2-40B4-BE49-F238E27FC236}">
-                <a16:creationId xmlns:a16="http://schemas.microsoft.com/office/drawing/2014/main" id="{D2035571-89A7-430E-A7F0-2D4B116D145B}"/>
+                <a16:creationId xmlns:a16="http://schemas.microsoft.com/office/drawing/2014/main" id="{828F18B6-9B5F-4A82-8362-8AB1DC892073}"/>
               </a:ext>
             </a:extLst>
           </p:cNvPr>
@@ -27460,7 +27460,7 @@
           <p:cNvPr id="8" name="">
             <a:extLst xmlns:a="http://schemas.openxmlformats.org/drawingml/2006/main">
               <a:ext uri="{FF2B5EF4-FFF2-40B4-BE49-F238E27FC236}">
-                <a16:creationId xmlns:a16="http://schemas.microsoft.com/office/drawing/2014/main" id="{1E4DFE42-3291-4438-B8D3-BC985702E9DD}"/>
+                <a16:creationId xmlns:a16="http://schemas.microsoft.com/office/drawing/2014/main" id="{852E9265-2A1C-4632-8892-E6A4CD0B2938}"/>
               </a:ext>
             </a:extLst>
           </p:cNvPr>
@@ -27489,7 +27489,7 @@
     </p:spTree>
     <p:extLst>
       <p:ext uri="{BB962C8B-B14F-4D97-AF65-F5344CB8AC3E}">
-        <p14:creationId xmlns:p14="http://schemas.microsoft.com/office/powerpoint/2010/main" val="310038495"/>
+        <p14:creationId xmlns:p14="http://schemas.microsoft.com/office/powerpoint/2010/main" val="371091542"/>
       </p:ext>
     </p:extLst>
   </p:cSld>
@@ -27523,7 +27523,7 @@
           <p:cNvPr id="32" name="">
             <a:extLst xmlns:a="http://schemas.openxmlformats.org/drawingml/2006/main">
               <a:ext uri="{FF2B5EF4-FFF2-40B4-BE49-F238E27FC236}">
-                <a16:creationId xmlns:a16="http://schemas.microsoft.com/office/drawing/2014/main" id="{6CCDD774-01D9-4465-A46F-60254FD0C0F7}"/>
+                <a16:creationId xmlns:a16="http://schemas.microsoft.com/office/drawing/2014/main" id="{B525724E-AD64-4F6A-BDF0-3970D29FFE58}"/>
               </a:ext>
             </a:extLst>
           </p:cNvPr>
@@ -27554,7 +27554,7 @@
           <p:cNvPr id="2" name="">
             <a:extLst xmlns:a="http://schemas.openxmlformats.org/drawingml/2006/main">
               <a:ext uri="{FF2B5EF4-FFF2-40B4-BE49-F238E27FC236}">
-                <a16:creationId xmlns:a16="http://schemas.microsoft.com/office/drawing/2014/main" id="{E79BF1F0-1708-48A0-8676-64B3FE577060}"/>
+                <a16:creationId xmlns:a16="http://schemas.microsoft.com/office/drawing/2014/main" id="{4B3A58C0-6CE1-4C03-A153-80E994CED5FE}"/>
               </a:ext>
             </a:extLst>
           </p:cNvPr>
@@ -27616,7 +27616,7 @@
           <p:cNvPr id="3" name="">
             <a:extLst xmlns:a="http://schemas.openxmlformats.org/drawingml/2006/main">
               <a:ext uri="{FF2B5EF4-FFF2-40B4-BE49-F238E27FC236}">
-                <a16:creationId xmlns:a16="http://schemas.microsoft.com/office/drawing/2014/main" id="{8C02DF46-4186-4FD6-9E46-A06D90A59CC7}"/>
+                <a16:creationId xmlns:a16="http://schemas.microsoft.com/office/drawing/2014/main" id="{318D6945-FC92-4EF8-B01F-E6673BDDB0E9}"/>
               </a:ext>
             </a:extLst>
           </p:cNvPr>
@@ -27678,7 +27678,7 @@
           <p:cNvPr id="4" name="">
             <a:extLst xmlns:a="http://schemas.openxmlformats.org/drawingml/2006/main">
               <a:ext uri="{FF2B5EF4-FFF2-40B4-BE49-F238E27FC236}">
-                <a16:creationId xmlns:a16="http://schemas.microsoft.com/office/drawing/2014/main" id="{FF48BF04-D763-4EAA-B1D3-917056053AF3}"/>
+                <a16:creationId xmlns:a16="http://schemas.microsoft.com/office/drawing/2014/main" id="{8C2B2E33-A5B1-4CA0-9D62-CAE69ED0FB4D}"/>
               </a:ext>
             </a:extLst>
           </p:cNvPr>
@@ -27740,7 +27740,7 @@
           <p:cNvPr id="5" name="">
             <a:extLst xmlns:a="http://schemas.openxmlformats.org/drawingml/2006/main">
               <a:ext uri="{FF2B5EF4-FFF2-40B4-BE49-F238E27FC236}">
-                <a16:creationId xmlns:a16="http://schemas.microsoft.com/office/drawing/2014/main" id="{E4425024-2C2B-4080-8D2F-5A928A68A9CD}"/>
+                <a16:creationId xmlns:a16="http://schemas.microsoft.com/office/drawing/2014/main" id="{4D218860-F93D-4554-B67E-560A2AAB9E19}"/>
               </a:ext>
             </a:extLst>
           </p:cNvPr>
@@ -27802,7 +27802,7 @@
           <p:cNvPr id="6" name="">
             <a:extLst xmlns:a="http://schemas.openxmlformats.org/drawingml/2006/main">
               <a:ext uri="{FF2B5EF4-FFF2-40B4-BE49-F238E27FC236}">
-                <a16:creationId xmlns:a16="http://schemas.microsoft.com/office/drawing/2014/main" id="{A061AE09-A060-407D-B3FD-3EDA9C755C8A}"/>
+                <a16:creationId xmlns:a16="http://schemas.microsoft.com/office/drawing/2014/main" id="{802778B5-48E5-40BB-A726-0F0FFE95F0F3}"/>
               </a:ext>
             </a:extLst>
           </p:cNvPr>
@@ -27864,7 +27864,7 @@
           <p:cNvPr id="7" name="">
             <a:extLst xmlns:a="http://schemas.openxmlformats.org/drawingml/2006/main">
               <a:ext uri="{FF2B5EF4-FFF2-40B4-BE49-F238E27FC236}">
-                <a16:creationId xmlns:a16="http://schemas.microsoft.com/office/drawing/2014/main" id="{170D5942-C0EB-440F-B513-AFDE951B0C88}"/>
+                <a16:creationId xmlns:a16="http://schemas.microsoft.com/office/drawing/2014/main" id="{B68926D3-57F9-4EFD-AA18-4CE19DCB12A6}"/>
               </a:ext>
             </a:extLst>
           </p:cNvPr>
@@ -27897,7 +27897,7 @@
           <p:cNvPr id="8" name="">
             <a:extLst xmlns:a="http://schemas.openxmlformats.org/drawingml/2006/main">
               <a:ext uri="{FF2B5EF4-FFF2-40B4-BE49-F238E27FC236}">
-                <a16:creationId xmlns:a16="http://schemas.microsoft.com/office/drawing/2014/main" id="{161EFF88-CEFB-4073-952B-C9BA26D4CD15}"/>
+                <a16:creationId xmlns:a16="http://schemas.microsoft.com/office/drawing/2014/main" id="{26D2632C-C811-49B9-BD2F-444E2E4127E1}"/>
               </a:ext>
             </a:extLst>
           </p:cNvPr>
@@ -27930,7 +27930,7 @@
           <p:cNvPr id="9" name="">
             <a:extLst xmlns:a="http://schemas.openxmlformats.org/drawingml/2006/main">
               <a:ext uri="{FF2B5EF4-FFF2-40B4-BE49-F238E27FC236}">
-                <a16:creationId xmlns:a16="http://schemas.microsoft.com/office/drawing/2014/main" id="{35C1FC70-0C14-42EB-BE1A-A592853381D4}"/>
+                <a16:creationId xmlns:a16="http://schemas.microsoft.com/office/drawing/2014/main" id="{89F076A6-5867-4B1B-A431-833C5FFC4F8E}"/>
               </a:ext>
             </a:extLst>
           </p:cNvPr>
@@ -27992,7 +27992,7 @@
           <p:cNvPr id="10" name="">
             <a:extLst xmlns:a="http://schemas.openxmlformats.org/drawingml/2006/main">
               <a:ext uri="{FF2B5EF4-FFF2-40B4-BE49-F238E27FC236}">
-                <a16:creationId xmlns:a16="http://schemas.microsoft.com/office/drawing/2014/main" id="{825EB6B5-1640-4699-AC57-3E855D6426B2}"/>
+                <a16:creationId xmlns:a16="http://schemas.microsoft.com/office/drawing/2014/main" id="{09BEBCDA-C6B7-47B5-AD88-55BC58BE1898}"/>
               </a:ext>
             </a:extLst>
           </p:cNvPr>
@@ -28054,7 +28054,7 @@
           <p:cNvPr id="11" name="">
             <a:extLst xmlns:a="http://schemas.openxmlformats.org/drawingml/2006/main">
               <a:ext uri="{FF2B5EF4-FFF2-40B4-BE49-F238E27FC236}">
-                <a16:creationId xmlns:a16="http://schemas.microsoft.com/office/drawing/2014/main" id="{DFCBC6A1-7398-47AF-8D3E-0319690B6A84}"/>
+                <a16:creationId xmlns:a16="http://schemas.microsoft.com/office/drawing/2014/main" id="{A6B282A7-1DD3-4B9F-85C5-34C7F6509AE5}"/>
               </a:ext>
             </a:extLst>
           </p:cNvPr>
@@ -28116,7 +28116,7 @@
           <p:cNvPr id="12" name="">
             <a:extLst xmlns:a="http://schemas.openxmlformats.org/drawingml/2006/main">
               <a:ext uri="{FF2B5EF4-FFF2-40B4-BE49-F238E27FC236}">
-                <a16:creationId xmlns:a16="http://schemas.microsoft.com/office/drawing/2014/main" id="{5127A7B4-ABA4-4D07-AE68-2A2018CD5664}"/>
+                <a16:creationId xmlns:a16="http://schemas.microsoft.com/office/drawing/2014/main" id="{09B013BB-F201-41F3-9746-9AE428BCBDD4}"/>
               </a:ext>
             </a:extLst>
           </p:cNvPr>
@@ -28156,7 +28156,7 @@
           <p:cNvPr id="13" name="">
             <a:extLst xmlns:a="http://schemas.openxmlformats.org/drawingml/2006/main">
               <a:ext uri="{FF2B5EF4-FFF2-40B4-BE49-F238E27FC236}">
-                <a16:creationId xmlns:a16="http://schemas.microsoft.com/office/drawing/2014/main" id="{85C2EFEE-E392-4AA6-ACB6-46AE0E0662C0}"/>
+                <a16:creationId xmlns:a16="http://schemas.microsoft.com/office/drawing/2014/main" id="{5898C613-E144-4E84-9CF5-0305EBA144FB}"/>
               </a:ext>
             </a:extLst>
           </p:cNvPr>
@@ -28218,7 +28218,7 @@
           <p:cNvPr id="14" name="">
             <a:extLst xmlns:a="http://schemas.openxmlformats.org/drawingml/2006/main">
               <a:ext uri="{FF2B5EF4-FFF2-40B4-BE49-F238E27FC236}">
-                <a16:creationId xmlns:a16="http://schemas.microsoft.com/office/drawing/2014/main" id="{F5EA7417-E89B-4ABC-A0FA-3CA109B7E400}"/>
+                <a16:creationId xmlns:a16="http://schemas.microsoft.com/office/drawing/2014/main" id="{041B88D6-05B0-41F8-AEE0-66A73F20CF21}"/>
               </a:ext>
             </a:extLst>
           </p:cNvPr>
@@ -28280,7 +28280,7 @@
           <p:cNvPr id="15" name="">
             <a:extLst xmlns:a="http://schemas.openxmlformats.org/drawingml/2006/main">
               <a:ext uri="{FF2B5EF4-FFF2-40B4-BE49-F238E27FC236}">
-                <a16:creationId xmlns:a16="http://schemas.microsoft.com/office/drawing/2014/main" id="{C9105C20-BD0F-4F2F-8A29-EE232B0AA3CF}"/>
+                <a16:creationId xmlns:a16="http://schemas.microsoft.com/office/drawing/2014/main" id="{BCC6DE67-3AAE-4E2C-A78A-B3806D2DA233}"/>
               </a:ext>
             </a:extLst>
           </p:cNvPr>
@@ -28320,7 +28320,7 @@
           <p:cNvPr id="16" name="">
             <a:extLst xmlns:a="http://schemas.openxmlformats.org/drawingml/2006/main">
               <a:ext uri="{FF2B5EF4-FFF2-40B4-BE49-F238E27FC236}">
-                <a16:creationId xmlns:a16="http://schemas.microsoft.com/office/drawing/2014/main" id="{BDA2E365-5D5E-4C1E-98FB-9C3CC1ED7AC0}"/>
+                <a16:creationId xmlns:a16="http://schemas.microsoft.com/office/drawing/2014/main" id="{B3FA5844-41B7-44CB-9D76-EBDC06883C59}"/>
               </a:ext>
             </a:extLst>
           </p:cNvPr>
@@ -28382,7 +28382,7 @@
           <p:cNvPr id="17" name="">
             <a:extLst xmlns:a="http://schemas.openxmlformats.org/drawingml/2006/main">
               <a:ext uri="{FF2B5EF4-FFF2-40B4-BE49-F238E27FC236}">
-                <a16:creationId xmlns:a16="http://schemas.microsoft.com/office/drawing/2014/main" id="{B72E6A4C-F866-42A5-806D-03AE2CED0F8C}"/>
+                <a16:creationId xmlns:a16="http://schemas.microsoft.com/office/drawing/2014/main" id="{B17D6F31-BCDD-48CD-B899-3CF86DF0FD1F}"/>
               </a:ext>
             </a:extLst>
           </p:cNvPr>
@@ -28444,7 +28444,7 @@
           <p:cNvPr id="18" name="">
             <a:extLst xmlns:a="http://schemas.openxmlformats.org/drawingml/2006/main">
               <a:ext uri="{FF2B5EF4-FFF2-40B4-BE49-F238E27FC236}">
-                <a16:creationId xmlns:a16="http://schemas.microsoft.com/office/drawing/2014/main" id="{BAE48F37-5D9D-4560-A567-5660AEE01F2C}"/>
+                <a16:creationId xmlns:a16="http://schemas.microsoft.com/office/drawing/2014/main" id="{E0A7888A-7036-4DA6-AE5D-208623F53D1E}"/>
               </a:ext>
             </a:extLst>
           </p:cNvPr>
@@ -28477,7 +28477,7 @@
           <p:cNvPr id="19" name="">
             <a:extLst xmlns:a="http://schemas.openxmlformats.org/drawingml/2006/main">
               <a:ext uri="{FF2B5EF4-FFF2-40B4-BE49-F238E27FC236}">
-                <a16:creationId xmlns:a16="http://schemas.microsoft.com/office/drawing/2014/main" id="{D34E7FD0-84EC-4400-B742-8B1B0D8E1BFB}"/>
+                <a16:creationId xmlns:a16="http://schemas.microsoft.com/office/drawing/2014/main" id="{ED6E11B2-F954-4A11-B2BB-408070EAE95E}"/>
               </a:ext>
             </a:extLst>
           </p:cNvPr>
@@ -28510,7 +28510,7 @@
           <p:cNvPr id="20" name="">
             <a:extLst xmlns:a="http://schemas.openxmlformats.org/drawingml/2006/main">
               <a:ext uri="{FF2B5EF4-FFF2-40B4-BE49-F238E27FC236}">
-                <a16:creationId xmlns:a16="http://schemas.microsoft.com/office/drawing/2014/main" id="{DE5652FB-32BB-43D6-B58C-0BBC6C433932}"/>
+                <a16:creationId xmlns:a16="http://schemas.microsoft.com/office/drawing/2014/main" id="{0801BB90-C148-476B-BB2A-4B740E07B582}"/>
               </a:ext>
             </a:extLst>
           </p:cNvPr>
@@ -28572,7 +28572,7 @@
           <p:cNvPr id="21" name="">
             <a:extLst xmlns:a="http://schemas.openxmlformats.org/drawingml/2006/main">
               <a:ext uri="{FF2B5EF4-FFF2-40B4-BE49-F238E27FC236}">
-                <a16:creationId xmlns:a16="http://schemas.microsoft.com/office/drawing/2014/main" id="{4CA49A35-A59C-4C96-9AE4-AAF677EA786A}"/>
+                <a16:creationId xmlns:a16="http://schemas.microsoft.com/office/drawing/2014/main" id="{C3E64176-C72C-4572-B36B-67D150AA2953}"/>
               </a:ext>
             </a:extLst>
           </p:cNvPr>
@@ -28634,7 +28634,7 @@
           <p:cNvPr id="22" name="">
             <a:extLst xmlns:a="http://schemas.openxmlformats.org/drawingml/2006/main">
               <a:ext uri="{FF2B5EF4-FFF2-40B4-BE49-F238E27FC236}">
-                <a16:creationId xmlns:a16="http://schemas.microsoft.com/office/drawing/2014/main" id="{18DA77B1-8E52-468B-BA54-E1C42F50DB52}"/>
+                <a16:creationId xmlns:a16="http://schemas.microsoft.com/office/drawing/2014/main" id="{65A530DB-6864-4408-9EA6-FF1B405102AA}"/>
               </a:ext>
             </a:extLst>
           </p:cNvPr>
@@ -28674,7 +28674,7 @@
           <p:cNvPr id="23" name="">
             <a:extLst xmlns:a="http://schemas.openxmlformats.org/drawingml/2006/main">
               <a:ext uri="{FF2B5EF4-FFF2-40B4-BE49-F238E27FC236}">
-                <a16:creationId xmlns:a16="http://schemas.microsoft.com/office/drawing/2014/main" id="{209FDB19-AE28-44E7-BF2E-5DF2712DE52B}"/>
+                <a16:creationId xmlns:a16="http://schemas.microsoft.com/office/drawing/2014/main" id="{E88D0188-AAD0-4159-91A5-0E4C51261500}"/>
               </a:ext>
             </a:extLst>
           </p:cNvPr>
@@ -28736,7 +28736,7 @@
           <p:cNvPr id="24" name="">
             <a:extLst xmlns:a="http://schemas.openxmlformats.org/drawingml/2006/main">
               <a:ext uri="{FF2B5EF4-FFF2-40B4-BE49-F238E27FC236}">
-                <a16:creationId xmlns:a16="http://schemas.microsoft.com/office/drawing/2014/main" id="{D4AA9B0F-C14A-4523-8386-F7ECFEC16268}"/>
+                <a16:creationId xmlns:a16="http://schemas.microsoft.com/office/drawing/2014/main" id="{4A6F0F23-402D-444C-A7A4-D5A56059D9CE}"/>
               </a:ext>
             </a:extLst>
           </p:cNvPr>
@@ -28798,7 +28798,7 @@
           <p:cNvPr id="25" name="">
             <a:extLst xmlns:a="http://schemas.openxmlformats.org/drawingml/2006/main">
               <a:ext uri="{FF2B5EF4-FFF2-40B4-BE49-F238E27FC236}">
-                <a16:creationId xmlns:a16="http://schemas.microsoft.com/office/drawing/2014/main" id="{08C5D021-8DD5-4CC5-B142-935E5C2793F7}"/>
+                <a16:creationId xmlns:a16="http://schemas.microsoft.com/office/drawing/2014/main" id="{B5877CA2-10DE-4226-A390-2F75E6B38C82}"/>
               </a:ext>
             </a:extLst>
           </p:cNvPr>
@@ -28838,7 +28838,7 @@
           <p:cNvPr id="26" name="">
             <a:extLst xmlns:a="http://schemas.openxmlformats.org/drawingml/2006/main">
               <a:ext uri="{FF2B5EF4-FFF2-40B4-BE49-F238E27FC236}">
-                <a16:creationId xmlns:a16="http://schemas.microsoft.com/office/drawing/2014/main" id="{6C45B132-A89E-48A5-9FB2-6631D550B814}"/>
+                <a16:creationId xmlns:a16="http://schemas.microsoft.com/office/drawing/2014/main" id="{A42E1815-0B80-49AC-AB92-2987E0E4F9F2}"/>
               </a:ext>
             </a:extLst>
           </p:cNvPr>
@@ -28900,7 +28900,7 @@
           <p:cNvPr id="27" name="">
             <a:extLst xmlns:a="http://schemas.openxmlformats.org/drawingml/2006/main">
               <a:ext uri="{FF2B5EF4-FFF2-40B4-BE49-F238E27FC236}">
-                <a16:creationId xmlns:a16="http://schemas.microsoft.com/office/drawing/2014/main" id="{E2B7E3E1-19FD-4423-863D-C361C41B68E0}"/>
+                <a16:creationId xmlns:a16="http://schemas.microsoft.com/office/drawing/2014/main" id="{85891E37-19DE-4570-98F1-7E005C921894}"/>
               </a:ext>
             </a:extLst>
           </p:cNvPr>
@@ -28962,7 +28962,7 @@
           <p:cNvPr id="28" name="">
             <a:extLst xmlns:a="http://schemas.openxmlformats.org/drawingml/2006/main">
               <a:ext uri="{FF2B5EF4-FFF2-40B4-BE49-F238E27FC236}">
-                <a16:creationId xmlns:a16="http://schemas.microsoft.com/office/drawing/2014/main" id="{DC4530D9-B681-4ABB-82E9-FEFCE94A8497}"/>
+                <a16:creationId xmlns:a16="http://schemas.microsoft.com/office/drawing/2014/main" id="{5FE40CC9-DC00-4461-B65A-5B02B0F288FD}"/>
               </a:ext>
             </a:extLst>
           </p:cNvPr>
@@ -29002,7 +29002,7 @@
           <p:cNvPr id="29" name="">
             <a:extLst xmlns:a="http://schemas.openxmlformats.org/drawingml/2006/main">
               <a:ext uri="{FF2B5EF4-FFF2-40B4-BE49-F238E27FC236}">
-                <a16:creationId xmlns:a16="http://schemas.microsoft.com/office/drawing/2014/main" id="{294B7C76-DF78-4DE2-B9B5-DA8A7B674A72}"/>
+                <a16:creationId xmlns:a16="http://schemas.microsoft.com/office/drawing/2014/main" id="{833A805A-30EE-41A0-B98C-59AF14A52DDA}"/>
               </a:ext>
             </a:extLst>
           </p:cNvPr>
@@ -29064,7 +29064,7 @@
           <p:cNvPr id="30" name="">
             <a:extLst xmlns:a="http://schemas.openxmlformats.org/drawingml/2006/main">
               <a:ext uri="{FF2B5EF4-FFF2-40B4-BE49-F238E27FC236}">
-                <a16:creationId xmlns:a16="http://schemas.microsoft.com/office/drawing/2014/main" id="{15C56E82-58EC-4634-BD35-9EFAA6CE3C66}"/>
+                <a16:creationId xmlns:a16="http://schemas.microsoft.com/office/drawing/2014/main" id="{51925E5D-4264-413E-8A02-FFE266C6177D}"/>
               </a:ext>
             </a:extLst>
           </p:cNvPr>
@@ -29097,7 +29097,7 @@
           <p:cNvPr id="31" name="">
             <a:extLst xmlns:a="http://schemas.openxmlformats.org/drawingml/2006/main">
               <a:ext uri="{FF2B5EF4-FFF2-40B4-BE49-F238E27FC236}">
-                <a16:creationId xmlns:a16="http://schemas.microsoft.com/office/drawing/2014/main" id="{BCA08833-F18F-4AE4-BBEC-54208B230358}"/>
+                <a16:creationId xmlns:a16="http://schemas.microsoft.com/office/drawing/2014/main" id="{4F7F2DCF-FA40-4680-9ED0-CADD9F85279D}"/>
               </a:ext>
             </a:extLst>
           </p:cNvPr>
@@ -29157,7 +29157,7 @@
     </p:spTree>
     <p:extLst>
       <p:ext uri="{BB962C8B-B14F-4D97-AF65-F5344CB8AC3E}">
-        <p14:creationId xmlns:p14="http://schemas.microsoft.com/office/powerpoint/2010/main" val="1660054413"/>
+        <p14:creationId xmlns:p14="http://schemas.microsoft.com/office/powerpoint/2010/main" val="810278225"/>
       </p:ext>
     </p:extLst>
   </p:cSld>
@@ -29191,7 +29191,7 @@
           <p:cNvPr id="20" name="">
             <a:extLst xmlns:a="http://schemas.openxmlformats.org/drawingml/2006/main">
               <a:ext uri="{FF2B5EF4-FFF2-40B4-BE49-F238E27FC236}">
-                <a16:creationId xmlns:a16="http://schemas.microsoft.com/office/drawing/2014/main" id="{9AF1DE34-AEA9-4E42-803B-E8BA102A18DE}"/>
+                <a16:creationId xmlns:a16="http://schemas.microsoft.com/office/drawing/2014/main" id="{FF045BB4-BC07-40AB-B08D-D20D70BC41BD}"/>
               </a:ext>
             </a:extLst>
           </p:cNvPr>
@@ -29222,7 +29222,7 @@
           <p:cNvPr id="2" name="">
             <a:extLst xmlns:a="http://schemas.openxmlformats.org/drawingml/2006/main">
               <a:ext uri="{FF2B5EF4-FFF2-40B4-BE49-F238E27FC236}">
-                <a16:creationId xmlns:a16="http://schemas.microsoft.com/office/drawing/2014/main" id="{1519EEA4-FB50-4682-8D46-2F2AD359900F}"/>
+                <a16:creationId xmlns:a16="http://schemas.microsoft.com/office/drawing/2014/main" id="{0CBFBCEC-4E84-416B-BB97-70FF8F5CDF7D}"/>
               </a:ext>
             </a:extLst>
           </p:cNvPr>
@@ -29284,7 +29284,7 @@
           <p:cNvPr id="3" name="">
             <a:extLst xmlns:a="http://schemas.openxmlformats.org/drawingml/2006/main">
               <a:ext uri="{FF2B5EF4-FFF2-40B4-BE49-F238E27FC236}">
-                <a16:creationId xmlns:a16="http://schemas.microsoft.com/office/drawing/2014/main" id="{752EA248-E16F-4C69-AA83-3A8ED220E40F}"/>
+                <a16:creationId xmlns:a16="http://schemas.microsoft.com/office/drawing/2014/main" id="{A0640714-81EE-4144-8F89-510651F27948}"/>
               </a:ext>
             </a:extLst>
           </p:cNvPr>
@@ -29346,7 +29346,7 @@
           <p:cNvPr id="4" name="">
             <a:extLst xmlns:a="http://schemas.openxmlformats.org/drawingml/2006/main">
               <a:ext uri="{FF2B5EF4-FFF2-40B4-BE49-F238E27FC236}">
-                <a16:creationId xmlns:a16="http://schemas.microsoft.com/office/drawing/2014/main" id="{B952870F-8EE7-4891-88AC-FB0597AB0489}"/>
+                <a16:creationId xmlns:a16="http://schemas.microsoft.com/office/drawing/2014/main" id="{AFA8F9F5-08DF-44A8-A3EF-80B92C8E0F03}"/>
               </a:ext>
             </a:extLst>
           </p:cNvPr>
@@ -29408,7 +29408,7 @@
           <p:cNvPr id="5" name="">
             <a:extLst xmlns:a="http://schemas.openxmlformats.org/drawingml/2006/main">
               <a:ext uri="{FF2B5EF4-FFF2-40B4-BE49-F238E27FC236}">
-                <a16:creationId xmlns:a16="http://schemas.microsoft.com/office/drawing/2014/main" id="{1140F537-0E3B-44C1-A672-CB717E3F9FF8}"/>
+                <a16:creationId xmlns:a16="http://schemas.microsoft.com/office/drawing/2014/main" id="{FC292024-F7F3-44EF-8D5A-F6DE012139E1}"/>
               </a:ext>
             </a:extLst>
           </p:cNvPr>
@@ -29470,7 +29470,7 @@
           <p:cNvPr id="6" name="">
             <a:extLst xmlns:a="http://schemas.openxmlformats.org/drawingml/2006/main">
               <a:ext uri="{FF2B5EF4-FFF2-40B4-BE49-F238E27FC236}">
-                <a16:creationId xmlns:a16="http://schemas.microsoft.com/office/drawing/2014/main" id="{5D149898-F0E7-4688-A0F9-95CBB2FBCE7C}"/>
+                <a16:creationId xmlns:a16="http://schemas.microsoft.com/office/drawing/2014/main" id="{56CAFED0-0D13-4EE0-BF3C-2DBE3AB590C0}"/>
               </a:ext>
             </a:extLst>
           </p:cNvPr>
@@ -29532,7 +29532,7 @@
           <p:cNvPr id="7" name="">
             <a:extLst xmlns:a="http://schemas.openxmlformats.org/drawingml/2006/main">
               <a:ext uri="{FF2B5EF4-FFF2-40B4-BE49-F238E27FC236}">
-                <a16:creationId xmlns:a16="http://schemas.microsoft.com/office/drawing/2014/main" id="{0588723B-7911-4C1D-B655-B2B38B520B0A}"/>
+                <a16:creationId xmlns:a16="http://schemas.microsoft.com/office/drawing/2014/main" id="{E80697C3-E855-4E1A-9ACD-3C6B9228C585}"/>
               </a:ext>
             </a:extLst>
           </p:cNvPr>
@@ -29565,7 +29565,7 @@
           <p:cNvPr id="8" name="">
             <a:extLst xmlns:a="http://schemas.openxmlformats.org/drawingml/2006/main">
               <a:ext uri="{FF2B5EF4-FFF2-40B4-BE49-F238E27FC236}">
-                <a16:creationId xmlns:a16="http://schemas.microsoft.com/office/drawing/2014/main" id="{ECC142EC-8675-435A-8552-BDA0A6278711}"/>
+                <a16:creationId xmlns:a16="http://schemas.microsoft.com/office/drawing/2014/main" id="{E2BEB34F-164F-435D-963E-61F45D388678}"/>
               </a:ext>
             </a:extLst>
           </p:cNvPr>
@@ -29627,7 +29627,7 @@
           <p:cNvPr id="9" name="">
             <a:extLst xmlns:a="http://schemas.openxmlformats.org/drawingml/2006/main">
               <a:ext uri="{FF2B5EF4-FFF2-40B4-BE49-F238E27FC236}">
-                <a16:creationId xmlns:a16="http://schemas.microsoft.com/office/drawing/2014/main" id="{F881D87F-826C-4630-9F80-640595959795}"/>
+                <a16:creationId xmlns:a16="http://schemas.microsoft.com/office/drawing/2014/main" id="{5F7EDCD5-B1ED-4AC0-9836-12362C579356}"/>
               </a:ext>
             </a:extLst>
           </p:cNvPr>
@@ -29689,7 +29689,7 @@
           <p:cNvPr id="10" name="">
             <a:extLst xmlns:a="http://schemas.openxmlformats.org/drawingml/2006/main">
               <a:ext uri="{FF2B5EF4-FFF2-40B4-BE49-F238E27FC236}">
-                <a16:creationId xmlns:a16="http://schemas.microsoft.com/office/drawing/2014/main" id="{1E1776AA-BF07-4E6D-85C3-017442215BE4}"/>
+                <a16:creationId xmlns:a16="http://schemas.microsoft.com/office/drawing/2014/main" id="{69EFFE0F-56AE-4DA7-A377-03A6CA0D00A3}"/>
               </a:ext>
             </a:extLst>
           </p:cNvPr>
@@ -29751,7 +29751,7 @@
           <p:cNvPr id="11" name="">
             <a:extLst xmlns:a="http://schemas.openxmlformats.org/drawingml/2006/main">
               <a:ext uri="{FF2B5EF4-FFF2-40B4-BE49-F238E27FC236}">
-                <a16:creationId xmlns:a16="http://schemas.microsoft.com/office/drawing/2014/main" id="{94FC38BC-9B18-4707-AD37-050375FA4A0D}"/>
+                <a16:creationId xmlns:a16="http://schemas.microsoft.com/office/drawing/2014/main" id="{90B4E9D2-88CB-4EA3-A0A6-7E826C18F05F}"/>
               </a:ext>
             </a:extLst>
           </p:cNvPr>
@@ -29813,7 +29813,7 @@
           <p:cNvPr id="12" name="">
             <a:extLst xmlns:a="http://schemas.openxmlformats.org/drawingml/2006/main">
               <a:ext uri="{FF2B5EF4-FFF2-40B4-BE49-F238E27FC236}">
-                <a16:creationId xmlns:a16="http://schemas.microsoft.com/office/drawing/2014/main" id="{F2024976-614F-42FA-AD79-8B5D8667ECC5}"/>
+                <a16:creationId xmlns:a16="http://schemas.microsoft.com/office/drawing/2014/main" id="{CF7B73DD-624F-49A2-A915-FDD95C8F1117}"/>
               </a:ext>
             </a:extLst>
           </p:cNvPr>
@@ -29875,7 +29875,7 @@
           <p:cNvPr id="13" name="">
             <a:extLst xmlns:a="http://schemas.openxmlformats.org/drawingml/2006/main">
               <a:ext uri="{FF2B5EF4-FFF2-40B4-BE49-F238E27FC236}">
-                <a16:creationId xmlns:a16="http://schemas.microsoft.com/office/drawing/2014/main" id="{56B71760-D350-4F33-A326-5961F8618E58}"/>
+                <a16:creationId xmlns:a16="http://schemas.microsoft.com/office/drawing/2014/main" id="{740C8193-3A35-46FF-8B3A-A423031E6A9D}"/>
               </a:ext>
             </a:extLst>
           </p:cNvPr>
@@ -29908,7 +29908,7 @@
           <p:cNvPr id="14" name="">
             <a:extLst xmlns:a="http://schemas.openxmlformats.org/drawingml/2006/main">
               <a:ext uri="{FF2B5EF4-FFF2-40B4-BE49-F238E27FC236}">
-                <a16:creationId xmlns:a16="http://schemas.microsoft.com/office/drawing/2014/main" id="{30DB6CE2-8614-4BFE-BEAE-725E3DCE64AA}"/>
+                <a16:creationId xmlns:a16="http://schemas.microsoft.com/office/drawing/2014/main" id="{AB12721E-62FF-4579-B2DA-D1B7A56C0BD0}"/>
               </a:ext>
             </a:extLst>
           </p:cNvPr>
@@ -29970,7 +29970,7 @@
           <p:cNvPr id="15" name="">
             <a:extLst xmlns:a="http://schemas.openxmlformats.org/drawingml/2006/main">
               <a:ext uri="{FF2B5EF4-FFF2-40B4-BE49-F238E27FC236}">
-                <a16:creationId xmlns:a16="http://schemas.microsoft.com/office/drawing/2014/main" id="{7DCCA62D-5645-40DF-BCF9-40ABFEA6768D}"/>
+                <a16:creationId xmlns:a16="http://schemas.microsoft.com/office/drawing/2014/main" id="{CC5BD58A-D1A2-4FF3-B0C6-AF7FBEC9782E}"/>
               </a:ext>
             </a:extLst>
           </p:cNvPr>
@@ -30032,7 +30032,7 @@
           <p:cNvPr id="16" name="">
             <a:extLst xmlns:a="http://schemas.openxmlformats.org/drawingml/2006/main">
               <a:ext uri="{FF2B5EF4-FFF2-40B4-BE49-F238E27FC236}">
-                <a16:creationId xmlns:a16="http://schemas.microsoft.com/office/drawing/2014/main" id="{F3C9A326-F0B3-4A45-99F9-95512BB089E2}"/>
+                <a16:creationId xmlns:a16="http://schemas.microsoft.com/office/drawing/2014/main" id="{1331D1AB-C8D3-4B05-AA6F-CE170C0BD090}"/>
               </a:ext>
             </a:extLst>
           </p:cNvPr>
@@ -30094,7 +30094,7 @@
           <p:cNvPr id="17" name="">
             <a:extLst xmlns:a="http://schemas.openxmlformats.org/drawingml/2006/main">
               <a:ext uri="{FF2B5EF4-FFF2-40B4-BE49-F238E27FC236}">
-                <a16:creationId xmlns:a16="http://schemas.microsoft.com/office/drawing/2014/main" id="{3244EB34-5A24-44E9-8B46-19ECA4CE89FB}"/>
+                <a16:creationId xmlns:a16="http://schemas.microsoft.com/office/drawing/2014/main" id="{6113A64A-7FB7-43C3-B620-71E8AD9A534C}"/>
               </a:ext>
             </a:extLst>
           </p:cNvPr>
@@ -30156,7 +30156,7 @@
           <p:cNvPr id="18" name="">
             <a:extLst xmlns:a="http://schemas.openxmlformats.org/drawingml/2006/main">
               <a:ext uri="{FF2B5EF4-FFF2-40B4-BE49-F238E27FC236}">
-                <a16:creationId xmlns:a16="http://schemas.microsoft.com/office/drawing/2014/main" id="{6D7107FC-3982-4C52-8861-0272FD463A4C}"/>
+                <a16:creationId xmlns:a16="http://schemas.microsoft.com/office/drawing/2014/main" id="{C77CD8EC-037E-447B-BB36-A927AB7497D3}"/>
               </a:ext>
             </a:extLst>
           </p:cNvPr>
@@ -30218,7 +30218,7 @@
           <p:cNvPr id="19" name="">
             <a:extLst xmlns:a="http://schemas.openxmlformats.org/drawingml/2006/main">
               <a:ext uri="{FF2B5EF4-FFF2-40B4-BE49-F238E27FC236}">
-                <a16:creationId xmlns:a16="http://schemas.microsoft.com/office/drawing/2014/main" id="{8123CFD4-6F97-4FE1-86B3-FCD136A7F478}"/>
+                <a16:creationId xmlns:a16="http://schemas.microsoft.com/office/drawing/2014/main" id="{8C6D0E6A-40BD-4DFC-9C6B-67DDC2CF075F}"/>
               </a:ext>
             </a:extLst>
           </p:cNvPr>
@@ -30278,7 +30278,7 @@
     </p:spTree>
     <p:extLst>
       <p:ext uri="{BB962C8B-B14F-4D97-AF65-F5344CB8AC3E}">
-        <p14:creationId xmlns:p14="http://schemas.microsoft.com/office/powerpoint/2010/main" val="98300874"/>
+        <p14:creationId xmlns:p14="http://schemas.microsoft.com/office/powerpoint/2010/main" val="2032320158"/>
       </p:ext>
     </p:extLst>
   </p:cSld>
@@ -30312,7 +30312,7 @@
           <p:cNvPr id="17" name="">
             <a:extLst xmlns:a="http://schemas.openxmlformats.org/drawingml/2006/main">
               <a:ext uri="{FF2B5EF4-FFF2-40B4-BE49-F238E27FC236}">
-                <a16:creationId xmlns:a16="http://schemas.microsoft.com/office/drawing/2014/main" id="{D9805941-DA53-48D9-AB13-3FC0FB0069AA}"/>
+                <a16:creationId xmlns:a16="http://schemas.microsoft.com/office/drawing/2014/main" id="{87C29CD9-D6CA-451A-B1CB-772EC4AB419F}"/>
               </a:ext>
             </a:extLst>
           </p:cNvPr>
@@ -30343,7 +30343,7 @@
           <p:cNvPr id="2" name="">
             <a:extLst xmlns:a="http://schemas.openxmlformats.org/drawingml/2006/main">
               <a:ext uri="{FF2B5EF4-FFF2-40B4-BE49-F238E27FC236}">
-                <a16:creationId xmlns:a16="http://schemas.microsoft.com/office/drawing/2014/main" id="{CBD4571D-8375-46A4-89F4-DDAEBC2C6011}"/>
+                <a16:creationId xmlns:a16="http://schemas.microsoft.com/office/drawing/2014/main" id="{329A2447-07DD-49CB-9E92-27203D553D78}"/>
               </a:ext>
             </a:extLst>
           </p:cNvPr>
@@ -30405,7 +30405,7 @@
           <p:cNvPr id="3" name="">
             <a:extLst xmlns:a="http://schemas.openxmlformats.org/drawingml/2006/main">
               <a:ext uri="{FF2B5EF4-FFF2-40B4-BE49-F238E27FC236}">
-                <a16:creationId xmlns:a16="http://schemas.microsoft.com/office/drawing/2014/main" id="{E4717CB3-41CF-42FE-8FAD-39D37B68250B}"/>
+                <a16:creationId xmlns:a16="http://schemas.microsoft.com/office/drawing/2014/main" id="{24D75D30-67FE-41BA-B510-37A49FC1A34B}"/>
               </a:ext>
             </a:extLst>
           </p:cNvPr>
@@ -30467,7 +30467,7 @@
           <p:cNvPr id="4" name="">
             <a:extLst xmlns:a="http://schemas.openxmlformats.org/drawingml/2006/main">
               <a:ext uri="{FF2B5EF4-FFF2-40B4-BE49-F238E27FC236}">
-                <a16:creationId xmlns:a16="http://schemas.microsoft.com/office/drawing/2014/main" id="{4F95E546-C534-4DA8-A640-5AA06C2E7135}"/>
+                <a16:creationId xmlns:a16="http://schemas.microsoft.com/office/drawing/2014/main" id="{0ECAB80C-8251-43D3-A987-E18AB138CB3B}"/>
               </a:ext>
             </a:extLst>
           </p:cNvPr>
@@ -30529,7 +30529,7 @@
           <p:cNvPr id="5" name="">
             <a:extLst xmlns:a="http://schemas.openxmlformats.org/drawingml/2006/main">
               <a:ext uri="{FF2B5EF4-FFF2-40B4-BE49-F238E27FC236}">
-                <a16:creationId xmlns:a16="http://schemas.microsoft.com/office/drawing/2014/main" id="{37EB4CF1-95FA-466D-8C42-03C6F9AE7D2C}"/>
+                <a16:creationId xmlns:a16="http://schemas.microsoft.com/office/drawing/2014/main" id="{445A172C-FBD5-40D5-B2D6-73CAA7A2FFE6}"/>
               </a:ext>
             </a:extLst>
           </p:cNvPr>
@@ -30591,7 +30591,7 @@
           <p:cNvPr id="6" name="">
             <a:extLst xmlns:a="http://schemas.openxmlformats.org/drawingml/2006/main">
               <a:ext uri="{FF2B5EF4-FFF2-40B4-BE49-F238E27FC236}">
-                <a16:creationId xmlns:a16="http://schemas.microsoft.com/office/drawing/2014/main" id="{67D536B1-1E20-4BFA-B0D5-F95667AC842B}"/>
+                <a16:creationId xmlns:a16="http://schemas.microsoft.com/office/drawing/2014/main" id="{23E958AD-C867-4872-95AB-CFB812695B00}"/>
               </a:ext>
             </a:extLst>
           </p:cNvPr>
@@ -30653,7 +30653,7 @@
           <p:cNvPr id="7" name="">
             <a:extLst xmlns:a="http://schemas.openxmlformats.org/drawingml/2006/main">
               <a:ext uri="{FF2B5EF4-FFF2-40B4-BE49-F238E27FC236}">
-                <a16:creationId xmlns:a16="http://schemas.microsoft.com/office/drawing/2014/main" id="{D6B3A119-8A31-4483-985F-BA076874C2BC}"/>
+                <a16:creationId xmlns:a16="http://schemas.microsoft.com/office/drawing/2014/main" id="{C7190873-A756-4FB4-BC2C-A59A62A22632}"/>
               </a:ext>
             </a:extLst>
           </p:cNvPr>
@@ -30715,7 +30715,7 @@
           <p:cNvPr id="8" name="">
             <a:extLst xmlns:a="http://schemas.openxmlformats.org/drawingml/2006/main">
               <a:ext uri="{FF2B5EF4-FFF2-40B4-BE49-F238E27FC236}">
-                <a16:creationId xmlns:a16="http://schemas.microsoft.com/office/drawing/2014/main" id="{D615846D-BC40-461D-971D-3571D48BF236}"/>
+                <a16:creationId xmlns:a16="http://schemas.microsoft.com/office/drawing/2014/main" id="{C09DF6A8-9507-4FB5-A4F2-2A965CA64088}"/>
               </a:ext>
             </a:extLst>
           </p:cNvPr>
@@ -30777,7 +30777,7 @@
           <p:cNvPr id="9" name="">
             <a:extLst xmlns:a="http://schemas.openxmlformats.org/drawingml/2006/main">
               <a:ext uri="{FF2B5EF4-FFF2-40B4-BE49-F238E27FC236}">
-                <a16:creationId xmlns:a16="http://schemas.microsoft.com/office/drawing/2014/main" id="{F1923DC0-3F53-4D1D-946E-CBB907781FD6}"/>
+                <a16:creationId xmlns:a16="http://schemas.microsoft.com/office/drawing/2014/main" id="{9AAA8B3C-0D3C-4CEF-99DD-460BD3ADA439}"/>
               </a:ext>
             </a:extLst>
           </p:cNvPr>
@@ -30839,7 +30839,7 @@
           <p:cNvPr id="10" name="">
             <a:extLst xmlns:a="http://schemas.openxmlformats.org/drawingml/2006/main">
               <a:ext uri="{FF2B5EF4-FFF2-40B4-BE49-F238E27FC236}">
-                <a16:creationId xmlns:a16="http://schemas.microsoft.com/office/drawing/2014/main" id="{F8C0F464-6B29-42BE-9634-E8690A29C025}"/>
+                <a16:creationId xmlns:a16="http://schemas.microsoft.com/office/drawing/2014/main" id="{EEADE82C-4BFC-4A70-983E-418689DF8828}"/>
               </a:ext>
             </a:extLst>
           </p:cNvPr>
@@ -30901,7 +30901,7 @@
           <p:cNvPr id="11" name="">
             <a:extLst xmlns:a="http://schemas.openxmlformats.org/drawingml/2006/main">
               <a:ext uri="{FF2B5EF4-FFF2-40B4-BE49-F238E27FC236}">
-                <a16:creationId xmlns:a16="http://schemas.microsoft.com/office/drawing/2014/main" id="{29402E54-7D39-4CFB-BA91-755419235AA5}"/>
+                <a16:creationId xmlns:a16="http://schemas.microsoft.com/office/drawing/2014/main" id="{0E06EE39-B613-475E-9C4D-60E3EFD4D6B1}"/>
               </a:ext>
             </a:extLst>
           </p:cNvPr>
@@ -30963,7 +30963,7 @@
           <p:cNvPr id="12" name="">
             <a:extLst xmlns:a="http://schemas.openxmlformats.org/drawingml/2006/main">
               <a:ext uri="{FF2B5EF4-FFF2-40B4-BE49-F238E27FC236}">
-                <a16:creationId xmlns:a16="http://schemas.microsoft.com/office/drawing/2014/main" id="{228F8E62-3CB4-443D-8C27-3FEBD182CFEB}"/>
+                <a16:creationId xmlns:a16="http://schemas.microsoft.com/office/drawing/2014/main" id="{EC4484EF-FE0D-45AA-AB65-EC331F11D15E}"/>
               </a:ext>
             </a:extLst>
           </p:cNvPr>
@@ -31025,7 +31025,7 @@
           <p:cNvPr id="13" name="">
             <a:extLst xmlns:a="http://schemas.openxmlformats.org/drawingml/2006/main">
               <a:ext uri="{FF2B5EF4-FFF2-40B4-BE49-F238E27FC236}">
-                <a16:creationId xmlns:a16="http://schemas.microsoft.com/office/drawing/2014/main" id="{ACA4233F-E8DF-44F1-BCD7-7507462BEB9C}"/>
+                <a16:creationId xmlns:a16="http://schemas.microsoft.com/office/drawing/2014/main" id="{69BE4254-008E-4827-8489-E74AA81131F5}"/>
               </a:ext>
             </a:extLst>
           </p:cNvPr>
@@ -31087,7 +31087,7 @@
           <p:cNvPr id="14" name="">
             <a:extLst xmlns:a="http://schemas.openxmlformats.org/drawingml/2006/main">
               <a:ext uri="{FF2B5EF4-FFF2-40B4-BE49-F238E27FC236}">
-                <a16:creationId xmlns:a16="http://schemas.microsoft.com/office/drawing/2014/main" id="{03A18518-0AAC-4DB4-8900-30C6E9AB25F5}"/>
+                <a16:creationId xmlns:a16="http://schemas.microsoft.com/office/drawing/2014/main" id="{3911E516-3A69-4B64-A2FD-7C16D7337005}"/>
               </a:ext>
             </a:extLst>
           </p:cNvPr>
@@ -31149,7 +31149,7 @@
           <p:cNvPr id="15" name="">
             <a:extLst xmlns:a="http://schemas.openxmlformats.org/drawingml/2006/main">
               <a:ext uri="{FF2B5EF4-FFF2-40B4-BE49-F238E27FC236}">
-                <a16:creationId xmlns:a16="http://schemas.microsoft.com/office/drawing/2014/main" id="{A1DCF6C2-4BEC-42BD-AC46-6F6F3E8BE2BB}"/>
+                <a16:creationId xmlns:a16="http://schemas.microsoft.com/office/drawing/2014/main" id="{CBC9A3F1-C5DE-4D39-8CD0-9B646EBFA75B}"/>
               </a:ext>
             </a:extLst>
           </p:cNvPr>
@@ -31211,7 +31211,7 @@
           <p:cNvPr id="16" name="">
             <a:extLst xmlns:a="http://schemas.openxmlformats.org/drawingml/2006/main">
               <a:ext uri="{FF2B5EF4-FFF2-40B4-BE49-F238E27FC236}">
-                <a16:creationId xmlns:a16="http://schemas.microsoft.com/office/drawing/2014/main" id="{5D142A0E-7E74-4DEE-A570-568CB11D704F}"/>
+                <a16:creationId xmlns:a16="http://schemas.microsoft.com/office/drawing/2014/main" id="{D0CD77E5-C805-4697-AC0D-B6A9582CCF67}"/>
               </a:ext>
             </a:extLst>
           </p:cNvPr>
@@ -31271,7 +31271,7 @@
     </p:spTree>
     <p:extLst>
       <p:ext uri="{BB962C8B-B14F-4D97-AF65-F5344CB8AC3E}">
-        <p14:creationId xmlns:p14="http://schemas.microsoft.com/office/powerpoint/2010/main" val="1280666489"/>
+        <p14:creationId xmlns:p14="http://schemas.microsoft.com/office/powerpoint/2010/main" val="1877648530"/>
       </p:ext>
     </p:extLst>
   </p:cSld>
@@ -31305,7 +31305,7 @@
           <p:cNvPr id="10" name="">
             <a:extLst xmlns:a="http://schemas.openxmlformats.org/drawingml/2006/main">
               <a:ext uri="{FF2B5EF4-FFF2-40B4-BE49-F238E27FC236}">
-                <a16:creationId xmlns:a16="http://schemas.microsoft.com/office/drawing/2014/main" id="{01D4B2BD-97F9-4A92-A98A-C41062E661DF}"/>
+                <a16:creationId xmlns:a16="http://schemas.microsoft.com/office/drawing/2014/main" id="{ED085123-F6AA-4AE8-971D-1CC76CDDE6B3}"/>
               </a:ext>
             </a:extLst>
           </p:cNvPr>
@@ -31336,7 +31336,7 @@
           <p:cNvPr id="2" name="">
             <a:extLst xmlns:a="http://schemas.openxmlformats.org/drawingml/2006/main">
               <a:ext uri="{FF2B5EF4-FFF2-40B4-BE49-F238E27FC236}">
-                <a16:creationId xmlns:a16="http://schemas.microsoft.com/office/drawing/2014/main" id="{F129FC2F-3A6B-4BB6-B3A4-DCA3014EFD5F}"/>
+                <a16:creationId xmlns:a16="http://schemas.microsoft.com/office/drawing/2014/main" id="{0301BABF-BFFA-4E34-957F-B1A72657F1FE}"/>
               </a:ext>
             </a:extLst>
           </p:cNvPr>
@@ -31398,7 +31398,7 @@
           <p:cNvPr id="3" name="">
             <a:extLst xmlns:a="http://schemas.openxmlformats.org/drawingml/2006/main">
               <a:ext uri="{FF2B5EF4-FFF2-40B4-BE49-F238E27FC236}">
-                <a16:creationId xmlns:a16="http://schemas.microsoft.com/office/drawing/2014/main" id="{569A51DE-74C7-4822-98BB-5691E7EE30C5}"/>
+                <a16:creationId xmlns:a16="http://schemas.microsoft.com/office/drawing/2014/main" id="{CBE7AA62-6059-4DC8-9F88-90EA1A29F51D}"/>
               </a:ext>
             </a:extLst>
           </p:cNvPr>
@@ -31460,7 +31460,7 @@
           <p:cNvPr id="4" name="">
             <a:extLst xmlns:a="http://schemas.openxmlformats.org/drawingml/2006/main">
               <a:ext uri="{FF2B5EF4-FFF2-40B4-BE49-F238E27FC236}">
-                <a16:creationId xmlns:a16="http://schemas.microsoft.com/office/drawing/2014/main" id="{DA77D107-32DE-4DDD-977B-9685D1547973}"/>
+                <a16:creationId xmlns:a16="http://schemas.microsoft.com/office/drawing/2014/main" id="{905F03E1-23D7-42BF-AB75-C3149FCA0D6A}"/>
               </a:ext>
             </a:extLst>
           </p:cNvPr>
@@ -31522,7 +31522,7 @@
           <p:cNvPr id="5" name="">
             <a:extLst xmlns:a="http://schemas.openxmlformats.org/drawingml/2006/main">
               <a:ext uri="{FF2B5EF4-FFF2-40B4-BE49-F238E27FC236}">
-                <a16:creationId xmlns:a16="http://schemas.microsoft.com/office/drawing/2014/main" id="{8C6230BA-8917-4B91-8378-610FB0A42B25}"/>
+                <a16:creationId xmlns:a16="http://schemas.microsoft.com/office/drawing/2014/main" id="{1A9B3CBC-66C6-480B-90D0-71A86837F0EA}"/>
               </a:ext>
             </a:extLst>
           </p:cNvPr>
@@ -31584,7 +31584,7 @@
           <p:cNvPr id="6" name="">
             <a:extLst xmlns:a="http://schemas.openxmlformats.org/drawingml/2006/main">
               <a:ext uri="{FF2B5EF4-FFF2-40B4-BE49-F238E27FC236}">
-                <a16:creationId xmlns:a16="http://schemas.microsoft.com/office/drawing/2014/main" id="{08445616-EAFA-4994-8EB0-8F259F9C95B2}"/>
+                <a16:creationId xmlns:a16="http://schemas.microsoft.com/office/drawing/2014/main" id="{8DE93786-5D76-4851-8173-0C60C2F24370}"/>
               </a:ext>
             </a:extLst>
           </p:cNvPr>
@@ -31646,7 +31646,7 @@
           <p:cNvPr id="7" name="">
             <a:extLst xmlns:a="http://schemas.openxmlformats.org/drawingml/2006/main">
               <a:ext uri="{FF2B5EF4-FFF2-40B4-BE49-F238E27FC236}">
-                <a16:creationId xmlns:a16="http://schemas.microsoft.com/office/drawing/2014/main" id="{58E9B524-F123-4BB7-BCE0-00AE236828BB}"/>
+                <a16:creationId xmlns:a16="http://schemas.microsoft.com/office/drawing/2014/main" id="{C35FBAA4-0796-42BC-9D16-E9657E546B7E}"/>
               </a:ext>
             </a:extLst>
           </p:cNvPr>
@@ -31708,7 +31708,7 @@
           <p:cNvPr id="8" name="">
             <a:extLst xmlns:a="http://schemas.openxmlformats.org/drawingml/2006/main">
               <a:ext uri="{FF2B5EF4-FFF2-40B4-BE49-F238E27FC236}">
-                <a16:creationId xmlns:a16="http://schemas.microsoft.com/office/drawing/2014/main" id="{1BAFF602-C1EA-48E9-8413-94DDDA7AC538}"/>
+                <a16:creationId xmlns:a16="http://schemas.microsoft.com/office/drawing/2014/main" id="{2C24C011-2B99-46E0-B545-764FD957CEEB}"/>
               </a:ext>
             </a:extLst>
           </p:cNvPr>
@@ -31797,7 +31797,7 @@
           <p:cNvPr id="9" name="">
             <a:extLst xmlns:a="http://schemas.openxmlformats.org/drawingml/2006/main">
               <a:ext uri="{FF2B5EF4-FFF2-40B4-BE49-F238E27FC236}">
-                <a16:creationId xmlns:a16="http://schemas.microsoft.com/office/drawing/2014/main" id="{8E5E56D4-6937-4E79-890C-BCF8A32A233A}"/>
+                <a16:creationId xmlns:a16="http://schemas.microsoft.com/office/drawing/2014/main" id="{3DF621E0-FD34-4DB0-81F1-E03DF4563441}"/>
               </a:ext>
             </a:extLst>
           </p:cNvPr>
@@ -31835,9 +31835,9 @@
                 <a:solidFill>
                   <a:srgbClr val="8E8B82"/>
                 </a:solidFill>
-                <a:latin typeface="Noto Sans KR"/>
-                <a:ea typeface="Noto Sans KR"/>
-                <a:cs typeface="Noto Sans KR"/>
+                <a:latin typeface="Consolas"/>
+                <a:ea typeface="Consolas"/>
+                <a:cs typeface="Consolas"/>
               </a:defRPr>
             </a:pPr>
             <a:r>
@@ -31845,11 +31845,11 @@
                 <a:solidFill>
                   <a:srgbClr val="8E8B82"/>
                 </a:solidFill>
-                <a:latin typeface="Noto Sans KR"/>
-                <a:ea typeface="Noto Sans KR"/>
-                <a:cs typeface="Noto Sans KR"/>
-              </a:rPr>
-              <a:t>실습 자료 · 결과물  ·  실습 가이드 웹페이지 「실습 결과 공유」</a:t>
+                <a:latin typeface="Consolas"/>
+                <a:ea typeface="Consolas"/>
+                <a:cs typeface="Consolas"/>
+              </a:rPr>
+              <a:t>실습 자료 · 결과물  ·  https://ksb6857.github.io/ai-training-260811/</a:t>
             </a:r>
           </a:p>
         </p:txBody>
@@ -31857,7 +31857,7 @@
     </p:spTree>
     <p:extLst>
       <p:ext uri="{BB962C8B-B14F-4D97-AF65-F5344CB8AC3E}">
-        <p14:creationId xmlns:p14="http://schemas.microsoft.com/office/powerpoint/2010/main" val="273110141"/>
+        <p14:creationId xmlns:p14="http://schemas.microsoft.com/office/powerpoint/2010/main" val="1830322020"/>
       </p:ext>
     </p:extLst>
   </p:cSld>
@@ -31891,7 +31891,7 @@
           <p:cNvPr id="32" name="">
             <a:extLst xmlns:a="http://schemas.openxmlformats.org/drawingml/2006/main">
               <a:ext uri="{FF2B5EF4-FFF2-40B4-BE49-F238E27FC236}">
-                <a16:creationId xmlns:a16="http://schemas.microsoft.com/office/drawing/2014/main" id="{7055A2EA-5DCC-484E-8A67-7559BD963341}"/>
+                <a16:creationId xmlns:a16="http://schemas.microsoft.com/office/drawing/2014/main" id="{26E85B70-82D2-4339-A200-1E72E180A680}"/>
               </a:ext>
             </a:extLst>
           </p:cNvPr>
@@ -31922,7 +31922,7 @@
           <p:cNvPr id="2" name="">
             <a:extLst xmlns:a="http://schemas.openxmlformats.org/drawingml/2006/main">
               <a:ext uri="{FF2B5EF4-FFF2-40B4-BE49-F238E27FC236}">
-                <a16:creationId xmlns:a16="http://schemas.microsoft.com/office/drawing/2014/main" id="{8DE7AC93-C778-4179-BAD6-DC2CE169D419}"/>
+                <a16:creationId xmlns:a16="http://schemas.microsoft.com/office/drawing/2014/main" id="{37D4E769-41B4-459E-967F-F006C7CBE6D6}"/>
               </a:ext>
             </a:extLst>
           </p:cNvPr>
@@ -31984,7 +31984,7 @@
           <p:cNvPr id="3" name="">
             <a:extLst xmlns:a="http://schemas.openxmlformats.org/drawingml/2006/main">
               <a:ext uri="{FF2B5EF4-FFF2-40B4-BE49-F238E27FC236}">
-                <a16:creationId xmlns:a16="http://schemas.microsoft.com/office/drawing/2014/main" id="{525976FE-69A4-4974-ADE3-2988C4917BB6}"/>
+                <a16:creationId xmlns:a16="http://schemas.microsoft.com/office/drawing/2014/main" id="{8A3F3AA4-9736-4AE9-9DC4-C7CFA1CC143A}"/>
               </a:ext>
             </a:extLst>
           </p:cNvPr>
@@ -32046,7 +32046,7 @@
           <p:cNvPr id="4" name="">
             <a:extLst xmlns:a="http://schemas.openxmlformats.org/drawingml/2006/main">
               <a:ext uri="{FF2B5EF4-FFF2-40B4-BE49-F238E27FC236}">
-                <a16:creationId xmlns:a16="http://schemas.microsoft.com/office/drawing/2014/main" id="{C01DE2F8-1AC6-4EBD-B315-E8B14064DFF4}"/>
+                <a16:creationId xmlns:a16="http://schemas.microsoft.com/office/drawing/2014/main" id="{0A36BD52-4DC6-49FC-8376-B4A26CB40FCC}"/>
               </a:ext>
             </a:extLst>
           </p:cNvPr>
@@ -32108,7 +32108,7 @@
           <p:cNvPr id="5" name="">
             <a:extLst xmlns:a="http://schemas.openxmlformats.org/drawingml/2006/main">
               <a:ext uri="{FF2B5EF4-FFF2-40B4-BE49-F238E27FC236}">
-                <a16:creationId xmlns:a16="http://schemas.microsoft.com/office/drawing/2014/main" id="{FD01E0FC-6D45-4190-BE04-3AEA174AF5A6}"/>
+                <a16:creationId xmlns:a16="http://schemas.microsoft.com/office/drawing/2014/main" id="{4B66CB1A-CD51-4511-9148-69D9A17CC710}"/>
               </a:ext>
             </a:extLst>
           </p:cNvPr>
@@ -32170,7 +32170,7 @@
           <p:cNvPr id="6" name="">
             <a:extLst xmlns:a="http://schemas.openxmlformats.org/drawingml/2006/main">
               <a:ext uri="{FF2B5EF4-FFF2-40B4-BE49-F238E27FC236}">
-                <a16:creationId xmlns:a16="http://schemas.microsoft.com/office/drawing/2014/main" id="{BC0EC4E6-34E2-44FB-B843-35DFA8A08A18}"/>
+                <a16:creationId xmlns:a16="http://schemas.microsoft.com/office/drawing/2014/main" id="{3993F1DF-9C2F-4880-9C9E-F639D48A0DDB}"/>
               </a:ext>
             </a:extLst>
           </p:cNvPr>
@@ -32232,7 +32232,7 @@
           <p:cNvPr id="7" name="">
             <a:extLst xmlns:a="http://schemas.openxmlformats.org/drawingml/2006/main">
               <a:ext uri="{FF2B5EF4-FFF2-40B4-BE49-F238E27FC236}">
-                <a16:creationId xmlns:a16="http://schemas.microsoft.com/office/drawing/2014/main" id="{39FB600B-EF9D-46DC-9941-F99874C1EA05}"/>
+                <a16:creationId xmlns:a16="http://schemas.microsoft.com/office/drawing/2014/main" id="{9138BB29-48A2-407E-9AE5-1D36DF022DC1}"/>
               </a:ext>
             </a:extLst>
           </p:cNvPr>
@@ -32265,7 +32265,7 @@
           <p:cNvPr id="8" name="">
             <a:extLst xmlns:a="http://schemas.openxmlformats.org/drawingml/2006/main">
               <a:ext uri="{FF2B5EF4-FFF2-40B4-BE49-F238E27FC236}">
-                <a16:creationId xmlns:a16="http://schemas.microsoft.com/office/drawing/2014/main" id="{1C3EEF8D-EC89-40F5-841A-B1C7B31C04AA}"/>
+                <a16:creationId xmlns:a16="http://schemas.microsoft.com/office/drawing/2014/main" id="{1D768D4E-4501-4EC2-91F9-19CE65253F58}"/>
               </a:ext>
             </a:extLst>
           </p:cNvPr>
@@ -32298,7 +32298,7 @@
           <p:cNvPr id="9" name="">
             <a:extLst xmlns:a="http://schemas.openxmlformats.org/drawingml/2006/main">
               <a:ext uri="{FF2B5EF4-FFF2-40B4-BE49-F238E27FC236}">
-                <a16:creationId xmlns:a16="http://schemas.microsoft.com/office/drawing/2014/main" id="{FB58EB79-19F6-4EBD-B4B1-9E9EF6A917DC}"/>
+                <a16:creationId xmlns:a16="http://schemas.microsoft.com/office/drawing/2014/main" id="{19B01291-B047-40E4-9560-B164ED9BD9BE}"/>
               </a:ext>
             </a:extLst>
           </p:cNvPr>
@@ -32360,7 +32360,7 @@
           <p:cNvPr id="10" name="">
             <a:extLst xmlns:a="http://schemas.openxmlformats.org/drawingml/2006/main">
               <a:ext uri="{FF2B5EF4-FFF2-40B4-BE49-F238E27FC236}">
-                <a16:creationId xmlns:a16="http://schemas.microsoft.com/office/drawing/2014/main" id="{04FC924D-84A1-4F8F-AD1C-952E42C3A3BB}"/>
+                <a16:creationId xmlns:a16="http://schemas.microsoft.com/office/drawing/2014/main" id="{415561C4-5B54-4269-9E5B-5C0F0AB100D0}"/>
               </a:ext>
             </a:extLst>
           </p:cNvPr>
@@ -32422,7 +32422,7 @@
           <p:cNvPr id="11" name="">
             <a:extLst xmlns:a="http://schemas.openxmlformats.org/drawingml/2006/main">
               <a:ext uri="{FF2B5EF4-FFF2-40B4-BE49-F238E27FC236}">
-                <a16:creationId xmlns:a16="http://schemas.microsoft.com/office/drawing/2014/main" id="{611D4C14-EEFB-4E7A-BD58-22CC27DBDC37}"/>
+                <a16:creationId xmlns:a16="http://schemas.microsoft.com/office/drawing/2014/main" id="{7BBC038F-C57E-43D7-8AF9-0F1F5CED30E7}"/>
               </a:ext>
             </a:extLst>
           </p:cNvPr>
@@ -32484,7 +32484,7 @@
           <p:cNvPr id="12" name="">
             <a:extLst xmlns:a="http://schemas.openxmlformats.org/drawingml/2006/main">
               <a:ext uri="{FF2B5EF4-FFF2-40B4-BE49-F238E27FC236}">
-                <a16:creationId xmlns:a16="http://schemas.microsoft.com/office/drawing/2014/main" id="{787DBF7E-EAD7-472E-8A90-F29290A518B7}"/>
+                <a16:creationId xmlns:a16="http://schemas.microsoft.com/office/drawing/2014/main" id="{3DADBDE8-1E77-4850-A5C9-8A5B5CC29110}"/>
               </a:ext>
             </a:extLst>
           </p:cNvPr>
@@ -32524,7 +32524,7 @@
           <p:cNvPr id="13" name="">
             <a:extLst xmlns:a="http://schemas.openxmlformats.org/drawingml/2006/main">
               <a:ext uri="{FF2B5EF4-FFF2-40B4-BE49-F238E27FC236}">
-                <a16:creationId xmlns:a16="http://schemas.microsoft.com/office/drawing/2014/main" id="{B8606DAA-7CDD-4FC5-96C5-DD544367E8F6}"/>
+                <a16:creationId xmlns:a16="http://schemas.microsoft.com/office/drawing/2014/main" id="{6E08EE24-D08A-4BC8-8AFB-64840CEF83F6}"/>
               </a:ext>
             </a:extLst>
           </p:cNvPr>
@@ -32586,7 +32586,7 @@
           <p:cNvPr id="14" name="">
             <a:extLst xmlns:a="http://schemas.openxmlformats.org/drawingml/2006/main">
               <a:ext uri="{FF2B5EF4-FFF2-40B4-BE49-F238E27FC236}">
-                <a16:creationId xmlns:a16="http://schemas.microsoft.com/office/drawing/2014/main" id="{71CE83DA-1F60-4B83-B4B4-76F05C327C37}"/>
+                <a16:creationId xmlns:a16="http://schemas.microsoft.com/office/drawing/2014/main" id="{D5948142-306C-41F9-AE74-651B45390AAC}"/>
               </a:ext>
             </a:extLst>
           </p:cNvPr>
@@ -32648,7 +32648,7 @@
           <p:cNvPr id="15" name="">
             <a:extLst xmlns:a="http://schemas.openxmlformats.org/drawingml/2006/main">
               <a:ext uri="{FF2B5EF4-FFF2-40B4-BE49-F238E27FC236}">
-                <a16:creationId xmlns:a16="http://schemas.microsoft.com/office/drawing/2014/main" id="{AD56F3E3-69CA-455B-8A9A-94B2415F9223}"/>
+                <a16:creationId xmlns:a16="http://schemas.microsoft.com/office/drawing/2014/main" id="{824CE3FB-2A8E-4AF0-B71A-08FA42E1DB37}"/>
               </a:ext>
             </a:extLst>
           </p:cNvPr>
@@ -32681,7 +32681,7 @@
           <p:cNvPr id="16" name="">
             <a:extLst xmlns:a="http://schemas.openxmlformats.org/drawingml/2006/main">
               <a:ext uri="{FF2B5EF4-FFF2-40B4-BE49-F238E27FC236}">
-                <a16:creationId xmlns:a16="http://schemas.microsoft.com/office/drawing/2014/main" id="{613B6731-9AB5-43F4-9884-B968F2B2B16A}"/>
+                <a16:creationId xmlns:a16="http://schemas.microsoft.com/office/drawing/2014/main" id="{687C66B7-239A-4379-8D3F-73D51FBFF130}"/>
               </a:ext>
             </a:extLst>
           </p:cNvPr>
@@ -32714,7 +32714,7 @@
           <p:cNvPr id="17" name="">
             <a:extLst xmlns:a="http://schemas.openxmlformats.org/drawingml/2006/main">
               <a:ext uri="{FF2B5EF4-FFF2-40B4-BE49-F238E27FC236}">
-                <a16:creationId xmlns:a16="http://schemas.microsoft.com/office/drawing/2014/main" id="{A2432B57-BA42-4E7E-AF77-6CA03151499D}"/>
+                <a16:creationId xmlns:a16="http://schemas.microsoft.com/office/drawing/2014/main" id="{3F7D4981-E445-403F-A382-9401A98A34BE}"/>
               </a:ext>
             </a:extLst>
           </p:cNvPr>
@@ -32776,7 +32776,7 @@
           <p:cNvPr id="18" name="">
             <a:extLst xmlns:a="http://schemas.openxmlformats.org/drawingml/2006/main">
               <a:ext uri="{FF2B5EF4-FFF2-40B4-BE49-F238E27FC236}">
-                <a16:creationId xmlns:a16="http://schemas.microsoft.com/office/drawing/2014/main" id="{9C46D39C-8E37-4C13-BEB6-CCB035A6B9CA}"/>
+                <a16:creationId xmlns:a16="http://schemas.microsoft.com/office/drawing/2014/main" id="{1674F169-EB7B-451E-8AEA-B21E28E270A3}"/>
               </a:ext>
             </a:extLst>
           </p:cNvPr>
@@ -32838,7 +32838,7 @@
           <p:cNvPr id="19" name="">
             <a:extLst xmlns:a="http://schemas.openxmlformats.org/drawingml/2006/main">
               <a:ext uri="{FF2B5EF4-FFF2-40B4-BE49-F238E27FC236}">
-                <a16:creationId xmlns:a16="http://schemas.microsoft.com/office/drawing/2014/main" id="{75BDAC5B-09FE-4B27-B1B7-9D260C1549CA}"/>
+                <a16:creationId xmlns:a16="http://schemas.microsoft.com/office/drawing/2014/main" id="{97BD5B6A-4A2A-4D33-B2F5-023CABEF0B02}"/>
               </a:ext>
             </a:extLst>
           </p:cNvPr>
@@ -32900,7 +32900,7 @@
           <p:cNvPr id="20" name="">
             <a:extLst xmlns:a="http://schemas.openxmlformats.org/drawingml/2006/main">
               <a:ext uri="{FF2B5EF4-FFF2-40B4-BE49-F238E27FC236}">
-                <a16:creationId xmlns:a16="http://schemas.microsoft.com/office/drawing/2014/main" id="{A8B80E10-D253-4F11-B04C-0CC94C197768}"/>
+                <a16:creationId xmlns:a16="http://schemas.microsoft.com/office/drawing/2014/main" id="{829214BB-BB72-449D-AAF3-FC5B43520DB9}"/>
               </a:ext>
             </a:extLst>
           </p:cNvPr>
@@ -32940,7 +32940,7 @@
           <p:cNvPr id="21" name="">
             <a:extLst xmlns:a="http://schemas.openxmlformats.org/drawingml/2006/main">
               <a:ext uri="{FF2B5EF4-FFF2-40B4-BE49-F238E27FC236}">
-                <a16:creationId xmlns:a16="http://schemas.microsoft.com/office/drawing/2014/main" id="{EB9445D4-2136-4622-9952-A6C2067A3008}"/>
+                <a16:creationId xmlns:a16="http://schemas.microsoft.com/office/drawing/2014/main" id="{9674877F-C61B-4024-8110-96525A51415C}"/>
               </a:ext>
             </a:extLst>
           </p:cNvPr>
@@ -33002,7 +33002,7 @@
           <p:cNvPr id="22" name="">
             <a:extLst xmlns:a="http://schemas.openxmlformats.org/drawingml/2006/main">
               <a:ext uri="{FF2B5EF4-FFF2-40B4-BE49-F238E27FC236}">
-                <a16:creationId xmlns:a16="http://schemas.microsoft.com/office/drawing/2014/main" id="{74CED7B4-024B-4F9B-BFEF-827AF5E8C960}"/>
+                <a16:creationId xmlns:a16="http://schemas.microsoft.com/office/drawing/2014/main" id="{2A1D1F63-0BED-4BF1-A5B5-592E6622AA97}"/>
               </a:ext>
             </a:extLst>
           </p:cNvPr>
@@ -33064,7 +33064,7 @@
           <p:cNvPr id="23" name="">
             <a:extLst xmlns:a="http://schemas.openxmlformats.org/drawingml/2006/main">
               <a:ext uri="{FF2B5EF4-FFF2-40B4-BE49-F238E27FC236}">
-                <a16:creationId xmlns:a16="http://schemas.microsoft.com/office/drawing/2014/main" id="{C2783825-6EAC-4508-9955-A631863A6C81}"/>
+                <a16:creationId xmlns:a16="http://schemas.microsoft.com/office/drawing/2014/main" id="{04F1378D-7B61-4882-A585-5C607F7F7F50}"/>
               </a:ext>
             </a:extLst>
           </p:cNvPr>
@@ -33097,7 +33097,7 @@
           <p:cNvPr id="24" name="">
             <a:extLst xmlns:a="http://schemas.openxmlformats.org/drawingml/2006/main">
               <a:ext uri="{FF2B5EF4-FFF2-40B4-BE49-F238E27FC236}">
-                <a16:creationId xmlns:a16="http://schemas.microsoft.com/office/drawing/2014/main" id="{32305275-7640-4CC6-B4D2-7AF9DF29864D}"/>
+                <a16:creationId xmlns:a16="http://schemas.microsoft.com/office/drawing/2014/main" id="{17664969-CA83-4A57-ADFB-F9A180C5C14F}"/>
               </a:ext>
             </a:extLst>
           </p:cNvPr>
@@ -33130,7 +33130,7 @@
           <p:cNvPr id="25" name="">
             <a:extLst xmlns:a="http://schemas.openxmlformats.org/drawingml/2006/main">
               <a:ext uri="{FF2B5EF4-FFF2-40B4-BE49-F238E27FC236}">
-                <a16:creationId xmlns:a16="http://schemas.microsoft.com/office/drawing/2014/main" id="{444A38D7-6154-4023-B7BF-D643D2D3AA50}"/>
+                <a16:creationId xmlns:a16="http://schemas.microsoft.com/office/drawing/2014/main" id="{F1495A6F-DC35-41DF-9FD0-5AD221B1008A}"/>
               </a:ext>
             </a:extLst>
           </p:cNvPr>
@@ -33192,7 +33192,7 @@
           <p:cNvPr id="26" name="">
             <a:extLst xmlns:a="http://schemas.openxmlformats.org/drawingml/2006/main">
               <a:ext uri="{FF2B5EF4-FFF2-40B4-BE49-F238E27FC236}">
-                <a16:creationId xmlns:a16="http://schemas.microsoft.com/office/drawing/2014/main" id="{5317899A-4939-4B79-838E-5FE81E511E58}"/>
+                <a16:creationId xmlns:a16="http://schemas.microsoft.com/office/drawing/2014/main" id="{9921616A-0247-4D40-A8C9-2FA20D786AEC}"/>
               </a:ext>
             </a:extLst>
           </p:cNvPr>
@@ -33254,7 +33254,7 @@
           <p:cNvPr id="27" name="">
             <a:extLst xmlns:a="http://schemas.openxmlformats.org/drawingml/2006/main">
               <a:ext uri="{FF2B5EF4-FFF2-40B4-BE49-F238E27FC236}">
-                <a16:creationId xmlns:a16="http://schemas.microsoft.com/office/drawing/2014/main" id="{873628FA-D94C-4609-A9AF-9B62AA71B8DF}"/>
+                <a16:creationId xmlns:a16="http://schemas.microsoft.com/office/drawing/2014/main" id="{65A4AF89-46C1-49AB-8AFB-15F7AB64D4F4}"/>
               </a:ext>
             </a:extLst>
           </p:cNvPr>
@@ -33316,7 +33316,7 @@
           <p:cNvPr id="28" name="">
             <a:extLst xmlns:a="http://schemas.openxmlformats.org/drawingml/2006/main">
               <a:ext uri="{FF2B5EF4-FFF2-40B4-BE49-F238E27FC236}">
-                <a16:creationId xmlns:a16="http://schemas.microsoft.com/office/drawing/2014/main" id="{E233B52F-1F33-4991-8941-86D43E01385A}"/>
+                <a16:creationId xmlns:a16="http://schemas.microsoft.com/office/drawing/2014/main" id="{D0DB90E3-9D84-4E07-9B36-80E33BD88057}"/>
               </a:ext>
             </a:extLst>
           </p:cNvPr>
@@ -33356,7 +33356,7 @@
           <p:cNvPr id="29" name="">
             <a:extLst xmlns:a="http://schemas.openxmlformats.org/drawingml/2006/main">
               <a:ext uri="{FF2B5EF4-FFF2-40B4-BE49-F238E27FC236}">
-                <a16:creationId xmlns:a16="http://schemas.microsoft.com/office/drawing/2014/main" id="{00F2D0E4-5A2A-4817-B196-2948A47BC4FB}"/>
+                <a16:creationId xmlns:a16="http://schemas.microsoft.com/office/drawing/2014/main" id="{1164450C-11A8-423F-B618-929E0A5DB8BB}"/>
               </a:ext>
             </a:extLst>
           </p:cNvPr>
@@ -33418,7 +33418,7 @@
           <p:cNvPr id="30" name="">
             <a:extLst xmlns:a="http://schemas.openxmlformats.org/drawingml/2006/main">
               <a:ext uri="{FF2B5EF4-FFF2-40B4-BE49-F238E27FC236}">
-                <a16:creationId xmlns:a16="http://schemas.microsoft.com/office/drawing/2014/main" id="{00CD6D97-2D53-48DE-B328-110409E3FB94}"/>
+                <a16:creationId xmlns:a16="http://schemas.microsoft.com/office/drawing/2014/main" id="{58B25469-0E23-4EC9-B202-FEC16FAD3C6E}"/>
               </a:ext>
             </a:extLst>
           </p:cNvPr>
@@ -33480,7 +33480,7 @@
           <p:cNvPr id="31" name="">
             <a:extLst xmlns:a="http://schemas.openxmlformats.org/drawingml/2006/main">
               <a:ext uri="{FF2B5EF4-FFF2-40B4-BE49-F238E27FC236}">
-                <a16:creationId xmlns:a16="http://schemas.microsoft.com/office/drawing/2014/main" id="{0C1AD24C-7FF4-48EE-8054-A1AE9FE2A170}"/>
+                <a16:creationId xmlns:a16="http://schemas.microsoft.com/office/drawing/2014/main" id="{C5E7C7C7-9196-4846-9DA4-51346325ED2D}"/>
               </a:ext>
             </a:extLst>
           </p:cNvPr>
@@ -33540,7 +33540,7 @@
     </p:spTree>
     <p:extLst>
       <p:ext uri="{BB962C8B-B14F-4D97-AF65-F5344CB8AC3E}">
-        <p14:creationId xmlns:p14="http://schemas.microsoft.com/office/powerpoint/2010/main" val="2093384510"/>
+        <p14:creationId xmlns:p14="http://schemas.microsoft.com/office/powerpoint/2010/main" val="275864580"/>
       </p:ext>
     </p:extLst>
   </p:cSld>
@@ -33574,7 +33574,7 @@
           <p:cNvPr id="9" name="">
             <a:extLst xmlns:a="http://schemas.openxmlformats.org/drawingml/2006/main">
               <a:ext uri="{FF2B5EF4-FFF2-40B4-BE49-F238E27FC236}">
-                <a16:creationId xmlns:a16="http://schemas.microsoft.com/office/drawing/2014/main" id="{02BD45CD-D0E9-4561-870C-EDAB056AD01C}"/>
+                <a16:creationId xmlns:a16="http://schemas.microsoft.com/office/drawing/2014/main" id="{84B791DC-9321-43BE-9591-A12FD09BEE8C}"/>
               </a:ext>
             </a:extLst>
           </p:cNvPr>
@@ -33605,7 +33605,7 @@
           <p:cNvPr id="2" name="">
             <a:extLst xmlns:a="http://schemas.openxmlformats.org/drawingml/2006/main">
               <a:ext uri="{FF2B5EF4-FFF2-40B4-BE49-F238E27FC236}">
-                <a16:creationId xmlns:a16="http://schemas.microsoft.com/office/drawing/2014/main" id="{E641D3D8-46F3-4CAD-80B8-FA579EDD549D}"/>
+                <a16:creationId xmlns:a16="http://schemas.microsoft.com/office/drawing/2014/main" id="{722DC582-1ACE-4B51-B829-11F05A901A72}"/>
               </a:ext>
             </a:extLst>
           </p:cNvPr>
@@ -33667,7 +33667,7 @@
           <p:cNvPr id="3" name="">
             <a:extLst xmlns:a="http://schemas.openxmlformats.org/drawingml/2006/main">
               <a:ext uri="{FF2B5EF4-FFF2-40B4-BE49-F238E27FC236}">
-                <a16:creationId xmlns:a16="http://schemas.microsoft.com/office/drawing/2014/main" id="{8AE7094C-9649-4FF8-B52C-D6C264D92EF6}"/>
+                <a16:creationId xmlns:a16="http://schemas.microsoft.com/office/drawing/2014/main" id="{70104D25-D73B-4AA6-8EF8-6321CF545918}"/>
               </a:ext>
             </a:extLst>
           </p:cNvPr>
@@ -33729,7 +33729,7 @@
           <p:cNvPr id="4" name="">
             <a:extLst xmlns:a="http://schemas.openxmlformats.org/drawingml/2006/main">
               <a:ext uri="{FF2B5EF4-FFF2-40B4-BE49-F238E27FC236}">
-                <a16:creationId xmlns:a16="http://schemas.microsoft.com/office/drawing/2014/main" id="{B0C06BBF-8659-4609-8594-2395D896A7A4}"/>
+                <a16:creationId xmlns:a16="http://schemas.microsoft.com/office/drawing/2014/main" id="{DE8C6EFC-10E9-4DF5-A012-092BE69618C8}"/>
               </a:ext>
             </a:extLst>
           </p:cNvPr>
@@ -33791,7 +33791,7 @@
           <p:cNvPr id="5" name="">
             <a:extLst xmlns:a="http://schemas.openxmlformats.org/drawingml/2006/main">
               <a:ext uri="{FF2B5EF4-FFF2-40B4-BE49-F238E27FC236}">
-                <a16:creationId xmlns:a16="http://schemas.microsoft.com/office/drawing/2014/main" id="{5DD120DE-B29D-4878-96A8-51DBF74C4B59}"/>
+                <a16:creationId xmlns:a16="http://schemas.microsoft.com/office/drawing/2014/main" id="{7870B544-0F02-4F71-8FD6-33A4A48483AF}"/>
               </a:ext>
             </a:extLst>
           </p:cNvPr>
@@ -33853,7 +33853,7 @@
           <p:cNvPr id="6" name="">
             <a:extLst xmlns:a="http://schemas.openxmlformats.org/drawingml/2006/main">
               <a:ext uri="{FF2B5EF4-FFF2-40B4-BE49-F238E27FC236}">
-                <a16:creationId xmlns:a16="http://schemas.microsoft.com/office/drawing/2014/main" id="{86DB2E45-B3CB-492F-88FB-A36E3DE341AC}"/>
+                <a16:creationId xmlns:a16="http://schemas.microsoft.com/office/drawing/2014/main" id="{6324DE1A-D9CA-4A71-9EEB-B1039BAB82FA}"/>
               </a:ext>
             </a:extLst>
           </p:cNvPr>
@@ -33942,7 +33942,7 @@
           <p:cNvPr id="7" name="">
             <a:extLst xmlns:a="http://schemas.openxmlformats.org/drawingml/2006/main">
               <a:ext uri="{FF2B5EF4-FFF2-40B4-BE49-F238E27FC236}">
-                <a16:creationId xmlns:a16="http://schemas.microsoft.com/office/drawing/2014/main" id="{8223EE7C-CCA0-427C-9F69-DC5970C06FE3}"/>
+                <a16:creationId xmlns:a16="http://schemas.microsoft.com/office/drawing/2014/main" id="{53FB58F9-AB17-4EBC-B662-A0D65FBA0633}"/>
               </a:ext>
             </a:extLst>
           </p:cNvPr>
@@ -34004,7 +34004,7 @@
           <p:cNvPr id="8" name="">
             <a:extLst xmlns:a="http://schemas.openxmlformats.org/drawingml/2006/main">
               <a:ext uri="{FF2B5EF4-FFF2-40B4-BE49-F238E27FC236}">
-                <a16:creationId xmlns:a16="http://schemas.microsoft.com/office/drawing/2014/main" id="{9862E3C8-7493-43EF-B5DC-3F33BC174AC3}"/>
+                <a16:creationId xmlns:a16="http://schemas.microsoft.com/office/drawing/2014/main" id="{60861D43-E179-4E3B-AE62-55F9ADB6BCD6}"/>
               </a:ext>
             </a:extLst>
           </p:cNvPr>
@@ -34033,7 +34033,7 @@
     </p:spTree>
     <p:extLst>
       <p:ext uri="{BB962C8B-B14F-4D97-AF65-F5344CB8AC3E}">
-        <p14:creationId xmlns:p14="http://schemas.microsoft.com/office/powerpoint/2010/main" val="1647651637"/>
+        <p14:creationId xmlns:p14="http://schemas.microsoft.com/office/powerpoint/2010/main" val="1504594273"/>
       </p:ext>
     </p:extLst>
   </p:cSld>
@@ -34067,7 +34067,7 @@
           <p:cNvPr id="7" name="">
             <a:extLst xmlns:a="http://schemas.openxmlformats.org/drawingml/2006/main">
               <a:ext uri="{FF2B5EF4-FFF2-40B4-BE49-F238E27FC236}">
-                <a16:creationId xmlns:a16="http://schemas.microsoft.com/office/drawing/2014/main" id="{707D2075-8DEF-4A0D-AEC9-8A7BCC8390BD}"/>
+                <a16:creationId xmlns:a16="http://schemas.microsoft.com/office/drawing/2014/main" id="{999D7F39-0742-4FA6-B7F2-4179435C91AA}"/>
               </a:ext>
             </a:extLst>
           </p:cNvPr>
@@ -34098,7 +34098,7 @@
           <p:cNvPr id="2" name="">
             <a:extLst xmlns:a="http://schemas.openxmlformats.org/drawingml/2006/main">
               <a:ext uri="{FF2B5EF4-FFF2-40B4-BE49-F238E27FC236}">
-                <a16:creationId xmlns:a16="http://schemas.microsoft.com/office/drawing/2014/main" id="{2D94012F-4E24-4F9C-ACA3-1C4747C22FF0}"/>
+                <a16:creationId xmlns:a16="http://schemas.microsoft.com/office/drawing/2014/main" id="{AEBB200D-E22D-4125-8FB0-648BACD2B98A}"/>
               </a:ext>
             </a:extLst>
           </p:cNvPr>
@@ -34160,7 +34160,7 @@
           <p:cNvPr id="3" name="">
             <a:extLst xmlns:a="http://schemas.openxmlformats.org/drawingml/2006/main">
               <a:ext uri="{FF2B5EF4-FFF2-40B4-BE49-F238E27FC236}">
-                <a16:creationId xmlns:a16="http://schemas.microsoft.com/office/drawing/2014/main" id="{A0F5CA28-3137-4B09-9546-C8CE28938C43}"/>
+                <a16:creationId xmlns:a16="http://schemas.microsoft.com/office/drawing/2014/main" id="{21A1B226-88AD-4C21-A8C8-BA582CB04696}"/>
               </a:ext>
             </a:extLst>
           </p:cNvPr>
@@ -34222,7 +34222,7 @@
           <p:cNvPr id="4" name="">
             <a:extLst xmlns:a="http://schemas.openxmlformats.org/drawingml/2006/main">
               <a:ext uri="{FF2B5EF4-FFF2-40B4-BE49-F238E27FC236}">
-                <a16:creationId xmlns:a16="http://schemas.microsoft.com/office/drawing/2014/main" id="{882B469A-B948-42E8-BF7F-FFC150C6E425}"/>
+                <a16:creationId xmlns:a16="http://schemas.microsoft.com/office/drawing/2014/main" id="{0D83B3C6-565A-48E8-AA33-C253A36E7FF9}"/>
               </a:ext>
             </a:extLst>
           </p:cNvPr>
@@ -34284,7 +34284,7 @@
           <p:cNvPr id="5" name="">
             <a:extLst xmlns:a="http://schemas.openxmlformats.org/drawingml/2006/main">
               <a:ext uri="{FF2B5EF4-FFF2-40B4-BE49-F238E27FC236}">
-                <a16:creationId xmlns:a16="http://schemas.microsoft.com/office/drawing/2014/main" id="{D1ED8B92-B61C-4E47-934C-64BD4CE1622A}"/>
+                <a16:creationId xmlns:a16="http://schemas.microsoft.com/office/drawing/2014/main" id="{48200838-DB6A-4CD5-9EC0-E0D902F4759C}"/>
               </a:ext>
             </a:extLst>
           </p:cNvPr>
@@ -34350,7 +34350,7 @@
           <p:nvPr/>
         </p:nvPicPr>
         <p:blipFill>
-          <a:blip xmlns:r="http://schemas.openxmlformats.org/officeDocument/2006/relationships" xmlns:a="http://schemas.openxmlformats.org/drawingml/2006/main" r:embed="R3d1e5b6d90004902"/>
+          <a:blip xmlns:r="http://schemas.openxmlformats.org/officeDocument/2006/relationships" xmlns:a="http://schemas.openxmlformats.org/drawingml/2006/main" r:embed="R80cdc489e1ba4531"/>
           <a:stretch xmlns:a="http://schemas.openxmlformats.org/drawingml/2006/main"/>
         </p:blipFill>
         <p:spPr>
@@ -34368,7 +34368,7 @@
     </p:spTree>
     <p:extLst>
       <p:ext uri="{BB962C8B-B14F-4D97-AF65-F5344CB8AC3E}">
-        <p14:creationId xmlns:p14="http://schemas.microsoft.com/office/powerpoint/2010/main" val="1475686801"/>
+        <p14:creationId xmlns:p14="http://schemas.microsoft.com/office/powerpoint/2010/main" val="1220354306"/>
       </p:ext>
     </p:extLst>
   </p:cSld>
@@ -34402,7 +34402,7 @@
           <p:cNvPr id="10" name="">
             <a:extLst xmlns:a="http://schemas.openxmlformats.org/drawingml/2006/main">
               <a:ext uri="{FF2B5EF4-FFF2-40B4-BE49-F238E27FC236}">
-                <a16:creationId xmlns:a16="http://schemas.microsoft.com/office/drawing/2014/main" id="{106624D5-5234-4B7E-91B1-4197D06C53F8}"/>
+                <a16:creationId xmlns:a16="http://schemas.microsoft.com/office/drawing/2014/main" id="{2507846B-BF20-4D36-8C4F-4871CB0EC28A}"/>
               </a:ext>
             </a:extLst>
           </p:cNvPr>
@@ -34433,7 +34433,7 @@
           <p:cNvPr id="2" name="">
             <a:extLst xmlns:a="http://schemas.openxmlformats.org/drawingml/2006/main">
               <a:ext uri="{FF2B5EF4-FFF2-40B4-BE49-F238E27FC236}">
-                <a16:creationId xmlns:a16="http://schemas.microsoft.com/office/drawing/2014/main" id="{135DA375-381A-4F87-ABC2-2D0F5A4C46A8}"/>
+                <a16:creationId xmlns:a16="http://schemas.microsoft.com/office/drawing/2014/main" id="{53512685-7B2F-4754-BD46-20ACC78F57CE}"/>
               </a:ext>
             </a:extLst>
           </p:cNvPr>
@@ -34495,7 +34495,7 @@
           <p:cNvPr id="3" name="">
             <a:extLst xmlns:a="http://schemas.openxmlformats.org/drawingml/2006/main">
               <a:ext uri="{FF2B5EF4-FFF2-40B4-BE49-F238E27FC236}">
-                <a16:creationId xmlns:a16="http://schemas.microsoft.com/office/drawing/2014/main" id="{A0CE66F0-6DB1-4DAF-AD71-977D7BB173D1}"/>
+                <a16:creationId xmlns:a16="http://schemas.microsoft.com/office/drawing/2014/main" id="{5A496D3B-A16F-464D-B477-7E86407509EF}"/>
               </a:ext>
             </a:extLst>
           </p:cNvPr>
@@ -34557,7 +34557,7 @@
           <p:cNvPr id="4" name="">
             <a:extLst xmlns:a="http://schemas.openxmlformats.org/drawingml/2006/main">
               <a:ext uri="{FF2B5EF4-FFF2-40B4-BE49-F238E27FC236}">
-                <a16:creationId xmlns:a16="http://schemas.microsoft.com/office/drawing/2014/main" id="{C6AF98BC-ABD3-458D-B2E3-6AE681C040D4}"/>
+                <a16:creationId xmlns:a16="http://schemas.microsoft.com/office/drawing/2014/main" id="{871D6739-A242-498D-A015-EE491FD67613}"/>
               </a:ext>
             </a:extLst>
           </p:cNvPr>
@@ -34619,7 +34619,7 @@
           <p:cNvPr id="5" name="">
             <a:extLst xmlns:a="http://schemas.openxmlformats.org/drawingml/2006/main">
               <a:ext uri="{FF2B5EF4-FFF2-40B4-BE49-F238E27FC236}">
-                <a16:creationId xmlns:a16="http://schemas.microsoft.com/office/drawing/2014/main" id="{E2C13051-BF9C-4ADA-8B39-0AB5B1D9ACD5}"/>
+                <a16:creationId xmlns:a16="http://schemas.microsoft.com/office/drawing/2014/main" id="{2FE95154-723A-4A87-96CE-178385823617}"/>
               </a:ext>
             </a:extLst>
           </p:cNvPr>
@@ -34681,7 +34681,7 @@
           <p:cNvPr id="6" name="">
             <a:extLst xmlns:a="http://schemas.openxmlformats.org/drawingml/2006/main">
               <a:ext uri="{FF2B5EF4-FFF2-40B4-BE49-F238E27FC236}">
-                <a16:creationId xmlns:a16="http://schemas.microsoft.com/office/drawing/2014/main" id="{F70CD81E-F573-476D-9B36-D3E44DA79171}"/>
+                <a16:creationId xmlns:a16="http://schemas.microsoft.com/office/drawing/2014/main" id="{7BFD86C5-180B-4C58-939C-C00F90B0526D}"/>
               </a:ext>
             </a:extLst>
           </p:cNvPr>
@@ -34743,7 +34743,7 @@
           <p:cNvPr id="7" name="">
             <a:extLst xmlns:a="http://schemas.openxmlformats.org/drawingml/2006/main">
               <a:ext uri="{FF2B5EF4-FFF2-40B4-BE49-F238E27FC236}">
-                <a16:creationId xmlns:a16="http://schemas.microsoft.com/office/drawing/2014/main" id="{8E76D2C0-9985-4224-B526-EFE366852E2B}"/>
+                <a16:creationId xmlns:a16="http://schemas.microsoft.com/office/drawing/2014/main" id="{503529B7-6F2E-4978-8AC9-7BCC0CC0BECB}"/>
               </a:ext>
             </a:extLst>
           </p:cNvPr>
@@ -34778,7 +34778,7 @@
           <p:cNvPr id="8" name="">
             <a:extLst xmlns:a="http://schemas.openxmlformats.org/drawingml/2006/main">
               <a:ext uri="{FF2B5EF4-FFF2-40B4-BE49-F238E27FC236}">
-                <a16:creationId xmlns:a16="http://schemas.microsoft.com/office/drawing/2014/main" id="{7B5A8CBC-5BC4-49EB-AC37-6D217E10A997}"/>
+                <a16:creationId xmlns:a16="http://schemas.microsoft.com/office/drawing/2014/main" id="{9C55D518-EADD-49C5-9A29-FBE19F6A7F3B}"/>
               </a:ext>
             </a:extLst>
           </p:cNvPr>
@@ -34840,7 +34840,7 @@
           <p:cNvPr id="9" name="">
             <a:extLst xmlns:a="http://schemas.openxmlformats.org/drawingml/2006/main">
               <a:ext uri="{FF2B5EF4-FFF2-40B4-BE49-F238E27FC236}">
-                <a16:creationId xmlns:a16="http://schemas.microsoft.com/office/drawing/2014/main" id="{F055FD65-7D7B-4074-81EF-6703BD34B023}"/>
+                <a16:creationId xmlns:a16="http://schemas.microsoft.com/office/drawing/2014/main" id="{C157AF93-E340-4B98-9EDE-12061C4E504F}"/>
               </a:ext>
             </a:extLst>
           </p:cNvPr>
@@ -34927,7 +34927,7 @@
     </p:spTree>
     <p:extLst>
       <p:ext uri="{BB962C8B-B14F-4D97-AF65-F5344CB8AC3E}">
-        <p14:creationId xmlns:p14="http://schemas.microsoft.com/office/powerpoint/2010/main" val="1681114019"/>
+        <p14:creationId xmlns:p14="http://schemas.microsoft.com/office/powerpoint/2010/main" val="228472120"/>
       </p:ext>
     </p:extLst>
   </p:cSld>
@@ -34961,7 +34961,7 @@
           <p:cNvPr id="43" name="">
             <a:extLst xmlns:a="http://schemas.openxmlformats.org/drawingml/2006/main">
               <a:ext uri="{FF2B5EF4-FFF2-40B4-BE49-F238E27FC236}">
-                <a16:creationId xmlns:a16="http://schemas.microsoft.com/office/drawing/2014/main" id="{E5874420-5997-4C16-8686-07F0A50BC518}"/>
+                <a16:creationId xmlns:a16="http://schemas.microsoft.com/office/drawing/2014/main" id="{A9E6DEAE-0F50-40A8-80BB-FF5ABA19F1C7}"/>
               </a:ext>
             </a:extLst>
           </p:cNvPr>
@@ -34992,7 +34992,7 @@
           <p:cNvPr id="2" name="">
             <a:extLst xmlns:a="http://schemas.openxmlformats.org/drawingml/2006/main">
               <a:ext uri="{FF2B5EF4-FFF2-40B4-BE49-F238E27FC236}">
-                <a16:creationId xmlns:a16="http://schemas.microsoft.com/office/drawing/2014/main" id="{01EDEF8E-8EC4-4D99-83C5-6FB974936F28}"/>
+                <a16:creationId xmlns:a16="http://schemas.microsoft.com/office/drawing/2014/main" id="{D2118479-7A5A-46C2-B3E7-35544D8F038D}"/>
               </a:ext>
             </a:extLst>
           </p:cNvPr>
@@ -35054,7 +35054,7 @@
           <p:cNvPr id="3" name="">
             <a:extLst xmlns:a="http://schemas.openxmlformats.org/drawingml/2006/main">
               <a:ext uri="{FF2B5EF4-FFF2-40B4-BE49-F238E27FC236}">
-                <a16:creationId xmlns:a16="http://schemas.microsoft.com/office/drawing/2014/main" id="{A9D6C5E7-73FE-4940-BFBC-6F0499423905}"/>
+                <a16:creationId xmlns:a16="http://schemas.microsoft.com/office/drawing/2014/main" id="{4977A692-7247-431E-86C5-9337E8E249CC}"/>
               </a:ext>
             </a:extLst>
           </p:cNvPr>
@@ -35116,7 +35116,7 @@
           <p:cNvPr id="4" name="">
             <a:extLst xmlns:a="http://schemas.openxmlformats.org/drawingml/2006/main">
               <a:ext uri="{FF2B5EF4-FFF2-40B4-BE49-F238E27FC236}">
-                <a16:creationId xmlns:a16="http://schemas.microsoft.com/office/drawing/2014/main" id="{D3CA6788-E00B-46E0-BFCF-0CE1D52FEB5C}"/>
+                <a16:creationId xmlns:a16="http://schemas.microsoft.com/office/drawing/2014/main" id="{429ED650-801D-4713-958F-5410B7E20271}"/>
               </a:ext>
             </a:extLst>
           </p:cNvPr>
@@ -35178,7 +35178,7 @@
           <p:cNvPr id="5" name="">
             <a:extLst xmlns:a="http://schemas.openxmlformats.org/drawingml/2006/main">
               <a:ext uri="{FF2B5EF4-FFF2-40B4-BE49-F238E27FC236}">
-                <a16:creationId xmlns:a16="http://schemas.microsoft.com/office/drawing/2014/main" id="{E04ADF74-D9C8-47C7-B0A0-97020DCF8A58}"/>
+                <a16:creationId xmlns:a16="http://schemas.microsoft.com/office/drawing/2014/main" id="{3D8F3F6B-B37F-4A98-B727-98F96CBA931D}"/>
               </a:ext>
             </a:extLst>
           </p:cNvPr>
@@ -35240,7 +35240,7 @@
           <p:cNvPr id="6" name="">
             <a:extLst xmlns:a="http://schemas.openxmlformats.org/drawingml/2006/main">
               <a:ext uri="{FF2B5EF4-FFF2-40B4-BE49-F238E27FC236}">
-                <a16:creationId xmlns:a16="http://schemas.microsoft.com/office/drawing/2014/main" id="{C8465911-8FE2-4DF5-9AB8-4593C5A22A2D}"/>
+                <a16:creationId xmlns:a16="http://schemas.microsoft.com/office/drawing/2014/main" id="{CC87E975-AC1E-45A9-AD23-8ED08D85E07D}"/>
               </a:ext>
             </a:extLst>
           </p:cNvPr>
@@ -35302,7 +35302,7 @@
           <p:cNvPr id="7" name="">
             <a:extLst xmlns:a="http://schemas.openxmlformats.org/drawingml/2006/main">
               <a:ext uri="{FF2B5EF4-FFF2-40B4-BE49-F238E27FC236}">
-                <a16:creationId xmlns:a16="http://schemas.microsoft.com/office/drawing/2014/main" id="{E89972BC-B536-4635-B7C3-D3D656BF30DE}"/>
+                <a16:creationId xmlns:a16="http://schemas.microsoft.com/office/drawing/2014/main" id="{D0309943-7993-456B-916D-E523DDA96D8E}"/>
               </a:ext>
             </a:extLst>
           </p:cNvPr>
@@ -35333,7 +35333,7 @@
           <p:cNvPr id="8" name="">
             <a:extLst xmlns:a="http://schemas.openxmlformats.org/drawingml/2006/main">
               <a:ext uri="{FF2B5EF4-FFF2-40B4-BE49-F238E27FC236}">
-                <a16:creationId xmlns:a16="http://schemas.microsoft.com/office/drawing/2014/main" id="{1CE6E6BC-85E0-410B-9E40-22FF6454E4BF}"/>
+                <a16:creationId xmlns:a16="http://schemas.microsoft.com/office/drawing/2014/main" id="{85C2DFA3-EDF3-4F86-8082-C43F2D4500AE}"/>
               </a:ext>
             </a:extLst>
           </p:cNvPr>
@@ -35395,7 +35395,7 @@
           <p:cNvPr id="9" name="">
             <a:extLst xmlns:a="http://schemas.openxmlformats.org/drawingml/2006/main">
               <a:ext uri="{FF2B5EF4-FFF2-40B4-BE49-F238E27FC236}">
-                <a16:creationId xmlns:a16="http://schemas.microsoft.com/office/drawing/2014/main" id="{7A7AA9C3-4D07-48E4-B654-0CB6F75AA192}"/>
+                <a16:creationId xmlns:a16="http://schemas.microsoft.com/office/drawing/2014/main" id="{4DE32866-6816-486E-9639-054701D11B5E}"/>
               </a:ext>
             </a:extLst>
           </p:cNvPr>
@@ -35426,7 +35426,7 @@
           <p:cNvPr id="10" name="">
             <a:extLst xmlns:a="http://schemas.openxmlformats.org/drawingml/2006/main">
               <a:ext uri="{FF2B5EF4-FFF2-40B4-BE49-F238E27FC236}">
-                <a16:creationId xmlns:a16="http://schemas.microsoft.com/office/drawing/2014/main" id="{5DE07922-ABD1-4400-82CD-679E8537B621}"/>
+                <a16:creationId xmlns:a16="http://schemas.microsoft.com/office/drawing/2014/main" id="{34F802CC-AE1E-4A26-96D6-9CB1CBA370F7}"/>
               </a:ext>
             </a:extLst>
           </p:cNvPr>
@@ -35488,7 +35488,7 @@
           <p:cNvPr id="11" name="">
             <a:extLst xmlns:a="http://schemas.openxmlformats.org/drawingml/2006/main">
               <a:ext uri="{FF2B5EF4-FFF2-40B4-BE49-F238E27FC236}">
-                <a16:creationId xmlns:a16="http://schemas.microsoft.com/office/drawing/2014/main" id="{CCB09A01-F460-4276-9678-912F3B4EA463}"/>
+                <a16:creationId xmlns:a16="http://schemas.microsoft.com/office/drawing/2014/main" id="{03B8880B-F3BC-4D1B-9BD5-3E62A40F1652}"/>
               </a:ext>
             </a:extLst>
           </p:cNvPr>
@@ -35519,7 +35519,7 @@
           <p:cNvPr id="12" name="">
             <a:extLst xmlns:a="http://schemas.openxmlformats.org/drawingml/2006/main">
               <a:ext uri="{FF2B5EF4-FFF2-40B4-BE49-F238E27FC236}">
-                <a16:creationId xmlns:a16="http://schemas.microsoft.com/office/drawing/2014/main" id="{2070676A-FA54-4A40-9F1A-452931D2EAF8}"/>
+                <a16:creationId xmlns:a16="http://schemas.microsoft.com/office/drawing/2014/main" id="{F06ED9E7-7DD9-422E-B483-4AF7A28824B4}"/>
               </a:ext>
             </a:extLst>
           </p:cNvPr>
@@ -35581,7 +35581,7 @@
           <p:cNvPr id="13" name="">
             <a:extLst xmlns:a="http://schemas.openxmlformats.org/drawingml/2006/main">
               <a:ext uri="{FF2B5EF4-FFF2-40B4-BE49-F238E27FC236}">
-                <a16:creationId xmlns:a16="http://schemas.microsoft.com/office/drawing/2014/main" id="{C8B9E240-4EB1-41F1-B305-8293BC62860D}"/>
+                <a16:creationId xmlns:a16="http://schemas.microsoft.com/office/drawing/2014/main" id="{EBA5EE5F-1F1C-4C70-8563-07ED312B5B1A}"/>
               </a:ext>
             </a:extLst>
           </p:cNvPr>
@@ -35614,7 +35614,7 @@
           <p:cNvPr id="14" name="">
             <a:extLst xmlns:a="http://schemas.openxmlformats.org/drawingml/2006/main">
               <a:ext uri="{FF2B5EF4-FFF2-40B4-BE49-F238E27FC236}">
-                <a16:creationId xmlns:a16="http://schemas.microsoft.com/office/drawing/2014/main" id="{7486DFD6-FD2E-4E42-9976-84E7B5C29FD9}"/>
+                <a16:creationId xmlns:a16="http://schemas.microsoft.com/office/drawing/2014/main" id="{E910D083-59D2-44B9-8341-B6B17A3169D2}"/>
               </a:ext>
             </a:extLst>
           </p:cNvPr>
@@ -35676,7 +35676,7 @@
           <p:cNvPr id="15" name="">
             <a:extLst xmlns:a="http://schemas.openxmlformats.org/drawingml/2006/main">
               <a:ext uri="{FF2B5EF4-FFF2-40B4-BE49-F238E27FC236}">
-                <a16:creationId xmlns:a16="http://schemas.microsoft.com/office/drawing/2014/main" id="{16D14564-2CD7-4538-B5AB-F6A5DCFCF53E}"/>
+                <a16:creationId xmlns:a16="http://schemas.microsoft.com/office/drawing/2014/main" id="{73190670-124F-4E93-BCD0-9BD2FD34A052}"/>
               </a:ext>
             </a:extLst>
           </p:cNvPr>
@@ -35709,7 +35709,7 @@
           <p:cNvPr id="16" name="">
             <a:extLst xmlns:a="http://schemas.openxmlformats.org/drawingml/2006/main">
               <a:ext uri="{FF2B5EF4-FFF2-40B4-BE49-F238E27FC236}">
-                <a16:creationId xmlns:a16="http://schemas.microsoft.com/office/drawing/2014/main" id="{A66F213E-732A-415B-9B9A-93C1376C65E3}"/>
+                <a16:creationId xmlns:a16="http://schemas.microsoft.com/office/drawing/2014/main" id="{8E72D547-68E8-4E9D-B3BC-691818D9523B}"/>
               </a:ext>
             </a:extLst>
           </p:cNvPr>
@@ -35771,7 +35771,7 @@
           <p:cNvPr id="17" name="">
             <a:extLst xmlns:a="http://schemas.openxmlformats.org/drawingml/2006/main">
               <a:ext uri="{FF2B5EF4-FFF2-40B4-BE49-F238E27FC236}">
-                <a16:creationId xmlns:a16="http://schemas.microsoft.com/office/drawing/2014/main" id="{3C1A1326-799A-4C8E-B9B1-275265449A76}"/>
+                <a16:creationId xmlns:a16="http://schemas.microsoft.com/office/drawing/2014/main" id="{EAF8F55A-FFF0-4CF5-9C97-4F6E9FB040C8}"/>
               </a:ext>
             </a:extLst>
           </p:cNvPr>
@@ -35804,7 +35804,7 @@
           <p:cNvPr id="18" name="">
             <a:extLst xmlns:a="http://schemas.openxmlformats.org/drawingml/2006/main">
               <a:ext uri="{FF2B5EF4-FFF2-40B4-BE49-F238E27FC236}">
-                <a16:creationId xmlns:a16="http://schemas.microsoft.com/office/drawing/2014/main" id="{1417B432-44FC-43B7-97E8-9AC58EC33448}"/>
+                <a16:creationId xmlns:a16="http://schemas.microsoft.com/office/drawing/2014/main" id="{24C73EE7-30D9-428F-A6B5-C03C97C7C5A8}"/>
               </a:ext>
             </a:extLst>
           </p:cNvPr>
@@ -35866,7 +35866,7 @@
           <p:cNvPr id="19" name="">
             <a:extLst xmlns:a="http://schemas.openxmlformats.org/drawingml/2006/main">
               <a:ext uri="{FF2B5EF4-FFF2-40B4-BE49-F238E27FC236}">
-                <a16:creationId xmlns:a16="http://schemas.microsoft.com/office/drawing/2014/main" id="{4FD9DD30-DEF8-406A-9B22-3C5224D06A09}"/>
+                <a16:creationId xmlns:a16="http://schemas.microsoft.com/office/drawing/2014/main" id="{F9025424-5536-4AD4-9411-748141BBB68F}"/>
               </a:ext>
             </a:extLst>
           </p:cNvPr>
@@ -35899,7 +35899,7 @@
           <p:cNvPr id="20" name="">
             <a:extLst xmlns:a="http://schemas.openxmlformats.org/drawingml/2006/main">
               <a:ext uri="{FF2B5EF4-FFF2-40B4-BE49-F238E27FC236}">
-                <a16:creationId xmlns:a16="http://schemas.microsoft.com/office/drawing/2014/main" id="{6BF1E416-F0DE-408C-AC76-5CA2F2EE0D9A}"/>
+                <a16:creationId xmlns:a16="http://schemas.microsoft.com/office/drawing/2014/main" id="{B0FB5E14-1427-4AA5-B0DA-BB25955191B6}"/>
               </a:ext>
             </a:extLst>
           </p:cNvPr>
@@ -35961,7 +35961,7 @@
           <p:cNvPr id="21" name="">
             <a:extLst xmlns:a="http://schemas.openxmlformats.org/drawingml/2006/main">
               <a:ext uri="{FF2B5EF4-FFF2-40B4-BE49-F238E27FC236}">
-                <a16:creationId xmlns:a16="http://schemas.microsoft.com/office/drawing/2014/main" id="{5E0B9E9A-10DD-4512-B54E-285CD78FE2EE}"/>
+                <a16:creationId xmlns:a16="http://schemas.microsoft.com/office/drawing/2014/main" id="{2F5DA4E1-C57C-4BCF-A27C-D378153B5982}"/>
               </a:ext>
             </a:extLst>
           </p:cNvPr>
@@ -35994,7 +35994,7 @@
           <p:cNvPr id="22" name="">
             <a:extLst xmlns:a="http://schemas.openxmlformats.org/drawingml/2006/main">
               <a:ext uri="{FF2B5EF4-FFF2-40B4-BE49-F238E27FC236}">
-                <a16:creationId xmlns:a16="http://schemas.microsoft.com/office/drawing/2014/main" id="{12316F7C-4A94-4D92-84A2-99E496048922}"/>
+                <a16:creationId xmlns:a16="http://schemas.microsoft.com/office/drawing/2014/main" id="{EC8E2ACE-9A4F-4EE8-AC96-8E70B5C5A10B}"/>
               </a:ext>
             </a:extLst>
           </p:cNvPr>
@@ -36056,7 +36056,7 @@
           <p:cNvPr id="23" name="">
             <a:extLst xmlns:a="http://schemas.openxmlformats.org/drawingml/2006/main">
               <a:ext uri="{FF2B5EF4-FFF2-40B4-BE49-F238E27FC236}">
-                <a16:creationId xmlns:a16="http://schemas.microsoft.com/office/drawing/2014/main" id="{3262ABED-E5C9-4724-A4D6-F6245DE03423}"/>
+                <a16:creationId xmlns:a16="http://schemas.microsoft.com/office/drawing/2014/main" id="{4384B3E0-C21E-4867-9D18-2AF161D2D2D2}"/>
               </a:ext>
             </a:extLst>
           </p:cNvPr>
@@ -36089,7 +36089,7 @@
           <p:cNvPr id="24" name="">
             <a:extLst xmlns:a="http://schemas.openxmlformats.org/drawingml/2006/main">
               <a:ext uri="{FF2B5EF4-FFF2-40B4-BE49-F238E27FC236}">
-                <a16:creationId xmlns:a16="http://schemas.microsoft.com/office/drawing/2014/main" id="{1A7E19DF-DC14-4AC3-9599-44CBE2846A8F}"/>
+                <a16:creationId xmlns:a16="http://schemas.microsoft.com/office/drawing/2014/main" id="{99151DE3-2D26-4CC2-A1F0-9FCD1C2FF23C}"/>
               </a:ext>
             </a:extLst>
           </p:cNvPr>
@@ -36151,7 +36151,7 @@
           <p:cNvPr id="25" name="">
             <a:extLst xmlns:a="http://schemas.openxmlformats.org/drawingml/2006/main">
               <a:ext uri="{FF2B5EF4-FFF2-40B4-BE49-F238E27FC236}">
-                <a16:creationId xmlns:a16="http://schemas.microsoft.com/office/drawing/2014/main" id="{091F0943-5F69-4644-ADA4-C4897F854AEE}"/>
+                <a16:creationId xmlns:a16="http://schemas.microsoft.com/office/drawing/2014/main" id="{56E9C932-6895-4B05-AAC3-A93426E7E13C}"/>
               </a:ext>
             </a:extLst>
           </p:cNvPr>
@@ -36184,7 +36184,7 @@
           <p:cNvPr id="26" name="">
             <a:extLst xmlns:a="http://schemas.openxmlformats.org/drawingml/2006/main">
               <a:ext uri="{FF2B5EF4-FFF2-40B4-BE49-F238E27FC236}">
-                <a16:creationId xmlns:a16="http://schemas.microsoft.com/office/drawing/2014/main" id="{C18CFAB2-83F4-4785-A7AA-0CB9E9AD5D7E}"/>
+                <a16:creationId xmlns:a16="http://schemas.microsoft.com/office/drawing/2014/main" id="{74BDE4E6-2383-4C44-95F4-89EB379AEA51}"/>
               </a:ext>
             </a:extLst>
           </p:cNvPr>
@@ -36246,7 +36246,7 @@
           <p:cNvPr id="27" name="">
             <a:extLst xmlns:a="http://schemas.openxmlformats.org/drawingml/2006/main">
               <a:ext uri="{FF2B5EF4-FFF2-40B4-BE49-F238E27FC236}">
-                <a16:creationId xmlns:a16="http://schemas.microsoft.com/office/drawing/2014/main" id="{37CBE7A3-F886-442A-B71F-04FA9A5EE010}"/>
+                <a16:creationId xmlns:a16="http://schemas.microsoft.com/office/drawing/2014/main" id="{E2AA7BA9-B0DD-44E8-8F41-7871B74C7071}"/>
               </a:ext>
             </a:extLst>
           </p:cNvPr>
@@ -36279,7 +36279,7 @@
           <p:cNvPr id="28" name="">
             <a:extLst xmlns:a="http://schemas.openxmlformats.org/drawingml/2006/main">
               <a:ext uri="{FF2B5EF4-FFF2-40B4-BE49-F238E27FC236}">
-                <a16:creationId xmlns:a16="http://schemas.microsoft.com/office/drawing/2014/main" id="{C029C955-E5F3-45C2-871E-40CA18BE9FF8}"/>
+                <a16:creationId xmlns:a16="http://schemas.microsoft.com/office/drawing/2014/main" id="{C7B013D5-726C-42AD-A938-F503BEF2C6BE}"/>
               </a:ext>
             </a:extLst>
           </p:cNvPr>
@@ -36341,7 +36341,7 @@
           <p:cNvPr id="29" name="">
             <a:extLst xmlns:a="http://schemas.openxmlformats.org/drawingml/2006/main">
               <a:ext uri="{FF2B5EF4-FFF2-40B4-BE49-F238E27FC236}">
-                <a16:creationId xmlns:a16="http://schemas.microsoft.com/office/drawing/2014/main" id="{618076B8-875E-43A8-A731-61B1C5156B02}"/>
+                <a16:creationId xmlns:a16="http://schemas.microsoft.com/office/drawing/2014/main" id="{79C071B1-4479-4BCD-BF8A-18D36955830B}"/>
               </a:ext>
             </a:extLst>
           </p:cNvPr>
@@ -36374,7 +36374,7 @@
           <p:cNvPr id="30" name="">
             <a:extLst xmlns:a="http://schemas.openxmlformats.org/drawingml/2006/main">
               <a:ext uri="{FF2B5EF4-FFF2-40B4-BE49-F238E27FC236}">
-                <a16:creationId xmlns:a16="http://schemas.microsoft.com/office/drawing/2014/main" id="{C1E72C6A-9BFF-4BBF-813B-F5BE02231E1E}"/>
+                <a16:creationId xmlns:a16="http://schemas.microsoft.com/office/drawing/2014/main" id="{90B201E7-F934-4C8B-95D2-E1A3FC70F65F}"/>
               </a:ext>
             </a:extLst>
           </p:cNvPr>
@@ -36436,7 +36436,7 @@
           <p:cNvPr id="31" name="">
             <a:extLst xmlns:a="http://schemas.openxmlformats.org/drawingml/2006/main">
               <a:ext uri="{FF2B5EF4-FFF2-40B4-BE49-F238E27FC236}">
-                <a16:creationId xmlns:a16="http://schemas.microsoft.com/office/drawing/2014/main" id="{5A572BE1-2C99-40F6-996E-36D4E8A409C5}"/>
+                <a16:creationId xmlns:a16="http://schemas.microsoft.com/office/drawing/2014/main" id="{6EC52D35-7790-476B-8CEB-CD4B3CF30928}"/>
               </a:ext>
             </a:extLst>
           </p:cNvPr>
@@ -36469,7 +36469,7 @@
           <p:cNvPr id="32" name="">
             <a:extLst xmlns:a="http://schemas.openxmlformats.org/drawingml/2006/main">
               <a:ext uri="{FF2B5EF4-FFF2-40B4-BE49-F238E27FC236}">
-                <a16:creationId xmlns:a16="http://schemas.microsoft.com/office/drawing/2014/main" id="{619EF147-C290-46CB-A797-BA631751DDD3}"/>
+                <a16:creationId xmlns:a16="http://schemas.microsoft.com/office/drawing/2014/main" id="{F1D7944C-8A98-4ADC-99B1-F2A7F11EBA2A}"/>
               </a:ext>
             </a:extLst>
           </p:cNvPr>
@@ -36531,7 +36531,7 @@
           <p:cNvPr id="33" name="">
             <a:extLst xmlns:a="http://schemas.openxmlformats.org/drawingml/2006/main">
               <a:ext uri="{FF2B5EF4-FFF2-40B4-BE49-F238E27FC236}">
-                <a16:creationId xmlns:a16="http://schemas.microsoft.com/office/drawing/2014/main" id="{5BFA26E8-1AED-457B-BE25-B593101A4F6C}"/>
+                <a16:creationId xmlns:a16="http://schemas.microsoft.com/office/drawing/2014/main" id="{A4A505C5-A196-47D3-B724-ABAA5FECE930}"/>
               </a:ext>
             </a:extLst>
           </p:cNvPr>
@@ -36564,7 +36564,7 @@
           <p:cNvPr id="34" name="">
             <a:extLst xmlns:a="http://schemas.openxmlformats.org/drawingml/2006/main">
               <a:ext uri="{FF2B5EF4-FFF2-40B4-BE49-F238E27FC236}">
-                <a16:creationId xmlns:a16="http://schemas.microsoft.com/office/drawing/2014/main" id="{20A60834-79ED-4437-B337-BA4F38CFE326}"/>
+                <a16:creationId xmlns:a16="http://schemas.microsoft.com/office/drawing/2014/main" id="{BDBBACC7-67B3-49A3-8544-79E64B05D26A}"/>
               </a:ext>
             </a:extLst>
           </p:cNvPr>
@@ -36626,7 +36626,7 @@
           <p:cNvPr id="35" name="">
             <a:extLst xmlns:a="http://schemas.openxmlformats.org/drawingml/2006/main">
               <a:ext uri="{FF2B5EF4-FFF2-40B4-BE49-F238E27FC236}">
-                <a16:creationId xmlns:a16="http://schemas.microsoft.com/office/drawing/2014/main" id="{0B25C1A0-443B-4E5B-9818-77E0CD617462}"/>
+                <a16:creationId xmlns:a16="http://schemas.microsoft.com/office/drawing/2014/main" id="{4E1A76FC-E46A-46A3-BA87-082112F75339}"/>
               </a:ext>
             </a:extLst>
           </p:cNvPr>
@@ -36659,7 +36659,7 @@
           <p:cNvPr id="36" name="">
             <a:extLst xmlns:a="http://schemas.openxmlformats.org/drawingml/2006/main">
               <a:ext uri="{FF2B5EF4-FFF2-40B4-BE49-F238E27FC236}">
-                <a16:creationId xmlns:a16="http://schemas.microsoft.com/office/drawing/2014/main" id="{6476B4BD-02BD-49F5-8447-925CE5D35500}"/>
+                <a16:creationId xmlns:a16="http://schemas.microsoft.com/office/drawing/2014/main" id="{9BC11433-4622-4801-B8E5-28466595AB96}"/>
               </a:ext>
             </a:extLst>
           </p:cNvPr>
@@ -36721,7 +36721,7 @@
           <p:cNvPr id="37" name="">
             <a:extLst xmlns:a="http://schemas.openxmlformats.org/drawingml/2006/main">
               <a:ext uri="{FF2B5EF4-FFF2-40B4-BE49-F238E27FC236}">
-                <a16:creationId xmlns:a16="http://schemas.microsoft.com/office/drawing/2014/main" id="{E3E60B0F-6CA5-44DD-871D-2F25A21DD1CD}"/>
+                <a16:creationId xmlns:a16="http://schemas.microsoft.com/office/drawing/2014/main" id="{ACD4B572-554E-4D0C-9981-9492B0446AD7}"/>
               </a:ext>
             </a:extLst>
           </p:cNvPr>
@@ -36754,7 +36754,7 @@
           <p:cNvPr id="38" name="">
             <a:extLst xmlns:a="http://schemas.openxmlformats.org/drawingml/2006/main">
               <a:ext uri="{FF2B5EF4-FFF2-40B4-BE49-F238E27FC236}">
-                <a16:creationId xmlns:a16="http://schemas.microsoft.com/office/drawing/2014/main" id="{12B97749-C4B5-413D-A3EB-A5B913F2E189}"/>
+                <a16:creationId xmlns:a16="http://schemas.microsoft.com/office/drawing/2014/main" id="{A83583E5-A536-4256-8EFF-CB0F9361FF94}"/>
               </a:ext>
             </a:extLst>
           </p:cNvPr>
@@ -36816,7 +36816,7 @@
           <p:cNvPr id="39" name="">
             <a:extLst xmlns:a="http://schemas.openxmlformats.org/drawingml/2006/main">
               <a:ext uri="{FF2B5EF4-FFF2-40B4-BE49-F238E27FC236}">
-                <a16:creationId xmlns:a16="http://schemas.microsoft.com/office/drawing/2014/main" id="{172D99B3-8E95-4957-B31A-EDF9FF7D6255}"/>
+                <a16:creationId xmlns:a16="http://schemas.microsoft.com/office/drawing/2014/main" id="{7C496C48-072C-46B2-B912-EFF6BE18CAA6}"/>
               </a:ext>
             </a:extLst>
           </p:cNvPr>
@@ -36849,7 +36849,7 @@
           <p:cNvPr id="40" name="">
             <a:extLst xmlns:a="http://schemas.openxmlformats.org/drawingml/2006/main">
               <a:ext uri="{FF2B5EF4-FFF2-40B4-BE49-F238E27FC236}">
-                <a16:creationId xmlns:a16="http://schemas.microsoft.com/office/drawing/2014/main" id="{31E86F43-0E09-4741-87E1-EB45853C10E2}"/>
+                <a16:creationId xmlns:a16="http://schemas.microsoft.com/office/drawing/2014/main" id="{FB7071F2-29F6-49AB-8858-C01DE6BFBE1E}"/>
               </a:ext>
             </a:extLst>
           </p:cNvPr>
@@ -36911,7 +36911,7 @@
           <p:cNvPr id="41" name="">
             <a:extLst xmlns:a="http://schemas.openxmlformats.org/drawingml/2006/main">
               <a:ext uri="{FF2B5EF4-FFF2-40B4-BE49-F238E27FC236}">
-                <a16:creationId xmlns:a16="http://schemas.microsoft.com/office/drawing/2014/main" id="{D7895D2F-B6C3-42F9-AF6B-12C0AF9EDAD0}"/>
+                <a16:creationId xmlns:a16="http://schemas.microsoft.com/office/drawing/2014/main" id="{FFBA2ADB-CFB5-465C-9D9A-E52C5CE34C71}"/>
               </a:ext>
             </a:extLst>
           </p:cNvPr>
@@ -36944,7 +36944,7 @@
           <p:cNvPr id="42" name="">
             <a:extLst xmlns:a="http://schemas.openxmlformats.org/drawingml/2006/main">
               <a:ext uri="{FF2B5EF4-FFF2-40B4-BE49-F238E27FC236}">
-                <a16:creationId xmlns:a16="http://schemas.microsoft.com/office/drawing/2014/main" id="{DC5E2E71-C43E-49B2-883D-B3630C89E02B}"/>
+                <a16:creationId xmlns:a16="http://schemas.microsoft.com/office/drawing/2014/main" id="{C17D605F-4D74-4660-8646-3B9FC7FBE19F}"/>
               </a:ext>
             </a:extLst>
           </p:cNvPr>
@@ -37004,7 +37004,7 @@
     </p:spTree>
     <p:extLst>
       <p:ext uri="{BB962C8B-B14F-4D97-AF65-F5344CB8AC3E}">
-        <p14:creationId xmlns:p14="http://schemas.microsoft.com/office/powerpoint/2010/main" val="442422354"/>
+        <p14:creationId xmlns:p14="http://schemas.microsoft.com/office/powerpoint/2010/main" val="1230741272"/>
       </p:ext>
     </p:extLst>
   </p:cSld>
@@ -37038,7 +37038,7 @@
           <p:cNvPr id="17" name="">
             <a:extLst xmlns:a="http://schemas.openxmlformats.org/drawingml/2006/main">
               <a:ext uri="{FF2B5EF4-FFF2-40B4-BE49-F238E27FC236}">
-                <a16:creationId xmlns:a16="http://schemas.microsoft.com/office/drawing/2014/main" id="{2C7B4849-DEF7-45D8-AB6E-279CD01C7C4E}"/>
+                <a16:creationId xmlns:a16="http://schemas.microsoft.com/office/drawing/2014/main" id="{DB784F84-3E22-4A69-8386-29CF1720727D}"/>
               </a:ext>
             </a:extLst>
           </p:cNvPr>
@@ -37069,7 +37069,7 @@
           <p:cNvPr id="2" name="">
             <a:extLst xmlns:a="http://schemas.openxmlformats.org/drawingml/2006/main">
               <a:ext uri="{FF2B5EF4-FFF2-40B4-BE49-F238E27FC236}">
-                <a16:creationId xmlns:a16="http://schemas.microsoft.com/office/drawing/2014/main" id="{25530790-850E-4C2A-96C8-6CB48215C50B}"/>
+                <a16:creationId xmlns:a16="http://schemas.microsoft.com/office/drawing/2014/main" id="{3F1642C8-B840-4D52-B9A5-C1B38D71C0F4}"/>
               </a:ext>
             </a:extLst>
           </p:cNvPr>
@@ -37131,7 +37131,7 @@
           <p:cNvPr id="3" name="">
             <a:extLst xmlns:a="http://schemas.openxmlformats.org/drawingml/2006/main">
               <a:ext uri="{FF2B5EF4-FFF2-40B4-BE49-F238E27FC236}">
-                <a16:creationId xmlns:a16="http://schemas.microsoft.com/office/drawing/2014/main" id="{17F9A45E-360B-49B7-95E0-8FAA3F23C387}"/>
+                <a16:creationId xmlns:a16="http://schemas.microsoft.com/office/drawing/2014/main" id="{B538BC89-7821-4F89-A3EE-37224EA2C126}"/>
               </a:ext>
             </a:extLst>
           </p:cNvPr>
@@ -37193,7 +37193,7 @@
           <p:cNvPr id="4" name="">
             <a:extLst xmlns:a="http://schemas.openxmlformats.org/drawingml/2006/main">
               <a:ext uri="{FF2B5EF4-FFF2-40B4-BE49-F238E27FC236}">
-                <a16:creationId xmlns:a16="http://schemas.microsoft.com/office/drawing/2014/main" id="{B612CBB4-F641-49E7-BD57-C39D58C798A5}"/>
+                <a16:creationId xmlns:a16="http://schemas.microsoft.com/office/drawing/2014/main" id="{4D7D8715-6436-4545-B33E-C8CB3ABD11C8}"/>
               </a:ext>
             </a:extLst>
           </p:cNvPr>
@@ -37255,7 +37255,7 @@
           <p:cNvPr id="5" name="">
             <a:extLst xmlns:a="http://schemas.openxmlformats.org/drawingml/2006/main">
               <a:ext uri="{FF2B5EF4-FFF2-40B4-BE49-F238E27FC236}">
-                <a16:creationId xmlns:a16="http://schemas.microsoft.com/office/drawing/2014/main" id="{6CC81F86-B999-45A3-B9BA-9EDB209C4A0D}"/>
+                <a16:creationId xmlns:a16="http://schemas.microsoft.com/office/drawing/2014/main" id="{80600513-B024-4F71-909D-281F0854DDB2}"/>
               </a:ext>
             </a:extLst>
           </p:cNvPr>
@@ -37317,7 +37317,7 @@
           <p:cNvPr id="6" name="">
             <a:extLst xmlns:a="http://schemas.openxmlformats.org/drawingml/2006/main">
               <a:ext uri="{FF2B5EF4-FFF2-40B4-BE49-F238E27FC236}">
-                <a16:creationId xmlns:a16="http://schemas.microsoft.com/office/drawing/2014/main" id="{A979008B-B4B5-422C-9AB1-DD3201792540}"/>
+                <a16:creationId xmlns:a16="http://schemas.microsoft.com/office/drawing/2014/main" id="{F6D4C5C4-3489-4056-8A1C-C07D0A93AFFB}"/>
               </a:ext>
             </a:extLst>
           </p:cNvPr>
@@ -37379,7 +37379,7 @@
           <p:cNvPr id="7" name="">
             <a:extLst xmlns:a="http://schemas.openxmlformats.org/drawingml/2006/main">
               <a:ext uri="{FF2B5EF4-FFF2-40B4-BE49-F238E27FC236}">
-                <a16:creationId xmlns:a16="http://schemas.microsoft.com/office/drawing/2014/main" id="{C0B489CD-4AEA-482C-B981-ACA87B930786}"/>
+                <a16:creationId xmlns:a16="http://schemas.microsoft.com/office/drawing/2014/main" id="{E91DE949-F52A-4209-81D8-C293886AB37A}"/>
               </a:ext>
             </a:extLst>
           </p:cNvPr>
@@ -37441,7 +37441,7 @@
           <p:cNvPr id="8" name="">
             <a:extLst xmlns:a="http://schemas.openxmlformats.org/drawingml/2006/main">
               <a:ext uri="{FF2B5EF4-FFF2-40B4-BE49-F238E27FC236}">
-                <a16:creationId xmlns:a16="http://schemas.microsoft.com/office/drawing/2014/main" id="{24A9C334-4124-4DC3-9EAB-33ED637FA5B4}"/>
+                <a16:creationId xmlns:a16="http://schemas.microsoft.com/office/drawing/2014/main" id="{AD2AD9D4-B5FC-4F33-BDC7-7EC30088FFA5}"/>
               </a:ext>
             </a:extLst>
           </p:cNvPr>
@@ -37503,7 +37503,7 @@
           <p:cNvPr id="9" name="">
             <a:extLst xmlns:a="http://schemas.openxmlformats.org/drawingml/2006/main">
               <a:ext uri="{FF2B5EF4-FFF2-40B4-BE49-F238E27FC236}">
-                <a16:creationId xmlns:a16="http://schemas.microsoft.com/office/drawing/2014/main" id="{52C6EF4D-698F-4EBA-BB4C-94008556913F}"/>
+                <a16:creationId xmlns:a16="http://schemas.microsoft.com/office/drawing/2014/main" id="{1ADFEE6E-E10D-44C1-AE67-CC42C90EED20}"/>
               </a:ext>
             </a:extLst>
           </p:cNvPr>
@@ -37565,7 +37565,7 @@
           <p:cNvPr id="10" name="">
             <a:extLst xmlns:a="http://schemas.openxmlformats.org/drawingml/2006/main">
               <a:ext uri="{FF2B5EF4-FFF2-40B4-BE49-F238E27FC236}">
-                <a16:creationId xmlns:a16="http://schemas.microsoft.com/office/drawing/2014/main" id="{F490EA0A-8726-4BB5-89FF-0ED641AAF73E}"/>
+                <a16:creationId xmlns:a16="http://schemas.microsoft.com/office/drawing/2014/main" id="{BDAE0E56-88A7-42D3-99E3-CA3F0D17FAB1}"/>
               </a:ext>
             </a:extLst>
           </p:cNvPr>
@@ -37627,7 +37627,7 @@
           <p:cNvPr id="11" name="">
             <a:extLst xmlns:a="http://schemas.openxmlformats.org/drawingml/2006/main">
               <a:ext uri="{FF2B5EF4-FFF2-40B4-BE49-F238E27FC236}">
-                <a16:creationId xmlns:a16="http://schemas.microsoft.com/office/drawing/2014/main" id="{D1CA18A9-4CA8-4B10-AD89-792A5F3C86BB}"/>
+                <a16:creationId xmlns:a16="http://schemas.microsoft.com/office/drawing/2014/main" id="{FFA2F7D0-E941-43F1-9834-C9176924C242}"/>
               </a:ext>
             </a:extLst>
           </p:cNvPr>
@@ -37689,7 +37689,7 @@
           <p:cNvPr id="12" name="">
             <a:extLst xmlns:a="http://schemas.openxmlformats.org/drawingml/2006/main">
               <a:ext uri="{FF2B5EF4-FFF2-40B4-BE49-F238E27FC236}">
-                <a16:creationId xmlns:a16="http://schemas.microsoft.com/office/drawing/2014/main" id="{C5F15FAE-B681-4CDF-B12D-C95C7CF09A98}"/>
+                <a16:creationId xmlns:a16="http://schemas.microsoft.com/office/drawing/2014/main" id="{FA1CAF11-611C-4B1D-9F13-ED24F6924300}"/>
               </a:ext>
             </a:extLst>
           </p:cNvPr>
@@ -37751,7 +37751,7 @@
           <p:cNvPr id="13" name="">
             <a:extLst xmlns:a="http://schemas.openxmlformats.org/drawingml/2006/main">
               <a:ext uri="{FF2B5EF4-FFF2-40B4-BE49-F238E27FC236}">
-                <a16:creationId xmlns:a16="http://schemas.microsoft.com/office/drawing/2014/main" id="{F45D11FE-CFA8-4DA2-A9FB-7B50E6D242DC}"/>
+                <a16:creationId xmlns:a16="http://schemas.microsoft.com/office/drawing/2014/main" id="{3477C2DA-C4C7-47DA-97BD-B89FA436191C}"/>
               </a:ext>
             </a:extLst>
           </p:cNvPr>
@@ -37813,7 +37813,7 @@
           <p:cNvPr id="14" name="">
             <a:extLst xmlns:a="http://schemas.openxmlformats.org/drawingml/2006/main">
               <a:ext uri="{FF2B5EF4-FFF2-40B4-BE49-F238E27FC236}">
-                <a16:creationId xmlns:a16="http://schemas.microsoft.com/office/drawing/2014/main" id="{3C91BDEE-6F77-4FE3-B247-7442B91128EB}"/>
+                <a16:creationId xmlns:a16="http://schemas.microsoft.com/office/drawing/2014/main" id="{A9789D13-70D5-446B-8AD8-29DB8631C7BC}"/>
               </a:ext>
             </a:extLst>
           </p:cNvPr>
@@ -37875,7 +37875,7 @@
           <p:cNvPr id="15" name="">
             <a:extLst xmlns:a="http://schemas.openxmlformats.org/drawingml/2006/main">
               <a:ext uri="{FF2B5EF4-FFF2-40B4-BE49-F238E27FC236}">
-                <a16:creationId xmlns:a16="http://schemas.microsoft.com/office/drawing/2014/main" id="{D47A91BA-3680-4DE0-801F-8178211E4EEB}"/>
+                <a16:creationId xmlns:a16="http://schemas.microsoft.com/office/drawing/2014/main" id="{4182D5BF-FBB2-4797-9B77-C009BD294076}"/>
               </a:ext>
             </a:extLst>
           </p:cNvPr>
@@ -37937,7 +37937,7 @@
           <p:cNvPr id="16" name="">
             <a:extLst xmlns:a="http://schemas.openxmlformats.org/drawingml/2006/main">
               <a:ext uri="{FF2B5EF4-FFF2-40B4-BE49-F238E27FC236}">
-                <a16:creationId xmlns:a16="http://schemas.microsoft.com/office/drawing/2014/main" id="{AE5850F8-6602-4332-A0A4-81A190BBE60A}"/>
+                <a16:creationId xmlns:a16="http://schemas.microsoft.com/office/drawing/2014/main" id="{ED776FD9-5E89-4266-99C9-EA22EE783063}"/>
               </a:ext>
             </a:extLst>
           </p:cNvPr>
@@ -37997,7 +37997,7 @@
     </p:spTree>
     <p:extLst>
       <p:ext uri="{BB962C8B-B14F-4D97-AF65-F5344CB8AC3E}">
-        <p14:creationId xmlns:p14="http://schemas.microsoft.com/office/powerpoint/2010/main" val="1959001620"/>
+        <p14:creationId xmlns:p14="http://schemas.microsoft.com/office/powerpoint/2010/main" val="182727580"/>
       </p:ext>
     </p:extLst>
   </p:cSld>
